--- a/Cans_Mstr.pptx
+++ b/Cans_Mstr.pptx
@@ -25474,7 +25474,7 @@
       </p:sp>
       <p:sp>
         <p:nvSpPr>
-          <p:cNvPr id="21" name="Text 18"/>
+          <p:cNvPr id="46" name="Text 16"/>
           <p:cNvSpPr/>
           <p:nvPr/>
         </p:nvSpPr>
@@ -25505,7 +25505,7 @@
                 <a:ea typeface="Calibri" pitchFamily="34" charset="-122"/>
                 <a:cs typeface="Calibri" pitchFamily="34" charset="-120"/>
               </a:rPr>
-              <a:t>Conjoint</a:t>
+              <a:t>Enfant 3</a:t>
             </a:r>
             <a:endParaRPr lang="en-US" sz="850" dirty="0"/>
           </a:p>
@@ -25513,7 +25513,7 @@
       </p:sp>
       <p:sp>
         <p:nvSpPr>
-          <p:cNvPr id="22" name="Text 19"/>
+          <p:cNvPr id="47" name="Text 17"/>
           <p:cNvSpPr/>
           <p:nvPr/>
         </p:nvSpPr>
@@ -25529,21 +25529,99 @@
           <a:ln/>
         </p:spPr>
         <p:txBody>
-          <a:bodyPr wrap="square" lIns="0" tIns="0" rIns="0" bIns="0" rtlCol="0" anchor="ctr"/>
-          <a:lstStyle/>
-          <a:p>
-            <a:pPr algn="r" indent="0" marL="0">
-              <a:buNone/>
-            </a:pPr>
-            <a:r>
-              <a:rPr lang="en-US" sz="850" b="1" dirty="0">
-                <a:solidFill>
-                  <a:srgbClr val="8B1A1A"/>
+          <a:bodyPr wrap="square" lIns="0" tIns="0" rIns="0" bIns="0" rtlCol="0" anchor="t"/>
+          <a:lstStyle/>
+          <a:p>
+            <a:pPr indent="0" marL="0">
+              <a:buNone/>
+            </a:pPr>
+            <a:r>
+              <a:rPr lang="en-US" sz="850" i="1" dirty="0">
+                <a:solidFill>
+                  <a:srgbClr val="C4B5A5"/>
                 </a:solidFill>
                 <a:latin typeface="Calibri" pitchFamily="34" charset="0"/>
                 <a:ea typeface="Calibri" pitchFamily="34" charset="-122"/>
                 <a:cs typeface="Calibri" pitchFamily="34" charset="-120"/>
               </a:rPr>
+              <a:t>[X €]</a:t>
+            </a:r>
+            <a:endParaRPr lang="en-US" sz="850" dirty="0"/>
+          </a:p>
+        </p:txBody>
+      </p:sp>
+      <p:sp>
+        <p:nvSpPr>
+          <p:cNvPr id="21" name="Text 18"/>
+          <p:cNvSpPr/>
+          <p:nvPr/>
+        </p:nvSpPr>
+        <p:spPr>
+          <a:xfrm>
+            <a:off x="658368" y="4261104"/>
+            <a:ext cx="1280160" cy="219456"/>
+          </a:xfrm>
+          <a:prstGeom prst="rect">
+            <a:avLst/>
+          </a:prstGeom>
+          <a:noFill/>
+          <a:ln/>
+        </p:spPr>
+        <p:txBody>
+          <a:bodyPr wrap="square" lIns="0" tIns="0" rIns="0" bIns="0" rtlCol="0" anchor="ctr"/>
+          <a:lstStyle/>
+          <a:p>
+            <a:pPr indent="0" marL="0">
+              <a:buNone/>
+            </a:pPr>
+            <a:r>
+              <a:rPr lang="en-US" sz="850" dirty="0">
+                <a:solidFill>
+                  <a:srgbClr val="E5E0D8"/>
+                </a:solidFill>
+                <a:latin typeface="Calibri" pitchFamily="34" charset="0"/>
+                <a:ea typeface="Calibri" pitchFamily="34" charset="-122"/>
+                <a:cs typeface="Calibri" pitchFamily="34" charset="-120"/>
+              </a:rPr>
+              <a:t>Conjoint</a:t>
+            </a:r>
+            <a:endParaRPr lang="en-US" sz="850" dirty="0"/>
+          </a:p>
+        </p:txBody>
+      </p:sp>
+      <p:sp>
+        <p:nvSpPr>
+          <p:cNvPr id="22" name="Text 19"/>
+          <p:cNvSpPr/>
+          <p:nvPr/>
+        </p:nvSpPr>
+        <p:spPr>
+          <a:xfrm>
+            <a:off x="1828800" y="4261104"/>
+            <a:ext cx="969264" cy="219456"/>
+          </a:xfrm>
+          <a:prstGeom prst="rect">
+            <a:avLst/>
+          </a:prstGeom>
+          <a:noFill/>
+          <a:ln/>
+        </p:spPr>
+        <p:txBody>
+          <a:bodyPr wrap="square" lIns="0" tIns="0" rIns="0" bIns="0" rtlCol="0" anchor="ctr"/>
+          <a:lstStyle/>
+          <a:p>
+            <a:pPr algn="r" indent="0" marL="0">
+              <a:buNone/>
+            </a:pPr>
+            <a:r>
+              <a:rPr lang="en-US" sz="850" b="1" dirty="0">
+                <a:solidFill>
+                  <a:srgbClr val="8B1A1A"/>
+                </a:solidFill>
+                <a:latin typeface="Calibri" pitchFamily="34" charset="0"/>
+                <a:ea typeface="Calibri" pitchFamily="34" charset="-122"/>
+                <a:cs typeface="Calibri" pitchFamily="34" charset="-120"/>
+              </a:rPr>
               <a:t>EXONÉRÉ</a:t>
             </a:r>
             <a:endParaRPr lang="en-US" sz="850" dirty="0"/>
@@ -25931,7 +26009,7 @@
       </p:sp>
       <p:sp>
         <p:nvSpPr>
-          <p:cNvPr id="33" name="Text 30"/>
+          <p:cNvPr id="48" name="Text 28"/>
           <p:cNvSpPr/>
           <p:nvPr/>
         </p:nvSpPr>
@@ -25962,6 +26040,84 @@
                 <a:ea typeface="Calibri" pitchFamily="34" charset="-122"/>
                 <a:cs typeface="Calibri" pitchFamily="34" charset="-120"/>
               </a:rPr>
+              <a:t>Enfant 3</a:t>
+            </a:r>
+            <a:endParaRPr lang="en-US" sz="850" dirty="0"/>
+          </a:p>
+        </p:txBody>
+      </p:sp>
+      <p:sp>
+        <p:nvSpPr>
+          <p:cNvPr id="49" name="Text 29"/>
+          <p:cNvSpPr/>
+          <p:nvPr/>
+        </p:nvSpPr>
+        <p:spPr>
+          <a:xfrm>
+            <a:off x="4480560" y="4005072"/>
+            <a:ext cx="969264" cy="219456"/>
+          </a:xfrm>
+          <a:prstGeom prst="rect">
+            <a:avLst/>
+          </a:prstGeom>
+          <a:noFill/>
+          <a:ln/>
+        </p:spPr>
+        <p:txBody>
+          <a:bodyPr wrap="square" lIns="0" tIns="0" rIns="0" bIns="0" rtlCol="0" anchor="t"/>
+          <a:lstStyle/>
+          <a:p>
+            <a:pPr indent="0" marL="0">
+              <a:buNone/>
+            </a:pPr>
+            <a:r>
+              <a:rPr lang="en-US" sz="850" i="1" dirty="0">
+                <a:solidFill>
+                  <a:srgbClr val="C4B5A5"/>
+                </a:solidFill>
+                <a:latin typeface="Calibri" pitchFamily="34" charset="0"/>
+                <a:ea typeface="Calibri" pitchFamily="34" charset="-122"/>
+                <a:cs typeface="Calibri" pitchFamily="34" charset="-120"/>
+              </a:rPr>
+              <a:t>[X €]</a:t>
+            </a:r>
+            <a:endParaRPr lang="en-US" sz="850" dirty="0"/>
+          </a:p>
+        </p:txBody>
+      </p:sp>
+      <p:sp>
+        <p:nvSpPr>
+          <p:cNvPr id="33" name="Text 30"/>
+          <p:cNvSpPr/>
+          <p:nvPr/>
+        </p:nvSpPr>
+        <p:spPr>
+          <a:xfrm>
+            <a:off x="3310128" y="4261104"/>
+            <a:ext cx="1280160" cy="219456"/>
+          </a:xfrm>
+          <a:prstGeom prst="rect">
+            <a:avLst/>
+          </a:prstGeom>
+          <a:noFill/>
+          <a:ln/>
+        </p:spPr>
+        <p:txBody>
+          <a:bodyPr wrap="square" lIns="0" tIns="0" rIns="0" bIns="0" rtlCol="0" anchor="ctr"/>
+          <a:lstStyle/>
+          <a:p>
+            <a:pPr indent="0" marL="0">
+              <a:buNone/>
+            </a:pPr>
+            <a:r>
+              <a:rPr lang="en-US" sz="850" dirty="0">
+                <a:solidFill>
+                  <a:srgbClr val="F3F0EB"/>
+                </a:solidFill>
+                <a:latin typeface="Calibri" pitchFamily="34" charset="0"/>
+                <a:ea typeface="Calibri" pitchFamily="34" charset="-122"/>
+                <a:cs typeface="Calibri" pitchFamily="34" charset="-120"/>
+              </a:rPr>
               <a:t>Conjoint</a:t>
             </a:r>
             <a:endParaRPr lang="en-US" sz="850" dirty="0"/>
@@ -25976,7 +26132,7 @@
         </p:nvSpPr>
         <p:spPr>
           <a:xfrm>
-            <a:off x="4480560" y="4005072"/>
+            <a:off x="4480560" y="4261104"/>
             <a:ext cx="969264" cy="219456"/>
           </a:xfrm>
           <a:prstGeom prst="rect">

--- a/Cans_Mstr.pptx
+++ b/Cans_Mstr.pptx
@@ -9522,30 +9522,30 @@
       </p:sp>
       <p:sp>
         <p:nvSpPr>
-          <p:cNvPr id="13" name="Text 10"/>
+          <p:cNvPr id="111" name="Text Objectif 111"/>
           <p:cNvSpPr/>
           <p:nvPr/>
         </p:nvSpPr>
         <p:spPr>
           <a:xfrm>
             <a:off x="502920" y="1737360"/>
-            <a:ext cx="548640" cy="502920"/>
-          </a:xfrm>
-          <a:prstGeom prst="rect">
-            <a:avLst/>
-          </a:prstGeom>
-          <a:noFill/>
-          <a:ln/>
-        </p:spPr>
-        <p:txBody>
-          <a:bodyPr wrap="square" lIns="0" tIns="0" rIns="0" bIns="0" rtlCol="0" anchor="ctr"/>
-          <a:lstStyle/>
-          <a:p>
-            <a:pPr indent="0" marL="0">
-              <a:buNone/>
-            </a:pPr>
-            <a:r>
-              <a:rPr lang="en-US" sz="3200" dirty="0">
+            <a:ext cx="2560320" cy="460000"/>
+          </a:xfrm>
+          <a:prstGeom prst="rect">
+            <a:avLst/>
+          </a:prstGeom>
+          <a:noFill/>
+          <a:ln/>
+        </p:spPr>
+        <p:txBody>
+          <a:bodyPr wrap="square" lIns="0" tIns="0" rIns="0" bIns="0" rtlCol="0" anchor="ctr"/>
+          <a:lstStyle/>
+          <a:p>
+            <a:pPr indent="0" marL="0">
+              <a:buNone/>
+            </a:pPr>
+            <a:r>
+              <a:rPr lang="en-US" sz="1300" b="1" dirty="0">
                 <a:solidFill>
                   <a:srgbClr val="8B1A1A"/>
                 </a:solidFill>
@@ -9553,9 +9553,9 @@
                 <a:ea typeface="Garamond" pitchFamily="34" charset="-122"/>
                 <a:cs typeface="Garamond" pitchFamily="34" charset="-120"/>
               </a:rPr>
-              <a:t>01</a:t>
-            </a:r>
-            <a:endParaRPr lang="en-US" sz="3200" dirty="0"/>
+              <a:t>[Objectif de l’axe — formulation client]</a:t>
+            </a:r>
+            <a:endParaRPr lang="en-US" sz="1300" dirty="0"/>
           </a:p>
         </p:txBody>
       </p:sp>
@@ -9586,14 +9586,14 @@
       </p:sp>
       <p:sp>
         <p:nvSpPr>
-          <p:cNvPr id="15" name="Text 12"/>
-          <p:cNvSpPr/>
-          <p:nvPr/>
-        </p:nvSpPr>
-        <p:spPr>
-          <a:xfrm>
-            <a:off x="502920" y="2377440"/>
-            <a:ext cx="2560320" cy="256032"/>
+          <p:cNvPr id="16" name="Text 13"/>
+          <p:cNvSpPr/>
+          <p:nvPr/>
+        </p:nvSpPr>
+        <p:spPr>
+          <a:xfrm>
+            <a:off x="502920" y="2697480"/>
+            <a:ext cx="2560320" cy="1143000"/>
           </a:xfrm>
           <a:prstGeom prst="rect">
             <a:avLst/>
@@ -9605,19 +9605,100 @@
           <a:bodyPr wrap="square" lIns="0" tIns="0" rIns="0" bIns="0" rtlCol="0" anchor="t"/>
           <a:lstStyle/>
           <a:p>
-            <a:pPr indent="0" marL="0">
-              <a:buNone/>
-            </a:pPr>
-            <a:r>
-              <a:rPr lang="en-US" sz="750" i="1" dirty="0">
+            <a:pPr marL="182880" indent="-182880">
+              <a:buFont typeface="Arial"/>
+              <a:buChar char="•"/>
+            </a:pPr>
+            <a:r>
+              <a:rPr lang="en-US" sz="1000" i="1" dirty="0">
                 <a:solidFill>
                   <a:srgbClr val="C4B5A5"/>
+                </a:solidFill>
+                <a:latin typeface="Calibri" pitchFamily="34" charset="0"/>
+                <a:ea typeface="Calibri" pitchFamily="34" charset="-122"/>
+                <a:cs typeface="Calibri" pitchFamily="34" charset="-120"/>
+              </a:rPr>
+              <a:t>[Bénéfice 1 — répond à l'objectif exprimé]</a:t>
+            </a:r>
+          </a:p>
+          <a:p>
+            <a:pPr marL="182880" indent="-182880">
+              <a:buFont typeface="Arial"/>
+              <a:buChar char="•"/>
+            </a:pPr>
+            <a:r>
+              <a:rPr lang="en-US" sz="1000" i="1" dirty="0">
+                <a:solidFill>
+                  <a:srgbClr val="C4B5A5"/>
+                </a:solidFill>
+                <a:latin typeface="Calibri" pitchFamily="34" charset="0"/>
+                <a:ea typeface="Calibri" pitchFamily="34" charset="-122"/>
+                <a:cs typeface="Calibri" pitchFamily="34" charset="-120"/>
+              </a:rPr>
+              <a:t>[Bénéfice 2 — répond à l'objectif exprimé]</a:t>
+            </a:r>
+          </a:p>
+        </p:txBody>
+      </p:sp>
+      <p:sp>
+        <p:nvSpPr>
+          <p:cNvPr id="17" name="Shape 14"/>
+          <p:cNvSpPr/>
+          <p:nvPr/>
+        </p:nvSpPr>
+        <p:spPr>
+          <a:xfrm>
+            <a:off x="502920" y="3931920"/>
+            <a:ext cx="2560320" cy="10973"/>
+          </a:xfrm>
+          <a:prstGeom prst="rect">
+            <a:avLst/>
+          </a:prstGeom>
+          <a:solidFill>
+            <a:srgbClr val="E5E0D8"/>
+          </a:solidFill>
+          <a:ln w="12700">
+            <a:solidFill>
+              <a:srgbClr val="E5E0D8"/>
+            </a:solidFill>
+            <a:prstDash val="solid"/>
+          </a:ln>
+        </p:spPr>
+      </p:sp>
+      <p:sp>
+        <p:nvSpPr>
+          <p:cNvPr id="18" name="Text 15"/>
+          <p:cNvSpPr/>
+          <p:nvPr/>
+        </p:nvSpPr>
+        <p:spPr>
+          <a:xfrm>
+            <a:off x="502920" y="4005072"/>
+            <a:ext cx="2560320" cy="201168"/>
+          </a:xfrm>
+          <a:prstGeom prst="rect">
+            <a:avLst/>
+          </a:prstGeom>
+          <a:noFill/>
+          <a:ln/>
+        </p:spPr>
+        <p:txBody>
+          <a:bodyPr wrap="square" lIns="0" tIns="0" rIns="0" bIns="0" rtlCol="0" anchor="ctr"/>
+          <a:lstStyle/>
+          <a:p>
+            <a:pPr indent="0" marL="0">
+              <a:buNone/>
+            </a:pPr>
+            <a:r>
+              <a:rPr lang="en-US" sz="1050" b="1" dirty="0">
+                <a:solidFill>
+                  <a:srgbClr val="8B1A1A"/>
                 </a:solidFill>
                 <a:latin typeface="Garamond" pitchFamily="34" charset="0"/>
                 <a:ea typeface="Garamond" pitchFamily="34" charset="-122"/>
                 <a:cs typeface="Garamond" pitchFamily="34" charset="-120"/>
               </a:rPr>
-              <a:t>[AXE 1 — intitulé, REVENUS COMPLÉMENTAIRES]</a:t>
+              <a:t>[Nom de la solution]</a:t>
             </a:r>
             <a:endParaRPr lang="en-US" sz="750" dirty="0"/>
           </a:p>
@@ -9625,14 +9706,14 @@
       </p:sp>
       <p:sp>
         <p:nvSpPr>
-          <p:cNvPr id="16" name="Text 13"/>
-          <p:cNvSpPr/>
-          <p:nvPr/>
-        </p:nvSpPr>
-        <p:spPr>
-          <a:xfrm>
-            <a:off x="502920" y="2697480"/>
-            <a:ext cx="2560320" cy="1143000"/>
+          <p:cNvPr id="19" name="Text 16"/>
+          <p:cNvSpPr/>
+          <p:nvPr/>
+        </p:nvSpPr>
+        <p:spPr>
+          <a:xfrm>
+            <a:off x="502920" y="4224528"/>
+            <a:ext cx="2560320" cy="256032"/>
           </a:xfrm>
           <a:prstGeom prst="rect">
             <a:avLst/>
@@ -9648,7 +9729,7 @@
               <a:buNone/>
             </a:pPr>
             <a:r>
-              <a:rPr lang="en-US" sz="1150" i="1" dirty="0">
+              <a:rPr lang="en-US" sz="1100" b="1" dirty="0">
                 <a:solidFill>
                   <a:srgbClr val="C4B5A5"/>
                 </a:solidFill>
@@ -9656,63 +9737,77 @@
                 <a:ea typeface="Calibri" pitchFamily="34" charset="-122"/>
                 <a:cs typeface="Calibri" pitchFamily="34" charset="-120"/>
               </a:rPr>
-              <a:t>[Description de l'axe 1 — objectif, enveloppe(s) mobilisée(s), montant cible, horizon]</a:t>
-            </a:r>
-            <a:endParaRPr lang="en-US" sz="1150" dirty="0"/>
-          </a:p>
-        </p:txBody>
-      </p:sp>
-      <p:sp>
-        <p:nvSpPr>
-          <p:cNvPr id="17" name="Shape 14"/>
-          <p:cNvSpPr/>
-          <p:nvPr/>
-        </p:nvSpPr>
-        <p:spPr>
-          <a:xfrm>
-            <a:off x="502920" y="3931920"/>
-            <a:ext cx="2560320" cy="10973"/>
-          </a:xfrm>
-          <a:prstGeom prst="rect">
-            <a:avLst/>
-          </a:prstGeom>
-          <a:solidFill>
-            <a:srgbClr val="E5E0D8"/>
-          </a:solidFill>
-          <a:ln w="12700">
-            <a:solidFill>
-              <a:srgbClr val="E5E0D8"/>
-            </a:solidFill>
-            <a:prstDash val="solid"/>
-          </a:ln>
-        </p:spPr>
-      </p:sp>
-      <p:sp>
-        <p:nvSpPr>
-          <p:cNvPr id="18" name="Text 15"/>
-          <p:cNvSpPr/>
-          <p:nvPr/>
-        </p:nvSpPr>
-        <p:spPr>
-          <a:xfrm>
-            <a:off x="502920" y="4005072"/>
-            <a:ext cx="2560320" cy="201168"/>
-          </a:xfrm>
-          <a:prstGeom prst="rect">
-            <a:avLst/>
-          </a:prstGeom>
-          <a:noFill/>
-          <a:ln/>
-        </p:spPr>
-        <p:txBody>
-          <a:bodyPr wrap="square" lIns="0" tIns="0" rIns="0" bIns="0" rtlCol="0" anchor="ctr"/>
-          <a:lstStyle/>
-          <a:p>
-            <a:pPr indent="0" marL="0">
-              <a:buNone/>
-            </a:pPr>
-            <a:r>
-              <a:rPr lang="en-US" sz="750" spc="250" kern="0" dirty="0">
+              <a:t>[Montant]</a:t>
+            </a:r>
+            <a:endParaRPr lang="en-US" sz="1000" dirty="0"/>
+          </a:p>
+        </p:txBody>
+      </p:sp>
+      <p:sp>
+        <p:nvSpPr>
+          <p:cNvPr id="101" name="Text Risque 1"/>
+          <p:cNvSpPr/>
+          <p:nvPr/>
+        </p:nvSpPr>
+        <p:spPr>
+          <a:xfrm>
+            <a:off x="502920" y="4515000"/>
+            <a:ext cx="2560320" cy="230000"/>
+          </a:xfrm>
+          <a:prstGeom prst="rect">
+            <a:avLst/>
+          </a:prstGeom>
+          <a:noFill/>
+          <a:ln/>
+        </p:spPr>
+        <p:txBody>
+          <a:bodyPr wrap="square" lIns="0" tIns="0" rIns="0" bIns="0" rtlCol="0" anchor="t"/>
+          <a:lstStyle/>
+          <a:p>
+            <a:pPr indent="0" marL="0">
+              <a:buNone/>
+            </a:pPr>
+            <a:r>
+              <a:rPr lang="en-US" sz="900" i="1" dirty="0">
+                <a:solidFill>
+                  <a:srgbClr val="4A5568"/>
+                </a:solidFill>
+                <a:latin typeface="Calibri" pitchFamily="34" charset="0"/>
+                <a:ea typeface="Calibri" pitchFamily="34" charset="-122"/>
+                <a:cs typeface="Calibri" pitchFamily="34" charset="-120"/>
+              </a:rPr>
+              <a:t>[Profil de risque et rendement cible]</a:t>
+            </a:r>
+            <a:endParaRPr lang="en-US" sz="900" dirty="0"/>
+          </a:p>
+        </p:txBody>
+      </p:sp>
+      <p:sp>
+        <p:nvSpPr>
+          <p:cNvPr id="112" name="Text Objectif 112"/>
+          <p:cNvSpPr/>
+          <p:nvPr/>
+        </p:nvSpPr>
+        <p:spPr>
+          <a:xfrm>
+            <a:off x="3200400" y="1737360"/>
+            <a:ext cx="2560320" cy="460000"/>
+          </a:xfrm>
+          <a:prstGeom prst="rect">
+            <a:avLst/>
+          </a:prstGeom>
+          <a:noFill/>
+          <a:ln/>
+        </p:spPr>
+        <p:txBody>
+          <a:bodyPr wrap="square" lIns="0" tIns="0" rIns="0" bIns="0" rtlCol="0" anchor="ctr"/>
+          <a:lstStyle/>
+          <a:p>
+            <a:pPr indent="0" marL="0">
+              <a:buNone/>
+            </a:pPr>
+            <a:r>
+              <a:rPr lang="en-US" sz="1300" b="1" dirty="0">
                 <a:solidFill>
                   <a:srgbClr val="8B1A1A"/>
                 </a:solidFill>
@@ -9720,22 +9815,47 @@
                 <a:ea typeface="Garamond" pitchFamily="34" charset="-122"/>
                 <a:cs typeface="Garamond" pitchFamily="34" charset="-120"/>
               </a:rPr>
-              <a:t>ENVELOPPE(S)</a:t>
-            </a:r>
-            <a:endParaRPr lang="en-US" sz="750" dirty="0"/>
-          </a:p>
-        </p:txBody>
-      </p:sp>
-      <p:sp>
-        <p:nvSpPr>
-          <p:cNvPr id="19" name="Text 16"/>
-          <p:cNvSpPr/>
-          <p:nvPr/>
-        </p:nvSpPr>
-        <p:spPr>
-          <a:xfrm>
-            <a:off x="502920" y="4224528"/>
-            <a:ext cx="2560320" cy="256032"/>
+              <a:t>[Objectif de l’axe — formulation client]</a:t>
+            </a:r>
+            <a:endParaRPr lang="en-US" sz="1300" dirty="0"/>
+          </a:p>
+        </p:txBody>
+      </p:sp>
+      <p:sp>
+        <p:nvSpPr>
+          <p:cNvPr id="21" name="Shape 18"/>
+          <p:cNvSpPr/>
+          <p:nvPr/>
+        </p:nvSpPr>
+        <p:spPr>
+          <a:xfrm>
+            <a:off x="3200400" y="2286000"/>
+            <a:ext cx="2560320" cy="10973"/>
+          </a:xfrm>
+          <a:prstGeom prst="rect">
+            <a:avLst/>
+          </a:prstGeom>
+          <a:solidFill>
+            <a:srgbClr val="CFC8BD"/>
+          </a:solidFill>
+          <a:ln w="12700">
+            <a:solidFill>
+              <a:srgbClr val="CFC8BD"/>
+            </a:solidFill>
+            <a:prstDash val="solid"/>
+          </a:ln>
+        </p:spPr>
+      </p:sp>
+      <p:sp>
+        <p:nvSpPr>
+          <p:cNvPr id="23" name="Text 20"/>
+          <p:cNvSpPr/>
+          <p:nvPr/>
+        </p:nvSpPr>
+        <p:spPr>
+          <a:xfrm>
+            <a:off x="3200400" y="2697480"/>
+            <a:ext cx="2560320" cy="1143000"/>
           </a:xfrm>
           <a:prstGeom prst="rect">
             <a:avLst/>
@@ -9747,8 +9867,9 @@
           <a:bodyPr wrap="square" lIns="0" tIns="0" rIns="0" bIns="0" rtlCol="0" anchor="t"/>
           <a:lstStyle/>
           <a:p>
-            <a:pPr indent="0" marL="0">
-              <a:buNone/>
+            <a:pPr marL="182880" indent="-182880">
+              <a:buFont typeface="Arial"/>
+              <a:buChar char="•"/>
             </a:pPr>
             <a:r>
               <a:rPr lang="en-US" sz="1000" i="1" dirty="0">
@@ -9759,38 +9880,79 @@
                 <a:ea typeface="Calibri" pitchFamily="34" charset="-122"/>
                 <a:cs typeface="Calibri" pitchFamily="34" charset="-120"/>
               </a:rPr>
-              <a:t>[Enveloppe(s)]</a:t>
-            </a:r>
-            <a:endParaRPr lang="en-US" sz="1000" dirty="0"/>
-          </a:p>
-        </p:txBody>
-      </p:sp>
-      <p:sp>
-        <p:nvSpPr>
-          <p:cNvPr id="20" name="Text 17"/>
-          <p:cNvSpPr/>
-          <p:nvPr/>
-        </p:nvSpPr>
-        <p:spPr>
-          <a:xfrm>
-            <a:off x="3200400" y="1737360"/>
-            <a:ext cx="548640" cy="502920"/>
-          </a:xfrm>
-          <a:prstGeom prst="rect">
-            <a:avLst/>
-          </a:prstGeom>
-          <a:noFill/>
-          <a:ln/>
-        </p:spPr>
-        <p:txBody>
-          <a:bodyPr wrap="square" lIns="0" tIns="0" rIns="0" bIns="0" rtlCol="0" anchor="ctr"/>
-          <a:lstStyle/>
-          <a:p>
-            <a:pPr indent="0" marL="0">
-              <a:buNone/>
-            </a:pPr>
-            <a:r>
-              <a:rPr lang="en-US" sz="3200" dirty="0">
+              <a:t>[Bénéfice 1 — répond à l'objectif exprimé]</a:t>
+            </a:r>
+          </a:p>
+          <a:p>
+            <a:pPr marL="182880" indent="-182880">
+              <a:buFont typeface="Arial"/>
+              <a:buChar char="•"/>
+            </a:pPr>
+            <a:r>
+              <a:rPr lang="en-US" sz="1000" i="1" dirty="0">
+                <a:solidFill>
+                  <a:srgbClr val="C4B5A5"/>
+                </a:solidFill>
+                <a:latin typeface="Calibri" pitchFamily="34" charset="0"/>
+                <a:ea typeface="Calibri" pitchFamily="34" charset="-122"/>
+                <a:cs typeface="Calibri" pitchFamily="34" charset="-120"/>
+              </a:rPr>
+              <a:t>[Bénéfice 2 — répond à l'objectif exprimé]</a:t>
+            </a:r>
+          </a:p>
+        </p:txBody>
+      </p:sp>
+      <p:sp>
+        <p:nvSpPr>
+          <p:cNvPr id="24" name="Shape 21"/>
+          <p:cNvSpPr/>
+          <p:nvPr/>
+        </p:nvSpPr>
+        <p:spPr>
+          <a:xfrm>
+            <a:off x="3200400" y="3931920"/>
+            <a:ext cx="2560320" cy="10973"/>
+          </a:xfrm>
+          <a:prstGeom prst="rect">
+            <a:avLst/>
+          </a:prstGeom>
+          <a:solidFill>
+            <a:srgbClr val="E5E0D8"/>
+          </a:solidFill>
+          <a:ln w="12700">
+            <a:solidFill>
+              <a:srgbClr val="E5E0D8"/>
+            </a:solidFill>
+            <a:prstDash val="solid"/>
+          </a:ln>
+        </p:spPr>
+      </p:sp>
+      <p:sp>
+        <p:nvSpPr>
+          <p:cNvPr id="25" name="Text 22"/>
+          <p:cNvSpPr/>
+          <p:nvPr/>
+        </p:nvSpPr>
+        <p:spPr>
+          <a:xfrm>
+            <a:off x="3200400" y="4005072"/>
+            <a:ext cx="2560320" cy="201168"/>
+          </a:xfrm>
+          <a:prstGeom prst="rect">
+            <a:avLst/>
+          </a:prstGeom>
+          <a:noFill/>
+          <a:ln/>
+        </p:spPr>
+        <p:txBody>
+          <a:bodyPr wrap="square" lIns="0" tIns="0" rIns="0" bIns="0" rtlCol="0" anchor="ctr"/>
+          <a:lstStyle/>
+          <a:p>
+            <a:pPr indent="0" marL="0">
+              <a:buNone/>
+            </a:pPr>
+            <a:r>
+              <a:rPr lang="en-US" sz="1050" b="1" dirty="0">
                 <a:solidFill>
                   <a:srgbClr val="8B1A1A"/>
                 </a:solidFill>
@@ -9798,46 +9960,21 @@
                 <a:ea typeface="Garamond" pitchFamily="34" charset="-122"/>
                 <a:cs typeface="Garamond" pitchFamily="34" charset="-120"/>
               </a:rPr>
-              <a:t>02</a:t>
-            </a:r>
-            <a:endParaRPr lang="en-US" sz="3200" dirty="0"/>
-          </a:p>
-        </p:txBody>
-      </p:sp>
-      <p:sp>
-        <p:nvSpPr>
-          <p:cNvPr id="21" name="Shape 18"/>
-          <p:cNvSpPr/>
-          <p:nvPr/>
-        </p:nvSpPr>
-        <p:spPr>
-          <a:xfrm>
-            <a:off x="3200400" y="2286000"/>
-            <a:ext cx="2560320" cy="10973"/>
-          </a:xfrm>
-          <a:prstGeom prst="rect">
-            <a:avLst/>
-          </a:prstGeom>
-          <a:solidFill>
-            <a:srgbClr val="CFC8BD"/>
-          </a:solidFill>
-          <a:ln w="12700">
-            <a:solidFill>
-              <a:srgbClr val="CFC8BD"/>
-            </a:solidFill>
-            <a:prstDash val="solid"/>
-          </a:ln>
-        </p:spPr>
-      </p:sp>
-      <p:sp>
-        <p:nvSpPr>
-          <p:cNvPr id="22" name="Text 19"/>
-          <p:cNvSpPr/>
-          <p:nvPr/>
-        </p:nvSpPr>
-        <p:spPr>
-          <a:xfrm>
-            <a:off x="3200400" y="2377440"/>
+              <a:t>[Nom de la solution]</a:t>
+            </a:r>
+            <a:endParaRPr lang="en-US" sz="750" dirty="0"/>
+          </a:p>
+        </p:txBody>
+      </p:sp>
+      <p:sp>
+        <p:nvSpPr>
+          <p:cNvPr id="26" name="Text 23"/>
+          <p:cNvSpPr/>
+          <p:nvPr/>
+        </p:nvSpPr>
+        <p:spPr>
+          <a:xfrm>
+            <a:off x="3200400" y="4224528"/>
             <a:ext cx="2560320" cy="256032"/>
           </a:xfrm>
           <a:prstGeom prst="rect">
@@ -9854,29 +9991,132 @@
               <a:buNone/>
             </a:pPr>
             <a:r>
-              <a:rPr lang="en-US" sz="750" i="1" dirty="0">
+              <a:rPr lang="en-US" sz="1100" b="1" dirty="0">
                 <a:solidFill>
                   <a:srgbClr val="C4B5A5"/>
+                </a:solidFill>
+                <a:latin typeface="Calibri" pitchFamily="34" charset="0"/>
+                <a:ea typeface="Calibri" pitchFamily="34" charset="-122"/>
+                <a:cs typeface="Calibri" pitchFamily="34" charset="-120"/>
+              </a:rPr>
+              <a:t>[Montant]</a:t>
+            </a:r>
+            <a:endParaRPr lang="en-US" sz="1000" dirty="0"/>
+          </a:p>
+        </p:txBody>
+      </p:sp>
+      <p:sp>
+        <p:nvSpPr>
+          <p:cNvPr id="102" name="Text Risque 2"/>
+          <p:cNvSpPr/>
+          <p:nvPr/>
+        </p:nvSpPr>
+        <p:spPr>
+          <a:xfrm>
+            <a:off x="3200400" y="4515000"/>
+            <a:ext cx="2560320" cy="230000"/>
+          </a:xfrm>
+          <a:prstGeom prst="rect">
+            <a:avLst/>
+          </a:prstGeom>
+          <a:noFill/>
+          <a:ln/>
+        </p:spPr>
+        <p:txBody>
+          <a:bodyPr wrap="square" lIns="0" tIns="0" rIns="0" bIns="0" rtlCol="0" anchor="t"/>
+          <a:lstStyle/>
+          <a:p>
+            <a:pPr indent="0" marL="0">
+              <a:buNone/>
+            </a:pPr>
+            <a:r>
+              <a:rPr lang="en-US" sz="900" i="1" dirty="0">
+                <a:solidFill>
+                  <a:srgbClr val="4A5568"/>
+                </a:solidFill>
+                <a:latin typeface="Calibri" pitchFamily="34" charset="0"/>
+                <a:ea typeface="Calibri" pitchFamily="34" charset="-122"/>
+                <a:cs typeface="Calibri" pitchFamily="34" charset="-120"/>
+              </a:rPr>
+              <a:t>[Profil de risque et rendement cible]</a:t>
+            </a:r>
+            <a:endParaRPr lang="en-US" sz="900" dirty="0"/>
+          </a:p>
+        </p:txBody>
+      </p:sp>
+      <p:sp>
+        <p:nvSpPr>
+          <p:cNvPr id="113" name="Text Objectif 113"/>
+          <p:cNvSpPr/>
+          <p:nvPr/>
+        </p:nvSpPr>
+        <p:spPr>
+          <a:xfrm>
+            <a:off x="5897880" y="1737360"/>
+            <a:ext cx="2560320" cy="460000"/>
+          </a:xfrm>
+          <a:prstGeom prst="rect">
+            <a:avLst/>
+          </a:prstGeom>
+          <a:noFill/>
+          <a:ln/>
+        </p:spPr>
+        <p:txBody>
+          <a:bodyPr wrap="square" lIns="0" tIns="0" rIns="0" bIns="0" rtlCol="0" anchor="ctr"/>
+          <a:lstStyle/>
+          <a:p>
+            <a:pPr indent="0" marL="0">
+              <a:buNone/>
+            </a:pPr>
+            <a:r>
+              <a:rPr lang="en-US" sz="1300" b="1" dirty="0">
+                <a:solidFill>
+                  <a:srgbClr val="8B1A1A"/>
                 </a:solidFill>
                 <a:latin typeface="Garamond" pitchFamily="34" charset="0"/>
                 <a:ea typeface="Garamond" pitchFamily="34" charset="-122"/>
                 <a:cs typeface="Garamond" pitchFamily="34" charset="-120"/>
               </a:rPr>
-              <a:t>[AXE 2 — intitulé, REVENUS COMPLÉMENTAIRES]</a:t>
-            </a:r>
-            <a:endParaRPr lang="en-US" sz="750" dirty="0"/>
-          </a:p>
-        </p:txBody>
-      </p:sp>
-      <p:sp>
-        <p:nvSpPr>
-          <p:cNvPr id="23" name="Text 20"/>
-          <p:cNvSpPr/>
-          <p:nvPr/>
-        </p:nvSpPr>
-        <p:spPr>
-          <a:xfrm>
-            <a:off x="3200400" y="2697480"/>
+              <a:t>[Objectif de l’axe — formulation client]</a:t>
+            </a:r>
+            <a:endParaRPr lang="en-US" sz="1300" dirty="0"/>
+          </a:p>
+        </p:txBody>
+      </p:sp>
+      <p:sp>
+        <p:nvSpPr>
+          <p:cNvPr id="28" name="Shape 25"/>
+          <p:cNvSpPr/>
+          <p:nvPr/>
+        </p:nvSpPr>
+        <p:spPr>
+          <a:xfrm>
+            <a:off x="5897880" y="2286000"/>
+            <a:ext cx="2560320" cy="10973"/>
+          </a:xfrm>
+          <a:prstGeom prst="rect">
+            <a:avLst/>
+          </a:prstGeom>
+          <a:solidFill>
+            <a:srgbClr val="CFC8BD"/>
+          </a:solidFill>
+          <a:ln w="12700">
+            <a:solidFill>
+              <a:srgbClr val="CFC8BD"/>
+            </a:solidFill>
+            <a:prstDash val="solid"/>
+          </a:ln>
+        </p:spPr>
+      </p:sp>
+      <p:sp>
+        <p:nvSpPr>
+          <p:cNvPr id="30" name="Text 27"/>
+          <p:cNvSpPr/>
+          <p:nvPr/>
+        </p:nvSpPr>
+        <p:spPr>
+          <a:xfrm>
+            <a:off x="5897880" y="2697480"/>
             <a:ext cx="2560320" cy="1143000"/>
           </a:xfrm>
           <a:prstGeom prst="rect">
@@ -9889,11 +10129,12 @@
           <a:bodyPr wrap="square" lIns="0" tIns="0" rIns="0" bIns="0" rtlCol="0" anchor="t"/>
           <a:lstStyle/>
           <a:p>
-            <a:pPr indent="0" marL="0">
-              <a:buNone/>
-            </a:pPr>
-            <a:r>
-              <a:rPr lang="en-US" sz="1150" i="1" dirty="0">
+            <a:pPr marL="182880" indent="-182880">
+              <a:buFont typeface="Arial"/>
+              <a:buChar char="•"/>
+            </a:pPr>
+            <a:r>
+              <a:rPr lang="en-US" sz="1000" i="1" dirty="0">
                 <a:solidFill>
                   <a:srgbClr val="C4B5A5"/>
                 </a:solidFill>
@@ -9901,21 +10142,37 @@
                 <a:ea typeface="Calibri" pitchFamily="34" charset="-122"/>
                 <a:cs typeface="Calibri" pitchFamily="34" charset="-120"/>
               </a:rPr>
-              <a:t>[Description de l'axe 2 — objectif, enveloppe(s) mobilisée(s), montant cible, horizon]</a:t>
-            </a:r>
-            <a:endParaRPr lang="en-US" sz="1150" dirty="0"/>
-          </a:p>
-        </p:txBody>
-      </p:sp>
-      <p:sp>
-        <p:nvSpPr>
-          <p:cNvPr id="24" name="Shape 21"/>
-          <p:cNvSpPr/>
-          <p:nvPr/>
-        </p:nvSpPr>
-        <p:spPr>
-          <a:xfrm>
-            <a:off x="3200400" y="3931920"/>
+              <a:t>[Bénéfice 1 — répond à l'objectif exprimé]</a:t>
+            </a:r>
+          </a:p>
+          <a:p>
+            <a:pPr marL="182880" indent="-182880">
+              <a:buFont typeface="Arial"/>
+              <a:buChar char="•"/>
+            </a:pPr>
+            <a:r>
+              <a:rPr lang="en-US" sz="1000" i="1" dirty="0">
+                <a:solidFill>
+                  <a:srgbClr val="C4B5A5"/>
+                </a:solidFill>
+                <a:latin typeface="Calibri" pitchFamily="34" charset="0"/>
+                <a:ea typeface="Calibri" pitchFamily="34" charset="-122"/>
+                <a:cs typeface="Calibri" pitchFamily="34" charset="-120"/>
+              </a:rPr>
+              <a:t>[Bénéfice 2 — répond à l'objectif exprimé]</a:t>
+            </a:r>
+          </a:p>
+        </p:txBody>
+      </p:sp>
+      <p:sp>
+        <p:nvSpPr>
+          <p:cNvPr id="31" name="Shape 28"/>
+          <p:cNvSpPr/>
+          <p:nvPr/>
+        </p:nvSpPr>
+        <p:spPr>
+          <a:xfrm>
+            <a:off x="5897880" y="3931920"/>
             <a:ext cx="2560320" cy="10973"/>
           </a:xfrm>
           <a:prstGeom prst="rect">
@@ -9934,13 +10191,13 @@
       </p:sp>
       <p:sp>
         <p:nvSpPr>
-          <p:cNvPr id="25" name="Text 22"/>
-          <p:cNvSpPr/>
-          <p:nvPr/>
-        </p:nvSpPr>
-        <p:spPr>
-          <a:xfrm>
-            <a:off x="3200400" y="4005072"/>
+          <p:cNvPr id="32" name="Text 29"/>
+          <p:cNvSpPr/>
+          <p:nvPr/>
+        </p:nvSpPr>
+        <p:spPr>
+          <a:xfrm>
+            <a:off x="5897880" y="4005072"/>
             <a:ext cx="2560320" cy="201168"/>
           </a:xfrm>
           <a:prstGeom prst="rect">
@@ -9957,7 +10214,7 @@
               <a:buNone/>
             </a:pPr>
             <a:r>
-              <a:rPr lang="en-US" sz="750" spc="250" kern="0" dirty="0">
+              <a:rPr lang="en-US" sz="1050" b="1" dirty="0">
                 <a:solidFill>
                   <a:srgbClr val="8B1A1A"/>
                 </a:solidFill>
@@ -9965,7 +10222,7 @@
                 <a:ea typeface="Garamond" pitchFamily="34" charset="-122"/>
                 <a:cs typeface="Garamond" pitchFamily="34" charset="-120"/>
               </a:rPr>
-              <a:t>ENVELOPPE(S)</a:t>
+              <a:t>[Nom de la solution]</a:t>
             </a:r>
             <a:endParaRPr lang="en-US" sz="750" dirty="0"/>
           </a:p>
@@ -9973,13 +10230,13 @@
       </p:sp>
       <p:sp>
         <p:nvSpPr>
-          <p:cNvPr id="26" name="Text 23"/>
-          <p:cNvSpPr/>
-          <p:nvPr/>
-        </p:nvSpPr>
-        <p:spPr>
-          <a:xfrm>
-            <a:off x="3200400" y="4224528"/>
+          <p:cNvPr id="33" name="Text 30"/>
+          <p:cNvSpPr/>
+          <p:nvPr/>
+        </p:nvSpPr>
+        <p:spPr>
+          <a:xfrm>
+            <a:off x="5897880" y="4224528"/>
             <a:ext cx="2560320" cy="256032"/>
           </a:xfrm>
           <a:prstGeom prst="rect">
@@ -9996,7 +10253,7 @@
               <a:buNone/>
             </a:pPr>
             <a:r>
-              <a:rPr lang="en-US" sz="1000" i="1" dirty="0">
+              <a:rPr lang="en-US" sz="1100" b="1" dirty="0">
                 <a:solidFill>
                   <a:srgbClr val="C4B5A5"/>
                 </a:solidFill>
@@ -10004,7 +10261,7 @@
                 <a:ea typeface="Calibri" pitchFamily="34" charset="-122"/>
                 <a:cs typeface="Calibri" pitchFamily="34" charset="-120"/>
               </a:rPr>
-              <a:t>[Enveloppe(s)]</a:t>
+              <a:t>[Montant]</a:t>
             </a:r>
             <a:endParaRPr lang="en-US" sz="1000" dirty="0"/>
           </a:p>
@@ -10012,78 +10269,14 @@
       </p:sp>
       <p:sp>
         <p:nvSpPr>
-          <p:cNvPr id="27" name="Text 24"/>
-          <p:cNvSpPr/>
-          <p:nvPr/>
-        </p:nvSpPr>
-        <p:spPr>
-          <a:xfrm>
-            <a:off x="5897880" y="1737360"/>
-            <a:ext cx="548640" cy="502920"/>
-          </a:xfrm>
-          <a:prstGeom prst="rect">
-            <a:avLst/>
-          </a:prstGeom>
-          <a:noFill/>
-          <a:ln/>
-        </p:spPr>
-        <p:txBody>
-          <a:bodyPr wrap="square" lIns="0" tIns="0" rIns="0" bIns="0" rtlCol="0" anchor="ctr"/>
-          <a:lstStyle/>
-          <a:p>
-            <a:pPr indent="0" marL="0">
-              <a:buNone/>
-            </a:pPr>
-            <a:r>
-              <a:rPr lang="en-US" sz="3200" dirty="0">
-                <a:solidFill>
-                  <a:srgbClr val="8B1A1A"/>
-                </a:solidFill>
-                <a:latin typeface="Garamond" pitchFamily="34" charset="0"/>
-                <a:ea typeface="Garamond" pitchFamily="34" charset="-122"/>
-                <a:cs typeface="Garamond" pitchFamily="34" charset="-120"/>
-              </a:rPr>
-              <a:t>03</a:t>
-            </a:r>
-            <a:endParaRPr lang="en-US" sz="3200" dirty="0"/>
-          </a:p>
-        </p:txBody>
-      </p:sp>
-      <p:sp>
-        <p:nvSpPr>
-          <p:cNvPr id="28" name="Shape 25"/>
-          <p:cNvSpPr/>
-          <p:nvPr/>
-        </p:nvSpPr>
-        <p:spPr>
-          <a:xfrm>
-            <a:off x="5897880" y="2286000"/>
-            <a:ext cx="2560320" cy="10973"/>
-          </a:xfrm>
-          <a:prstGeom prst="rect">
-            <a:avLst/>
-          </a:prstGeom>
-          <a:solidFill>
-            <a:srgbClr val="CFC8BD"/>
-          </a:solidFill>
-          <a:ln w="12700">
-            <a:solidFill>
-              <a:srgbClr val="CFC8BD"/>
-            </a:solidFill>
-            <a:prstDash val="solid"/>
-          </a:ln>
-        </p:spPr>
-      </p:sp>
-      <p:sp>
-        <p:nvSpPr>
-          <p:cNvPr id="29" name="Text 26"/>
-          <p:cNvSpPr/>
-          <p:nvPr/>
-        </p:nvSpPr>
-        <p:spPr>
-          <a:xfrm>
-            <a:off x="5897880" y="2377440"/>
-            <a:ext cx="2560320" cy="256032"/>
+          <p:cNvPr id="103" name="Text Risque 3"/>
+          <p:cNvSpPr/>
+          <p:nvPr/>
+        </p:nvSpPr>
+        <p:spPr>
+          <a:xfrm>
+            <a:off x="5897880" y="4515000"/>
+            <a:ext cx="2560320" cy="230000"/>
           </a:xfrm>
           <a:prstGeom prst="rect">
             <a:avLst/>
@@ -10099,159 +10292,17 @@
               <a:buNone/>
             </a:pPr>
             <a:r>
-              <a:rPr lang="en-US" sz="750" i="1" dirty="0">
-                <a:solidFill>
-                  <a:srgbClr val="C4B5A5"/>
-                </a:solidFill>
-                <a:latin typeface="Garamond" pitchFamily="34" charset="0"/>
-                <a:ea typeface="Garamond" pitchFamily="34" charset="-122"/>
-                <a:cs typeface="Garamond" pitchFamily="34" charset="-120"/>
-              </a:rPr>
-              <a:t>[AXE 3 — intitulé, REVENUS COMPLÉMENTAIRES]</a:t>
-            </a:r>
-            <a:endParaRPr lang="en-US" sz="750" dirty="0"/>
-          </a:p>
-        </p:txBody>
-      </p:sp>
-      <p:sp>
-        <p:nvSpPr>
-          <p:cNvPr id="30" name="Text 27"/>
-          <p:cNvSpPr/>
-          <p:nvPr/>
-        </p:nvSpPr>
-        <p:spPr>
-          <a:xfrm>
-            <a:off x="5897880" y="2697480"/>
-            <a:ext cx="2560320" cy="1143000"/>
-          </a:xfrm>
-          <a:prstGeom prst="rect">
-            <a:avLst/>
-          </a:prstGeom>
-          <a:noFill/>
-          <a:ln/>
-        </p:spPr>
-        <p:txBody>
-          <a:bodyPr wrap="square" lIns="0" tIns="0" rIns="0" bIns="0" rtlCol="0" anchor="t"/>
-          <a:lstStyle/>
-          <a:p>
-            <a:pPr indent="0" marL="0">
-              <a:buNone/>
-            </a:pPr>
-            <a:r>
-              <a:rPr lang="en-US" sz="1150" i="1" dirty="0">
-                <a:solidFill>
-                  <a:srgbClr val="C4B5A5"/>
+              <a:rPr lang="en-US" sz="900" i="1" dirty="0">
+                <a:solidFill>
+                  <a:srgbClr val="4A5568"/>
                 </a:solidFill>
                 <a:latin typeface="Calibri" pitchFamily="34" charset="0"/>
                 <a:ea typeface="Calibri" pitchFamily="34" charset="-122"/>
                 <a:cs typeface="Calibri" pitchFamily="34" charset="-120"/>
               </a:rPr>
-              <a:t>[Description de l'axe 3 — objectif, enveloppe(s) mobilisée(s), montant cible, horizon]</a:t>
-            </a:r>
-            <a:endParaRPr lang="en-US" sz="1150" dirty="0"/>
-          </a:p>
-        </p:txBody>
-      </p:sp>
-      <p:sp>
-        <p:nvSpPr>
-          <p:cNvPr id="31" name="Shape 28"/>
-          <p:cNvSpPr/>
-          <p:nvPr/>
-        </p:nvSpPr>
-        <p:spPr>
-          <a:xfrm>
-            <a:off x="5897880" y="3931920"/>
-            <a:ext cx="2560320" cy="10973"/>
-          </a:xfrm>
-          <a:prstGeom prst="rect">
-            <a:avLst/>
-          </a:prstGeom>
-          <a:solidFill>
-            <a:srgbClr val="E5E0D8"/>
-          </a:solidFill>
-          <a:ln w="12700">
-            <a:solidFill>
-              <a:srgbClr val="E5E0D8"/>
-            </a:solidFill>
-            <a:prstDash val="solid"/>
-          </a:ln>
-        </p:spPr>
-      </p:sp>
-      <p:sp>
-        <p:nvSpPr>
-          <p:cNvPr id="32" name="Text 29"/>
-          <p:cNvSpPr/>
-          <p:nvPr/>
-        </p:nvSpPr>
-        <p:spPr>
-          <a:xfrm>
-            <a:off x="5897880" y="4005072"/>
-            <a:ext cx="2560320" cy="201168"/>
-          </a:xfrm>
-          <a:prstGeom prst="rect">
-            <a:avLst/>
-          </a:prstGeom>
-          <a:noFill/>
-          <a:ln/>
-        </p:spPr>
-        <p:txBody>
-          <a:bodyPr wrap="square" lIns="0" tIns="0" rIns="0" bIns="0" rtlCol="0" anchor="ctr"/>
-          <a:lstStyle/>
-          <a:p>
-            <a:pPr indent="0" marL="0">
-              <a:buNone/>
-            </a:pPr>
-            <a:r>
-              <a:rPr lang="en-US" sz="750" spc="250" kern="0" dirty="0">
-                <a:solidFill>
-                  <a:srgbClr val="8B1A1A"/>
-                </a:solidFill>
-                <a:latin typeface="Garamond" pitchFamily="34" charset="0"/>
-                <a:ea typeface="Garamond" pitchFamily="34" charset="-122"/>
-                <a:cs typeface="Garamond" pitchFamily="34" charset="-120"/>
-              </a:rPr>
-              <a:t>ENVELOPPE(S)</a:t>
-            </a:r>
-            <a:endParaRPr lang="en-US" sz="750" dirty="0"/>
-          </a:p>
-        </p:txBody>
-      </p:sp>
-      <p:sp>
-        <p:nvSpPr>
-          <p:cNvPr id="33" name="Text 30"/>
-          <p:cNvSpPr/>
-          <p:nvPr/>
-        </p:nvSpPr>
-        <p:spPr>
-          <a:xfrm>
-            <a:off x="5897880" y="4224528"/>
-            <a:ext cx="2560320" cy="256032"/>
-          </a:xfrm>
-          <a:prstGeom prst="rect">
-            <a:avLst/>
-          </a:prstGeom>
-          <a:noFill/>
-          <a:ln/>
-        </p:spPr>
-        <p:txBody>
-          <a:bodyPr wrap="square" lIns="0" tIns="0" rIns="0" bIns="0" rtlCol="0" anchor="t"/>
-          <a:lstStyle/>
-          <a:p>
-            <a:pPr indent="0" marL="0">
-              <a:buNone/>
-            </a:pPr>
-            <a:r>
-              <a:rPr lang="en-US" sz="1000" i="1" dirty="0">
-                <a:solidFill>
-                  <a:srgbClr val="C4B5A5"/>
-                </a:solidFill>
-                <a:latin typeface="Calibri" pitchFamily="34" charset="0"/>
-                <a:ea typeface="Calibri" pitchFamily="34" charset="-122"/>
-                <a:cs typeface="Calibri" pitchFamily="34" charset="-120"/>
-              </a:rPr>
-              <a:t>[Enveloppe(s)]</a:t>
-            </a:r>
-            <a:endParaRPr lang="en-US" sz="1000" dirty="0"/>
+              <a:t>[Profil de risque et rendement cible]</a:t>
+            </a:r>
+            <a:endParaRPr lang="en-US" sz="900" dirty="0"/>
           </a:p>
         </p:txBody>
       </p:sp>

--- a/Cans_Mstr.pptx
+++ b/Cans_Mstr.pptx
@@ -5705,17 +5705,6 @@
             <a:pPr marL="0" indent="0">
               <a:buNone/>
             </a:pPr>
-            <a:r>
-              <a:rPr lang="en-US" sz="750" i="1" dirty="0">
-                <a:solidFill>
-                  <a:srgbClr val="A09080"/>
-                </a:solidFill>
-                <a:latin typeface="Calibri" pitchFamily="34" charset="0"/>
-                <a:ea typeface="Calibri" pitchFamily="34" charset="-122"/>
-                <a:cs typeface="Calibri" pitchFamily="34" charset="-120"/>
-              </a:rPr>
-              <a:t>Adapter le nombre de colonnes au nombre de projets — supprimer les colonnes non utilisées</a:t>
-            </a:r>
             <a:endParaRPr lang="en-US" sz="750" dirty="0"/>
           </a:p>
         </p:txBody>
@@ -28627,17 +28616,6 @@
             <a:pPr marL="0" indent="0">
               <a:buNone/>
             </a:pPr>
-            <a:r>
-              <a:rPr lang="en-US" sz="750" i="1" dirty="0">
-                <a:solidFill>
-                  <a:srgbClr val="A09080"/>
-                </a:solidFill>
-                <a:latin typeface="Calibri" pitchFamily="34" charset="0"/>
-                <a:ea typeface="Calibri" pitchFamily="34" charset="-122"/>
-                <a:cs typeface="Calibri" pitchFamily="34" charset="-120"/>
-              </a:rPr>
-              <a:t>5 remarques maximum recommandées — supprimer les lignes non utilisées</a:t>
-            </a:r>
             <a:endParaRPr lang="en-US" sz="750" dirty="0"/>
           </a:p>
         </p:txBody>
@@ -29300,17 +29278,6 @@
 </file>
 
 <file path=customXml/item1.xml><?xml version="1.0" encoding="utf-8"?>
-<p:properties xmlns:p="http://schemas.microsoft.com/office/2006/metadata/properties" xmlns:xsi="http://www.w3.org/2001/XMLSchema-instance" xmlns:pc="http://schemas.microsoft.com/office/infopath/2007/PartnerControls">
-  <documentManagement>
-    <TaxCatchAll xmlns="96f3f382-ceb1-40cb-99f5-e72dad3ad468" xsi:nil="true"/>
-    <lcf76f155ced4ddcb4097134ff3c332f xmlns="20af6729-ca02-41fe-ad33-8052e43e59c7">
-      <Terms xmlns="http://schemas.microsoft.com/office/infopath/2007/PartnerControls"/>
-    </lcf76f155ced4ddcb4097134ff3c332f>
-  </documentManagement>
-</p:properties>
-</file>
-
-<file path=customXml/item2.xml><?xml version="1.0" encoding="utf-8"?>
 <ct:contentTypeSchema xmlns:ct="http://schemas.microsoft.com/office/2006/metadata/contentType" xmlns:ma="http://schemas.microsoft.com/office/2006/metadata/properties/metaAttributes" ct:_="" ma:_="" ma:contentTypeName="Document" ma:contentTypeID="0x010100E413E88BE41E9B4697EEB1383CCFCEE9" ma:contentTypeVersion="15" ma:contentTypeDescription="Crée un document." ma:contentTypeScope="" ma:versionID="fdc6ab2ac34b5193386aa592c794ff43">
   <xsd:schema xmlns:xsd="http://www.w3.org/2001/XMLSchema" xmlns:xs="http://www.w3.org/2001/XMLSchema" xmlns:p="http://schemas.microsoft.com/office/2006/metadata/properties" xmlns:ns2="20af6729-ca02-41fe-ad33-8052e43e59c7" xmlns:ns3="96f3f382-ceb1-40cb-99f5-e72dad3ad468" targetNamespace="http://schemas.microsoft.com/office/2006/metadata/properties" ma:root="true" ma:fieldsID="deac9eb5af6cc4882cd6ba5d54d79817" ns2:_="" ns3:_="">
     <xsd:import namespace="20af6729-ca02-41fe-ad33-8052e43e59c7"/>
@@ -29545,6 +29512,17 @@
 </ct:contentTypeSchema>
 </file>
 
+<file path=customXml/item2.xml><?xml version="1.0" encoding="utf-8"?>
+<p:properties xmlns:p="http://schemas.microsoft.com/office/2006/metadata/properties" xmlns:xsi="http://www.w3.org/2001/XMLSchema-instance" xmlns:pc="http://schemas.microsoft.com/office/infopath/2007/PartnerControls">
+  <documentManagement>
+    <TaxCatchAll xmlns="96f3f382-ceb1-40cb-99f5-e72dad3ad468" xsi:nil="true"/>
+    <lcf76f155ced4ddcb4097134ff3c332f xmlns="20af6729-ca02-41fe-ad33-8052e43e59c7">
+      <Terms xmlns="http://schemas.microsoft.com/office/infopath/2007/PartnerControls"/>
+    </lcf76f155ced4ddcb4097134ff3c332f>
+  </documentManagement>
+</p:properties>
+</file>
+
 <file path=customXml/item3.xml><?xml version="1.0" encoding="utf-8"?>
 <?mso-contentType ?>
 <FormTemplates xmlns="http://schemas.microsoft.com/sharepoint/v3/contenttype/forms">
@@ -29555,17 +29533,6 @@
 </file>
 
 <file path=customXml/itemProps1.xml><?xml version="1.0" encoding="utf-8"?>
-<ds:datastoreItem xmlns:ds="http://schemas.openxmlformats.org/officeDocument/2006/customXml" ds:itemID="{4D2500C3-0BF9-4160-9EFB-6F363BE89EA2}">
-  <ds:schemaRefs>
-    <ds:schemaRef ds:uri="http://schemas.microsoft.com/office/2006/metadata/properties"/>
-    <ds:schemaRef ds:uri="http://schemas.microsoft.com/office/infopath/2007/PartnerControls"/>
-    <ds:schemaRef ds:uri="96f3f382-ceb1-40cb-99f5-e72dad3ad468"/>
-    <ds:schemaRef ds:uri="20af6729-ca02-41fe-ad33-8052e43e59c7"/>
-  </ds:schemaRefs>
-</ds:datastoreItem>
-</file>
-
-<file path=customXml/itemProps2.xml><?xml version="1.0" encoding="utf-8"?>
 <ds:datastoreItem xmlns:ds="http://schemas.openxmlformats.org/officeDocument/2006/customXml" ds:itemID="{BE50BBAE-E30E-4E78-9619-46B248827988}">
   <ds:schemaRefs>
     <ds:schemaRef ds:uri="http://schemas.microsoft.com/office/2006/metadata/contentType"/>
@@ -29584,6 +29551,17 @@
 </ds:datastoreItem>
 </file>
 
+<file path=customXml/itemProps2.xml><?xml version="1.0" encoding="utf-8"?>
+<ds:datastoreItem xmlns:ds="http://schemas.openxmlformats.org/officeDocument/2006/customXml" ds:itemID="{4D2500C3-0BF9-4160-9EFB-6F363BE89EA2}">
+  <ds:schemaRefs>
+    <ds:schemaRef ds:uri="http://schemas.microsoft.com/office/2006/metadata/properties"/>
+    <ds:schemaRef ds:uri="http://schemas.microsoft.com/office/infopath/2007/PartnerControls"/>
+    <ds:schemaRef ds:uri="96f3f382-ceb1-40cb-99f5-e72dad3ad468"/>
+    <ds:schemaRef ds:uri="20af6729-ca02-41fe-ad33-8052e43e59c7"/>
+  </ds:schemaRefs>
+</ds:datastoreItem>
+</file>
+
 <file path=customXml/itemProps3.xml><?xml version="1.0" encoding="utf-8"?>
 <ds:datastoreItem xmlns:ds="http://schemas.openxmlformats.org/officeDocument/2006/customXml" ds:itemID="{F079F69C-2C23-423F-AFA6-0DA966A4C7CD}">
   <ds:schemaRefs>

--- a/Cans_Mstr.pptx
+++ b/Cans_Mstr.pptx
@@ -180,7 +180,7 @@
             </c:spPr>
             <c:extLst>
               <c:ext xmlns:c16="http://schemas.microsoft.com/office/drawing/2014/chart" uri="{C3380CC4-5D6E-409C-BE32-E72D297353CC}">
-                <c16:uniqueId val="{00000001-4599-4413-8511-35C52911DB64}"/>
+                <c16:uniqueId val="{00000001-521C-4D6E-B23E-20B5810BB680}"/>
               </c:ext>
             </c:extLst>
           </c:dPt>
@@ -195,7 +195,7 @@
             </c:spPr>
             <c:extLst>
               <c:ext xmlns:c16="http://schemas.microsoft.com/office/drawing/2014/chart" uri="{C3380CC4-5D6E-409C-BE32-E72D297353CC}">
-                <c16:uniqueId val="{00000003-4599-4413-8511-35C52911DB64}"/>
+                <c16:uniqueId val="{00000003-521C-4D6E-B23E-20B5810BB680}"/>
               </c:ext>
             </c:extLst>
           </c:dPt>
@@ -210,7 +210,7 @@
             </c:spPr>
             <c:extLst>
               <c:ext xmlns:c16="http://schemas.microsoft.com/office/drawing/2014/chart" uri="{C3380CC4-5D6E-409C-BE32-E72D297353CC}">
-                <c16:uniqueId val="{00000005-4599-4413-8511-35C52911DB64}"/>
+                <c16:uniqueId val="{00000005-521C-4D6E-B23E-20B5810BB680}"/>
               </c:ext>
             </c:extLst>
           </c:dPt>
@@ -225,7 +225,7 @@
             </c:spPr>
             <c:extLst>
               <c:ext xmlns:c16="http://schemas.microsoft.com/office/drawing/2014/chart" uri="{C3380CC4-5D6E-409C-BE32-E72D297353CC}">
-                <c16:uniqueId val="{00000007-4599-4413-8511-35C52911DB64}"/>
+                <c16:uniqueId val="{00000007-521C-4D6E-B23E-20B5810BB680}"/>
               </c:ext>
             </c:extLst>
           </c:dPt>
@@ -258,7 +258,7 @@
               <c:extLst>
                 <c:ext xmlns:c15="http://schemas.microsoft.com/office/drawing/2012/chart" uri="{CE6537A1-D6FC-4f65-9D91-7224C49458BB}"/>
                 <c:ext xmlns:c16="http://schemas.microsoft.com/office/drawing/2014/chart" uri="{C3380CC4-5D6E-409C-BE32-E72D297353CC}">
-                  <c16:uniqueId val="{00000001-4599-4413-8511-35C52911DB64}"/>
+                  <c16:uniqueId val="{00000001-521C-4D6E-B23E-20B5810BB680}"/>
                 </c:ext>
               </c:extLst>
             </c:dLbl>
@@ -290,7 +290,7 @@
               <c:extLst>
                 <c:ext xmlns:c15="http://schemas.microsoft.com/office/drawing/2012/chart" uri="{CE6537A1-D6FC-4f65-9D91-7224C49458BB}"/>
                 <c:ext xmlns:c16="http://schemas.microsoft.com/office/drawing/2014/chart" uri="{C3380CC4-5D6E-409C-BE32-E72D297353CC}">
-                  <c16:uniqueId val="{00000003-4599-4413-8511-35C52911DB64}"/>
+                  <c16:uniqueId val="{00000003-521C-4D6E-B23E-20B5810BB680}"/>
                 </c:ext>
               </c:extLst>
             </c:dLbl>
@@ -322,7 +322,7 @@
               <c:extLst>
                 <c:ext xmlns:c15="http://schemas.microsoft.com/office/drawing/2012/chart" uri="{CE6537A1-D6FC-4f65-9D91-7224C49458BB}"/>
                 <c:ext xmlns:c16="http://schemas.microsoft.com/office/drawing/2014/chart" uri="{C3380CC4-5D6E-409C-BE32-E72D297353CC}">
-                  <c16:uniqueId val="{00000005-4599-4413-8511-35C52911DB64}"/>
+                  <c16:uniqueId val="{00000005-521C-4D6E-B23E-20B5810BB680}"/>
                 </c:ext>
               </c:extLst>
             </c:dLbl>
@@ -354,7 +354,7 @@
               <c:extLst>
                 <c:ext xmlns:c15="http://schemas.microsoft.com/office/drawing/2012/chart" uri="{CE6537A1-D6FC-4f65-9D91-7224C49458BB}"/>
                 <c:ext xmlns:c16="http://schemas.microsoft.com/office/drawing/2014/chart" uri="{C3380CC4-5D6E-409C-BE32-E72D297353CC}">
-                  <c16:uniqueId val="{00000007-4599-4413-8511-35C52911DB64}"/>
+                  <c16:uniqueId val="{00000007-521C-4D6E-B23E-20B5810BB680}"/>
                 </c:ext>
               </c:extLst>
             </c:dLbl>
@@ -435,7 +435,7 @@
           </c:val>
           <c:extLst>
             <c:ext xmlns:c16="http://schemas.microsoft.com/office/drawing/2014/chart" uri="{C3380CC4-5D6E-409C-BE32-E72D297353CC}">
-              <c16:uniqueId val="{00000008-4599-4413-8511-35C52911DB64}"/>
+              <c16:uniqueId val="{00000008-521C-4D6E-B23E-20B5810BB680}"/>
             </c:ext>
           </c:extLst>
         </c:ser>
@@ -526,7 +526,7 @@
             </c:spPr>
             <c:extLst>
               <c:ext xmlns:c16="http://schemas.microsoft.com/office/drawing/2014/chart" uri="{C3380CC4-5D6E-409C-BE32-E72D297353CC}">
-                <c16:uniqueId val="{00000001-4A28-4496-B912-79D198304420}"/>
+                <c16:uniqueId val="{00000001-9F90-4DF6-A584-4BDB3A9AE02A}"/>
               </c:ext>
             </c:extLst>
           </c:dPt>
@@ -541,7 +541,7 @@
             </c:spPr>
             <c:extLst>
               <c:ext xmlns:c16="http://schemas.microsoft.com/office/drawing/2014/chart" uri="{C3380CC4-5D6E-409C-BE32-E72D297353CC}">
-                <c16:uniqueId val="{00000003-4A28-4496-B912-79D198304420}"/>
+                <c16:uniqueId val="{00000003-9F90-4DF6-A584-4BDB3A9AE02A}"/>
               </c:ext>
             </c:extLst>
           </c:dPt>
@@ -574,7 +574,7 @@
               <c:extLst>
                 <c:ext xmlns:c15="http://schemas.microsoft.com/office/drawing/2012/chart" uri="{CE6537A1-D6FC-4f65-9D91-7224C49458BB}"/>
                 <c:ext xmlns:c16="http://schemas.microsoft.com/office/drawing/2014/chart" uri="{C3380CC4-5D6E-409C-BE32-E72D297353CC}">
-                  <c16:uniqueId val="{00000001-4A28-4496-B912-79D198304420}"/>
+                  <c16:uniqueId val="{00000001-9F90-4DF6-A584-4BDB3A9AE02A}"/>
                 </c:ext>
               </c:extLst>
             </c:dLbl>
@@ -606,7 +606,7 @@
               <c:extLst>
                 <c:ext xmlns:c15="http://schemas.microsoft.com/office/drawing/2012/chart" uri="{CE6537A1-D6FC-4f65-9D91-7224C49458BB}"/>
                 <c:ext xmlns:c16="http://schemas.microsoft.com/office/drawing/2014/chart" uri="{C3380CC4-5D6E-409C-BE32-E72D297353CC}">
-                  <c16:uniqueId val="{00000003-4A28-4496-B912-79D198304420}"/>
+                  <c16:uniqueId val="{00000003-9F90-4DF6-A584-4BDB3A9AE02A}"/>
                 </c:ext>
               </c:extLst>
             </c:dLbl>
@@ -675,7 +675,7 @@
           </c:val>
           <c:extLst>
             <c:ext xmlns:c16="http://schemas.microsoft.com/office/drawing/2014/chart" uri="{C3380CC4-5D6E-409C-BE32-E72D297353CC}">
-              <c16:uniqueId val="{00000004-4A28-4496-B912-79D198304420}"/>
+              <c16:uniqueId val="{00000004-9F90-4DF6-A584-4BDB3A9AE02A}"/>
             </c:ext>
           </c:extLst>
         </c:ser>
@@ -741,7 +741,7 @@
     </p:spTree>
     <p:extLst>
       <p:ext uri="{BB962C8B-B14F-4D97-AF65-F5344CB8AC3E}">
-        <p14:creationId xmlns:p14="http://schemas.microsoft.com/office/powerpoint/2010/main" val="940792593"/>
+        <p14:creationId xmlns:p14="http://schemas.microsoft.com/office/powerpoint/2010/main" val="1811024738"/>
       </p:ext>
     </p:extLst>
   </p:cSld>
@@ -2999,7 +2999,7 @@
             <a:r>
               <a:rPr lang="en-US" sz="750" i="1" dirty="0">
                 <a:solidFill>
-                  <a:srgbClr val="C4B5A5"/>
+                  <a:srgbClr val="8E5B3F"/>
                 </a:solidFill>
                 <a:latin typeface="Garamond" pitchFamily="34" charset="0"/>
                 <a:ea typeface="Garamond" pitchFamily="34" charset="-122"/>
@@ -3070,7 +3070,7 @@
             <a:r>
               <a:rPr lang="en-US" sz="4600" i="1" dirty="0">
                 <a:solidFill>
-                  <a:srgbClr val="C4B5A5"/>
+                  <a:srgbClr val="8E5B3F"/>
                 </a:solidFill>
                 <a:latin typeface="Garamond" pitchFamily="34" charset="0"/>
                 <a:ea typeface="Garamond" pitchFamily="34" charset="-122"/>
@@ -3141,7 +3141,7 @@
             <a:r>
               <a:rPr lang="en-US" sz="2000" i="1" dirty="0">
                 <a:solidFill>
-                  <a:srgbClr val="C4B5A5"/>
+                  <a:srgbClr val="8E5B3F"/>
                 </a:solidFill>
                 <a:latin typeface="Garamond" pitchFamily="34" charset="0"/>
                 <a:ea typeface="Garamond" pitchFamily="34" charset="-122"/>
@@ -3219,7 +3219,7 @@
             <a:r>
               <a:rPr lang="en-US" sz="1000" i="1" dirty="0">
                 <a:solidFill>
-                  <a:srgbClr val="C4B5A5"/>
+                  <a:srgbClr val="8E5B3F"/>
                 </a:solidFill>
                 <a:latin typeface="Garamond" pitchFamily="34" charset="0"/>
                 <a:ea typeface="Garamond" pitchFamily="34" charset="-122"/>
@@ -3750,7 +3750,7 @@
             <a:r>
               <a:rPr lang="en-US" sz="1150" i="1" dirty="0">
                 <a:solidFill>
-                  <a:srgbClr val="C4B5A5"/>
+                  <a:srgbClr val="8E5B3F"/>
                 </a:solidFill>
                 <a:latin typeface="Calibri" pitchFamily="34" charset="0"/>
                 <a:ea typeface="Calibri" pitchFamily="34" charset="-122"/>
@@ -3821,7 +3821,7 @@
             <a:r>
               <a:rPr lang="en-US" sz="1150" i="1" dirty="0">
                 <a:solidFill>
-                  <a:srgbClr val="C4B5A5"/>
+                  <a:srgbClr val="8E5B3F"/>
                 </a:solidFill>
                 <a:latin typeface="Calibri" pitchFamily="34" charset="0"/>
                 <a:ea typeface="Calibri" pitchFamily="34" charset="-122"/>
@@ -3892,7 +3892,7 @@
             <a:r>
               <a:rPr lang="en-US" sz="1150" i="1" dirty="0">
                 <a:solidFill>
-                  <a:srgbClr val="C4B5A5"/>
+                  <a:srgbClr val="8E5B3F"/>
                 </a:solidFill>
                 <a:latin typeface="Calibri" pitchFamily="34" charset="0"/>
                 <a:ea typeface="Calibri" pitchFamily="34" charset="-122"/>
@@ -4002,7 +4002,7 @@
             <a:r>
               <a:rPr lang="en-US" sz="1150" i="1" dirty="0">
                 <a:solidFill>
-                  <a:srgbClr val="C4B5A5"/>
+                  <a:srgbClr val="8E5B3F"/>
                 </a:solidFill>
                 <a:latin typeface="Calibri" pitchFamily="34" charset="0"/>
                 <a:ea typeface="Calibri" pitchFamily="34" charset="-122"/>
@@ -4073,7 +4073,7 @@
             <a:r>
               <a:rPr lang="en-US" sz="1150" i="1" dirty="0">
                 <a:solidFill>
-                  <a:srgbClr val="C4B5A5"/>
+                  <a:srgbClr val="8E5B3F"/>
                 </a:solidFill>
                 <a:latin typeface="Calibri" pitchFamily="34" charset="0"/>
                 <a:ea typeface="Calibri" pitchFamily="34" charset="-122"/>
@@ -4144,7 +4144,7 @@
             <a:r>
               <a:rPr lang="en-US" sz="1150" i="1" dirty="0">
                 <a:solidFill>
-                  <a:srgbClr val="C4B5A5"/>
+                  <a:srgbClr val="8E5B3F"/>
                 </a:solidFill>
                 <a:latin typeface="Calibri" pitchFamily="34" charset="0"/>
                 <a:ea typeface="Calibri" pitchFamily="34" charset="-122"/>
@@ -4846,7 +4846,7 @@
             <a:r>
               <a:rPr lang="en-US" sz="800" i="1" dirty="0">
                 <a:solidFill>
-                  <a:srgbClr val="C4B5A5"/>
+                  <a:srgbClr val="8E5B3F"/>
                 </a:solidFill>
                 <a:latin typeface="Garamond" pitchFamily="34" charset="0"/>
                 <a:ea typeface="Garamond" pitchFamily="34" charset="-122"/>
@@ -4885,7 +4885,7 @@
             <a:r>
               <a:rPr lang="en-US" sz="1150" i="1" dirty="0">
                 <a:solidFill>
-                  <a:srgbClr val="C4B5A5"/>
+                  <a:srgbClr val="8E5B3F"/>
                 </a:solidFill>
                 <a:latin typeface="Calibri" pitchFamily="34" charset="0"/>
                 <a:ea typeface="Calibri" pitchFamily="34" charset="-122"/>
@@ -4995,7 +4995,7 @@
             <a:r>
               <a:rPr lang="en-US" sz="1000" i="1" dirty="0">
                 <a:solidFill>
-                  <a:srgbClr val="C4B5A5"/>
+                  <a:srgbClr val="8E5B3F"/>
                 </a:solidFill>
                 <a:latin typeface="Calibri" pitchFamily="34" charset="0"/>
                 <a:ea typeface="Calibri" pitchFamily="34" charset="-122"/>
@@ -5073,7 +5073,7 @@
             <a:r>
               <a:rPr lang="en-US" sz="1000" i="1" dirty="0">
                 <a:solidFill>
-                  <a:srgbClr val="C4B5A5"/>
+                  <a:srgbClr val="8E5B3F"/>
                 </a:solidFill>
                 <a:latin typeface="Calibri" pitchFamily="34" charset="0"/>
                 <a:ea typeface="Calibri" pitchFamily="34" charset="-122"/>
@@ -5144,7 +5144,7 @@
             <a:r>
               <a:rPr lang="en-US" sz="800" i="1" dirty="0">
                 <a:solidFill>
-                  <a:srgbClr val="C4B5A5"/>
+                  <a:srgbClr val="8E5B3F"/>
                 </a:solidFill>
                 <a:latin typeface="Garamond" pitchFamily="34" charset="0"/>
                 <a:ea typeface="Garamond" pitchFamily="34" charset="-122"/>
@@ -5183,7 +5183,7 @@
             <a:r>
               <a:rPr lang="en-US" sz="1150" i="1" dirty="0">
                 <a:solidFill>
-                  <a:srgbClr val="C4B5A5"/>
+                  <a:srgbClr val="8E5B3F"/>
                 </a:solidFill>
                 <a:latin typeface="Calibri" pitchFamily="34" charset="0"/>
                 <a:ea typeface="Calibri" pitchFamily="34" charset="-122"/>
@@ -5293,7 +5293,7 @@
             <a:r>
               <a:rPr lang="en-US" sz="1000" i="1" dirty="0">
                 <a:solidFill>
-                  <a:srgbClr val="C4B5A5"/>
+                  <a:srgbClr val="8E5B3F"/>
                 </a:solidFill>
                 <a:latin typeface="Calibri" pitchFamily="34" charset="0"/>
                 <a:ea typeface="Calibri" pitchFamily="34" charset="-122"/>
@@ -5371,7 +5371,7 @@
             <a:r>
               <a:rPr lang="en-US" sz="1000" i="1" dirty="0">
                 <a:solidFill>
-                  <a:srgbClr val="C4B5A5"/>
+                  <a:srgbClr val="8E5B3F"/>
                 </a:solidFill>
                 <a:latin typeface="Calibri" pitchFamily="34" charset="0"/>
                 <a:ea typeface="Calibri" pitchFamily="34" charset="-122"/>
@@ -5442,7 +5442,7 @@
             <a:r>
               <a:rPr lang="en-US" sz="800" i="1" dirty="0">
                 <a:solidFill>
-                  <a:srgbClr val="C4B5A5"/>
+                  <a:srgbClr val="8E5B3F"/>
                 </a:solidFill>
                 <a:latin typeface="Garamond" pitchFamily="34" charset="0"/>
                 <a:ea typeface="Garamond" pitchFamily="34" charset="-122"/>
@@ -5481,7 +5481,7 @@
             <a:r>
               <a:rPr lang="en-US" sz="1150" i="1" dirty="0">
                 <a:solidFill>
-                  <a:srgbClr val="C4B5A5"/>
+                  <a:srgbClr val="8E5B3F"/>
                 </a:solidFill>
                 <a:latin typeface="Calibri" pitchFamily="34" charset="0"/>
                 <a:ea typeface="Calibri" pitchFamily="34" charset="-122"/>
@@ -5591,7 +5591,7 @@
             <a:r>
               <a:rPr lang="en-US" sz="1000" i="1" dirty="0">
                 <a:solidFill>
-                  <a:srgbClr val="C4B5A5"/>
+                  <a:srgbClr val="8E5B3F"/>
                 </a:solidFill>
                 <a:latin typeface="Calibri" pitchFamily="34" charset="0"/>
                 <a:ea typeface="Calibri" pitchFamily="34" charset="-122"/>
@@ -5669,7 +5669,7 @@
             <a:r>
               <a:rPr lang="en-US" sz="1000" i="1" dirty="0">
                 <a:solidFill>
-                  <a:srgbClr val="C4B5A5"/>
+                  <a:srgbClr val="8E5B3F"/>
                 </a:solidFill>
                 <a:latin typeface="Calibri" pitchFamily="34" charset="0"/>
                 <a:ea typeface="Calibri" pitchFamily="34" charset="-122"/>
@@ -5705,6 +5705,17 @@
             <a:pPr marL="0" indent="0">
               <a:buNone/>
             </a:pPr>
+            <a:r>
+              <a:rPr lang="en-US" sz="750" i="1" dirty="0">
+                <a:solidFill>
+                  <a:srgbClr val="A09080"/>
+                </a:solidFill>
+                <a:latin typeface="Calibri" pitchFamily="34" charset="0"/>
+                <a:ea typeface="Calibri" pitchFamily="34" charset="-122"/>
+                <a:cs typeface="Calibri" pitchFamily="34" charset="-120"/>
+              </a:rPr>
+              <a:t>Adapter le nombre de colonnes au nombre de projets — supprimer les colonnes non utilisées</a:t>
+            </a:r>
             <a:endParaRPr lang="en-US" sz="750" dirty="0"/>
           </a:p>
         </p:txBody>
@@ -6149,7 +6160,7 @@
             <a:r>
               <a:rPr lang="en-US" sz="1100" i="1" dirty="0">
                 <a:solidFill>
-                  <a:srgbClr val="C4B5A5"/>
+                  <a:srgbClr val="8E5B3F"/>
                 </a:solidFill>
                 <a:latin typeface="Calibri" pitchFamily="34" charset="0"/>
                 <a:ea typeface="Calibri" pitchFamily="34" charset="-122"/>
@@ -6504,7 +6515,7 @@
             <a:r>
               <a:rPr lang="en-US" sz="900" dirty="0">
                 <a:solidFill>
-                  <a:srgbClr val="C4B5A5"/>
+                  <a:srgbClr val="8E5B3F"/>
                 </a:solidFill>
                 <a:latin typeface="Calibri" pitchFamily="34" charset="0"/>
                 <a:ea typeface="Calibri" pitchFamily="34" charset="-122"/>
@@ -6575,7 +6586,7 @@
             <a:r>
               <a:rPr lang="en-US" sz="900" dirty="0">
                 <a:solidFill>
-                  <a:srgbClr val="C4B5A5"/>
+                  <a:srgbClr val="8E5B3F"/>
                 </a:solidFill>
                 <a:latin typeface="Calibri" pitchFamily="34" charset="0"/>
                 <a:ea typeface="Calibri" pitchFamily="34" charset="-122"/>
@@ -6646,7 +6657,7 @@
             <a:r>
               <a:rPr lang="en-US" sz="900" dirty="0">
                 <a:solidFill>
-                  <a:srgbClr val="C4B5A5"/>
+                  <a:srgbClr val="8E5B3F"/>
                 </a:solidFill>
                 <a:latin typeface="Calibri" pitchFamily="34" charset="0"/>
                 <a:ea typeface="Calibri" pitchFamily="34" charset="-122"/>
@@ -6717,7 +6728,7 @@
             <a:r>
               <a:rPr lang="en-US" sz="900" dirty="0">
                 <a:solidFill>
-                  <a:srgbClr val="C4B5A5"/>
+                  <a:srgbClr val="8E5B3F"/>
                 </a:solidFill>
                 <a:latin typeface="Calibri" pitchFamily="34" charset="0"/>
                 <a:ea typeface="Calibri" pitchFamily="34" charset="-122"/>
@@ -6788,7 +6799,7 @@
             <a:r>
               <a:rPr lang="en-US" sz="900" dirty="0">
                 <a:solidFill>
-                  <a:srgbClr val="C4B5A5"/>
+                  <a:srgbClr val="8E5B3F"/>
                 </a:solidFill>
                 <a:latin typeface="Calibri" pitchFamily="34" charset="0"/>
                 <a:ea typeface="Calibri" pitchFamily="34" charset="-122"/>
@@ -6859,7 +6870,7 @@
             <a:r>
               <a:rPr lang="en-US" sz="900" dirty="0">
                 <a:solidFill>
-                  <a:srgbClr val="C4B5A5"/>
+                  <a:srgbClr val="8E5B3F"/>
                 </a:solidFill>
                 <a:latin typeface="Calibri" pitchFamily="34" charset="0"/>
                 <a:ea typeface="Calibri" pitchFamily="34" charset="-122"/>
@@ -6930,7 +6941,7 @@
             <a:r>
               <a:rPr lang="en-US" sz="900" dirty="0">
                 <a:solidFill>
-                  <a:srgbClr val="C4B5A5"/>
+                  <a:srgbClr val="8E5B3F"/>
                 </a:solidFill>
                 <a:latin typeface="Calibri" pitchFamily="34" charset="0"/>
                 <a:ea typeface="Calibri" pitchFamily="34" charset="-122"/>
@@ -7001,7 +7012,7 @@
             <a:r>
               <a:rPr lang="en-US" sz="900" dirty="0">
                 <a:solidFill>
-                  <a:srgbClr val="C4B5A5"/>
+                  <a:srgbClr val="8E5B3F"/>
                 </a:solidFill>
                 <a:latin typeface="Calibri" pitchFamily="34" charset="0"/>
                 <a:ea typeface="Calibri" pitchFamily="34" charset="-122"/>
@@ -7072,7 +7083,7 @@
             <a:r>
               <a:rPr lang="en-US" sz="900" dirty="0">
                 <a:solidFill>
-                  <a:srgbClr val="C4B5A5"/>
+                  <a:srgbClr val="8E5B3F"/>
                 </a:solidFill>
                 <a:latin typeface="Calibri" pitchFamily="34" charset="0"/>
                 <a:ea typeface="Calibri" pitchFamily="34" charset="-122"/>
@@ -7143,7 +7154,7 @@
             <a:r>
               <a:rPr lang="en-US" sz="900" dirty="0">
                 <a:solidFill>
-                  <a:srgbClr val="C4B5A5"/>
+                  <a:srgbClr val="8E5B3F"/>
                 </a:solidFill>
                 <a:latin typeface="Calibri" pitchFamily="34" charset="0"/>
                 <a:ea typeface="Calibri" pitchFamily="34" charset="-122"/>
@@ -7214,7 +7225,7 @@
             <a:r>
               <a:rPr lang="en-US" sz="900" dirty="0">
                 <a:solidFill>
-                  <a:srgbClr val="C4B5A5"/>
+                  <a:srgbClr val="8E5B3F"/>
                 </a:solidFill>
                 <a:latin typeface="Calibri" pitchFamily="34" charset="0"/>
                 <a:ea typeface="Calibri" pitchFamily="34" charset="-122"/>
@@ -7285,7 +7296,7 @@
             <a:r>
               <a:rPr lang="en-US" sz="900" dirty="0">
                 <a:solidFill>
-                  <a:srgbClr val="C4B5A5"/>
+                  <a:srgbClr val="8E5B3F"/>
                 </a:solidFill>
                 <a:latin typeface="Calibri" pitchFamily="34" charset="0"/>
                 <a:ea typeface="Calibri" pitchFamily="34" charset="-122"/>
@@ -7356,7 +7367,7 @@
             <a:r>
               <a:rPr lang="en-US" sz="900" dirty="0">
                 <a:solidFill>
-                  <a:srgbClr val="C4B5A5"/>
+                  <a:srgbClr val="8E5B3F"/>
                 </a:solidFill>
                 <a:latin typeface="Calibri" pitchFamily="34" charset="0"/>
                 <a:ea typeface="Calibri" pitchFamily="34" charset="-122"/>
@@ -7427,7 +7438,7 @@
             <a:r>
               <a:rPr lang="en-US" sz="900" dirty="0">
                 <a:solidFill>
-                  <a:srgbClr val="C4B5A5"/>
+                  <a:srgbClr val="8E5B3F"/>
                 </a:solidFill>
                 <a:latin typeface="Calibri" pitchFamily="34" charset="0"/>
                 <a:ea typeface="Calibri" pitchFamily="34" charset="-122"/>
@@ -7498,7 +7509,7 @@
             <a:r>
               <a:rPr lang="en-US" sz="900" dirty="0">
                 <a:solidFill>
-                  <a:srgbClr val="C4B5A5"/>
+                  <a:srgbClr val="8E5B3F"/>
                 </a:solidFill>
                 <a:latin typeface="Calibri" pitchFamily="34" charset="0"/>
                 <a:ea typeface="Calibri" pitchFamily="34" charset="-122"/>
@@ -7569,7 +7580,7 @@
             <a:r>
               <a:rPr lang="en-US" sz="900" dirty="0">
                 <a:solidFill>
-                  <a:srgbClr val="C4B5A5"/>
+                  <a:srgbClr val="8E5B3F"/>
                 </a:solidFill>
                 <a:latin typeface="Calibri" pitchFamily="34" charset="0"/>
                 <a:ea typeface="Calibri" pitchFamily="34" charset="-122"/>
@@ -7640,7 +7651,7 @@
             <a:r>
               <a:rPr lang="en-US" sz="900" dirty="0">
                 <a:solidFill>
-                  <a:srgbClr val="C4B5A5"/>
+                  <a:srgbClr val="8E5B3F"/>
                 </a:solidFill>
                 <a:latin typeface="Calibri" pitchFamily="34" charset="0"/>
                 <a:ea typeface="Calibri" pitchFamily="34" charset="-122"/>
@@ -7711,7 +7722,7 @@
             <a:r>
               <a:rPr lang="en-US" sz="900" dirty="0">
                 <a:solidFill>
-                  <a:srgbClr val="C4B5A5"/>
+                  <a:srgbClr val="8E5B3F"/>
                 </a:solidFill>
                 <a:latin typeface="Calibri" pitchFamily="34" charset="0"/>
                 <a:ea typeface="Calibri" pitchFamily="34" charset="-122"/>
@@ -7782,7 +7793,7 @@
             <a:r>
               <a:rPr lang="en-US" sz="900" dirty="0">
                 <a:solidFill>
-                  <a:srgbClr val="C4B5A5"/>
+                  <a:srgbClr val="8E5B3F"/>
                 </a:solidFill>
                 <a:latin typeface="Calibri" pitchFamily="34" charset="0"/>
                 <a:ea typeface="Calibri" pitchFamily="34" charset="-122"/>
@@ -7853,7 +7864,7 @@
             <a:r>
               <a:rPr lang="en-US" sz="900" dirty="0">
                 <a:solidFill>
-                  <a:srgbClr val="C4B5A5"/>
+                  <a:srgbClr val="8E5B3F"/>
                 </a:solidFill>
                 <a:latin typeface="Calibri" pitchFamily="34" charset="0"/>
                 <a:ea typeface="Calibri" pitchFamily="34" charset="-122"/>
@@ -7963,7 +7974,7 @@
             <a:r>
               <a:rPr lang="en-US" sz="850" i="1" dirty="0">
                 <a:solidFill>
-                  <a:srgbClr val="C4B5A5"/>
+                  <a:srgbClr val="8E5B3F"/>
                 </a:solidFill>
                 <a:latin typeface="Calibri" pitchFamily="34" charset="0"/>
                 <a:ea typeface="Calibri" pitchFamily="34" charset="-122"/>
@@ -8034,7 +8045,7 @@
             <a:r>
               <a:rPr lang="en-US" sz="1000" i="1" dirty="0">
                 <a:solidFill>
-                  <a:srgbClr val="C4B5A5"/>
+                  <a:srgbClr val="8E5B3F"/>
                 </a:solidFill>
                 <a:latin typeface="Calibri" pitchFamily="34" charset="0"/>
                 <a:ea typeface="Calibri" pitchFamily="34" charset="-122"/>
@@ -8486,7 +8497,7 @@
             <a:r>
               <a:rPr lang="en-US" sz="1100" i="1" dirty="0">
                 <a:solidFill>
-                  <a:srgbClr val="C4B5A5"/>
+                  <a:srgbClr val="8E5B3F"/>
                 </a:solidFill>
                 <a:latin typeface="Calibri" pitchFamily="34" charset="0"/>
                 <a:ea typeface="Calibri" pitchFamily="34" charset="-122"/>
@@ -8596,7 +8607,7 @@
             <a:r>
               <a:rPr lang="en-US" sz="3400" i="1" dirty="0">
                 <a:solidFill>
-                  <a:srgbClr val="C4B5A5"/>
+                  <a:srgbClr val="8E5B3F"/>
                 </a:solidFill>
                 <a:latin typeface="Garamond" pitchFamily="34" charset="0"/>
                 <a:ea typeface="Garamond" pitchFamily="34" charset="-122"/>
@@ -8635,7 +8646,7 @@
             <a:r>
               <a:rPr lang="en-US" sz="900" i="1" dirty="0">
                 <a:solidFill>
-                  <a:srgbClr val="C4B5A5"/>
+                  <a:srgbClr val="8E5B3F"/>
                 </a:solidFill>
                 <a:latin typeface="Calibri" pitchFamily="34" charset="0"/>
                 <a:ea typeface="Calibri" pitchFamily="34" charset="-122"/>
@@ -8745,7 +8756,7 @@
             <a:r>
               <a:rPr lang="en-US" sz="3400" i="1" dirty="0">
                 <a:solidFill>
-                  <a:srgbClr val="C4B5A5"/>
+                  <a:srgbClr val="8E5B3F"/>
                 </a:solidFill>
                 <a:latin typeface="Garamond" pitchFamily="34" charset="0"/>
                 <a:ea typeface="Garamond" pitchFamily="34" charset="-122"/>
@@ -8784,7 +8795,7 @@
             <a:r>
               <a:rPr lang="en-US" sz="900" i="1" dirty="0">
                 <a:solidFill>
-                  <a:srgbClr val="C4B5A5"/>
+                  <a:srgbClr val="8E5B3F"/>
                 </a:solidFill>
                 <a:latin typeface="Calibri" pitchFamily="34" charset="0"/>
                 <a:ea typeface="Calibri" pitchFamily="34" charset="-122"/>
@@ -8894,7 +8905,7 @@
             <a:r>
               <a:rPr lang="en-US" sz="3400" i="1" dirty="0">
                 <a:solidFill>
-                  <a:srgbClr val="C4B5A5"/>
+                  <a:srgbClr val="8E5B3F"/>
                 </a:solidFill>
                 <a:latin typeface="Garamond" pitchFamily="34" charset="0"/>
                 <a:ea typeface="Garamond" pitchFamily="34" charset="-122"/>
@@ -8933,7 +8944,7 @@
             <a:r>
               <a:rPr lang="en-US" sz="900" i="1" dirty="0">
                 <a:solidFill>
-                  <a:srgbClr val="C4B5A5"/>
+                  <a:srgbClr val="8E5B3F"/>
                 </a:solidFill>
                 <a:latin typeface="Calibri" pitchFamily="34" charset="0"/>
                 <a:ea typeface="Calibri" pitchFamily="34" charset="-122"/>
@@ -9146,7 +9157,7 @@
             <a:r>
               <a:rPr lang="en-US" sz="1050" i="1" dirty="0">
                 <a:solidFill>
-                  <a:srgbClr val="C4B5A5"/>
+                  <a:srgbClr val="8E5B3F"/>
                 </a:solidFill>
                 <a:latin typeface="Calibri" pitchFamily="34" charset="0"/>
                 <a:ea typeface="Calibri" pitchFamily="34" charset="-122"/>
@@ -9217,7 +9228,7 @@
             <a:r>
               <a:rPr lang="en-US" sz="1050" i="1" dirty="0">
                 <a:solidFill>
-                  <a:srgbClr val="C4B5A5"/>
+                  <a:srgbClr val="8E5B3F"/>
                 </a:solidFill>
                 <a:latin typeface="Calibri" pitchFamily="34" charset="0"/>
                 <a:ea typeface="Calibri" pitchFamily="34" charset="-122"/>
@@ -9288,7 +9299,7 @@
             <a:r>
               <a:rPr lang="en-US" sz="1050" i="1" dirty="0">
                 <a:solidFill>
-                  <a:srgbClr val="C4B5A5"/>
+                  <a:srgbClr val="8E5B3F"/>
                 </a:solidFill>
                 <a:latin typeface="Calibri" pitchFamily="34" charset="0"/>
                 <a:ea typeface="Calibri" pitchFamily="34" charset="-122"/>
@@ -9359,7 +9370,7 @@
             <a:r>
               <a:rPr lang="en-US" sz="1050" i="1" dirty="0">
                 <a:solidFill>
-                  <a:srgbClr val="C4B5A5"/>
+                  <a:srgbClr val="8E5B3F"/>
                 </a:solidFill>
                 <a:latin typeface="Calibri" pitchFamily="34" charset="0"/>
                 <a:ea typeface="Calibri" pitchFamily="34" charset="-122"/>
@@ -9430,7 +9441,7 @@
             <a:r>
               <a:rPr lang="en-US" sz="1050" i="1" dirty="0">
                 <a:solidFill>
-                  <a:srgbClr val="C4B5A5"/>
+                  <a:srgbClr val="8E5B3F"/>
                 </a:solidFill>
                 <a:latin typeface="Calibri" pitchFamily="34" charset="0"/>
                 <a:ea typeface="Calibri" pitchFamily="34" charset="-122"/>
@@ -9501,7 +9512,7 @@
             <a:r>
               <a:rPr lang="en-US" sz="1050" i="1" dirty="0">
                 <a:solidFill>
-                  <a:srgbClr val="C4B5A5"/>
+                  <a:srgbClr val="8E5B3F"/>
                 </a:solidFill>
                 <a:latin typeface="Calibri" pitchFamily="34" charset="0"/>
                 <a:ea typeface="Calibri" pitchFamily="34" charset="-122"/>
@@ -9967,32 +9978,96 @@
       </p:sp>
       <p:sp>
         <p:nvSpPr>
-          <p:cNvPr id="111" name="Text Objectif 111"/>
-          <p:cNvSpPr/>
-          <p:nvPr/>
-        </p:nvSpPr>
-        <p:spPr>
-          <a:xfrm>
-            <a:off x="502920" y="1737360"/>
-            <a:ext cx="2560320" cy="460000"/>
-          </a:xfrm>
-          <a:prstGeom prst="rect">
-            <a:avLst/>
-          </a:prstGeom>
-          <a:noFill/>
-          <a:ln/>
-        </p:spPr>
-        <p:txBody>
-          <a:bodyPr wrap="square" lIns="0" tIns="0" rIns="0" bIns="0" rtlCol="0" anchor="ctr"/>
+          <p:cNvPr id="400" name="Card"/>
+          <p:cNvSpPr/>
+          <p:nvPr/>
+        </p:nvSpPr>
+        <p:spPr>
+          <a:xfrm>
+            <a:off x="484632" y="1654961"/>
+            <a:ext cx="2560320" cy="2873045"/>
+          </a:xfrm>
+          <a:prstGeom prst="rect">
+            <a:avLst/>
+          </a:prstGeom>
+          <a:solidFill>
+            <a:srgbClr val="1C2B3A"/>
+          </a:solidFill>
+          <a:ln>
+            <a:noFill/>
+          </a:ln>
+        </p:spPr>
+        <p:txBody>
+          <a:bodyPr/>
+          <a:lstStyle/>
+          <a:p>
+            <a:endParaRPr/>
+          </a:p>
+        </p:txBody>
+      </p:sp>
+      <p:sp>
+        <p:nvSpPr>
+          <p:cNvPr id="401" name="Eyebrow"/>
+          <p:cNvSpPr/>
+          <p:nvPr/>
+        </p:nvSpPr>
+        <p:spPr>
+          <a:xfrm>
+            <a:off x="484632" y="1756207"/>
+            <a:ext cx="2560320" cy="182880"/>
+          </a:xfrm>
+          <a:prstGeom prst="rect">
+            <a:avLst/>
+          </a:prstGeom>
+          <a:noFill/>
+          <a:ln/>
+        </p:spPr>
+        <p:txBody>
+          <a:bodyPr wrap="square" lIns="146304" tIns="0" rIns="146304" bIns="0" rtlCol="0" anchor="t"/>
           <a:lstStyle/>
           <a:p>
             <a:pPr marL="0" indent="0">
               <a:buNone/>
             </a:pPr>
-            <a:r>
-              <a:rPr lang="en-US" sz="1300" b="1" dirty="0">
-                <a:solidFill>
-                  <a:srgbClr val="8B1A1A"/>
+            <a:endParaRPr lang="en-US" sz="700" spc="250" dirty="0">
+              <a:solidFill>
+                <a:srgbClr val="A09080"/>
+              </a:solidFill>
+              <a:latin typeface="Garamond" pitchFamily="34" charset="0"/>
+              <a:ea typeface="Garamond" pitchFamily="34" charset="-122"/>
+              <a:cs typeface="Garamond" pitchFamily="34" charset="-120"/>
+            </a:endParaRPr>
+          </a:p>
+        </p:txBody>
+      </p:sp>
+      <p:sp>
+        <p:nvSpPr>
+          <p:cNvPr id="402" name="Objectif"/>
+          <p:cNvSpPr/>
+          <p:nvPr/>
+        </p:nvSpPr>
+        <p:spPr>
+          <a:xfrm>
+            <a:off x="484632" y="1986207"/>
+            <a:ext cx="2560320" cy="700000"/>
+          </a:xfrm>
+          <a:prstGeom prst="rect">
+            <a:avLst/>
+          </a:prstGeom>
+          <a:noFill/>
+          <a:ln/>
+        </p:spPr>
+        <p:txBody>
+          <a:bodyPr wrap="square" lIns="146304" tIns="0" rIns="146304" bIns="0" rtlCol="0" anchor="t"/>
+          <a:lstStyle/>
+          <a:p>
+            <a:pPr marL="0" indent="0">
+              <a:buNone/>
+            </a:pPr>
+            <a:r>
+              <a:rPr lang="en-US" sz="1350" dirty="0">
+                <a:solidFill>
+                  <a:srgbClr val="F3F0EB"/>
                 </a:solidFill>
                 <a:latin typeface="Garamond" pitchFamily="34" charset="0"/>
                 <a:ea typeface="Garamond" pitchFamily="34" charset="-122"/>
@@ -10000,69 +10075,68 @@
               </a:rPr>
               <a:t>[Objectif de l’axe — formulation client]</a:t>
             </a:r>
-            <a:endParaRPr lang="en-US" sz="1300" dirty="0"/>
-          </a:p>
-        </p:txBody>
-      </p:sp>
-      <p:sp>
-        <p:nvSpPr>
-          <p:cNvPr id="14" name="Shape 11"/>
-          <p:cNvSpPr/>
-          <p:nvPr/>
-        </p:nvSpPr>
-        <p:spPr>
-          <a:xfrm>
-            <a:off x="502920" y="2286000"/>
-            <a:ext cx="2560320" cy="10973"/>
-          </a:xfrm>
-          <a:prstGeom prst="rect">
-            <a:avLst/>
-          </a:prstGeom>
-          <a:solidFill>
-            <a:srgbClr val="CFC8BD"/>
-          </a:solidFill>
-          <a:ln w="12700">
-            <a:solidFill>
-              <a:srgbClr val="CFC8BD"/>
-            </a:solidFill>
-            <a:prstDash val="solid"/>
+          </a:p>
+        </p:txBody>
+      </p:sp>
+      <p:sp>
+        <p:nvSpPr>
+          <p:cNvPr id="403" name="AccentRule"/>
+          <p:cNvSpPr/>
+          <p:nvPr/>
+        </p:nvSpPr>
+        <p:spPr>
+          <a:xfrm>
+            <a:off x="484632" y="2756207"/>
+            <a:ext cx="640080" cy="20117"/>
+          </a:xfrm>
+          <a:prstGeom prst="rect">
+            <a:avLst/>
+          </a:prstGeom>
+          <a:solidFill>
+            <a:srgbClr val="8B1A1A"/>
+          </a:solidFill>
+          <a:ln>
+            <a:noFill/>
           </a:ln>
         </p:spPr>
         <p:txBody>
           <a:bodyPr/>
           <a:lstStyle/>
           <a:p>
-            <a:endParaRPr lang="fr-FR"/>
-          </a:p>
-        </p:txBody>
-      </p:sp>
-      <p:sp>
-        <p:nvSpPr>
-          <p:cNvPr id="16" name="Text 13"/>
-          <p:cNvSpPr/>
-          <p:nvPr/>
-        </p:nvSpPr>
-        <p:spPr>
-          <a:xfrm>
-            <a:off x="502920" y="2697480"/>
-            <a:ext cx="2560320" cy="1143000"/>
-          </a:xfrm>
-          <a:prstGeom prst="rect">
-            <a:avLst/>
-          </a:prstGeom>
-          <a:noFill/>
-          <a:ln/>
-        </p:spPr>
-        <p:txBody>
-          <a:bodyPr wrap="square" lIns="0" tIns="0" rIns="0" bIns="0" rtlCol="0" anchor="t"/>
-          <a:lstStyle/>
-          <a:p>
-            <a:pPr marL="182880" indent="-182880">
+            <a:endParaRPr/>
+          </a:p>
+        </p:txBody>
+      </p:sp>
+      <p:sp>
+        <p:nvSpPr>
+          <p:cNvPr id="406" name="Benefices"/>
+          <p:cNvSpPr/>
+          <p:nvPr/>
+        </p:nvSpPr>
+        <p:spPr>
+          <a:xfrm>
+            <a:off x="484632" y="2886207"/>
+            <a:ext cx="2560320" cy="800000"/>
+          </a:xfrm>
+          <a:prstGeom prst="rect">
+            <a:avLst/>
+          </a:prstGeom>
+          <a:noFill/>
+          <a:ln/>
+        </p:spPr>
+        <p:txBody>
+          <a:bodyPr wrap="square" lIns="146304" tIns="0" rIns="146304" bIns="0" rtlCol="0" anchor="t"/>
+          <a:lstStyle/>
+          <a:p>
+            <a:pPr marL="146304" indent="-146304">
+              <a:buClr>
+                <a:srgbClr val="8B1A1A"/>
+              </a:buClr>
               <a:buFont typeface="Arial"/>
               <a:buChar char="•"/>
             </a:pPr>
             <a:r>
-              <a:rPr lang="en-US" sz="1000" i="1" dirty="0">
+              <a:rPr lang="en-US" sz="1000" dirty="0">
                 <a:solidFill>
                   <a:srgbClr val="C4B5A5"/>
                 </a:solidFill>
@@ -10070,16 +10144,19 @@
                 <a:ea typeface="Calibri" pitchFamily="34" charset="-122"/>
                 <a:cs typeface="Calibri" pitchFamily="34" charset="-120"/>
               </a:rPr>
-              <a:t>[Bénéfice 1 — répond à l'objectif exprimé]</a:t>
-            </a:r>
-          </a:p>
-          <a:p>
-            <a:pPr marL="182880" indent="-182880">
+              <a:t>[Bénéfice 1]</a:t>
+            </a:r>
+          </a:p>
+          <a:p>
+            <a:pPr marL="146304" indent="-146304">
+              <a:buClr>
+                <a:srgbClr val="8B1A1A"/>
+              </a:buClr>
               <a:buFont typeface="Arial"/>
               <a:buChar char="•"/>
             </a:pPr>
             <a:r>
-              <a:rPr lang="en-US" sz="1000" i="1" dirty="0">
+              <a:rPr lang="en-US" sz="1000" dirty="0">
                 <a:solidFill>
                   <a:srgbClr val="C4B5A5"/>
                 </a:solidFill>
@@ -10087,258 +10164,402 @@
                 <a:ea typeface="Calibri" pitchFamily="34" charset="-122"/>
                 <a:cs typeface="Calibri" pitchFamily="34" charset="-120"/>
               </a:rPr>
-              <a:t>[Bénéfice 2 — répond à l'objectif exprimé]</a:t>
-            </a:r>
-          </a:p>
-        </p:txBody>
-      </p:sp>
-      <p:sp>
-        <p:nvSpPr>
-          <p:cNvPr id="17" name="Shape 14"/>
-          <p:cNvSpPr/>
-          <p:nvPr/>
-        </p:nvSpPr>
-        <p:spPr>
-          <a:xfrm>
-            <a:off x="502920" y="3931920"/>
+              <a:t>[Bénéfice 2]</a:t>
+            </a:r>
+          </a:p>
+        </p:txBody>
+      </p:sp>
+      <p:sp>
+        <p:nvSpPr>
+          <p:cNvPr id="407" name="MetaRule"/>
+          <p:cNvSpPr/>
+          <p:nvPr/>
+        </p:nvSpPr>
+        <p:spPr>
+          <a:xfrm>
+            <a:off x="484632" y="3846207"/>
             <a:ext cx="2560320" cy="10973"/>
           </a:xfrm>
           <a:prstGeom prst="rect">
             <a:avLst/>
           </a:prstGeom>
           <a:solidFill>
-            <a:srgbClr val="E5E0D8"/>
-          </a:solidFill>
-          <a:ln w="12700">
-            <a:solidFill>
-              <a:srgbClr val="E5E0D8"/>
-            </a:solidFill>
-            <a:prstDash val="solid"/>
+            <a:srgbClr val="A09080"/>
+          </a:solidFill>
+          <a:ln>
+            <a:noFill/>
           </a:ln>
         </p:spPr>
         <p:txBody>
           <a:bodyPr/>
           <a:lstStyle/>
           <a:p>
-            <a:endParaRPr lang="fr-FR"/>
-          </a:p>
-        </p:txBody>
-      </p:sp>
-      <p:sp>
-        <p:nvSpPr>
-          <p:cNvPr id="18" name="Text 15"/>
-          <p:cNvSpPr/>
-          <p:nvPr/>
-        </p:nvSpPr>
-        <p:spPr>
-          <a:xfrm>
-            <a:off x="502920" y="4005072"/>
-            <a:ext cx="2560320" cy="201168"/>
-          </a:xfrm>
-          <a:prstGeom prst="rect">
-            <a:avLst/>
-          </a:prstGeom>
-          <a:noFill/>
-          <a:ln/>
-        </p:spPr>
-        <p:txBody>
-          <a:bodyPr wrap="square" lIns="0" tIns="0" rIns="0" bIns="0" rtlCol="0" anchor="ctr"/>
+            <a:endParaRPr/>
+          </a:p>
+        </p:txBody>
+      </p:sp>
+      <p:sp>
+        <p:nvSpPr>
+          <p:cNvPr id="408" name="Solution"/>
+          <p:cNvSpPr/>
+          <p:nvPr/>
+        </p:nvSpPr>
+        <p:spPr>
+          <a:xfrm>
+            <a:off x="484632" y="3956207"/>
+            <a:ext cx="2560320" cy="420000"/>
+          </a:xfrm>
+          <a:prstGeom prst="rect">
+            <a:avLst/>
+          </a:prstGeom>
+          <a:noFill/>
+          <a:ln/>
+        </p:spPr>
+        <p:txBody>
+          <a:bodyPr wrap="square" lIns="146304" tIns="0" rIns="146304" bIns="0" rtlCol="0" anchor="t"/>
           <a:lstStyle/>
           <a:p>
             <a:pPr marL="0" indent="0">
               <a:buNone/>
             </a:pPr>
             <a:r>
-              <a:rPr lang="en-US" sz="1050" b="1" dirty="0">
-                <a:solidFill>
-                  <a:srgbClr val="8B1A1A"/>
+              <a:rPr lang="en-US" sz="850" spc="150" dirty="0">
+                <a:solidFill>
+                  <a:srgbClr val="F3F0EB"/>
                 </a:solidFill>
                 <a:latin typeface="Garamond" pitchFamily="34" charset="0"/>
                 <a:ea typeface="Garamond" pitchFamily="34" charset="-122"/>
                 <a:cs typeface="Garamond" pitchFamily="34" charset="-120"/>
               </a:rPr>
-              <a:t>[Nom de la solution]</a:t>
-            </a:r>
-            <a:endParaRPr lang="en-US" sz="750" dirty="0"/>
-          </a:p>
-        </p:txBody>
-      </p:sp>
-      <p:sp>
-        <p:nvSpPr>
-          <p:cNvPr id="19" name="Text 16"/>
-          <p:cNvSpPr/>
-          <p:nvPr/>
-        </p:nvSpPr>
-        <p:spPr>
-          <a:xfrm>
-            <a:off x="502920" y="4224528"/>
-            <a:ext cx="2560320" cy="256032"/>
-          </a:xfrm>
-          <a:prstGeom prst="rect">
-            <a:avLst/>
-          </a:prstGeom>
-          <a:noFill/>
-          <a:ln/>
-        </p:spPr>
-        <p:txBody>
-          <a:bodyPr wrap="square" lIns="0" tIns="0" rIns="0" bIns="0" rtlCol="0" anchor="t"/>
+              <a:t>[Solution]</a:t>
+            </a:r>
+          </a:p>
+        </p:txBody>
+      </p:sp>
+      <p:sp>
+        <p:nvSpPr>
+          <p:cNvPr id="409" name="Risque"/>
+          <p:cNvSpPr/>
+          <p:nvPr/>
+        </p:nvSpPr>
+        <p:spPr>
+          <a:xfrm>
+            <a:off x="484632" y="4316207"/>
+            <a:ext cx="2560320" cy="220000"/>
+          </a:xfrm>
+          <a:prstGeom prst="rect">
+            <a:avLst/>
+          </a:prstGeom>
+          <a:noFill/>
+          <a:ln/>
+        </p:spPr>
+        <p:txBody>
+          <a:bodyPr wrap="square" lIns="146304" tIns="0" rIns="146304" bIns="0" rtlCol="0" anchor="t"/>
           <a:lstStyle/>
           <a:p>
             <a:pPr marL="0" indent="0">
               <a:buNone/>
             </a:pPr>
             <a:r>
-              <a:rPr lang="en-US" sz="1100" b="1" dirty="0">
-                <a:solidFill>
-                  <a:srgbClr val="C4B5A5"/>
+              <a:rPr lang="en-US" sz="750" b="1" dirty="0">
+                <a:solidFill>
+                  <a:srgbClr val="A09080"/>
                 </a:solidFill>
                 <a:latin typeface="Calibri" pitchFamily="34" charset="0"/>
                 <a:ea typeface="Calibri" pitchFamily="34" charset="-122"/>
                 <a:cs typeface="Calibri" pitchFamily="34" charset="-120"/>
               </a:rPr>
-              <a:t>[Montant]</a:t>
-            </a:r>
-            <a:endParaRPr lang="en-US" sz="1000" dirty="0"/>
-          </a:p>
-        </p:txBody>
-      </p:sp>
-      <p:sp>
-        <p:nvSpPr>
-          <p:cNvPr id="101" name="Text Risque 1"/>
-          <p:cNvSpPr/>
-          <p:nvPr/>
-        </p:nvSpPr>
-        <p:spPr>
-          <a:xfrm>
-            <a:off x="502920" y="4515000"/>
-            <a:ext cx="2560320" cy="230000"/>
-          </a:xfrm>
-          <a:prstGeom prst="rect">
-            <a:avLst/>
-          </a:prstGeom>
-          <a:noFill/>
-          <a:ln/>
-        </p:spPr>
-        <p:txBody>
-          <a:bodyPr wrap="square" lIns="0" tIns="0" rIns="0" bIns="0" rtlCol="0" anchor="t"/>
+              <a:t>[Profil de risque · rendement cible]</a:t>
+            </a:r>
+          </a:p>
+        </p:txBody>
+      </p:sp>
+      <p:sp>
+        <p:nvSpPr>
+          <p:cNvPr id="420" name="Card"/>
+          <p:cNvSpPr/>
+          <p:nvPr/>
+        </p:nvSpPr>
+        <p:spPr>
+          <a:xfrm>
+            <a:off x="3182112" y="1654961"/>
+            <a:ext cx="2560320" cy="2873045"/>
+          </a:xfrm>
+          <a:prstGeom prst="rect">
+            <a:avLst/>
+          </a:prstGeom>
+          <a:solidFill>
+            <a:srgbClr val="8B1A1A"/>
+          </a:solidFill>
+          <a:ln>
+            <a:noFill/>
+          </a:ln>
+        </p:spPr>
+        <p:txBody>
+          <a:bodyPr/>
+          <a:lstStyle/>
+          <a:p>
+            <a:endParaRPr/>
+          </a:p>
+        </p:txBody>
+      </p:sp>
+      <p:sp>
+        <p:nvSpPr>
+          <p:cNvPr id="421" name="Eyebrow"/>
+          <p:cNvSpPr/>
+          <p:nvPr/>
+        </p:nvSpPr>
+        <p:spPr>
+          <a:xfrm>
+            <a:off x="3182112" y="1756207"/>
+            <a:ext cx="2560320" cy="182880"/>
+          </a:xfrm>
+          <a:prstGeom prst="rect">
+            <a:avLst/>
+          </a:prstGeom>
+          <a:noFill/>
+          <a:ln/>
+        </p:spPr>
+        <p:txBody>
+          <a:bodyPr wrap="square" lIns="146304" tIns="0" rIns="146304" bIns="0" rtlCol="0" anchor="t"/>
           <a:lstStyle/>
           <a:p>
             <a:pPr marL="0" indent="0">
               <a:buNone/>
             </a:pPr>
-            <a:r>
-              <a:rPr lang="en-US" sz="900" i="1" dirty="0">
-                <a:solidFill>
-                  <a:srgbClr val="4A5568"/>
+            <a:endParaRPr lang="en-US" sz="700" spc="250" dirty="0">
+              <a:solidFill>
+                <a:srgbClr val="C4B5A5"/>
+              </a:solidFill>
+              <a:latin typeface="Garamond" pitchFamily="34" charset="0"/>
+              <a:ea typeface="Garamond" pitchFamily="34" charset="-122"/>
+              <a:cs typeface="Garamond" pitchFamily="34" charset="-120"/>
+            </a:endParaRPr>
+          </a:p>
+        </p:txBody>
+      </p:sp>
+      <p:sp>
+        <p:nvSpPr>
+          <p:cNvPr id="422" name="Objectif"/>
+          <p:cNvSpPr/>
+          <p:nvPr/>
+        </p:nvSpPr>
+        <p:spPr>
+          <a:xfrm>
+            <a:off x="3182112" y="1986207"/>
+            <a:ext cx="2560320" cy="700000"/>
+          </a:xfrm>
+          <a:prstGeom prst="rect">
+            <a:avLst/>
+          </a:prstGeom>
+          <a:noFill/>
+          <a:ln/>
+        </p:spPr>
+        <p:txBody>
+          <a:bodyPr wrap="square" lIns="146304" tIns="0" rIns="146304" bIns="0" rtlCol="0" anchor="t"/>
+          <a:lstStyle/>
+          <a:p>
+            <a:pPr marL="0" indent="0">
+              <a:buNone/>
+            </a:pPr>
+            <a:r>
+              <a:rPr lang="en-US" sz="1350" dirty="0">
+                <a:solidFill>
+                  <a:srgbClr val="F3F0EB"/>
+                </a:solidFill>
+                <a:latin typeface="Garamond" pitchFamily="34" charset="0"/>
+                <a:ea typeface="Garamond" pitchFamily="34" charset="-122"/>
+                <a:cs typeface="Garamond" pitchFamily="34" charset="-120"/>
+              </a:rPr>
+              <a:t>[Objectif de l’axe — formulation client]</a:t>
+            </a:r>
+          </a:p>
+        </p:txBody>
+      </p:sp>
+      <p:sp>
+        <p:nvSpPr>
+          <p:cNvPr id="423" name="AccentRule"/>
+          <p:cNvSpPr/>
+          <p:nvPr/>
+        </p:nvSpPr>
+        <p:spPr>
+          <a:xfrm>
+            <a:off x="3182112" y="2756207"/>
+            <a:ext cx="640080" cy="20117"/>
+          </a:xfrm>
+          <a:prstGeom prst="rect">
+            <a:avLst/>
+          </a:prstGeom>
+          <a:solidFill>
+            <a:srgbClr val="E5E0D8"/>
+          </a:solidFill>
+          <a:ln>
+            <a:noFill/>
+          </a:ln>
+        </p:spPr>
+        <p:txBody>
+          <a:bodyPr/>
+          <a:lstStyle/>
+          <a:p>
+            <a:endParaRPr/>
+          </a:p>
+        </p:txBody>
+      </p:sp>
+      <p:sp>
+        <p:nvSpPr>
+          <p:cNvPr id="426" name="Benefices"/>
+          <p:cNvSpPr/>
+          <p:nvPr/>
+        </p:nvSpPr>
+        <p:spPr>
+          <a:xfrm>
+            <a:off x="3182112" y="2886207"/>
+            <a:ext cx="2560320" cy="800000"/>
+          </a:xfrm>
+          <a:prstGeom prst="rect">
+            <a:avLst/>
+          </a:prstGeom>
+          <a:noFill/>
+          <a:ln/>
+        </p:spPr>
+        <p:txBody>
+          <a:bodyPr wrap="square" lIns="146304" tIns="0" rIns="146304" bIns="0" rtlCol="0" anchor="t"/>
+          <a:lstStyle/>
+          <a:p>
+            <a:pPr marL="146304" indent="-146304">
+              <a:buClr>
+                <a:srgbClr val="E5E0D8"/>
+              </a:buClr>
+              <a:buFont typeface="Arial"/>
+              <a:buChar char="•"/>
+            </a:pPr>
+            <a:r>
+              <a:rPr lang="en-US" sz="1000" dirty="0">
+                <a:solidFill>
+                  <a:srgbClr val="E5E0D8"/>
                 </a:solidFill>
                 <a:latin typeface="Calibri" pitchFamily="34" charset="0"/>
                 <a:ea typeface="Calibri" pitchFamily="34" charset="-122"/>
                 <a:cs typeface="Calibri" pitchFamily="34" charset="-120"/>
               </a:rPr>
-              <a:t>[Profil de risque et rendement cible]</a:t>
-            </a:r>
-            <a:endParaRPr lang="en-US" sz="900" dirty="0"/>
-          </a:p>
-        </p:txBody>
-      </p:sp>
-      <p:sp>
-        <p:nvSpPr>
-          <p:cNvPr id="112" name="Text Objectif 112"/>
-          <p:cNvSpPr/>
-          <p:nvPr/>
-        </p:nvSpPr>
-        <p:spPr>
-          <a:xfrm>
-            <a:off x="3200400" y="1737360"/>
-            <a:ext cx="2560320" cy="460000"/>
-          </a:xfrm>
-          <a:prstGeom prst="rect">
-            <a:avLst/>
-          </a:prstGeom>
-          <a:noFill/>
-          <a:ln/>
-        </p:spPr>
-        <p:txBody>
-          <a:bodyPr wrap="square" lIns="0" tIns="0" rIns="0" bIns="0" rtlCol="0" anchor="ctr"/>
+              <a:t>[Bénéfice 1]</a:t>
+            </a:r>
+          </a:p>
+          <a:p>
+            <a:pPr marL="146304" indent="-146304">
+              <a:buClr>
+                <a:srgbClr val="E5E0D8"/>
+              </a:buClr>
+              <a:buFont typeface="Arial"/>
+              <a:buChar char="•"/>
+            </a:pPr>
+            <a:r>
+              <a:rPr lang="en-US" sz="1000" dirty="0">
+                <a:solidFill>
+                  <a:srgbClr val="E5E0D8"/>
+                </a:solidFill>
+                <a:latin typeface="Calibri" pitchFamily="34" charset="0"/>
+                <a:ea typeface="Calibri" pitchFamily="34" charset="-122"/>
+                <a:cs typeface="Calibri" pitchFamily="34" charset="-120"/>
+              </a:rPr>
+              <a:t>[Bénéfice 2]</a:t>
+            </a:r>
+          </a:p>
+        </p:txBody>
+      </p:sp>
+      <p:sp>
+        <p:nvSpPr>
+          <p:cNvPr id="427" name="MetaRule"/>
+          <p:cNvSpPr/>
+          <p:nvPr/>
+        </p:nvSpPr>
+        <p:spPr>
+          <a:xfrm>
+            <a:off x="3182112" y="3846207"/>
+            <a:ext cx="2560320" cy="10973"/>
+          </a:xfrm>
+          <a:prstGeom prst="rect">
+            <a:avLst/>
+          </a:prstGeom>
+          <a:solidFill>
+            <a:srgbClr val="C4B5A5"/>
+          </a:solidFill>
+          <a:ln>
+            <a:noFill/>
+          </a:ln>
+        </p:spPr>
+        <p:txBody>
+          <a:bodyPr/>
+          <a:lstStyle/>
+          <a:p>
+            <a:endParaRPr/>
+          </a:p>
+        </p:txBody>
+      </p:sp>
+      <p:sp>
+        <p:nvSpPr>
+          <p:cNvPr id="428" name="Solution"/>
+          <p:cNvSpPr/>
+          <p:nvPr/>
+        </p:nvSpPr>
+        <p:spPr>
+          <a:xfrm>
+            <a:off x="3182112" y="3956207"/>
+            <a:ext cx="2560320" cy="420000"/>
+          </a:xfrm>
+          <a:prstGeom prst="rect">
+            <a:avLst/>
+          </a:prstGeom>
+          <a:noFill/>
+          <a:ln/>
+        </p:spPr>
+        <p:txBody>
+          <a:bodyPr wrap="square" lIns="146304" tIns="0" rIns="146304" bIns="0" rtlCol="0" anchor="t"/>
           <a:lstStyle/>
           <a:p>
             <a:pPr marL="0" indent="0">
               <a:buNone/>
             </a:pPr>
             <a:r>
-              <a:rPr lang="en-US" sz="1300" b="1" dirty="0">
-                <a:solidFill>
-                  <a:srgbClr val="8B1A1A"/>
+              <a:rPr lang="en-US" sz="850" spc="150" dirty="0">
+                <a:solidFill>
+                  <a:srgbClr val="F3F0EB"/>
                 </a:solidFill>
                 <a:latin typeface="Garamond" pitchFamily="34" charset="0"/>
                 <a:ea typeface="Garamond" pitchFamily="34" charset="-122"/>
                 <a:cs typeface="Garamond" pitchFamily="34" charset="-120"/>
               </a:rPr>
-              <a:t>[Objectif de l’axe — formulation client]</a:t>
-            </a:r>
-            <a:endParaRPr lang="en-US" sz="1300" dirty="0"/>
-          </a:p>
-        </p:txBody>
-      </p:sp>
-      <p:sp>
-        <p:nvSpPr>
-          <p:cNvPr id="21" name="Shape 18"/>
-          <p:cNvSpPr/>
-          <p:nvPr/>
-        </p:nvSpPr>
-        <p:spPr>
-          <a:xfrm>
-            <a:off x="3200400" y="2286000"/>
-            <a:ext cx="2560320" cy="10973"/>
-          </a:xfrm>
-          <a:prstGeom prst="rect">
-            <a:avLst/>
-          </a:prstGeom>
-          <a:solidFill>
-            <a:srgbClr val="CFC8BD"/>
-          </a:solidFill>
-          <a:ln w="12700">
-            <a:solidFill>
-              <a:srgbClr val="CFC8BD"/>
-            </a:solidFill>
-            <a:prstDash val="solid"/>
-          </a:ln>
-        </p:spPr>
-        <p:txBody>
-          <a:bodyPr/>
-          <a:lstStyle/>
-          <a:p>
-            <a:endParaRPr lang="fr-FR"/>
-          </a:p>
-        </p:txBody>
-      </p:sp>
-      <p:sp>
-        <p:nvSpPr>
-          <p:cNvPr id="23" name="Text 20"/>
-          <p:cNvSpPr/>
-          <p:nvPr/>
-        </p:nvSpPr>
-        <p:spPr>
-          <a:xfrm>
-            <a:off x="3200400" y="2697480"/>
-            <a:ext cx="2560320" cy="1143000"/>
-          </a:xfrm>
-          <a:prstGeom prst="rect">
-            <a:avLst/>
-          </a:prstGeom>
-          <a:noFill/>
-          <a:ln/>
-        </p:spPr>
-        <p:txBody>
-          <a:bodyPr wrap="square" lIns="0" tIns="0" rIns="0" bIns="0" rtlCol="0" anchor="t"/>
-          <a:lstStyle/>
-          <a:p>
-            <a:pPr marL="182880" indent="-182880">
-              <a:buFont typeface="Arial"/>
-              <a:buChar char="•"/>
-            </a:pPr>
-            <a:r>
-              <a:rPr lang="en-US" sz="1000" i="1" dirty="0">
+              <a:t>[Solution]</a:t>
+            </a:r>
+          </a:p>
+        </p:txBody>
+      </p:sp>
+      <p:sp>
+        <p:nvSpPr>
+          <p:cNvPr id="429" name="Risque"/>
+          <p:cNvSpPr/>
+          <p:nvPr/>
+        </p:nvSpPr>
+        <p:spPr>
+          <a:xfrm>
+            <a:off x="3182112" y="4316207"/>
+            <a:ext cx="2560320" cy="220000"/>
+          </a:xfrm>
+          <a:prstGeom prst="rect">
+            <a:avLst/>
+          </a:prstGeom>
+          <a:noFill/>
+          <a:ln/>
+        </p:spPr>
+        <p:txBody>
+          <a:bodyPr wrap="square" lIns="146304" tIns="0" rIns="146304" bIns="0" rtlCol="0" anchor="t"/>
+          <a:lstStyle/>
+          <a:p>
+            <a:pPr marL="0" indent="0">
+              <a:buNone/>
+            </a:pPr>
+            <a:r>
+              <a:rPr lang="en-US" sz="750" b="1" dirty="0">
                 <a:solidFill>
                   <a:srgbClr val="C4B5A5"/>
                 </a:solidFill>
@@ -10346,450 +10567,306 @@
                 <a:ea typeface="Calibri" pitchFamily="34" charset="-122"/>
                 <a:cs typeface="Calibri" pitchFamily="34" charset="-120"/>
               </a:rPr>
-              <a:t>[Bénéfice 1 — répond à l'objectif exprimé]</a:t>
-            </a:r>
-          </a:p>
-          <a:p>
-            <a:pPr marL="182880" indent="-182880">
+              <a:t>[Profil de risque · rendement cible]</a:t>
+            </a:r>
+          </a:p>
+        </p:txBody>
+      </p:sp>
+      <p:sp>
+        <p:nvSpPr>
+          <p:cNvPr id="440" name="Card"/>
+          <p:cNvSpPr/>
+          <p:nvPr/>
+        </p:nvSpPr>
+        <p:spPr>
+          <a:xfrm>
+            <a:off x="5879592" y="1654961"/>
+            <a:ext cx="2560320" cy="2873045"/>
+          </a:xfrm>
+          <a:prstGeom prst="rect">
+            <a:avLst/>
+          </a:prstGeom>
+          <a:solidFill>
+            <a:srgbClr val="E5E0D8"/>
+          </a:solidFill>
+          <a:ln>
+            <a:noFill/>
+          </a:ln>
+        </p:spPr>
+        <p:txBody>
+          <a:bodyPr/>
+          <a:lstStyle/>
+          <a:p>
+            <a:endParaRPr dirty="0"/>
+          </a:p>
+        </p:txBody>
+      </p:sp>
+      <p:sp>
+        <p:nvSpPr>
+          <p:cNvPr id="441" name="Eyebrow"/>
+          <p:cNvSpPr/>
+          <p:nvPr/>
+        </p:nvSpPr>
+        <p:spPr>
+          <a:xfrm>
+            <a:off x="5879592" y="1756207"/>
+            <a:ext cx="2560320" cy="182880"/>
+          </a:xfrm>
+          <a:prstGeom prst="rect">
+            <a:avLst/>
+          </a:prstGeom>
+          <a:noFill/>
+          <a:ln/>
+        </p:spPr>
+        <p:txBody>
+          <a:bodyPr wrap="square" lIns="146304" tIns="0" rIns="146304" bIns="0" rtlCol="0" anchor="t"/>
+          <a:lstStyle/>
+          <a:p>
+            <a:pPr marL="0" indent="0">
+              <a:buNone/>
+            </a:pPr>
+            <a:endParaRPr lang="en-US" sz="700" spc="250" dirty="0">
+              <a:solidFill>
+                <a:srgbClr val="A09080"/>
+              </a:solidFill>
+              <a:latin typeface="Garamond" pitchFamily="34" charset="0"/>
+              <a:ea typeface="Garamond" pitchFamily="34" charset="-122"/>
+              <a:cs typeface="Garamond" pitchFamily="34" charset="-120"/>
+            </a:endParaRPr>
+          </a:p>
+        </p:txBody>
+      </p:sp>
+      <p:sp>
+        <p:nvSpPr>
+          <p:cNvPr id="442" name="Objectif"/>
+          <p:cNvSpPr/>
+          <p:nvPr/>
+        </p:nvSpPr>
+        <p:spPr>
+          <a:xfrm>
+            <a:off x="5879592" y="1986207"/>
+            <a:ext cx="2560320" cy="700000"/>
+          </a:xfrm>
+          <a:prstGeom prst="rect">
+            <a:avLst/>
+          </a:prstGeom>
+          <a:noFill/>
+          <a:ln/>
+        </p:spPr>
+        <p:txBody>
+          <a:bodyPr wrap="square" lIns="146304" tIns="0" rIns="146304" bIns="0" rtlCol="0" anchor="t"/>
+          <a:lstStyle/>
+          <a:p>
+            <a:pPr marL="0" indent="0">
+              <a:buNone/>
+            </a:pPr>
+            <a:r>
+              <a:rPr lang="en-US" sz="1350" dirty="0">
+                <a:solidFill>
+                  <a:srgbClr val="1C2B3A"/>
+                </a:solidFill>
+                <a:latin typeface="Garamond" pitchFamily="34" charset="0"/>
+                <a:ea typeface="Garamond" pitchFamily="34" charset="-122"/>
+                <a:cs typeface="Garamond" pitchFamily="34" charset="-120"/>
+              </a:rPr>
+              <a:t>[Objectif de l’axe — formulation client]</a:t>
+            </a:r>
+          </a:p>
+        </p:txBody>
+      </p:sp>
+      <p:sp>
+        <p:nvSpPr>
+          <p:cNvPr id="443" name="AccentRule"/>
+          <p:cNvSpPr/>
+          <p:nvPr/>
+        </p:nvSpPr>
+        <p:spPr>
+          <a:xfrm>
+            <a:off x="5879592" y="2756207"/>
+            <a:ext cx="640080" cy="20117"/>
+          </a:xfrm>
+          <a:prstGeom prst="rect">
+            <a:avLst/>
+          </a:prstGeom>
+          <a:solidFill>
+            <a:srgbClr val="8B1A1A"/>
+          </a:solidFill>
+          <a:ln>
+            <a:noFill/>
+          </a:ln>
+        </p:spPr>
+        <p:txBody>
+          <a:bodyPr/>
+          <a:lstStyle/>
+          <a:p>
+            <a:endParaRPr/>
+          </a:p>
+        </p:txBody>
+      </p:sp>
+      <p:sp>
+        <p:nvSpPr>
+          <p:cNvPr id="446" name="Benefices"/>
+          <p:cNvSpPr/>
+          <p:nvPr/>
+        </p:nvSpPr>
+        <p:spPr>
+          <a:xfrm>
+            <a:off x="5879592" y="2886207"/>
+            <a:ext cx="2560320" cy="800000"/>
+          </a:xfrm>
+          <a:prstGeom prst="rect">
+            <a:avLst/>
+          </a:prstGeom>
+          <a:noFill/>
+          <a:ln/>
+        </p:spPr>
+        <p:txBody>
+          <a:bodyPr wrap="square" lIns="146304" tIns="0" rIns="146304" bIns="0" rtlCol="0" anchor="t"/>
+          <a:lstStyle/>
+          <a:p>
+            <a:pPr marL="146304" indent="-146304">
+              <a:buClr>
+                <a:srgbClr val="8B1A1A"/>
+              </a:buClr>
               <a:buFont typeface="Arial"/>
               <a:buChar char="•"/>
             </a:pPr>
             <a:r>
-              <a:rPr lang="en-US" sz="1000" i="1" dirty="0">
-                <a:solidFill>
-                  <a:srgbClr val="C4B5A5"/>
+              <a:rPr lang="en-US" sz="1000" dirty="0">
+                <a:solidFill>
+                  <a:srgbClr val="4A5568"/>
                 </a:solidFill>
                 <a:latin typeface="Calibri" pitchFamily="34" charset="0"/>
                 <a:ea typeface="Calibri" pitchFamily="34" charset="-122"/>
                 <a:cs typeface="Calibri" pitchFamily="34" charset="-120"/>
               </a:rPr>
-              <a:t>[Bénéfice 2 — répond à l'objectif exprimé]</a:t>
-            </a:r>
-          </a:p>
-        </p:txBody>
-      </p:sp>
-      <p:sp>
-        <p:nvSpPr>
-          <p:cNvPr id="24" name="Shape 21"/>
-          <p:cNvSpPr/>
-          <p:nvPr/>
-        </p:nvSpPr>
-        <p:spPr>
-          <a:xfrm>
-            <a:off x="3200400" y="3931920"/>
+              <a:t>[Bénéfice 1]</a:t>
+            </a:r>
+          </a:p>
+          <a:p>
+            <a:pPr marL="146304" indent="-146304">
+              <a:buClr>
+                <a:srgbClr val="8B1A1A"/>
+              </a:buClr>
+              <a:buFont typeface="Arial"/>
+              <a:buChar char="•"/>
+            </a:pPr>
+            <a:r>
+              <a:rPr lang="en-US" sz="1000" dirty="0">
+                <a:solidFill>
+                  <a:srgbClr val="4A5568"/>
+                </a:solidFill>
+                <a:latin typeface="Calibri" pitchFamily="34" charset="0"/>
+                <a:ea typeface="Calibri" pitchFamily="34" charset="-122"/>
+                <a:cs typeface="Calibri" pitchFamily="34" charset="-120"/>
+              </a:rPr>
+              <a:t>[Bénéfice 2]</a:t>
+            </a:r>
+          </a:p>
+        </p:txBody>
+      </p:sp>
+      <p:sp>
+        <p:nvSpPr>
+          <p:cNvPr id="447" name="MetaRule"/>
+          <p:cNvSpPr/>
+          <p:nvPr/>
+        </p:nvSpPr>
+        <p:spPr>
+          <a:xfrm>
+            <a:off x="5879592" y="3846207"/>
             <a:ext cx="2560320" cy="10973"/>
           </a:xfrm>
           <a:prstGeom prst="rect">
             <a:avLst/>
           </a:prstGeom>
           <a:solidFill>
-            <a:srgbClr val="E5E0D8"/>
-          </a:solidFill>
-          <a:ln w="12700">
-            <a:solidFill>
-              <a:srgbClr val="E5E0D8"/>
-            </a:solidFill>
-            <a:prstDash val="solid"/>
+            <a:srgbClr val="A09080"/>
+          </a:solidFill>
+          <a:ln>
+            <a:noFill/>
           </a:ln>
         </p:spPr>
         <p:txBody>
           <a:bodyPr/>
           <a:lstStyle/>
           <a:p>
-            <a:endParaRPr lang="fr-FR"/>
-          </a:p>
-        </p:txBody>
-      </p:sp>
-      <p:sp>
-        <p:nvSpPr>
-          <p:cNvPr id="25" name="Text 22"/>
-          <p:cNvSpPr/>
-          <p:nvPr/>
-        </p:nvSpPr>
-        <p:spPr>
-          <a:xfrm>
-            <a:off x="3200400" y="4005072"/>
-            <a:ext cx="2560320" cy="201168"/>
-          </a:xfrm>
-          <a:prstGeom prst="rect">
-            <a:avLst/>
-          </a:prstGeom>
-          <a:noFill/>
-          <a:ln/>
-        </p:spPr>
-        <p:txBody>
-          <a:bodyPr wrap="square" lIns="0" tIns="0" rIns="0" bIns="0" rtlCol="0" anchor="ctr"/>
+            <a:endParaRPr/>
+          </a:p>
+        </p:txBody>
+      </p:sp>
+      <p:sp>
+        <p:nvSpPr>
+          <p:cNvPr id="448" name="Solution"/>
+          <p:cNvSpPr/>
+          <p:nvPr/>
+        </p:nvSpPr>
+        <p:spPr>
+          <a:xfrm>
+            <a:off x="5879592" y="3956207"/>
+            <a:ext cx="2560320" cy="420000"/>
+          </a:xfrm>
+          <a:prstGeom prst="rect">
+            <a:avLst/>
+          </a:prstGeom>
+          <a:noFill/>
+          <a:ln/>
+        </p:spPr>
+        <p:txBody>
+          <a:bodyPr wrap="square" lIns="146304" tIns="0" rIns="146304" bIns="0" rtlCol="0" anchor="t"/>
           <a:lstStyle/>
           <a:p>
             <a:pPr marL="0" indent="0">
               <a:buNone/>
             </a:pPr>
             <a:r>
-              <a:rPr lang="en-US" sz="1050" b="1" dirty="0">
-                <a:solidFill>
-                  <a:srgbClr val="8B1A1A"/>
+              <a:rPr lang="en-US" sz="850" spc="150" dirty="0">
+                <a:solidFill>
+                  <a:srgbClr val="1C2B3A"/>
                 </a:solidFill>
                 <a:latin typeface="Garamond" pitchFamily="34" charset="0"/>
                 <a:ea typeface="Garamond" pitchFamily="34" charset="-122"/>
                 <a:cs typeface="Garamond" pitchFamily="34" charset="-120"/>
               </a:rPr>
-              <a:t>[Nom de la solution]</a:t>
-            </a:r>
-            <a:endParaRPr lang="en-US" sz="750" dirty="0"/>
-          </a:p>
-        </p:txBody>
-      </p:sp>
-      <p:sp>
-        <p:nvSpPr>
-          <p:cNvPr id="26" name="Text 23"/>
-          <p:cNvSpPr/>
-          <p:nvPr/>
-        </p:nvSpPr>
-        <p:spPr>
-          <a:xfrm>
-            <a:off x="3200400" y="4224528"/>
-            <a:ext cx="2560320" cy="256032"/>
-          </a:xfrm>
-          <a:prstGeom prst="rect">
-            <a:avLst/>
-          </a:prstGeom>
-          <a:noFill/>
-          <a:ln/>
-        </p:spPr>
-        <p:txBody>
-          <a:bodyPr wrap="square" lIns="0" tIns="0" rIns="0" bIns="0" rtlCol="0" anchor="t"/>
+              <a:t>[Solution]</a:t>
+            </a:r>
+          </a:p>
+        </p:txBody>
+      </p:sp>
+      <p:sp>
+        <p:nvSpPr>
+          <p:cNvPr id="449" name="Risque"/>
+          <p:cNvSpPr/>
+          <p:nvPr/>
+        </p:nvSpPr>
+        <p:spPr>
+          <a:xfrm>
+            <a:off x="5879592" y="4316207"/>
+            <a:ext cx="2560320" cy="220000"/>
+          </a:xfrm>
+          <a:prstGeom prst="rect">
+            <a:avLst/>
+          </a:prstGeom>
+          <a:noFill/>
+          <a:ln/>
+        </p:spPr>
+        <p:txBody>
+          <a:bodyPr wrap="square" lIns="146304" tIns="0" rIns="146304" bIns="0" rtlCol="0" anchor="t"/>
           <a:lstStyle/>
           <a:p>
             <a:pPr marL="0" indent="0">
               <a:buNone/>
             </a:pPr>
             <a:r>
-              <a:rPr lang="en-US" sz="1100" b="1" dirty="0">
-                <a:solidFill>
-                  <a:srgbClr val="C4B5A5"/>
+              <a:rPr lang="en-US" sz="750" b="1" dirty="0">
+                <a:solidFill>
+                  <a:srgbClr val="A09080"/>
                 </a:solidFill>
                 <a:latin typeface="Calibri" pitchFamily="34" charset="0"/>
                 <a:ea typeface="Calibri" pitchFamily="34" charset="-122"/>
                 <a:cs typeface="Calibri" pitchFamily="34" charset="-120"/>
               </a:rPr>
-              <a:t>[Montant]</a:t>
-            </a:r>
-            <a:endParaRPr lang="en-US" sz="1000" dirty="0"/>
-          </a:p>
-        </p:txBody>
-      </p:sp>
-      <p:sp>
-        <p:nvSpPr>
-          <p:cNvPr id="102" name="Text Risque 2"/>
-          <p:cNvSpPr/>
-          <p:nvPr/>
-        </p:nvSpPr>
-        <p:spPr>
-          <a:xfrm>
-            <a:off x="3200400" y="4515000"/>
-            <a:ext cx="2560320" cy="230000"/>
-          </a:xfrm>
-          <a:prstGeom prst="rect">
-            <a:avLst/>
-          </a:prstGeom>
-          <a:noFill/>
-          <a:ln/>
-        </p:spPr>
-        <p:txBody>
-          <a:bodyPr wrap="square" lIns="0" tIns="0" rIns="0" bIns="0" rtlCol="0" anchor="t"/>
-          <a:lstStyle/>
-          <a:p>
-            <a:pPr marL="0" indent="0">
-              <a:buNone/>
-            </a:pPr>
-            <a:r>
-              <a:rPr lang="en-US" sz="900" i="1" dirty="0">
-                <a:solidFill>
-                  <a:srgbClr val="4A5568"/>
-                </a:solidFill>
-                <a:latin typeface="Calibri" pitchFamily="34" charset="0"/>
-                <a:ea typeface="Calibri" pitchFamily="34" charset="-122"/>
-                <a:cs typeface="Calibri" pitchFamily="34" charset="-120"/>
-              </a:rPr>
-              <a:t>[Profil de risque et rendement cible]</a:t>
-            </a:r>
-            <a:endParaRPr lang="en-US" sz="900" dirty="0"/>
-          </a:p>
-        </p:txBody>
-      </p:sp>
-      <p:sp>
-        <p:nvSpPr>
-          <p:cNvPr id="113" name="Text Objectif 113"/>
-          <p:cNvSpPr/>
-          <p:nvPr/>
-        </p:nvSpPr>
-        <p:spPr>
-          <a:xfrm>
-            <a:off x="5897880" y="1737360"/>
-            <a:ext cx="2560320" cy="460000"/>
-          </a:xfrm>
-          <a:prstGeom prst="rect">
-            <a:avLst/>
-          </a:prstGeom>
-          <a:noFill/>
-          <a:ln/>
-        </p:spPr>
-        <p:txBody>
-          <a:bodyPr wrap="square" lIns="0" tIns="0" rIns="0" bIns="0" rtlCol="0" anchor="ctr"/>
-          <a:lstStyle/>
-          <a:p>
-            <a:pPr marL="0" indent="0">
-              <a:buNone/>
-            </a:pPr>
-            <a:r>
-              <a:rPr lang="en-US" sz="1300" b="1" dirty="0">
-                <a:solidFill>
-                  <a:srgbClr val="8B1A1A"/>
-                </a:solidFill>
-                <a:latin typeface="Garamond" pitchFamily="34" charset="0"/>
-                <a:ea typeface="Garamond" pitchFamily="34" charset="-122"/>
-                <a:cs typeface="Garamond" pitchFamily="34" charset="-120"/>
-              </a:rPr>
-              <a:t>[Objectif de l’axe — formulation client]</a:t>
-            </a:r>
-            <a:endParaRPr lang="en-US" sz="1300" dirty="0"/>
-          </a:p>
-        </p:txBody>
-      </p:sp>
-      <p:sp>
-        <p:nvSpPr>
-          <p:cNvPr id="28" name="Shape 25"/>
-          <p:cNvSpPr/>
-          <p:nvPr/>
-        </p:nvSpPr>
-        <p:spPr>
-          <a:xfrm>
-            <a:off x="5897880" y="2286000"/>
-            <a:ext cx="2560320" cy="10973"/>
-          </a:xfrm>
-          <a:prstGeom prst="rect">
-            <a:avLst/>
-          </a:prstGeom>
-          <a:solidFill>
-            <a:srgbClr val="CFC8BD"/>
-          </a:solidFill>
-          <a:ln w="12700">
-            <a:solidFill>
-              <a:srgbClr val="CFC8BD"/>
-            </a:solidFill>
-            <a:prstDash val="solid"/>
-          </a:ln>
-        </p:spPr>
-        <p:txBody>
-          <a:bodyPr/>
-          <a:lstStyle/>
-          <a:p>
-            <a:endParaRPr lang="fr-FR"/>
-          </a:p>
-        </p:txBody>
-      </p:sp>
-      <p:sp>
-        <p:nvSpPr>
-          <p:cNvPr id="30" name="Text 27"/>
-          <p:cNvSpPr/>
-          <p:nvPr/>
-        </p:nvSpPr>
-        <p:spPr>
-          <a:xfrm>
-            <a:off x="5897880" y="2697480"/>
-            <a:ext cx="2560320" cy="1143000"/>
-          </a:xfrm>
-          <a:prstGeom prst="rect">
-            <a:avLst/>
-          </a:prstGeom>
-          <a:noFill/>
-          <a:ln/>
-        </p:spPr>
-        <p:txBody>
-          <a:bodyPr wrap="square" lIns="0" tIns="0" rIns="0" bIns="0" rtlCol="0" anchor="t"/>
-          <a:lstStyle/>
-          <a:p>
-            <a:pPr marL="182880" indent="-182880">
-              <a:buFont typeface="Arial"/>
-              <a:buChar char="•"/>
-            </a:pPr>
-            <a:r>
-              <a:rPr lang="en-US" sz="1000" i="1" dirty="0">
-                <a:solidFill>
-                  <a:srgbClr val="C4B5A5"/>
-                </a:solidFill>
-                <a:latin typeface="Calibri" pitchFamily="34" charset="0"/>
-                <a:ea typeface="Calibri" pitchFamily="34" charset="-122"/>
-                <a:cs typeface="Calibri" pitchFamily="34" charset="-120"/>
-              </a:rPr>
-              <a:t>[Bénéfice 1 — répond à l'objectif exprimé]</a:t>
-            </a:r>
-          </a:p>
-          <a:p>
-            <a:pPr marL="182880" indent="-182880">
-              <a:buFont typeface="Arial"/>
-              <a:buChar char="•"/>
-            </a:pPr>
-            <a:r>
-              <a:rPr lang="en-US" sz="1000" i="1" dirty="0">
-                <a:solidFill>
-                  <a:srgbClr val="C4B5A5"/>
-                </a:solidFill>
-                <a:latin typeface="Calibri" pitchFamily="34" charset="0"/>
-                <a:ea typeface="Calibri" pitchFamily="34" charset="-122"/>
-                <a:cs typeface="Calibri" pitchFamily="34" charset="-120"/>
-              </a:rPr>
-              <a:t>[Bénéfice 2 — répond à l'objectif exprimé]</a:t>
-            </a:r>
-          </a:p>
-        </p:txBody>
-      </p:sp>
-      <p:sp>
-        <p:nvSpPr>
-          <p:cNvPr id="31" name="Shape 28"/>
-          <p:cNvSpPr/>
-          <p:nvPr/>
-        </p:nvSpPr>
-        <p:spPr>
-          <a:xfrm>
-            <a:off x="5897880" y="3931920"/>
-            <a:ext cx="2560320" cy="10973"/>
-          </a:xfrm>
-          <a:prstGeom prst="rect">
-            <a:avLst/>
-          </a:prstGeom>
-          <a:solidFill>
-            <a:srgbClr val="E5E0D8"/>
-          </a:solidFill>
-          <a:ln w="12700">
-            <a:solidFill>
-              <a:srgbClr val="E5E0D8"/>
-            </a:solidFill>
-            <a:prstDash val="solid"/>
-          </a:ln>
-        </p:spPr>
-        <p:txBody>
-          <a:bodyPr/>
-          <a:lstStyle/>
-          <a:p>
-            <a:endParaRPr lang="fr-FR"/>
-          </a:p>
-        </p:txBody>
-      </p:sp>
-      <p:sp>
-        <p:nvSpPr>
-          <p:cNvPr id="32" name="Text 29"/>
-          <p:cNvSpPr/>
-          <p:nvPr/>
-        </p:nvSpPr>
-        <p:spPr>
-          <a:xfrm>
-            <a:off x="5897880" y="4005072"/>
-            <a:ext cx="2560320" cy="201168"/>
-          </a:xfrm>
-          <a:prstGeom prst="rect">
-            <a:avLst/>
-          </a:prstGeom>
-          <a:noFill/>
-          <a:ln/>
-        </p:spPr>
-        <p:txBody>
-          <a:bodyPr wrap="square" lIns="0" tIns="0" rIns="0" bIns="0" rtlCol="0" anchor="ctr"/>
-          <a:lstStyle/>
-          <a:p>
-            <a:pPr marL="0" indent="0">
-              <a:buNone/>
-            </a:pPr>
-            <a:r>
-              <a:rPr lang="en-US" sz="1050" b="1" dirty="0">
-                <a:solidFill>
-                  <a:srgbClr val="8B1A1A"/>
-                </a:solidFill>
-                <a:latin typeface="Garamond" pitchFamily="34" charset="0"/>
-                <a:ea typeface="Garamond" pitchFamily="34" charset="-122"/>
-                <a:cs typeface="Garamond" pitchFamily="34" charset="-120"/>
-              </a:rPr>
-              <a:t>[Nom de la solution]</a:t>
-            </a:r>
-            <a:endParaRPr lang="en-US" sz="750" dirty="0"/>
-          </a:p>
-        </p:txBody>
-      </p:sp>
-      <p:sp>
-        <p:nvSpPr>
-          <p:cNvPr id="33" name="Text 30"/>
-          <p:cNvSpPr/>
-          <p:nvPr/>
-        </p:nvSpPr>
-        <p:spPr>
-          <a:xfrm>
-            <a:off x="5897880" y="4224528"/>
-            <a:ext cx="2560320" cy="256032"/>
-          </a:xfrm>
-          <a:prstGeom prst="rect">
-            <a:avLst/>
-          </a:prstGeom>
-          <a:noFill/>
-          <a:ln/>
-        </p:spPr>
-        <p:txBody>
-          <a:bodyPr wrap="square" lIns="0" tIns="0" rIns="0" bIns="0" rtlCol="0" anchor="t"/>
-          <a:lstStyle/>
-          <a:p>
-            <a:pPr marL="0" indent="0">
-              <a:buNone/>
-            </a:pPr>
-            <a:r>
-              <a:rPr lang="en-US" sz="1100" b="1" dirty="0">
-                <a:solidFill>
-                  <a:srgbClr val="C4B5A5"/>
-                </a:solidFill>
-                <a:latin typeface="Calibri" pitchFamily="34" charset="0"/>
-                <a:ea typeface="Calibri" pitchFamily="34" charset="-122"/>
-                <a:cs typeface="Calibri" pitchFamily="34" charset="-120"/>
-              </a:rPr>
-              <a:t>[Montant]</a:t>
-            </a:r>
-            <a:endParaRPr lang="en-US" sz="1000" dirty="0"/>
-          </a:p>
-        </p:txBody>
-      </p:sp>
-      <p:sp>
-        <p:nvSpPr>
-          <p:cNvPr id="103" name="Text Risque 3"/>
-          <p:cNvSpPr/>
-          <p:nvPr/>
-        </p:nvSpPr>
-        <p:spPr>
-          <a:xfrm>
-            <a:off x="5897880" y="4515000"/>
-            <a:ext cx="2560320" cy="230000"/>
-          </a:xfrm>
-          <a:prstGeom prst="rect">
-            <a:avLst/>
-          </a:prstGeom>
-          <a:noFill/>
-          <a:ln/>
-        </p:spPr>
-        <p:txBody>
-          <a:bodyPr wrap="square" lIns="0" tIns="0" rIns="0" bIns="0" rtlCol="0" anchor="t"/>
-          <a:lstStyle/>
-          <a:p>
-            <a:pPr marL="0" indent="0">
-              <a:buNone/>
-            </a:pPr>
-            <a:r>
-              <a:rPr lang="en-US" sz="900" i="1" dirty="0">
-                <a:solidFill>
-                  <a:srgbClr val="4A5568"/>
-                </a:solidFill>
-                <a:latin typeface="Calibri" pitchFamily="34" charset="0"/>
-                <a:ea typeface="Calibri" pitchFamily="34" charset="-122"/>
-                <a:cs typeface="Calibri" pitchFamily="34" charset="-120"/>
-              </a:rPr>
-              <a:t>[Profil de risque et rendement cible]</a:t>
-            </a:r>
-            <a:endParaRPr lang="en-US" sz="900" dirty="0"/>
+              <a:t>[Profil de risque · rendement cible]</a:t>
+            </a:r>
           </a:p>
         </p:txBody>
       </p:sp>
@@ -11311,7 +11388,7 @@
             <a:r>
               <a:rPr lang="en-US" sz="1800" i="1" dirty="0">
                 <a:solidFill>
-                  <a:srgbClr val="C4B5A5"/>
+                  <a:srgbClr val="8E5B3F"/>
                 </a:solidFill>
                 <a:latin typeface="Garamond" pitchFamily="34" charset="0"/>
                 <a:ea typeface="Garamond" pitchFamily="34" charset="-122"/>
@@ -11421,7 +11498,7 @@
             <a:r>
               <a:rPr lang="en-US" sz="1800" i="1" dirty="0">
                 <a:solidFill>
-                  <a:srgbClr val="C4B5A5"/>
+                  <a:srgbClr val="8E5B3F"/>
                 </a:solidFill>
                 <a:latin typeface="Garamond" pitchFamily="34" charset="0"/>
                 <a:ea typeface="Garamond" pitchFamily="34" charset="-122"/>
@@ -11531,7 +11608,7 @@
             <a:r>
               <a:rPr lang="en-US" sz="1800" i="1" dirty="0">
                 <a:solidFill>
-                  <a:srgbClr val="C4B5A5"/>
+                  <a:srgbClr val="8E5B3F"/>
                 </a:solidFill>
                 <a:latin typeface="Garamond" pitchFamily="34" charset="0"/>
                 <a:ea typeface="Garamond" pitchFamily="34" charset="-122"/>
@@ -11641,7 +11718,7 @@
             <a:r>
               <a:rPr lang="en-US" sz="1800" i="1" dirty="0">
                 <a:solidFill>
-                  <a:srgbClr val="C4B5A5"/>
+                  <a:srgbClr val="8E5B3F"/>
                 </a:solidFill>
                 <a:latin typeface="Garamond" pitchFamily="34" charset="0"/>
                 <a:ea typeface="Garamond" pitchFamily="34" charset="-122"/>
@@ -11790,7 +11867,7 @@
             <a:r>
               <a:rPr lang="en-US" sz="1800" i="1" dirty="0">
                 <a:solidFill>
-                  <a:srgbClr val="C4B5A5"/>
+                  <a:srgbClr val="8E5B3F"/>
                 </a:solidFill>
                 <a:latin typeface="Garamond" pitchFamily="34" charset="0"/>
                 <a:ea typeface="Garamond" pitchFamily="34" charset="-122"/>
@@ -11829,7 +11906,7 @@
             <a:r>
               <a:rPr lang="en-US" sz="850" i="1" dirty="0">
                 <a:solidFill>
-                  <a:srgbClr val="C4B5A5"/>
+                  <a:srgbClr val="8E5B3F"/>
                 </a:solidFill>
                 <a:latin typeface="Calibri" pitchFamily="34" charset="0"/>
                 <a:ea typeface="Calibri" pitchFamily="34" charset="-122"/>
@@ -11939,7 +12016,7 @@
             <a:r>
               <a:rPr lang="en-US" sz="1800" i="1" dirty="0">
                 <a:solidFill>
-                  <a:srgbClr val="C4B5A5"/>
+                  <a:srgbClr val="8E5B3F"/>
                 </a:solidFill>
                 <a:latin typeface="Garamond" pitchFamily="34" charset="0"/>
                 <a:ea typeface="Garamond" pitchFamily="34" charset="-122"/>
@@ -11978,7 +12055,7 @@
             <a:r>
               <a:rPr lang="en-US" sz="850" i="1" dirty="0">
                 <a:solidFill>
-                  <a:srgbClr val="C4B5A5"/>
+                  <a:srgbClr val="8E5B3F"/>
                 </a:solidFill>
                 <a:latin typeface="Calibri" pitchFamily="34" charset="0"/>
                 <a:ea typeface="Calibri" pitchFamily="34" charset="-122"/>
@@ -12088,7 +12165,7 @@
             <a:r>
               <a:rPr lang="en-US" sz="1800" i="1" dirty="0">
                 <a:solidFill>
-                  <a:srgbClr val="C4B5A5"/>
+                  <a:srgbClr val="8E5B3F"/>
                 </a:solidFill>
                 <a:latin typeface="Garamond" pitchFamily="34" charset="0"/>
                 <a:ea typeface="Garamond" pitchFamily="34" charset="-122"/>
@@ -12127,7 +12204,7 @@
             <a:r>
               <a:rPr lang="en-US" sz="850" i="1" dirty="0">
                 <a:solidFill>
-                  <a:srgbClr val="C4B5A5"/>
+                  <a:srgbClr val="8E5B3F"/>
                 </a:solidFill>
                 <a:latin typeface="Calibri" pitchFamily="34" charset="0"/>
                 <a:ea typeface="Calibri" pitchFamily="34" charset="-122"/>
@@ -12237,7 +12314,7 @@
             <a:r>
               <a:rPr lang="en-US" sz="1800" i="1" dirty="0">
                 <a:solidFill>
-                  <a:srgbClr val="C4B5A5"/>
+                  <a:srgbClr val="8E5B3F"/>
                 </a:solidFill>
                 <a:latin typeface="Garamond" pitchFamily="34" charset="0"/>
                 <a:ea typeface="Garamond" pitchFamily="34" charset="-122"/>
@@ -12276,7 +12353,7 @@
             <a:r>
               <a:rPr lang="en-US" sz="850" i="1" dirty="0">
                 <a:solidFill>
-                  <a:srgbClr val="C4B5A5"/>
+                  <a:srgbClr val="8E5B3F"/>
                 </a:solidFill>
                 <a:latin typeface="Calibri" pitchFamily="34" charset="0"/>
                 <a:ea typeface="Calibri" pitchFamily="34" charset="-122"/>
@@ -13438,7 +13515,7 @@
             <a:r>
               <a:rPr lang="en-US" sz="1100" i="1" dirty="0">
                 <a:solidFill>
-                  <a:srgbClr val="C4B5A5"/>
+                  <a:srgbClr val="8E5B3F"/>
                 </a:solidFill>
                 <a:latin typeface="Calibri" pitchFamily="34" charset="0"/>
                 <a:ea typeface="Calibri" pitchFamily="34" charset="-122"/>
@@ -13477,7 +13554,7 @@
             <a:r>
               <a:rPr lang="en-US" sz="1050" i="1" dirty="0">
                 <a:solidFill>
-                  <a:srgbClr val="C4B5A5"/>
+                  <a:srgbClr val="8E5B3F"/>
                 </a:solidFill>
                 <a:latin typeface="Calibri" pitchFamily="34" charset="0"/>
                 <a:ea typeface="Calibri" pitchFamily="34" charset="-122"/>
@@ -13580,7 +13657,7 @@
             <a:r>
               <a:rPr lang="en-US" sz="1100" i="1" dirty="0">
                 <a:solidFill>
-                  <a:srgbClr val="C4B5A5"/>
+                  <a:srgbClr val="8E5B3F"/>
                 </a:solidFill>
                 <a:latin typeface="Calibri" pitchFamily="34" charset="0"/>
                 <a:ea typeface="Calibri" pitchFamily="34" charset="-122"/>
@@ -13619,7 +13696,7 @@
             <a:r>
               <a:rPr lang="en-US" sz="1050" i="1" dirty="0">
                 <a:solidFill>
-                  <a:srgbClr val="C4B5A5"/>
+                  <a:srgbClr val="8E5B3F"/>
                 </a:solidFill>
                 <a:latin typeface="Calibri" pitchFamily="34" charset="0"/>
                 <a:ea typeface="Calibri" pitchFamily="34" charset="-122"/>
@@ -13722,7 +13799,7 @@
             <a:r>
               <a:rPr lang="en-US" sz="1100" i="1" dirty="0">
                 <a:solidFill>
-                  <a:srgbClr val="C4B5A5"/>
+                  <a:srgbClr val="8E5B3F"/>
                 </a:solidFill>
                 <a:latin typeface="Calibri" pitchFamily="34" charset="0"/>
                 <a:ea typeface="Calibri" pitchFamily="34" charset="-122"/>
@@ -13761,7 +13838,7 @@
             <a:r>
               <a:rPr lang="en-US" sz="1050" i="1" dirty="0">
                 <a:solidFill>
-                  <a:srgbClr val="C4B5A5"/>
+                  <a:srgbClr val="8E5B3F"/>
                 </a:solidFill>
                 <a:latin typeface="Calibri" pitchFamily="34" charset="0"/>
                 <a:ea typeface="Calibri" pitchFamily="34" charset="-122"/>
@@ -14323,7 +14400,7 @@
             <a:r>
               <a:rPr lang="en-US" sz="800" i="1" dirty="0">
                 <a:solidFill>
-                  <a:srgbClr val="C4B5A5"/>
+                  <a:srgbClr val="8E5B3F"/>
                 </a:solidFill>
                 <a:latin typeface="Calibri" pitchFamily="34" charset="0"/>
                 <a:ea typeface="Calibri" pitchFamily="34" charset="-122"/>
@@ -14362,7 +14439,7 @@
             <a:r>
               <a:rPr lang="en-US" sz="1000" i="1" dirty="0">
                 <a:solidFill>
-                  <a:srgbClr val="C4B5A5"/>
+                  <a:srgbClr val="8E5B3F"/>
                 </a:solidFill>
                 <a:latin typeface="Garamond" pitchFamily="34" charset="0"/>
                 <a:ea typeface="Garamond" pitchFamily="34" charset="-122"/>
@@ -14401,7 +14478,7 @@
             <a:r>
               <a:rPr lang="en-US" sz="850" i="1" dirty="0">
                 <a:solidFill>
-                  <a:srgbClr val="C4B5A5"/>
+                  <a:srgbClr val="8E5B3F"/>
                 </a:solidFill>
                 <a:latin typeface="Calibri" pitchFamily="34" charset="0"/>
                 <a:ea typeface="Calibri" pitchFamily="34" charset="-122"/>
@@ -14440,7 +14517,7 @@
             <a:r>
               <a:rPr lang="en-US" sz="850" i="1" dirty="0">
                 <a:solidFill>
-                  <a:srgbClr val="C4B5A5"/>
+                  <a:srgbClr val="8E5B3F"/>
                 </a:solidFill>
                 <a:latin typeface="Calibri" pitchFamily="34" charset="0"/>
                 <a:ea typeface="Calibri" pitchFamily="34" charset="-122"/>
@@ -14653,7 +14730,7 @@
             <a:r>
               <a:rPr lang="en-US" sz="800" i="1" dirty="0">
                 <a:solidFill>
-                  <a:srgbClr val="C4B5A5"/>
+                  <a:srgbClr val="8E5B3F"/>
                 </a:solidFill>
                 <a:latin typeface="Calibri" pitchFamily="34" charset="0"/>
                 <a:ea typeface="Calibri" pitchFamily="34" charset="-122"/>
@@ -14692,7 +14769,7 @@
             <a:r>
               <a:rPr lang="en-US" sz="1000" i="1" dirty="0">
                 <a:solidFill>
-                  <a:srgbClr val="C4B5A5"/>
+                  <a:srgbClr val="8E5B3F"/>
                 </a:solidFill>
                 <a:latin typeface="Garamond" pitchFamily="34" charset="0"/>
                 <a:ea typeface="Garamond" pitchFamily="34" charset="-122"/>
@@ -14731,7 +14808,7 @@
             <a:r>
               <a:rPr lang="en-US" sz="850" i="1" dirty="0">
                 <a:solidFill>
-                  <a:srgbClr val="C4B5A5"/>
+                  <a:srgbClr val="8E5B3F"/>
                 </a:solidFill>
                 <a:latin typeface="Calibri" pitchFamily="34" charset="0"/>
                 <a:ea typeface="Calibri" pitchFamily="34" charset="-122"/>
@@ -14770,7 +14847,7 @@
             <a:r>
               <a:rPr lang="en-US" sz="850" i="1" dirty="0">
                 <a:solidFill>
-                  <a:srgbClr val="C4B5A5"/>
+                  <a:srgbClr val="8E5B3F"/>
                 </a:solidFill>
                 <a:latin typeface="Calibri" pitchFamily="34" charset="0"/>
                 <a:ea typeface="Calibri" pitchFamily="34" charset="-122"/>
@@ -14983,7 +15060,7 @@
             <a:r>
               <a:rPr lang="en-US" sz="800" i="1" dirty="0">
                 <a:solidFill>
-                  <a:srgbClr val="C4B5A5"/>
+                  <a:srgbClr val="8E5B3F"/>
                 </a:solidFill>
                 <a:latin typeface="Calibri" pitchFamily="34" charset="0"/>
                 <a:ea typeface="Calibri" pitchFamily="34" charset="-122"/>
@@ -15022,7 +15099,7 @@
             <a:r>
               <a:rPr lang="en-US" sz="1000" i="1" dirty="0">
                 <a:solidFill>
-                  <a:srgbClr val="C4B5A5"/>
+                  <a:srgbClr val="8E5B3F"/>
                 </a:solidFill>
                 <a:latin typeface="Garamond" pitchFamily="34" charset="0"/>
                 <a:ea typeface="Garamond" pitchFamily="34" charset="-122"/>
@@ -15061,7 +15138,7 @@
             <a:r>
               <a:rPr lang="en-US" sz="850" i="1" dirty="0">
                 <a:solidFill>
-                  <a:srgbClr val="C4B5A5"/>
+                  <a:srgbClr val="8E5B3F"/>
                 </a:solidFill>
                 <a:latin typeface="Calibri" pitchFamily="34" charset="0"/>
                 <a:ea typeface="Calibri" pitchFamily="34" charset="-122"/>
@@ -15100,7 +15177,7 @@
             <a:r>
               <a:rPr lang="en-US" sz="850" i="1" dirty="0">
                 <a:solidFill>
-                  <a:srgbClr val="C4B5A5"/>
+                  <a:srgbClr val="8E5B3F"/>
                 </a:solidFill>
                 <a:latin typeface="Calibri" pitchFamily="34" charset="0"/>
                 <a:ea typeface="Calibri" pitchFamily="34" charset="-122"/>
@@ -15313,7 +15390,7 @@
             <a:r>
               <a:rPr lang="en-US" sz="800" i="1" dirty="0">
                 <a:solidFill>
-                  <a:srgbClr val="C4B5A5"/>
+                  <a:srgbClr val="8E5B3F"/>
                 </a:solidFill>
                 <a:latin typeface="Calibri" pitchFamily="34" charset="0"/>
                 <a:ea typeface="Calibri" pitchFamily="34" charset="-122"/>
@@ -15352,7 +15429,7 @@
             <a:r>
               <a:rPr lang="en-US" sz="1000" i="1" dirty="0">
                 <a:solidFill>
-                  <a:srgbClr val="C4B5A5"/>
+                  <a:srgbClr val="8E5B3F"/>
                 </a:solidFill>
                 <a:latin typeface="Garamond" pitchFamily="34" charset="0"/>
                 <a:ea typeface="Garamond" pitchFamily="34" charset="-122"/>
@@ -15391,7 +15468,7 @@
             <a:r>
               <a:rPr lang="en-US" sz="850" i="1" dirty="0">
                 <a:solidFill>
-                  <a:srgbClr val="C4B5A5"/>
+                  <a:srgbClr val="8E5B3F"/>
                 </a:solidFill>
                 <a:latin typeface="Calibri" pitchFamily="34" charset="0"/>
                 <a:ea typeface="Calibri" pitchFamily="34" charset="-122"/>
@@ -15430,7 +15507,7 @@
             <a:r>
               <a:rPr lang="en-US" sz="850" i="1" dirty="0">
                 <a:solidFill>
-                  <a:srgbClr val="C4B5A5"/>
+                  <a:srgbClr val="8E5B3F"/>
                 </a:solidFill>
                 <a:latin typeface="Calibri" pitchFamily="34" charset="0"/>
                 <a:ea typeface="Calibri" pitchFamily="34" charset="-122"/>
@@ -20248,7 +20325,7 @@
             <a:r>
               <a:rPr lang="en-US" sz="1150" i="1" dirty="0">
                 <a:solidFill>
-                  <a:srgbClr val="C4B5A5"/>
+                  <a:srgbClr val="8E5B3F"/>
                 </a:solidFill>
                 <a:latin typeface="Calibri" pitchFamily="34" charset="0"/>
                 <a:ea typeface="Calibri" pitchFamily="34" charset="-122"/>
@@ -20358,7 +20435,7 @@
             <a:r>
               <a:rPr lang="en-US" sz="1150" i="1" dirty="0">
                 <a:solidFill>
-                  <a:srgbClr val="C4B5A5"/>
+                  <a:srgbClr val="8E5B3F"/>
                 </a:solidFill>
                 <a:latin typeface="Calibri" pitchFamily="34" charset="0"/>
                 <a:ea typeface="Calibri" pitchFamily="34" charset="-122"/>
@@ -20468,7 +20545,7 @@
             <a:r>
               <a:rPr lang="en-US" sz="1150" i="1" dirty="0">
                 <a:solidFill>
-                  <a:srgbClr val="C4B5A5"/>
+                  <a:srgbClr val="8E5B3F"/>
                 </a:solidFill>
                 <a:latin typeface="Calibri" pitchFamily="34" charset="0"/>
                 <a:ea typeface="Calibri" pitchFamily="34" charset="-122"/>
@@ -20578,7 +20655,7 @@
             <a:r>
               <a:rPr lang="en-US" sz="1150" i="1" dirty="0">
                 <a:solidFill>
-                  <a:srgbClr val="C4B5A5"/>
+                  <a:srgbClr val="8E5B3F"/>
                 </a:solidFill>
                 <a:latin typeface="Calibri" pitchFamily="34" charset="0"/>
                 <a:ea typeface="Calibri" pitchFamily="34" charset="-122"/>
@@ -20688,7 +20765,7 @@
             <a:r>
               <a:rPr lang="en-US" sz="1150" i="1" dirty="0">
                 <a:solidFill>
-                  <a:srgbClr val="C4B5A5"/>
+                  <a:srgbClr val="8E5B3F"/>
                 </a:solidFill>
                 <a:latin typeface="Calibri" pitchFamily="34" charset="0"/>
                 <a:ea typeface="Calibri" pitchFamily="34" charset="-122"/>
@@ -20798,7 +20875,7 @@
             <a:r>
               <a:rPr lang="en-US" sz="1150" i="1" dirty="0">
                 <a:solidFill>
-                  <a:srgbClr val="C4B5A5"/>
+                  <a:srgbClr val="8E5B3F"/>
                 </a:solidFill>
                 <a:latin typeface="Calibri" pitchFamily="34" charset="0"/>
                 <a:ea typeface="Calibri" pitchFamily="34" charset="-122"/>
@@ -20908,7 +20985,7 @@
             <a:r>
               <a:rPr lang="en-US" sz="1150" i="1" dirty="0">
                 <a:solidFill>
-                  <a:srgbClr val="C4B5A5"/>
+                  <a:srgbClr val="8E5B3F"/>
                 </a:solidFill>
                 <a:latin typeface="Calibri" pitchFamily="34" charset="0"/>
                 <a:ea typeface="Calibri" pitchFamily="34" charset="-122"/>
@@ -21018,7 +21095,7 @@
             <a:r>
               <a:rPr lang="en-US" sz="1150" i="1" dirty="0">
                 <a:solidFill>
-                  <a:srgbClr val="C4B5A5"/>
+                  <a:srgbClr val="8E5B3F"/>
                 </a:solidFill>
                 <a:latin typeface="Calibri" pitchFamily="34" charset="0"/>
                 <a:ea typeface="Calibri" pitchFamily="34" charset="-122"/>
@@ -23858,7 +23935,7 @@
             <a:r>
               <a:rPr lang="en-US" sz="850" b="1" i="1" dirty="0">
                 <a:solidFill>
-                  <a:srgbClr val="C4B5A5"/>
+                  <a:srgbClr val="8E5B3F"/>
                 </a:solidFill>
                 <a:latin typeface="Calibri" pitchFamily="34" charset="0"/>
                 <a:ea typeface="Calibri" pitchFamily="34" charset="-122"/>
@@ -23968,7 +24045,7 @@
             <a:r>
               <a:rPr lang="en-US" sz="850" b="1" i="1" dirty="0">
                 <a:solidFill>
-                  <a:srgbClr val="C4B5A5"/>
+                  <a:srgbClr val="8E5B3F"/>
                 </a:solidFill>
                 <a:latin typeface="Calibri" pitchFamily="34" charset="0"/>
                 <a:ea typeface="Calibri" pitchFamily="34" charset="-122"/>
@@ -24078,7 +24155,7 @@
             <a:r>
               <a:rPr lang="en-US" sz="850" b="1" i="1" dirty="0">
                 <a:solidFill>
-                  <a:srgbClr val="C4B5A5"/>
+                  <a:srgbClr val="8E5B3F"/>
                 </a:solidFill>
                 <a:latin typeface="Calibri" pitchFamily="34" charset="0"/>
                 <a:ea typeface="Calibri" pitchFamily="34" charset="-122"/>
@@ -24188,7 +24265,7 @@
             <a:r>
               <a:rPr lang="en-US" sz="850" b="1" i="1" dirty="0">
                 <a:solidFill>
-                  <a:srgbClr val="C4B5A5"/>
+                  <a:srgbClr val="8E5B3F"/>
                 </a:solidFill>
                 <a:latin typeface="Calibri" pitchFamily="34" charset="0"/>
                 <a:ea typeface="Calibri" pitchFamily="34" charset="-122"/>
@@ -24353,7 +24430,7 @@
             <a:r>
               <a:rPr lang="en-US" sz="850" b="1" i="1" dirty="0">
                 <a:solidFill>
-                  <a:srgbClr val="C4B5A5"/>
+                  <a:srgbClr val="8E5B3F"/>
                 </a:solidFill>
                 <a:latin typeface="Calibri" pitchFamily="34" charset="0"/>
                 <a:ea typeface="Calibri" pitchFamily="34" charset="-122"/>
@@ -24463,7 +24540,7 @@
             <a:r>
               <a:rPr lang="en-US" sz="850" b="1" i="1" dirty="0">
                 <a:solidFill>
-                  <a:srgbClr val="C4B5A5"/>
+                  <a:srgbClr val="8E5B3F"/>
                 </a:solidFill>
                 <a:latin typeface="Calibri" pitchFamily="34" charset="0"/>
                 <a:ea typeface="Calibri" pitchFamily="34" charset="-122"/>
@@ -25025,7 +25102,7 @@
             <a:r>
               <a:rPr lang="en-US" sz="6000" i="1" dirty="0">
                 <a:solidFill>
-                  <a:srgbClr val="C4B5A5"/>
+                  <a:srgbClr val="8E5B3F"/>
                 </a:solidFill>
                 <a:latin typeface="Garamond" pitchFamily="34" charset="0"/>
                 <a:ea typeface="Garamond" pitchFamily="34" charset="-122"/>
@@ -25096,7 +25173,7 @@
             <a:r>
               <a:rPr lang="en-US" sz="900" i="1" dirty="0">
                 <a:solidFill>
-                  <a:srgbClr val="C4B5A5"/>
+                  <a:srgbClr val="8E5B3F"/>
                 </a:solidFill>
                 <a:latin typeface="Calibri" pitchFamily="34" charset="0"/>
                 <a:ea typeface="Calibri" pitchFamily="34" charset="-122"/>
@@ -25206,7 +25283,7 @@
             <a:r>
               <a:rPr lang="en-US" sz="1800" i="1" dirty="0">
                 <a:solidFill>
-                  <a:srgbClr val="C4B5A5"/>
+                  <a:srgbClr val="8E5B3F"/>
                 </a:solidFill>
                 <a:latin typeface="Garamond" pitchFamily="34" charset="0"/>
                 <a:ea typeface="Garamond" pitchFamily="34" charset="-122"/>
@@ -25316,7 +25393,7 @@
             <a:r>
               <a:rPr lang="en-US" sz="1800" i="1" dirty="0">
                 <a:solidFill>
-                  <a:srgbClr val="C4B5A5"/>
+                  <a:srgbClr val="8E5B3F"/>
                 </a:solidFill>
                 <a:latin typeface="Garamond" pitchFamily="34" charset="0"/>
                 <a:ea typeface="Garamond" pitchFamily="34" charset="-122"/>
@@ -25426,7 +25503,7 @@
             <a:r>
               <a:rPr lang="en-US" sz="1800" i="1" dirty="0">
                 <a:solidFill>
-                  <a:srgbClr val="C4B5A5"/>
+                  <a:srgbClr val="8E5B3F"/>
                 </a:solidFill>
                 <a:latin typeface="Garamond" pitchFamily="34" charset="0"/>
                 <a:ea typeface="Garamond" pitchFamily="34" charset="-122"/>
@@ -25536,7 +25613,7 @@
             <a:r>
               <a:rPr lang="en-US" sz="1800" i="1" dirty="0">
                 <a:solidFill>
-                  <a:srgbClr val="C4B5A5"/>
+                  <a:srgbClr val="8E5B3F"/>
                 </a:solidFill>
                 <a:latin typeface="Garamond" pitchFamily="34" charset="0"/>
                 <a:ea typeface="Garamond" pitchFamily="34" charset="-122"/>
@@ -25646,7 +25723,7 @@
             <a:r>
               <a:rPr lang="en-US" sz="1800" i="1" dirty="0">
                 <a:solidFill>
-                  <a:srgbClr val="C4B5A5"/>
+                  <a:srgbClr val="8E5B3F"/>
                 </a:solidFill>
                 <a:latin typeface="Garamond" pitchFamily="34" charset="0"/>
                 <a:ea typeface="Garamond" pitchFamily="34" charset="-122"/>
@@ -25724,7 +25801,7 @@
             <a:r>
               <a:rPr lang="en-US" sz="1800" i="1" dirty="0">
                 <a:solidFill>
-                  <a:srgbClr val="C4B5A5"/>
+                  <a:srgbClr val="8E5B3F"/>
                 </a:solidFill>
                 <a:latin typeface="Garamond" pitchFamily="34" charset="0"/>
                 <a:ea typeface="Garamond" pitchFamily="34" charset="-122"/>
@@ -26082,7 +26159,7 @@
                 <a:ea typeface="Garamond" pitchFamily="34" charset="-122"/>
                 <a:cs typeface="Garamond" pitchFamily="34" charset="-120"/>
               </a:rPr>
-              <a:t>8</a:t>
+              <a:t>07</a:t>
             </a:r>
             <a:endParaRPr lang="en-US" sz="700" dirty="0"/>
           </a:p>
@@ -26310,7 +26387,7 @@
                 <a:ea typeface="Calibri" pitchFamily="34" charset="-122"/>
                 <a:cs typeface="Calibri" pitchFamily="34" charset="-120"/>
               </a:rPr>
-              <a:t>DE MME S.B.</a:t>
+              <a:t>DE [Mme/M. X.]</a:t>
             </a:r>
             <a:endParaRPr lang="en-US" sz="950" dirty="0"/>
           </a:p>
@@ -26393,7 +26470,7 @@
                 <a:ea typeface="Garamond" pitchFamily="34" charset="-122"/>
                 <a:cs typeface="Garamond" pitchFamily="34" charset="-120"/>
               </a:rPr>
-              <a:t>135 042 €</a:t>
+              <a:t>[X €]</a:t>
             </a:r>
             <a:endParaRPr lang="en-US" sz="4400" dirty="0"/>
           </a:p>
@@ -26483,7 +26560,7 @@
                 <a:ea typeface="Calibri" pitchFamily="34" charset="-122"/>
                 <a:cs typeface="Calibri" pitchFamily="34" charset="-120"/>
               </a:rPr>
-              <a:t>Par enfant (×4)</a:t>
+              <a:t>Par enfant (×N)</a:t>
             </a:r>
             <a:endParaRPr lang="en-US" sz="850" dirty="0"/>
           </a:p>
@@ -26528,7 +26605,7 @@
                 <a:ea typeface="Calibri" pitchFamily="34" charset="-122"/>
                 <a:cs typeface="Calibri" pitchFamily="34" charset="-120"/>
               </a:rPr>
-              <a:t>33 760 €</a:t>
+              <a:t>[X €]</a:t>
             </a:r>
             <a:endParaRPr lang="en-US" sz="850" dirty="0"/>
           </a:p>
@@ -26708,7 +26785,7 @@
                 <a:ea typeface="Calibri" pitchFamily="34" charset="-122"/>
                 <a:cs typeface="Calibri" pitchFamily="34" charset="-120"/>
               </a:rPr>
-              <a:t>20 000 €</a:t>
+              <a:t>[X €]</a:t>
             </a:r>
             <a:endParaRPr lang="en-US" sz="850" dirty="0"/>
           </a:p>
@@ -26853,7 +26930,7 @@
                 <a:ea typeface="Calibri" pitchFamily="34" charset="-122"/>
                 <a:cs typeface="Calibri" pitchFamily="34" charset="-120"/>
               </a:rPr>
-              <a:t>DE M. D.B.</a:t>
+              <a:t>DE [Mme/M. Y.]</a:t>
             </a:r>
             <a:endParaRPr lang="en-US" sz="950" dirty="0"/>
           </a:p>
@@ -26936,7 +27013,7 @@
                 <a:ea typeface="Garamond" pitchFamily="34" charset="-122"/>
                 <a:cs typeface="Garamond" pitchFamily="34" charset="-120"/>
               </a:rPr>
-              <a:t>263 435 €</a:t>
+              <a:t>[X €]</a:t>
             </a:r>
             <a:endParaRPr lang="en-US" sz="4400" dirty="0"/>
           </a:p>
@@ -27026,7 +27103,7 @@
                 <a:ea typeface="Calibri" pitchFamily="34" charset="-122"/>
                 <a:cs typeface="Calibri" pitchFamily="34" charset="-120"/>
               </a:rPr>
-              <a:t>Par enfant (×4)</a:t>
+              <a:t>Par enfant (×N)</a:t>
             </a:r>
             <a:endParaRPr lang="en-US" sz="850" dirty="0"/>
           </a:p>
@@ -27116,7 +27193,7 @@
                 <a:ea typeface="Calibri" pitchFamily="34" charset="-122"/>
                 <a:cs typeface="Calibri" pitchFamily="34" charset="-120"/>
               </a:rPr>
-              <a:t>65 859 €</a:t>
+              <a:t>[X €]</a:t>
             </a:r>
             <a:endParaRPr lang="en-US" sz="850" dirty="0"/>
           </a:p>
@@ -27161,7 +27238,7 @@
                 <a:ea typeface="Calibri" pitchFamily="34" charset="-122"/>
                 <a:cs typeface="Calibri" pitchFamily="34" charset="-120"/>
               </a:rPr>
-              <a:t>49 713 €</a:t>
+              <a:t>[X €]</a:t>
             </a:r>
             <a:endParaRPr lang="en-US" sz="850" dirty="0"/>
           </a:p>
@@ -27417,7 +27494,7 @@
                 <a:ea typeface="Garamond" pitchFamily="34" charset="-122"/>
                 <a:cs typeface="Garamond" pitchFamily="34" charset="-120"/>
               </a:rPr>
-              <a:t>398 477 €</a:t>
+              <a:t>[X €]</a:t>
             </a:r>
             <a:endParaRPr lang="en-US" sz="4400" dirty="0"/>
           </a:p>
@@ -27500,7 +27577,7 @@
                 <a:ea typeface="Garamond" pitchFamily="34" charset="-122"/>
                 <a:cs typeface="Garamond" pitchFamily="34" charset="-120"/>
               </a:rPr>
-              <a:t>45 %</a:t>
+              <a:t>[X %]</a:t>
             </a:r>
             <a:endParaRPr lang="en-US" sz="6000" dirty="0"/>
           </a:p>
@@ -27607,7 +27684,7 @@
                 <a:ea typeface="Calibri" pitchFamily="34" charset="-122"/>
                 <a:cs typeface="Calibri" pitchFamily="34" charset="-120"/>
               </a:rPr>
-              <a:t>100 % en usufruit (conjoint) — enfants en nue-propriété</a:t>
+              <a:t>[Hypothèse retenue — ex. 100 % usufruit conjoint, enfants nue-propriété]</a:t>
             </a:r>
             <a:endParaRPr lang="en-US" sz="800" dirty="0"/>
           </a:p>
@@ -28097,7 +28174,7 @@
             <a:r>
               <a:rPr lang="en-US" sz="1100" i="1" dirty="0">
                 <a:solidFill>
-                  <a:srgbClr val="C4B5A5"/>
+                  <a:srgbClr val="8E5B3F"/>
                 </a:solidFill>
                 <a:latin typeface="Calibri" pitchFamily="34" charset="0"/>
                 <a:ea typeface="Calibri" pitchFamily="34" charset="-122"/>
@@ -28168,7 +28245,7 @@
             <a:r>
               <a:rPr lang="en-US" sz="1150" i="1" dirty="0">
                 <a:solidFill>
-                  <a:srgbClr val="C4B5A5"/>
+                  <a:srgbClr val="8E5B3F"/>
                 </a:solidFill>
                 <a:latin typeface="Calibri" pitchFamily="34" charset="0"/>
                 <a:ea typeface="Calibri" pitchFamily="34" charset="-122"/>
@@ -28271,7 +28348,7 @@
             <a:r>
               <a:rPr lang="en-US" sz="1150" i="1" dirty="0">
                 <a:solidFill>
-                  <a:srgbClr val="C4B5A5"/>
+                  <a:srgbClr val="8E5B3F"/>
                 </a:solidFill>
                 <a:latin typeface="Calibri" pitchFamily="34" charset="0"/>
                 <a:ea typeface="Calibri" pitchFamily="34" charset="-122"/>
@@ -28374,7 +28451,7 @@
             <a:r>
               <a:rPr lang="en-US" sz="1150" i="1" dirty="0">
                 <a:solidFill>
-                  <a:srgbClr val="C4B5A5"/>
+                  <a:srgbClr val="8E5B3F"/>
                 </a:solidFill>
                 <a:latin typeface="Calibri" pitchFamily="34" charset="0"/>
                 <a:ea typeface="Calibri" pitchFamily="34" charset="-122"/>
@@ -28477,7 +28554,7 @@
             <a:r>
               <a:rPr lang="en-US" sz="1150" i="1" dirty="0">
                 <a:solidFill>
-                  <a:srgbClr val="C4B5A5"/>
+                  <a:srgbClr val="8E5B3F"/>
                 </a:solidFill>
                 <a:latin typeface="Calibri" pitchFamily="34" charset="0"/>
                 <a:ea typeface="Calibri" pitchFamily="34" charset="-122"/>
@@ -28580,7 +28657,7 @@
             <a:r>
               <a:rPr lang="en-US" sz="1150" i="1" dirty="0">
                 <a:solidFill>
-                  <a:srgbClr val="C4B5A5"/>
+                  <a:srgbClr val="8E5B3F"/>
                 </a:solidFill>
                 <a:latin typeface="Calibri" pitchFamily="34" charset="0"/>
                 <a:ea typeface="Calibri" pitchFamily="34" charset="-122"/>
@@ -28616,6 +28693,17 @@
             <a:pPr marL="0" indent="0">
               <a:buNone/>
             </a:pPr>
+            <a:r>
+              <a:rPr lang="en-US" sz="750" i="1" dirty="0">
+                <a:solidFill>
+                  <a:srgbClr val="A09080"/>
+                </a:solidFill>
+                <a:latin typeface="Calibri" pitchFamily="34" charset="0"/>
+                <a:ea typeface="Calibri" pitchFamily="34" charset="-122"/>
+                <a:cs typeface="Calibri" pitchFamily="34" charset="-120"/>
+              </a:rPr>
+              <a:t>5 remarques maximum recommandées — supprimer les lignes non utilisées</a:t>
+            </a:r>
             <a:endParaRPr lang="en-US" sz="750" dirty="0"/>
           </a:p>
         </p:txBody>
@@ -29278,6 +29366,26 @@
 </file>
 
 <file path=customXml/item1.xml><?xml version="1.0" encoding="utf-8"?>
+<p:properties xmlns:p="http://schemas.microsoft.com/office/2006/metadata/properties" xmlns:xsi="http://www.w3.org/2001/XMLSchema-instance" xmlns:pc="http://schemas.microsoft.com/office/infopath/2007/PartnerControls">
+  <documentManagement>
+    <TaxCatchAll xmlns="96f3f382-ceb1-40cb-99f5-e72dad3ad468" xsi:nil="true"/>
+    <lcf76f155ced4ddcb4097134ff3c332f xmlns="20af6729-ca02-41fe-ad33-8052e43e59c7">
+      <Terms xmlns="http://schemas.microsoft.com/office/infopath/2007/PartnerControls"/>
+    </lcf76f155ced4ddcb4097134ff3c332f>
+  </documentManagement>
+</p:properties>
+</file>
+
+<file path=customXml/item2.xml><?xml version="1.0" encoding="utf-8"?>
+<?mso-contentType ?>
+<FormTemplates xmlns="http://schemas.microsoft.com/sharepoint/v3/contenttype/forms">
+  <Display>DocumentLibraryForm</Display>
+  <Edit>DocumentLibraryForm</Edit>
+  <New>DocumentLibraryForm</New>
+</FormTemplates>
+</file>
+
+<file path=customXml/item3.xml><?xml version="1.0" encoding="utf-8"?>
 <ct:contentTypeSchema xmlns:ct="http://schemas.microsoft.com/office/2006/metadata/contentType" xmlns:ma="http://schemas.microsoft.com/office/2006/metadata/properties/metaAttributes" ct:_="" ma:_="" ma:contentTypeName="Document" ma:contentTypeID="0x010100E413E88BE41E9B4697EEB1383CCFCEE9" ma:contentTypeVersion="15" ma:contentTypeDescription="Crée un document." ma:contentTypeScope="" ma:versionID="fdc6ab2ac34b5193386aa592c794ff43">
   <xsd:schema xmlns:xsd="http://www.w3.org/2001/XMLSchema" xmlns:xs="http://www.w3.org/2001/XMLSchema" xmlns:p="http://schemas.microsoft.com/office/2006/metadata/properties" xmlns:ns2="20af6729-ca02-41fe-ad33-8052e43e59c7" xmlns:ns3="96f3f382-ceb1-40cb-99f5-e72dad3ad468" targetNamespace="http://schemas.microsoft.com/office/2006/metadata/properties" ma:root="true" ma:fieldsID="deac9eb5af6cc4882cd6ba5d54d79817" ns2:_="" ns3:_="">
     <xsd:import namespace="20af6729-ca02-41fe-ad33-8052e43e59c7"/>
@@ -29512,27 +29620,26 @@
 </ct:contentTypeSchema>
 </file>
 
-<file path=customXml/item2.xml><?xml version="1.0" encoding="utf-8"?>
-<p:properties xmlns:p="http://schemas.microsoft.com/office/2006/metadata/properties" xmlns:xsi="http://www.w3.org/2001/XMLSchema-instance" xmlns:pc="http://schemas.microsoft.com/office/infopath/2007/PartnerControls">
-  <documentManagement>
-    <TaxCatchAll xmlns="96f3f382-ceb1-40cb-99f5-e72dad3ad468" xsi:nil="true"/>
-    <lcf76f155ced4ddcb4097134ff3c332f xmlns="20af6729-ca02-41fe-ad33-8052e43e59c7">
-      <Terms xmlns="http://schemas.microsoft.com/office/infopath/2007/PartnerControls"/>
-    </lcf76f155ced4ddcb4097134ff3c332f>
-  </documentManagement>
-</p:properties>
+<file path=customXml/itemProps1.xml><?xml version="1.0" encoding="utf-8"?>
+<ds:datastoreItem xmlns:ds="http://schemas.openxmlformats.org/officeDocument/2006/customXml" ds:itemID="{4D2500C3-0BF9-4160-9EFB-6F363BE89EA2}">
+  <ds:schemaRefs>
+    <ds:schemaRef ds:uri="http://schemas.microsoft.com/office/2006/metadata/properties"/>
+    <ds:schemaRef ds:uri="http://schemas.microsoft.com/office/infopath/2007/PartnerControls"/>
+    <ds:schemaRef ds:uri="96f3f382-ceb1-40cb-99f5-e72dad3ad468"/>
+    <ds:schemaRef ds:uri="20af6729-ca02-41fe-ad33-8052e43e59c7"/>
+  </ds:schemaRefs>
+</ds:datastoreItem>
 </file>
 
-<file path=customXml/item3.xml><?xml version="1.0" encoding="utf-8"?>
-<?mso-contentType ?>
-<FormTemplates xmlns="http://schemas.microsoft.com/sharepoint/v3/contenttype/forms">
-  <Display>DocumentLibraryForm</Display>
-  <Edit>DocumentLibraryForm</Edit>
-  <New>DocumentLibraryForm</New>
-</FormTemplates>
+<file path=customXml/itemProps2.xml><?xml version="1.0" encoding="utf-8"?>
+<ds:datastoreItem xmlns:ds="http://schemas.openxmlformats.org/officeDocument/2006/customXml" ds:itemID="{F079F69C-2C23-423F-AFA6-0DA966A4C7CD}">
+  <ds:schemaRefs>
+    <ds:schemaRef ds:uri="http://schemas.microsoft.com/sharepoint/v3/contenttype/forms"/>
+  </ds:schemaRefs>
+</ds:datastoreItem>
 </file>
 
-<file path=customXml/itemProps1.xml><?xml version="1.0" encoding="utf-8"?>
+<file path=customXml/itemProps3.xml><?xml version="1.0" encoding="utf-8"?>
 <ds:datastoreItem xmlns:ds="http://schemas.openxmlformats.org/officeDocument/2006/customXml" ds:itemID="{BE50BBAE-E30E-4E78-9619-46B248827988}">
   <ds:schemaRefs>
     <ds:schemaRef ds:uri="http://schemas.microsoft.com/office/2006/metadata/contentType"/>
@@ -29549,23 +29656,4 @@
     <ds:schemaRef ds:uri="http://schemas.microsoft.com/internal/obd"/>
   </ds:schemaRefs>
 </ds:datastoreItem>
-</file>
-
-<file path=customXml/itemProps2.xml><?xml version="1.0" encoding="utf-8"?>
-<ds:datastoreItem xmlns:ds="http://schemas.openxmlformats.org/officeDocument/2006/customXml" ds:itemID="{4D2500C3-0BF9-4160-9EFB-6F363BE89EA2}">
-  <ds:schemaRefs>
-    <ds:schemaRef ds:uri="http://schemas.microsoft.com/office/2006/metadata/properties"/>
-    <ds:schemaRef ds:uri="http://schemas.microsoft.com/office/infopath/2007/PartnerControls"/>
-    <ds:schemaRef ds:uri="96f3f382-ceb1-40cb-99f5-e72dad3ad468"/>
-    <ds:schemaRef ds:uri="20af6729-ca02-41fe-ad33-8052e43e59c7"/>
-  </ds:schemaRefs>
-</ds:datastoreItem>
-</file>
-
-<file path=customXml/itemProps3.xml><?xml version="1.0" encoding="utf-8"?>
-<ds:datastoreItem xmlns:ds="http://schemas.openxmlformats.org/officeDocument/2006/customXml" ds:itemID="{F079F69C-2C23-423F-AFA6-0DA966A4C7CD}">
-  <ds:schemaRefs>
-    <ds:schemaRef ds:uri="http://schemas.microsoft.com/sharepoint/v3/contenttype/forms"/>
-  </ds:schemaRefs>
-</ds:datastoreItem>
 </file>
--- a/Cans_Mstr.pptx
+++ b/Cans_Mstr.pptx
@@ -27767,7 +27767,7 @@
                 <a:ea typeface="Calibri" pitchFamily="34" charset="-122"/>
                 <a:cs typeface="Calibri" pitchFamily="34" charset="-120"/>
               </a:rPr>
-              <a:t>Affilior Gestion Privée  ·  Confidentiel  ·  Août 2026  ·  Ce document ne constitue pas un conseil en investissement au sens MIF2</a:t>
+              <a:t>Affilior Gestion Privée  ·  Confidentiel  ·  [MOIS ANNÉE]  ·  Ce document ne constitue pas un conseil en investissement au sens MIF2</a:t>
             </a:r>
             <a:endParaRPr lang="en-US" sz="680" dirty="0"/>
           </a:p>

--- a/Cans_Mstr.pptx
+++ b/Cans_Mstr.pptx
@@ -17,11 +17,9 @@
     <p:sldId id="262" r:id="rId11"/>
     <p:sldId id="263" r:id="rId12"/>
     <p:sldId id="264" r:id="rId13"/>
-    <p:sldId id="265" r:id="rId14"/>
     <p:sldId id="266" r:id="rId15"/>
     <p:sldId id="267" r:id="rId16"/>
     <p:sldId id="268" r:id="rId17"/>
-    <p:sldId id="269" r:id="rId18"/>
     <p:sldId id="270" r:id="rId19"/>
     <p:sldId id="271" r:id="rId20"/>
     <p:sldId id="272" r:id="rId21"/>
@@ -243,7 +241,7 @@
                       <a:solidFill>
                         <a:srgbClr val="FFFFFF"/>
                       </a:solidFill>
-                      <a:latin typeface="Arial"/>
+                      <a:latin typeface="Calibri"/>
                     </a:defRPr>
                   </a:pPr>
                   <a:endParaRPr lang="fr-FR"/>
@@ -275,7 +273,7 @@
                       <a:solidFill>
                         <a:srgbClr val="FFFFFF"/>
                       </a:solidFill>
-                      <a:latin typeface="Arial"/>
+                      <a:latin typeface="Calibri"/>
                     </a:defRPr>
                   </a:pPr>
                   <a:endParaRPr lang="fr-FR"/>
@@ -307,7 +305,7 @@
                       <a:solidFill>
                         <a:srgbClr val="FFFFFF"/>
                       </a:solidFill>
-                      <a:latin typeface="Arial"/>
+                      <a:latin typeface="Calibri"/>
                     </a:defRPr>
                   </a:pPr>
                   <a:endParaRPr lang="fr-FR"/>
@@ -339,7 +337,7 @@
                       <a:solidFill>
                         <a:srgbClr val="FFFFFF"/>
                       </a:solidFill>
-                      <a:latin typeface="Arial"/>
+                      <a:latin typeface="Calibri"/>
                     </a:defRPr>
                   </a:pPr>
                   <a:endParaRPr lang="fr-FR"/>
@@ -375,7 +373,7 @@
                     <a:solidFill>
                       <a:srgbClr val="000000"/>
                     </a:solidFill>
-                    <a:latin typeface="Arial"/>
+                    <a:latin typeface="Calibri"/>
                   </a:defRPr>
                 </a:pPr>
                 <a:endParaRPr lang="fr-FR"/>
@@ -559,7 +557,7 @@
                       <a:solidFill>
                         <a:srgbClr val="FFFFFF"/>
                       </a:solidFill>
-                      <a:latin typeface="Arial"/>
+                      <a:latin typeface="Calibri"/>
                     </a:defRPr>
                   </a:pPr>
                   <a:endParaRPr lang="fr-FR"/>
@@ -591,7 +589,7 @@
                       <a:solidFill>
                         <a:srgbClr val="FFFFFF"/>
                       </a:solidFill>
-                      <a:latin typeface="Arial"/>
+                      <a:latin typeface="Calibri"/>
                     </a:defRPr>
                   </a:pPr>
                   <a:endParaRPr lang="fr-FR"/>
@@ -627,7 +625,7 @@
                     <a:solidFill>
                       <a:srgbClr val="000000"/>
                     </a:solidFill>
-                    <a:latin typeface="Arial"/>
+                    <a:latin typeface="Calibri"/>
                   </a:defRPr>
                 </a:pPr>
                 <a:endParaRPr lang="fr-FR"/>
@@ -925,90 +923,6 @@
 </p:notes>
 </file>
 
-<file path=ppt/notesSlides/notesSlide10.xml><?xml version="1.0" encoding="utf-8"?>
-<p:notes xmlns:a="http://schemas.openxmlformats.org/drawingml/2006/main" xmlns:r="http://schemas.openxmlformats.org/officeDocument/2006/relationships" xmlns:p="http://schemas.openxmlformats.org/presentationml/2006/main">
-  <p:cSld>
-    <p:spTree>
-      <p:nvGrpSpPr>
-        <p:cNvPr id="1" name=""/>
-        <p:cNvGrpSpPr/>
-        <p:nvPr/>
-      </p:nvGrpSpPr>
-      <p:grpSpPr>
-        <a:xfrm>
-          <a:off x="0" y="0"/>
-          <a:ext cx="0" cy="0"/>
-          <a:chOff x="0" y="0"/>
-          <a:chExt cx="0" cy="0"/>
-        </a:xfrm>
-      </p:grpSpPr>
-      <p:sp>
-        <p:nvSpPr>
-          <p:cNvPr id="2" name="Slide Image Placeholder 1"/>
-          <p:cNvSpPr>
-            <a:spLocks noGrp="1" noRot="1" noChangeAspect="1"/>
-          </p:cNvSpPr>
-          <p:nvPr>
-            <p:ph type="sldImg"/>
-          </p:nvPr>
-        </p:nvSpPr>
-        <p:spPr/>
-      </p:sp>
-      <p:sp>
-        <p:nvSpPr>
-          <p:cNvPr id="3" name="Notes Placeholder 2"/>
-          <p:cNvSpPr>
-            <a:spLocks noGrp="1"/>
-          </p:cNvSpPr>
-          <p:nvPr>
-            <p:ph type="body" idx="1"/>
-          </p:nvPr>
-        </p:nvSpPr>
-        <p:spPr/>
-        <p:txBody>
-          <a:bodyPr/>
-          <a:lstStyle/>
-          <a:p>
-            <a:endParaRPr lang="en-US" dirty="0"/>
-          </a:p>
-        </p:txBody>
-      </p:sp>
-      <p:sp>
-        <p:nvSpPr>
-          <p:cNvPr id="4" name="Slide Number Placeholder 3"/>
-          <p:cNvSpPr>
-            <a:spLocks noGrp="1"/>
-          </p:cNvSpPr>
-          <p:nvPr>
-            <p:ph type="sldNum" sz="quarter" idx="10"/>
-          </p:nvPr>
-        </p:nvSpPr>
-        <p:spPr/>
-        <p:txBody>
-          <a:bodyPr/>
-          <a:lstStyle/>
-          <a:p>
-            <a:fld id="{F7021451-1387-4CA6-816F-3879F97B5CBC}" type="slidenum">
-              <a:rPr lang="en-US"/>
-              <a:t>10</a:t>
-            </a:fld>
-            <a:endParaRPr lang="en-US"/>
-          </a:p>
-        </p:txBody>
-      </p:sp>
-    </p:spTree>
-    <p:extLst>
-      <p:ext uri="{BB962C8B-B14F-4D97-AF65-F5344CB8AC3E}">
-        <p14:creationId xmlns:p14="http://schemas.microsoft.com/office/powerpoint/2010/main" val="1024086991"/>
-      </p:ext>
-    </p:extLst>
-  </p:cSld>
-  <p:clrMapOvr>
-    <a:masterClrMapping/>
-  </p:clrMapOvr>
-</p:notes>
-</file>
-
 <file path=ppt/notesSlides/notesSlide11.xml><?xml version="1.0" encoding="utf-8"?>
 <p:notes xmlns:a="http://schemas.openxmlformats.org/drawingml/2006/main" xmlns:r="http://schemas.openxmlformats.org/officeDocument/2006/relationships" xmlns:p="http://schemas.openxmlformats.org/presentationml/2006/main">
   <p:cSld>
@@ -1243,90 +1157,6 @@
             <a:fld id="{F7021451-1387-4CA6-816F-3879F97B5CBC}" type="slidenum">
               <a:rPr lang="en-US"/>
               <a:t>13</a:t>
-            </a:fld>
-            <a:endParaRPr lang="en-US"/>
-          </a:p>
-        </p:txBody>
-      </p:sp>
-    </p:spTree>
-    <p:extLst>
-      <p:ext uri="{BB962C8B-B14F-4D97-AF65-F5344CB8AC3E}">
-        <p14:creationId xmlns:p14="http://schemas.microsoft.com/office/powerpoint/2010/main" val="1024086991"/>
-      </p:ext>
-    </p:extLst>
-  </p:cSld>
-  <p:clrMapOvr>
-    <a:masterClrMapping/>
-  </p:clrMapOvr>
-</p:notes>
-</file>
-
-<file path=ppt/notesSlides/notesSlide14.xml><?xml version="1.0" encoding="utf-8"?>
-<p:notes xmlns:a="http://schemas.openxmlformats.org/drawingml/2006/main" xmlns:r="http://schemas.openxmlformats.org/officeDocument/2006/relationships" xmlns:p="http://schemas.openxmlformats.org/presentationml/2006/main">
-  <p:cSld>
-    <p:spTree>
-      <p:nvGrpSpPr>
-        <p:cNvPr id="1" name=""/>
-        <p:cNvGrpSpPr/>
-        <p:nvPr/>
-      </p:nvGrpSpPr>
-      <p:grpSpPr>
-        <a:xfrm>
-          <a:off x="0" y="0"/>
-          <a:ext cx="0" cy="0"/>
-          <a:chOff x="0" y="0"/>
-          <a:chExt cx="0" cy="0"/>
-        </a:xfrm>
-      </p:grpSpPr>
-      <p:sp>
-        <p:nvSpPr>
-          <p:cNvPr id="2" name="Slide Image Placeholder 1"/>
-          <p:cNvSpPr>
-            <a:spLocks noGrp="1" noRot="1" noChangeAspect="1"/>
-          </p:cNvSpPr>
-          <p:nvPr>
-            <p:ph type="sldImg"/>
-          </p:nvPr>
-        </p:nvSpPr>
-        <p:spPr/>
-      </p:sp>
-      <p:sp>
-        <p:nvSpPr>
-          <p:cNvPr id="3" name="Notes Placeholder 2"/>
-          <p:cNvSpPr>
-            <a:spLocks noGrp="1"/>
-          </p:cNvSpPr>
-          <p:nvPr>
-            <p:ph type="body" idx="1"/>
-          </p:nvPr>
-        </p:nvSpPr>
-        <p:spPr/>
-        <p:txBody>
-          <a:bodyPr/>
-          <a:lstStyle/>
-          <a:p>
-            <a:endParaRPr lang="en-US" dirty="0"/>
-          </a:p>
-        </p:txBody>
-      </p:sp>
-      <p:sp>
-        <p:nvSpPr>
-          <p:cNvPr id="4" name="Slide Number Placeholder 3"/>
-          <p:cNvSpPr>
-            <a:spLocks noGrp="1"/>
-          </p:cNvSpPr>
-          <p:nvPr>
-            <p:ph type="sldNum" sz="quarter" idx="10"/>
-          </p:nvPr>
-        </p:nvSpPr>
-        <p:spPr/>
-        <p:txBody>
-          <a:bodyPr/>
-          <a:lstStyle/>
-          <a:p>
-            <a:fld id="{F7021451-1387-4CA6-816F-3879F97B5CBC}" type="slidenum">
-              <a:rPr lang="en-US"/>
-              <a:t>14</a:t>
             </a:fld>
             <a:endParaRPr lang="en-US"/>
           </a:p>
@@ -3349,860 +3179,6 @@
 </p:sld>
 </file>
 
-<file path=ppt/slides/slide10.xml><?xml version="1.0" encoding="utf-8"?>
-<p:sld xmlns:a="http://schemas.openxmlformats.org/drawingml/2006/main" xmlns:r="http://schemas.openxmlformats.org/officeDocument/2006/relationships" xmlns:p="http://schemas.openxmlformats.org/presentationml/2006/main">
-  <p:cSld name="Slide 10">
-    <p:bg>
-      <p:bgPr>
-        <a:solidFill>
-          <a:srgbClr val="F3F0EB"/>
-        </a:solidFill>
-        <a:effectLst/>
-      </p:bgPr>
-    </p:bg>
-    <p:spTree>
-      <p:nvGrpSpPr>
-        <p:cNvPr id="1" name=""/>
-        <p:cNvGrpSpPr/>
-        <p:nvPr/>
-      </p:nvGrpSpPr>
-      <p:grpSpPr>
-        <a:xfrm>
-          <a:off x="0" y="0"/>
-          <a:ext cx="0" cy="0"/>
-          <a:chOff x="0" y="0"/>
-          <a:chExt cx="0" cy="0"/>
-        </a:xfrm>
-      </p:grpSpPr>
-      <p:sp>
-        <p:nvSpPr>
-          <p:cNvPr id="2" name="Shape 0"/>
-          <p:cNvSpPr/>
-          <p:nvPr/>
-        </p:nvSpPr>
-        <p:spPr>
-          <a:xfrm>
-            <a:off x="0" y="4974336"/>
-            <a:ext cx="9144000" cy="169164"/>
-          </a:xfrm>
-          <a:prstGeom prst="rect">
-            <a:avLst/>
-          </a:prstGeom>
-          <a:solidFill>
-            <a:srgbClr val="CFC8BD"/>
-          </a:solidFill>
-          <a:ln w="12700">
-            <a:solidFill>
-              <a:srgbClr val="CFC8BD"/>
-            </a:solidFill>
-            <a:prstDash val="solid"/>
-          </a:ln>
-        </p:spPr>
-        <p:txBody>
-          <a:bodyPr/>
-          <a:lstStyle/>
-          <a:p>
-            <a:endParaRPr lang="fr-FR"/>
-          </a:p>
-        </p:txBody>
-      </p:sp>
-      <p:sp>
-        <p:nvSpPr>
-          <p:cNvPr id="3" name="Shape 1"/>
-          <p:cNvSpPr/>
-          <p:nvPr/>
-        </p:nvSpPr>
-        <p:spPr>
-          <a:xfrm>
-            <a:off x="8613648" y="411480"/>
-            <a:ext cx="10973" cy="4224528"/>
-          </a:xfrm>
-          <a:prstGeom prst="rect">
-            <a:avLst/>
-          </a:prstGeom>
-          <a:solidFill>
-            <a:srgbClr val="8B1A1A">
-              <a:alpha val="45000"/>
-            </a:srgbClr>
-          </a:solidFill>
-          <a:ln w="12700">
-            <a:solidFill>
-              <a:srgbClr val="8B1A1A">
-                <a:alpha val="45000"/>
-              </a:srgbClr>
-            </a:solidFill>
-            <a:prstDash val="solid"/>
-          </a:ln>
-        </p:spPr>
-        <p:txBody>
-          <a:bodyPr/>
-          <a:lstStyle/>
-          <a:p>
-            <a:endParaRPr lang="fr-FR"/>
-          </a:p>
-        </p:txBody>
-      </p:sp>
-      <p:sp>
-        <p:nvSpPr>
-          <p:cNvPr id="4" name="Shape 2"/>
-          <p:cNvSpPr/>
-          <p:nvPr/>
-        </p:nvSpPr>
-        <p:spPr>
-          <a:xfrm>
-            <a:off x="6876288" y="4773168"/>
-            <a:ext cx="1572768" cy="10973"/>
-          </a:xfrm>
-          <a:prstGeom prst="rect">
-            <a:avLst/>
-          </a:prstGeom>
-          <a:solidFill>
-            <a:srgbClr val="8B1A1A">
-              <a:alpha val="45000"/>
-            </a:srgbClr>
-          </a:solidFill>
-          <a:ln w="12700">
-            <a:solidFill>
-              <a:srgbClr val="8B1A1A">
-                <a:alpha val="45000"/>
-              </a:srgbClr>
-            </a:solidFill>
-            <a:prstDash val="solid"/>
-          </a:ln>
-        </p:spPr>
-        <p:txBody>
-          <a:bodyPr/>
-          <a:lstStyle/>
-          <a:p>
-            <a:endParaRPr lang="fr-FR"/>
-          </a:p>
-        </p:txBody>
-      </p:sp>
-      <p:sp>
-        <p:nvSpPr>
-          <p:cNvPr id="5" name="Shape 3"/>
-          <p:cNvSpPr/>
-          <p:nvPr/>
-        </p:nvSpPr>
-        <p:spPr>
-          <a:xfrm>
-            <a:off x="502920" y="164592"/>
-            <a:ext cx="8001000" cy="10973"/>
-          </a:xfrm>
-          <a:prstGeom prst="rect">
-            <a:avLst/>
-          </a:prstGeom>
-          <a:solidFill>
-            <a:srgbClr val="CFC8BD"/>
-          </a:solidFill>
-          <a:ln w="12700">
-            <a:solidFill>
-              <a:srgbClr val="CFC8BD"/>
-            </a:solidFill>
-            <a:prstDash val="solid"/>
-          </a:ln>
-        </p:spPr>
-        <p:txBody>
-          <a:bodyPr/>
-          <a:lstStyle/>
-          <a:p>
-            <a:endParaRPr lang="fr-FR"/>
-          </a:p>
-        </p:txBody>
-      </p:sp>
-      <p:sp>
-        <p:nvSpPr>
-          <p:cNvPr id="6" name="Text 4"/>
-          <p:cNvSpPr/>
-          <p:nvPr/>
-        </p:nvSpPr>
-        <p:spPr>
-          <a:xfrm>
-            <a:off x="4846320" y="228600"/>
-            <a:ext cx="3017520" cy="182880"/>
-          </a:xfrm>
-          <a:prstGeom prst="rect">
-            <a:avLst/>
-          </a:prstGeom>
-          <a:noFill/>
-          <a:ln/>
-        </p:spPr>
-        <p:txBody>
-          <a:bodyPr wrap="square" lIns="0" tIns="0" rIns="0" bIns="0" rtlCol="0" anchor="ctr"/>
-          <a:lstStyle/>
-          <a:p>
-            <a:pPr marL="0" indent="0" algn="r">
-              <a:buNone/>
-            </a:pPr>
-            <a:r>
-              <a:rPr lang="en-US" sz="750" kern="0" spc="200" dirty="0">
-                <a:solidFill>
-                  <a:srgbClr val="8B1A1A"/>
-                </a:solidFill>
-                <a:latin typeface="Garamond" pitchFamily="34" charset="0"/>
-                <a:ea typeface="Garamond" pitchFamily="34" charset="-122"/>
-                <a:cs typeface="Garamond" pitchFamily="34" charset="-120"/>
-              </a:rPr>
-              <a:t>DIAGNOSTIC</a:t>
-            </a:r>
-            <a:endParaRPr lang="en-US" sz="750" dirty="0"/>
-          </a:p>
-        </p:txBody>
-      </p:sp>
-      <p:sp>
-        <p:nvSpPr>
-          <p:cNvPr id="7" name="Text 5"/>
-          <p:cNvSpPr/>
-          <p:nvPr/>
-        </p:nvSpPr>
-        <p:spPr>
-          <a:xfrm>
-            <a:off x="8092440" y="219456"/>
-            <a:ext cx="347472" cy="182880"/>
-          </a:xfrm>
-          <a:prstGeom prst="rect">
-            <a:avLst/>
-          </a:prstGeom>
-          <a:noFill/>
-          <a:ln/>
-        </p:spPr>
-        <p:txBody>
-          <a:bodyPr wrap="square" lIns="0" tIns="0" rIns="0" bIns="0" rtlCol="0" anchor="ctr"/>
-          <a:lstStyle/>
-          <a:p>
-            <a:pPr marL="0" indent="0" algn="r">
-              <a:buNone/>
-            </a:pPr>
-            <a:r>
-              <a:rPr lang="en-US" sz="700" dirty="0">
-                <a:solidFill>
-                  <a:srgbClr val="A09080"/>
-                </a:solidFill>
-                <a:latin typeface="Garamond" pitchFamily="34" charset="0"/>
-                <a:ea typeface="Garamond" pitchFamily="34" charset="-122"/>
-                <a:cs typeface="Garamond" pitchFamily="34" charset="-120"/>
-              </a:rPr>
-              <a:t>10</a:t>
-            </a:r>
-            <a:endParaRPr lang="en-US" sz="700" dirty="0"/>
-          </a:p>
-        </p:txBody>
-      </p:sp>
-      <p:sp>
-        <p:nvSpPr>
-          <p:cNvPr id="8" name="Shape 6"/>
-          <p:cNvSpPr/>
-          <p:nvPr/>
-        </p:nvSpPr>
-        <p:spPr>
-          <a:xfrm>
-            <a:off x="502920" y="475488"/>
-            <a:ext cx="8001000" cy="10973"/>
-          </a:xfrm>
-          <a:prstGeom prst="rect">
-            <a:avLst/>
-          </a:prstGeom>
-          <a:solidFill>
-            <a:srgbClr val="CFC8BD"/>
-          </a:solidFill>
-          <a:ln w="12700">
-            <a:solidFill>
-              <a:srgbClr val="CFC8BD"/>
-            </a:solidFill>
-            <a:prstDash val="solid"/>
-          </a:ln>
-        </p:spPr>
-        <p:txBody>
-          <a:bodyPr/>
-          <a:lstStyle/>
-          <a:p>
-            <a:endParaRPr lang="fr-FR"/>
-          </a:p>
-        </p:txBody>
-      </p:sp>
-      <p:sp>
-        <p:nvSpPr>
-          <p:cNvPr id="9" name="Shape 7"/>
-          <p:cNvSpPr/>
-          <p:nvPr/>
-        </p:nvSpPr>
-        <p:spPr>
-          <a:xfrm>
-            <a:off x="0" y="475488"/>
-            <a:ext cx="4251960" cy="4498848"/>
-          </a:xfrm>
-          <a:prstGeom prst="rect">
-            <a:avLst/>
-          </a:prstGeom>
-          <a:solidFill>
-            <a:srgbClr val="1C2B3A"/>
-          </a:solidFill>
-          <a:ln w="12700">
-            <a:solidFill>
-              <a:srgbClr val="1C2B3A"/>
-            </a:solidFill>
-            <a:prstDash val="solid"/>
-          </a:ln>
-        </p:spPr>
-        <p:txBody>
-          <a:bodyPr/>
-          <a:lstStyle/>
-          <a:p>
-            <a:endParaRPr lang="fr-FR"/>
-          </a:p>
-        </p:txBody>
-      </p:sp>
-      <p:sp>
-        <p:nvSpPr>
-          <p:cNvPr id="10" name="Text 8"/>
-          <p:cNvSpPr/>
-          <p:nvPr/>
-        </p:nvSpPr>
-        <p:spPr>
-          <a:xfrm>
-            <a:off x="365760" y="713232"/>
-            <a:ext cx="3566160" cy="256032"/>
-          </a:xfrm>
-          <a:prstGeom prst="rect">
-            <a:avLst/>
-          </a:prstGeom>
-          <a:noFill/>
-          <a:ln/>
-        </p:spPr>
-        <p:txBody>
-          <a:bodyPr wrap="square" lIns="0" tIns="0" rIns="0" bIns="0" rtlCol="0" anchor="ctr"/>
-          <a:lstStyle/>
-          <a:p>
-            <a:pPr marL="0" indent="0">
-              <a:buNone/>
-            </a:pPr>
-            <a:r>
-              <a:rPr lang="en-US" sz="850" kern="0" spc="350" dirty="0">
-                <a:solidFill>
-                  <a:srgbClr val="A09080"/>
-                </a:solidFill>
-                <a:latin typeface="Garamond" pitchFamily="34" charset="0"/>
-                <a:ea typeface="Garamond" pitchFamily="34" charset="-122"/>
-                <a:cs typeface="Garamond" pitchFamily="34" charset="-120"/>
-              </a:rPr>
-              <a:t>AUJOURD'HUI</a:t>
-            </a:r>
-            <a:endParaRPr lang="en-US" sz="850" dirty="0"/>
-          </a:p>
-        </p:txBody>
-      </p:sp>
-      <p:sp>
-        <p:nvSpPr>
-          <p:cNvPr id="11" name="Shape 9"/>
-          <p:cNvSpPr/>
-          <p:nvPr/>
-        </p:nvSpPr>
-        <p:spPr>
-          <a:xfrm>
-            <a:off x="365760" y="1143000"/>
-            <a:ext cx="20117" cy="749808"/>
-          </a:xfrm>
-          <a:prstGeom prst="rect">
-            <a:avLst/>
-          </a:prstGeom>
-          <a:solidFill>
-            <a:srgbClr val="8B1A1A"/>
-          </a:solidFill>
-          <a:ln w="12700">
-            <a:solidFill>
-              <a:srgbClr val="8B1A1A"/>
-            </a:solidFill>
-            <a:prstDash val="solid"/>
-          </a:ln>
-        </p:spPr>
-        <p:txBody>
-          <a:bodyPr/>
-          <a:lstStyle/>
-          <a:p>
-            <a:endParaRPr lang="fr-FR"/>
-          </a:p>
-        </p:txBody>
-      </p:sp>
-      <p:sp>
-        <p:nvSpPr>
-          <p:cNvPr id="12" name="Text 10"/>
-          <p:cNvSpPr/>
-          <p:nvPr/>
-        </p:nvSpPr>
-        <p:spPr>
-          <a:xfrm>
-            <a:off x="530352" y="1143000"/>
-            <a:ext cx="3520440" cy="749808"/>
-          </a:xfrm>
-          <a:prstGeom prst="rect">
-            <a:avLst/>
-          </a:prstGeom>
-          <a:noFill/>
-          <a:ln/>
-        </p:spPr>
-        <p:txBody>
-          <a:bodyPr wrap="square" lIns="0" tIns="0" rIns="0" bIns="0" rtlCol="0" anchor="t"/>
-          <a:lstStyle/>
-          <a:p>
-            <a:pPr marL="0" indent="0">
-              <a:buNone/>
-            </a:pPr>
-            <a:r>
-              <a:rPr lang="en-US" sz="1150" i="1" dirty="0">
-                <a:solidFill>
-                  <a:srgbClr val="8E5B3F"/>
-                </a:solidFill>
-                <a:latin typeface="Calibri" pitchFamily="34" charset="0"/>
-                <a:ea typeface="Calibri" pitchFamily="34" charset="-122"/>
-                <a:cs typeface="Calibri" pitchFamily="34" charset="-120"/>
-              </a:rPr>
-              <a:t>[Situation fiscale — TMI, charges, pression IR/PS]</a:t>
-            </a:r>
-            <a:endParaRPr lang="en-US" sz="1150" dirty="0"/>
-          </a:p>
-        </p:txBody>
-      </p:sp>
-      <p:sp>
-        <p:nvSpPr>
-          <p:cNvPr id="13" name="Shape 11"/>
-          <p:cNvSpPr/>
-          <p:nvPr/>
-        </p:nvSpPr>
-        <p:spPr>
-          <a:xfrm>
-            <a:off x="365760" y="2167128"/>
-            <a:ext cx="20117" cy="749808"/>
-          </a:xfrm>
-          <a:prstGeom prst="rect">
-            <a:avLst/>
-          </a:prstGeom>
-          <a:solidFill>
-            <a:srgbClr val="8B1A1A"/>
-          </a:solidFill>
-          <a:ln w="12700">
-            <a:solidFill>
-              <a:srgbClr val="8B1A1A"/>
-            </a:solidFill>
-            <a:prstDash val="solid"/>
-          </a:ln>
-        </p:spPr>
-        <p:txBody>
-          <a:bodyPr/>
-          <a:lstStyle/>
-          <a:p>
-            <a:endParaRPr lang="fr-FR"/>
-          </a:p>
-        </p:txBody>
-      </p:sp>
-      <p:sp>
-        <p:nvSpPr>
-          <p:cNvPr id="14" name="Text 12"/>
-          <p:cNvSpPr/>
-          <p:nvPr/>
-        </p:nvSpPr>
-        <p:spPr>
-          <a:xfrm>
-            <a:off x="530352" y="2167128"/>
-            <a:ext cx="3520440" cy="749808"/>
-          </a:xfrm>
-          <a:prstGeom prst="rect">
-            <a:avLst/>
-          </a:prstGeom>
-          <a:noFill/>
-          <a:ln/>
-        </p:spPr>
-        <p:txBody>
-          <a:bodyPr wrap="square" lIns="0" tIns="0" rIns="0" bIns="0" rtlCol="0" anchor="t"/>
-          <a:lstStyle/>
-          <a:p>
-            <a:pPr marL="0" indent="0">
-              <a:buNone/>
-            </a:pPr>
-            <a:r>
-              <a:rPr lang="en-US" sz="1150" i="1" dirty="0">
-                <a:solidFill>
-                  <a:srgbClr val="8E5B3F"/>
-                </a:solidFill>
-                <a:latin typeface="Calibri" pitchFamily="34" charset="0"/>
-                <a:ea typeface="Calibri" pitchFamily="34" charset="-122"/>
-                <a:cs typeface="Calibri" pitchFamily="34" charset="-120"/>
-              </a:rPr>
-              <a:t>[Transmission — droits estimés au premier décès]</a:t>
-            </a:r>
-            <a:endParaRPr lang="en-US" sz="1150" dirty="0"/>
-          </a:p>
-        </p:txBody>
-      </p:sp>
-      <p:sp>
-        <p:nvSpPr>
-          <p:cNvPr id="15" name="Shape 13"/>
-          <p:cNvSpPr/>
-          <p:nvPr/>
-        </p:nvSpPr>
-        <p:spPr>
-          <a:xfrm>
-            <a:off x="365760" y="3191256"/>
-            <a:ext cx="20117" cy="749808"/>
-          </a:xfrm>
-          <a:prstGeom prst="rect">
-            <a:avLst/>
-          </a:prstGeom>
-          <a:solidFill>
-            <a:srgbClr val="8B1A1A"/>
-          </a:solidFill>
-          <a:ln w="12700">
-            <a:solidFill>
-              <a:srgbClr val="8B1A1A"/>
-            </a:solidFill>
-            <a:prstDash val="solid"/>
-          </a:ln>
-        </p:spPr>
-        <p:txBody>
-          <a:bodyPr/>
-          <a:lstStyle/>
-          <a:p>
-            <a:endParaRPr lang="fr-FR"/>
-          </a:p>
-        </p:txBody>
-      </p:sp>
-      <p:sp>
-        <p:nvSpPr>
-          <p:cNvPr id="16" name="Text 14"/>
-          <p:cNvSpPr/>
-          <p:nvPr/>
-        </p:nvSpPr>
-        <p:spPr>
-          <a:xfrm>
-            <a:off x="530352" y="3191256"/>
-            <a:ext cx="3520440" cy="749808"/>
-          </a:xfrm>
-          <a:prstGeom prst="rect">
-            <a:avLst/>
-          </a:prstGeom>
-          <a:noFill/>
-          <a:ln/>
-        </p:spPr>
-        <p:txBody>
-          <a:bodyPr wrap="square" lIns="0" tIns="0" rIns="0" bIns="0" rtlCol="0" anchor="t"/>
-          <a:lstStyle/>
-          <a:p>
-            <a:pPr marL="0" indent="0">
-              <a:buNone/>
-            </a:pPr>
-            <a:r>
-              <a:rPr lang="en-US" sz="1150" i="1" dirty="0">
-                <a:solidFill>
-                  <a:srgbClr val="8E5B3F"/>
-                </a:solidFill>
-                <a:latin typeface="Calibri" pitchFamily="34" charset="0"/>
-                <a:ea typeface="Calibri" pitchFamily="34" charset="-122"/>
-                <a:cs typeface="Calibri" pitchFamily="34" charset="-120"/>
-              </a:rPr>
-              <a:t>[Revenus futurs — lacune ou manque identifié]</a:t>
-            </a:r>
-            <a:endParaRPr lang="en-US" sz="1150" dirty="0"/>
-          </a:p>
-        </p:txBody>
-      </p:sp>
-      <p:sp>
-        <p:nvSpPr>
-          <p:cNvPr id="17" name="Text 15"/>
-          <p:cNvSpPr/>
-          <p:nvPr/>
-        </p:nvSpPr>
-        <p:spPr>
-          <a:xfrm>
-            <a:off x="4526280" y="713232"/>
-            <a:ext cx="3840480" cy="256032"/>
-          </a:xfrm>
-          <a:prstGeom prst="rect">
-            <a:avLst/>
-          </a:prstGeom>
-          <a:noFill/>
-          <a:ln/>
-        </p:spPr>
-        <p:txBody>
-          <a:bodyPr wrap="square" lIns="0" tIns="0" rIns="0" bIns="0" rtlCol="0" anchor="ctr"/>
-          <a:lstStyle/>
-          <a:p>
-            <a:pPr marL="0" indent="0">
-              <a:buNone/>
-            </a:pPr>
-            <a:r>
-              <a:rPr lang="en-US" sz="850" kern="0" spc="350" dirty="0">
-                <a:solidFill>
-                  <a:srgbClr val="8B1A1A"/>
-                </a:solidFill>
-                <a:latin typeface="Garamond" pitchFamily="34" charset="0"/>
-                <a:ea typeface="Garamond" pitchFamily="34" charset="-122"/>
-                <a:cs typeface="Garamond" pitchFamily="34" charset="-120"/>
-              </a:rPr>
-              <a:t>AVEC AFFILIOR</a:t>
-            </a:r>
-            <a:endParaRPr lang="en-US" sz="850" dirty="0"/>
-          </a:p>
-        </p:txBody>
-      </p:sp>
-      <p:sp>
-        <p:nvSpPr>
-          <p:cNvPr id="18" name="Shape 16"/>
-          <p:cNvSpPr/>
-          <p:nvPr/>
-        </p:nvSpPr>
-        <p:spPr>
-          <a:xfrm>
-            <a:off x="4526280" y="1143000"/>
-            <a:ext cx="20117" cy="749808"/>
-          </a:xfrm>
-          <a:prstGeom prst="rect">
-            <a:avLst/>
-          </a:prstGeom>
-          <a:solidFill>
-            <a:srgbClr val="8B1A1A"/>
-          </a:solidFill>
-          <a:ln w="12700">
-            <a:solidFill>
-              <a:srgbClr val="8B1A1A"/>
-            </a:solidFill>
-            <a:prstDash val="solid"/>
-          </a:ln>
-        </p:spPr>
-        <p:txBody>
-          <a:bodyPr/>
-          <a:lstStyle/>
-          <a:p>
-            <a:endParaRPr lang="fr-FR"/>
-          </a:p>
-        </p:txBody>
-      </p:sp>
-      <p:sp>
-        <p:nvSpPr>
-          <p:cNvPr id="19" name="Text 17"/>
-          <p:cNvSpPr/>
-          <p:nvPr/>
-        </p:nvSpPr>
-        <p:spPr>
-          <a:xfrm>
-            <a:off x="4681728" y="1143000"/>
-            <a:ext cx="3703320" cy="749808"/>
-          </a:xfrm>
-          <a:prstGeom prst="rect">
-            <a:avLst/>
-          </a:prstGeom>
-          <a:noFill/>
-          <a:ln/>
-        </p:spPr>
-        <p:txBody>
-          <a:bodyPr wrap="square" lIns="0" tIns="0" rIns="0" bIns="0" rtlCol="0" anchor="t"/>
-          <a:lstStyle/>
-          <a:p>
-            <a:pPr marL="0" indent="0">
-              <a:buNone/>
-            </a:pPr>
-            <a:r>
-              <a:rPr lang="en-US" sz="1150" i="1" dirty="0">
-                <a:solidFill>
-                  <a:srgbClr val="8E5B3F"/>
-                </a:solidFill>
-                <a:latin typeface="Calibri" pitchFamily="34" charset="0"/>
-                <a:ea typeface="Calibri" pitchFamily="34" charset="-122"/>
-                <a:cs typeface="Calibri" pitchFamily="34" charset="-120"/>
-              </a:rPr>
-              <a:t>[Optimisation IR/PS — dispositifs et enveloppes recommandés]</a:t>
-            </a:r>
-            <a:endParaRPr lang="en-US" sz="1150" dirty="0"/>
-          </a:p>
-        </p:txBody>
-      </p:sp>
-      <p:sp>
-        <p:nvSpPr>
-          <p:cNvPr id="20" name="Shape 18"/>
-          <p:cNvSpPr/>
-          <p:nvPr/>
-        </p:nvSpPr>
-        <p:spPr>
-          <a:xfrm>
-            <a:off x="4526280" y="2167128"/>
-            <a:ext cx="20117" cy="749808"/>
-          </a:xfrm>
-          <a:prstGeom prst="rect">
-            <a:avLst/>
-          </a:prstGeom>
-          <a:solidFill>
-            <a:srgbClr val="8B1A1A"/>
-          </a:solidFill>
-          <a:ln w="12700">
-            <a:solidFill>
-              <a:srgbClr val="8B1A1A"/>
-            </a:solidFill>
-            <a:prstDash val="solid"/>
-          </a:ln>
-        </p:spPr>
-        <p:txBody>
-          <a:bodyPr/>
-          <a:lstStyle/>
-          <a:p>
-            <a:endParaRPr lang="fr-FR"/>
-          </a:p>
-        </p:txBody>
-      </p:sp>
-      <p:sp>
-        <p:nvSpPr>
-          <p:cNvPr id="21" name="Text 19"/>
-          <p:cNvSpPr/>
-          <p:nvPr/>
-        </p:nvSpPr>
-        <p:spPr>
-          <a:xfrm>
-            <a:off x="4681728" y="2167128"/>
-            <a:ext cx="3703320" cy="749808"/>
-          </a:xfrm>
-          <a:prstGeom prst="rect">
-            <a:avLst/>
-          </a:prstGeom>
-          <a:noFill/>
-          <a:ln/>
-        </p:spPr>
-        <p:txBody>
-          <a:bodyPr wrap="square" lIns="0" tIns="0" rIns="0" bIns="0" rtlCol="0" anchor="t"/>
-          <a:lstStyle/>
-          <a:p>
-            <a:pPr marL="0" indent="0">
-              <a:buNone/>
-            </a:pPr>
-            <a:r>
-              <a:rPr lang="en-US" sz="1150" i="1" dirty="0">
-                <a:solidFill>
-                  <a:srgbClr val="8E5B3F"/>
-                </a:solidFill>
-                <a:latin typeface="Calibri" pitchFamily="34" charset="0"/>
-                <a:ea typeface="Calibri" pitchFamily="34" charset="-122"/>
-                <a:cs typeface="Calibri" pitchFamily="34" charset="-120"/>
-              </a:rPr>
-              <a:t>[Transmission anticipée — droits réduits de X €]</a:t>
-            </a:r>
-            <a:endParaRPr lang="en-US" sz="1150" dirty="0"/>
-          </a:p>
-        </p:txBody>
-      </p:sp>
-      <p:sp>
-        <p:nvSpPr>
-          <p:cNvPr id="22" name="Shape 20"/>
-          <p:cNvSpPr/>
-          <p:nvPr/>
-        </p:nvSpPr>
-        <p:spPr>
-          <a:xfrm>
-            <a:off x="4526280" y="3191256"/>
-            <a:ext cx="20117" cy="749808"/>
-          </a:xfrm>
-          <a:prstGeom prst="rect">
-            <a:avLst/>
-          </a:prstGeom>
-          <a:solidFill>
-            <a:srgbClr val="8B1A1A"/>
-          </a:solidFill>
-          <a:ln w="12700">
-            <a:solidFill>
-              <a:srgbClr val="8B1A1A"/>
-            </a:solidFill>
-            <a:prstDash val="solid"/>
-          </a:ln>
-        </p:spPr>
-        <p:txBody>
-          <a:bodyPr/>
-          <a:lstStyle/>
-          <a:p>
-            <a:endParaRPr lang="fr-FR"/>
-          </a:p>
-        </p:txBody>
-      </p:sp>
-      <p:sp>
-        <p:nvSpPr>
-          <p:cNvPr id="23" name="Text 21"/>
-          <p:cNvSpPr/>
-          <p:nvPr/>
-        </p:nvSpPr>
-        <p:spPr>
-          <a:xfrm>
-            <a:off x="4681728" y="3191256"/>
-            <a:ext cx="3703320" cy="749808"/>
-          </a:xfrm>
-          <a:prstGeom prst="rect">
-            <a:avLst/>
-          </a:prstGeom>
-          <a:noFill/>
-          <a:ln/>
-        </p:spPr>
-        <p:txBody>
-          <a:bodyPr wrap="square" lIns="0" tIns="0" rIns="0" bIns="0" rtlCol="0" anchor="t"/>
-          <a:lstStyle/>
-          <a:p>
-            <a:pPr marL="0" indent="0">
-              <a:buNone/>
-            </a:pPr>
-            <a:r>
-              <a:rPr lang="en-US" sz="1150" i="1" dirty="0">
-                <a:solidFill>
-                  <a:srgbClr val="8E5B3F"/>
-                </a:solidFill>
-                <a:latin typeface="Calibri" pitchFamily="34" charset="0"/>
-                <a:ea typeface="Calibri" pitchFamily="34" charset="-122"/>
-                <a:cs typeface="Calibri" pitchFamily="34" charset="-120"/>
-              </a:rPr>
-              <a:t>[Revenus complémentaires dès [ANNÉE] — X €/an]</a:t>
-            </a:r>
-            <a:endParaRPr lang="en-US" sz="1150" dirty="0"/>
-          </a:p>
-        </p:txBody>
-      </p:sp>
-      <p:sp>
-        <p:nvSpPr>
-          <p:cNvPr id="24" name="Text 22"/>
-          <p:cNvSpPr/>
-          <p:nvPr/>
-        </p:nvSpPr>
-        <p:spPr>
-          <a:xfrm>
-            <a:off x="2560320" y="5001768"/>
-            <a:ext cx="6080760" cy="118872"/>
-          </a:xfrm>
-          <a:prstGeom prst="rect">
-            <a:avLst/>
-          </a:prstGeom>
-          <a:noFill/>
-          <a:ln/>
-        </p:spPr>
-        <p:txBody>
-          <a:bodyPr wrap="square" lIns="0" tIns="0" rIns="0" bIns="0" rtlCol="0" anchor="ctr"/>
-          <a:lstStyle/>
-          <a:p>
-            <a:pPr marL="0" indent="0" algn="ctr">
-              <a:buNone/>
-            </a:pPr>
-            <a:r>
-              <a:rPr lang="en-US" sz="680" i="1" dirty="0">
-                <a:solidFill>
-                  <a:srgbClr val="A09080"/>
-                </a:solidFill>
-                <a:latin typeface="Calibri" pitchFamily="34" charset="0"/>
-                <a:ea typeface="Calibri" pitchFamily="34" charset="-122"/>
-                <a:cs typeface="Calibri" pitchFamily="34" charset="-120"/>
-              </a:rPr>
-              <a:t>Affilior Gestion Privée  ·  Confidentiel  ·  [MOIS ANNÉE]  ·  Ce document ne constitue pas un conseil en investissement au sens MIF2</a:t>
-            </a:r>
-            <a:endParaRPr lang="en-US" sz="680" dirty="0"/>
-          </a:p>
-        </p:txBody>
-      </p:sp>
-    </p:spTree>
-  </p:cSld>
-  <p:clrMapOvr>
-    <a:masterClrMapping/>
-  </p:clrMapOvr>
-</p:sld>
-</file>
-
 <file path=ppt/slides/slide11.xml><?xml version="1.0" encoding="utf-8"?>
 <p:sld xmlns:a="http://schemas.openxmlformats.org/drawingml/2006/main" xmlns:r="http://schemas.openxmlformats.org/officeDocument/2006/relationships" xmlns:p="http://schemas.openxmlformats.org/presentationml/2006/main">
   <p:cSld name="Slide 11">
@@ -4867,7 +3843,7 @@
         <p:spPr>
           <a:xfrm>
             <a:off x="502920" y="1783080"/>
-            <a:ext cx="2560320" cy="1417320"/>
+            <a:ext cx="2560320" cy="2880360"/>
           </a:xfrm>
           <a:prstGeom prst="rect">
             <a:avLst/>
@@ -4894,194 +3870,6 @@
               <a:t>[Description du projet 1 — contexte, montant envisagé, horizon, implications patrimoniales]</a:t>
             </a:r>
             <a:endParaRPr lang="en-US" sz="1150" dirty="0"/>
-          </a:p>
-        </p:txBody>
-      </p:sp>
-      <p:sp>
-        <p:nvSpPr>
-          <p:cNvPr id="15" name="Shape 12"/>
-          <p:cNvSpPr/>
-          <p:nvPr/>
-        </p:nvSpPr>
-        <p:spPr>
-          <a:xfrm>
-            <a:off x="502920" y="3273552"/>
-            <a:ext cx="2560320" cy="10973"/>
-          </a:xfrm>
-          <a:prstGeom prst="rect">
-            <a:avLst/>
-          </a:prstGeom>
-          <a:solidFill>
-            <a:srgbClr val="E5E0D8"/>
-          </a:solidFill>
-          <a:ln w="12700">
-            <a:solidFill>
-              <a:srgbClr val="E5E0D8"/>
-            </a:solidFill>
-            <a:prstDash val="solid"/>
-          </a:ln>
-        </p:spPr>
-        <p:txBody>
-          <a:bodyPr/>
-          <a:lstStyle/>
-          <a:p>
-            <a:endParaRPr lang="fr-FR"/>
-          </a:p>
-        </p:txBody>
-      </p:sp>
-      <p:sp>
-        <p:nvSpPr>
-          <p:cNvPr id="16" name="Text 13"/>
-          <p:cNvSpPr/>
-          <p:nvPr/>
-        </p:nvSpPr>
-        <p:spPr>
-          <a:xfrm>
-            <a:off x="502920" y="3364992"/>
-            <a:ext cx="1188720" cy="201168"/>
-          </a:xfrm>
-          <a:prstGeom prst="rect">
-            <a:avLst/>
-          </a:prstGeom>
-          <a:noFill/>
-          <a:ln/>
-        </p:spPr>
-        <p:txBody>
-          <a:bodyPr wrap="square" lIns="0" tIns="0" rIns="0" bIns="0" rtlCol="0" anchor="ctr"/>
-          <a:lstStyle/>
-          <a:p>
-            <a:pPr marL="0" indent="0">
-              <a:buNone/>
-            </a:pPr>
-            <a:r>
-              <a:rPr lang="en-US" sz="750" kern="0" spc="250" dirty="0">
-                <a:solidFill>
-                  <a:srgbClr val="8B1A1A"/>
-                </a:solidFill>
-                <a:latin typeface="Garamond" pitchFamily="34" charset="0"/>
-                <a:ea typeface="Garamond" pitchFamily="34" charset="-122"/>
-                <a:cs typeface="Garamond" pitchFamily="34" charset="-120"/>
-              </a:rPr>
-              <a:t>HORIZON</a:t>
-            </a:r>
-            <a:endParaRPr lang="en-US" sz="750" dirty="0"/>
-          </a:p>
-        </p:txBody>
-      </p:sp>
-      <p:sp>
-        <p:nvSpPr>
-          <p:cNvPr id="17" name="Text 14"/>
-          <p:cNvSpPr/>
-          <p:nvPr/>
-        </p:nvSpPr>
-        <p:spPr>
-          <a:xfrm>
-            <a:off x="502920" y="3566160"/>
-            <a:ext cx="2560320" cy="274320"/>
-          </a:xfrm>
-          <a:prstGeom prst="rect">
-            <a:avLst/>
-          </a:prstGeom>
-          <a:noFill/>
-          <a:ln/>
-        </p:spPr>
-        <p:txBody>
-          <a:bodyPr wrap="square" lIns="0" tIns="0" rIns="0" bIns="0" rtlCol="0" anchor="t"/>
-          <a:lstStyle/>
-          <a:p>
-            <a:pPr marL="0" indent="0">
-              <a:buNone/>
-            </a:pPr>
-            <a:r>
-              <a:rPr lang="en-US" sz="1000" i="1" dirty="0">
-                <a:solidFill>
-                  <a:srgbClr val="8E5B3F"/>
-                </a:solidFill>
-                <a:latin typeface="Calibri" pitchFamily="34" charset="0"/>
-                <a:ea typeface="Calibri" pitchFamily="34" charset="-122"/>
-                <a:cs typeface="Calibri" pitchFamily="34" charset="-120"/>
-              </a:rPr>
-              <a:t>[Court / Moyen / Long terme]</a:t>
-            </a:r>
-            <a:endParaRPr lang="en-US" sz="1000" dirty="0"/>
-          </a:p>
-        </p:txBody>
-      </p:sp>
-      <p:sp>
-        <p:nvSpPr>
-          <p:cNvPr id="18" name="Text 15"/>
-          <p:cNvSpPr/>
-          <p:nvPr/>
-        </p:nvSpPr>
-        <p:spPr>
-          <a:xfrm>
-            <a:off x="502920" y="3913632"/>
-            <a:ext cx="2560320" cy="201168"/>
-          </a:xfrm>
-          <a:prstGeom prst="rect">
-            <a:avLst/>
-          </a:prstGeom>
-          <a:noFill/>
-          <a:ln/>
-        </p:spPr>
-        <p:txBody>
-          <a:bodyPr wrap="square" lIns="0" tIns="0" rIns="0" bIns="0" rtlCol="0" anchor="ctr"/>
-          <a:lstStyle/>
-          <a:p>
-            <a:pPr marL="0" indent="0">
-              <a:buNone/>
-            </a:pPr>
-            <a:r>
-              <a:rPr lang="en-US" sz="750" kern="0" spc="250" dirty="0">
-                <a:solidFill>
-                  <a:srgbClr val="8B1A1A"/>
-                </a:solidFill>
-                <a:latin typeface="Garamond" pitchFamily="34" charset="0"/>
-                <a:ea typeface="Garamond" pitchFamily="34" charset="-122"/>
-                <a:cs typeface="Garamond" pitchFamily="34" charset="-120"/>
-              </a:rPr>
-              <a:t>MONTANT ESTIMÉ</a:t>
-            </a:r>
-            <a:endParaRPr lang="en-US" sz="750" dirty="0"/>
-          </a:p>
-        </p:txBody>
-      </p:sp>
-      <p:sp>
-        <p:nvSpPr>
-          <p:cNvPr id="19" name="Text 16"/>
-          <p:cNvSpPr/>
-          <p:nvPr/>
-        </p:nvSpPr>
-        <p:spPr>
-          <a:xfrm>
-            <a:off x="502920" y="4114800"/>
-            <a:ext cx="2560320" cy="274320"/>
-          </a:xfrm>
-          <a:prstGeom prst="rect">
-            <a:avLst/>
-          </a:prstGeom>
-          <a:noFill/>
-          <a:ln/>
-        </p:spPr>
-        <p:txBody>
-          <a:bodyPr wrap="square" lIns="0" tIns="0" rIns="0" bIns="0" rtlCol="0" anchor="t"/>
-          <a:lstStyle/>
-          <a:p>
-            <a:pPr marL="0" indent="0">
-              <a:buNone/>
-            </a:pPr>
-            <a:r>
-              <a:rPr lang="en-US" sz="1000" i="1" dirty="0">
-                <a:solidFill>
-                  <a:srgbClr val="8E5B3F"/>
-                </a:solidFill>
-                <a:latin typeface="Calibri" pitchFamily="34" charset="0"/>
-                <a:ea typeface="Calibri" pitchFamily="34" charset="-122"/>
-                <a:cs typeface="Calibri" pitchFamily="34" charset="-120"/>
-              </a:rPr>
-              <a:t>[X €]</a:t>
-            </a:r>
-            <a:endParaRPr lang="en-US" sz="1000" dirty="0"/>
           </a:p>
         </p:txBody>
       </p:sp>
@@ -5165,7 +3953,7 @@
         <p:spPr>
           <a:xfrm>
             <a:off x="3200400" y="1783080"/>
-            <a:ext cx="2560320" cy="1417320"/>
+            <a:ext cx="2560320" cy="2880360"/>
           </a:xfrm>
           <a:prstGeom prst="rect">
             <a:avLst/>
@@ -5192,194 +3980,6 @@
               <a:t>[Description du projet 2 — contexte, montant envisagé, horizon, implications patrimoniales]</a:t>
             </a:r>
             <a:endParaRPr lang="en-US" sz="1150" dirty="0"/>
-          </a:p>
-        </p:txBody>
-      </p:sp>
-      <p:sp>
-        <p:nvSpPr>
-          <p:cNvPr id="23" name="Shape 20"/>
-          <p:cNvSpPr/>
-          <p:nvPr/>
-        </p:nvSpPr>
-        <p:spPr>
-          <a:xfrm>
-            <a:off x="3200400" y="3273552"/>
-            <a:ext cx="2560320" cy="10973"/>
-          </a:xfrm>
-          <a:prstGeom prst="rect">
-            <a:avLst/>
-          </a:prstGeom>
-          <a:solidFill>
-            <a:srgbClr val="E5E0D8"/>
-          </a:solidFill>
-          <a:ln w="12700">
-            <a:solidFill>
-              <a:srgbClr val="E5E0D8"/>
-            </a:solidFill>
-            <a:prstDash val="solid"/>
-          </a:ln>
-        </p:spPr>
-        <p:txBody>
-          <a:bodyPr/>
-          <a:lstStyle/>
-          <a:p>
-            <a:endParaRPr lang="fr-FR"/>
-          </a:p>
-        </p:txBody>
-      </p:sp>
-      <p:sp>
-        <p:nvSpPr>
-          <p:cNvPr id="24" name="Text 21"/>
-          <p:cNvSpPr/>
-          <p:nvPr/>
-        </p:nvSpPr>
-        <p:spPr>
-          <a:xfrm>
-            <a:off x="3200400" y="3364992"/>
-            <a:ext cx="1188720" cy="201168"/>
-          </a:xfrm>
-          <a:prstGeom prst="rect">
-            <a:avLst/>
-          </a:prstGeom>
-          <a:noFill/>
-          <a:ln/>
-        </p:spPr>
-        <p:txBody>
-          <a:bodyPr wrap="square" lIns="0" tIns="0" rIns="0" bIns="0" rtlCol="0" anchor="ctr"/>
-          <a:lstStyle/>
-          <a:p>
-            <a:pPr marL="0" indent="0">
-              <a:buNone/>
-            </a:pPr>
-            <a:r>
-              <a:rPr lang="en-US" sz="750" kern="0" spc="250" dirty="0">
-                <a:solidFill>
-                  <a:srgbClr val="8B1A1A"/>
-                </a:solidFill>
-                <a:latin typeface="Garamond" pitchFamily="34" charset="0"/>
-                <a:ea typeface="Garamond" pitchFamily="34" charset="-122"/>
-                <a:cs typeface="Garamond" pitchFamily="34" charset="-120"/>
-              </a:rPr>
-              <a:t>HORIZON</a:t>
-            </a:r>
-            <a:endParaRPr lang="en-US" sz="750" dirty="0"/>
-          </a:p>
-        </p:txBody>
-      </p:sp>
-      <p:sp>
-        <p:nvSpPr>
-          <p:cNvPr id="25" name="Text 22"/>
-          <p:cNvSpPr/>
-          <p:nvPr/>
-        </p:nvSpPr>
-        <p:spPr>
-          <a:xfrm>
-            <a:off x="3200400" y="3566160"/>
-            <a:ext cx="2560320" cy="274320"/>
-          </a:xfrm>
-          <a:prstGeom prst="rect">
-            <a:avLst/>
-          </a:prstGeom>
-          <a:noFill/>
-          <a:ln/>
-        </p:spPr>
-        <p:txBody>
-          <a:bodyPr wrap="square" lIns="0" tIns="0" rIns="0" bIns="0" rtlCol="0" anchor="t"/>
-          <a:lstStyle/>
-          <a:p>
-            <a:pPr marL="0" indent="0">
-              <a:buNone/>
-            </a:pPr>
-            <a:r>
-              <a:rPr lang="en-US" sz="1000" i="1" dirty="0">
-                <a:solidFill>
-                  <a:srgbClr val="8E5B3F"/>
-                </a:solidFill>
-                <a:latin typeface="Calibri" pitchFamily="34" charset="0"/>
-                <a:ea typeface="Calibri" pitchFamily="34" charset="-122"/>
-                <a:cs typeface="Calibri" pitchFamily="34" charset="-120"/>
-              </a:rPr>
-              <a:t>[Court / Moyen / Long terme]</a:t>
-            </a:r>
-            <a:endParaRPr lang="en-US" sz="1000" dirty="0"/>
-          </a:p>
-        </p:txBody>
-      </p:sp>
-      <p:sp>
-        <p:nvSpPr>
-          <p:cNvPr id="26" name="Text 23"/>
-          <p:cNvSpPr/>
-          <p:nvPr/>
-        </p:nvSpPr>
-        <p:spPr>
-          <a:xfrm>
-            <a:off x="3200400" y="3913632"/>
-            <a:ext cx="2560320" cy="201168"/>
-          </a:xfrm>
-          <a:prstGeom prst="rect">
-            <a:avLst/>
-          </a:prstGeom>
-          <a:noFill/>
-          <a:ln/>
-        </p:spPr>
-        <p:txBody>
-          <a:bodyPr wrap="square" lIns="0" tIns="0" rIns="0" bIns="0" rtlCol="0" anchor="ctr"/>
-          <a:lstStyle/>
-          <a:p>
-            <a:pPr marL="0" indent="0">
-              <a:buNone/>
-            </a:pPr>
-            <a:r>
-              <a:rPr lang="en-US" sz="750" kern="0" spc="250" dirty="0">
-                <a:solidFill>
-                  <a:srgbClr val="8B1A1A"/>
-                </a:solidFill>
-                <a:latin typeface="Garamond" pitchFamily="34" charset="0"/>
-                <a:ea typeface="Garamond" pitchFamily="34" charset="-122"/>
-                <a:cs typeface="Garamond" pitchFamily="34" charset="-120"/>
-              </a:rPr>
-              <a:t>MONTANT ESTIMÉ</a:t>
-            </a:r>
-            <a:endParaRPr lang="en-US" sz="750" dirty="0"/>
-          </a:p>
-        </p:txBody>
-      </p:sp>
-      <p:sp>
-        <p:nvSpPr>
-          <p:cNvPr id="27" name="Text 24"/>
-          <p:cNvSpPr/>
-          <p:nvPr/>
-        </p:nvSpPr>
-        <p:spPr>
-          <a:xfrm>
-            <a:off x="3200400" y="4114800"/>
-            <a:ext cx="2560320" cy="274320"/>
-          </a:xfrm>
-          <a:prstGeom prst="rect">
-            <a:avLst/>
-          </a:prstGeom>
-          <a:noFill/>
-          <a:ln/>
-        </p:spPr>
-        <p:txBody>
-          <a:bodyPr wrap="square" lIns="0" tIns="0" rIns="0" bIns="0" rtlCol="0" anchor="t"/>
-          <a:lstStyle/>
-          <a:p>
-            <a:pPr marL="0" indent="0">
-              <a:buNone/>
-            </a:pPr>
-            <a:r>
-              <a:rPr lang="en-US" sz="1000" i="1" dirty="0">
-                <a:solidFill>
-                  <a:srgbClr val="8E5B3F"/>
-                </a:solidFill>
-                <a:latin typeface="Calibri" pitchFamily="34" charset="0"/>
-                <a:ea typeface="Calibri" pitchFamily="34" charset="-122"/>
-                <a:cs typeface="Calibri" pitchFamily="34" charset="-120"/>
-              </a:rPr>
-              <a:t>[X €]</a:t>
-            </a:r>
-            <a:endParaRPr lang="en-US" sz="1000" dirty="0"/>
           </a:p>
         </p:txBody>
       </p:sp>
@@ -5463,7 +4063,7 @@
         <p:spPr>
           <a:xfrm>
             <a:off x="5897880" y="1783080"/>
-            <a:ext cx="2560320" cy="1417320"/>
+            <a:ext cx="2560320" cy="2880360"/>
           </a:xfrm>
           <a:prstGeom prst="rect">
             <a:avLst/>
@@ -5490,194 +4090,6 @@
               <a:t>[Description du projet 3 — contexte, montant envisagé, horizon, implications patrimoniales]</a:t>
             </a:r>
             <a:endParaRPr lang="en-US" sz="1150" dirty="0"/>
-          </a:p>
-        </p:txBody>
-      </p:sp>
-      <p:sp>
-        <p:nvSpPr>
-          <p:cNvPr id="31" name="Shape 28"/>
-          <p:cNvSpPr/>
-          <p:nvPr/>
-        </p:nvSpPr>
-        <p:spPr>
-          <a:xfrm>
-            <a:off x="5897880" y="3273552"/>
-            <a:ext cx="2560320" cy="10973"/>
-          </a:xfrm>
-          <a:prstGeom prst="rect">
-            <a:avLst/>
-          </a:prstGeom>
-          <a:solidFill>
-            <a:srgbClr val="E5E0D8"/>
-          </a:solidFill>
-          <a:ln w="12700">
-            <a:solidFill>
-              <a:srgbClr val="E5E0D8"/>
-            </a:solidFill>
-            <a:prstDash val="solid"/>
-          </a:ln>
-        </p:spPr>
-        <p:txBody>
-          <a:bodyPr/>
-          <a:lstStyle/>
-          <a:p>
-            <a:endParaRPr lang="fr-FR"/>
-          </a:p>
-        </p:txBody>
-      </p:sp>
-      <p:sp>
-        <p:nvSpPr>
-          <p:cNvPr id="32" name="Text 29"/>
-          <p:cNvSpPr/>
-          <p:nvPr/>
-        </p:nvSpPr>
-        <p:spPr>
-          <a:xfrm>
-            <a:off x="5897880" y="3364992"/>
-            <a:ext cx="1188720" cy="201168"/>
-          </a:xfrm>
-          <a:prstGeom prst="rect">
-            <a:avLst/>
-          </a:prstGeom>
-          <a:noFill/>
-          <a:ln/>
-        </p:spPr>
-        <p:txBody>
-          <a:bodyPr wrap="square" lIns="0" tIns="0" rIns="0" bIns="0" rtlCol="0" anchor="ctr"/>
-          <a:lstStyle/>
-          <a:p>
-            <a:pPr marL="0" indent="0">
-              <a:buNone/>
-            </a:pPr>
-            <a:r>
-              <a:rPr lang="en-US" sz="750" kern="0" spc="250" dirty="0">
-                <a:solidFill>
-                  <a:srgbClr val="8B1A1A"/>
-                </a:solidFill>
-                <a:latin typeface="Garamond" pitchFamily="34" charset="0"/>
-                <a:ea typeface="Garamond" pitchFamily="34" charset="-122"/>
-                <a:cs typeface="Garamond" pitchFamily="34" charset="-120"/>
-              </a:rPr>
-              <a:t>HORIZON</a:t>
-            </a:r>
-            <a:endParaRPr lang="en-US" sz="750" dirty="0"/>
-          </a:p>
-        </p:txBody>
-      </p:sp>
-      <p:sp>
-        <p:nvSpPr>
-          <p:cNvPr id="33" name="Text 30"/>
-          <p:cNvSpPr/>
-          <p:nvPr/>
-        </p:nvSpPr>
-        <p:spPr>
-          <a:xfrm>
-            <a:off x="5897880" y="3566160"/>
-            <a:ext cx="2560320" cy="274320"/>
-          </a:xfrm>
-          <a:prstGeom prst="rect">
-            <a:avLst/>
-          </a:prstGeom>
-          <a:noFill/>
-          <a:ln/>
-        </p:spPr>
-        <p:txBody>
-          <a:bodyPr wrap="square" lIns="0" tIns="0" rIns="0" bIns="0" rtlCol="0" anchor="t"/>
-          <a:lstStyle/>
-          <a:p>
-            <a:pPr marL="0" indent="0">
-              <a:buNone/>
-            </a:pPr>
-            <a:r>
-              <a:rPr lang="en-US" sz="1000" i="1" dirty="0">
-                <a:solidFill>
-                  <a:srgbClr val="8E5B3F"/>
-                </a:solidFill>
-                <a:latin typeface="Calibri" pitchFamily="34" charset="0"/>
-                <a:ea typeface="Calibri" pitchFamily="34" charset="-122"/>
-                <a:cs typeface="Calibri" pitchFamily="34" charset="-120"/>
-              </a:rPr>
-              <a:t>[Court / Moyen / Long terme]</a:t>
-            </a:r>
-            <a:endParaRPr lang="en-US" sz="1000" dirty="0"/>
-          </a:p>
-        </p:txBody>
-      </p:sp>
-      <p:sp>
-        <p:nvSpPr>
-          <p:cNvPr id="34" name="Text 31"/>
-          <p:cNvSpPr/>
-          <p:nvPr/>
-        </p:nvSpPr>
-        <p:spPr>
-          <a:xfrm>
-            <a:off x="5897880" y="3913632"/>
-            <a:ext cx="2560320" cy="201168"/>
-          </a:xfrm>
-          <a:prstGeom prst="rect">
-            <a:avLst/>
-          </a:prstGeom>
-          <a:noFill/>
-          <a:ln/>
-        </p:spPr>
-        <p:txBody>
-          <a:bodyPr wrap="square" lIns="0" tIns="0" rIns="0" bIns="0" rtlCol="0" anchor="ctr"/>
-          <a:lstStyle/>
-          <a:p>
-            <a:pPr marL="0" indent="0">
-              <a:buNone/>
-            </a:pPr>
-            <a:r>
-              <a:rPr lang="en-US" sz="750" kern="0" spc="250" dirty="0">
-                <a:solidFill>
-                  <a:srgbClr val="8B1A1A"/>
-                </a:solidFill>
-                <a:latin typeface="Garamond" pitchFamily="34" charset="0"/>
-                <a:ea typeface="Garamond" pitchFamily="34" charset="-122"/>
-                <a:cs typeface="Garamond" pitchFamily="34" charset="-120"/>
-              </a:rPr>
-              <a:t>MONTANT ESTIMÉ</a:t>
-            </a:r>
-            <a:endParaRPr lang="en-US" sz="750" dirty="0"/>
-          </a:p>
-        </p:txBody>
-      </p:sp>
-      <p:sp>
-        <p:nvSpPr>
-          <p:cNvPr id="35" name="Text 32"/>
-          <p:cNvSpPr/>
-          <p:nvPr/>
-        </p:nvSpPr>
-        <p:spPr>
-          <a:xfrm>
-            <a:off x="5897880" y="4114800"/>
-            <a:ext cx="2560320" cy="274320"/>
-          </a:xfrm>
-          <a:prstGeom prst="rect">
-            <a:avLst/>
-          </a:prstGeom>
-          <a:noFill/>
-          <a:ln/>
-        </p:spPr>
-        <p:txBody>
-          <a:bodyPr wrap="square" lIns="0" tIns="0" rIns="0" bIns="0" rtlCol="0" anchor="t"/>
-          <a:lstStyle/>
-          <a:p>
-            <a:pPr marL="0" indent="0">
-              <a:buNone/>
-            </a:pPr>
-            <a:r>
-              <a:rPr lang="en-US" sz="1000" i="1" dirty="0">
-                <a:solidFill>
-                  <a:srgbClr val="8E5B3F"/>
-                </a:solidFill>
-                <a:latin typeface="Calibri" pitchFamily="34" charset="0"/>
-                <a:ea typeface="Calibri" pitchFamily="34" charset="-122"/>
-                <a:cs typeface="Calibri" pitchFamily="34" charset="-120"/>
-              </a:rPr>
-              <a:t>[X €]</a:t>
-            </a:r>
-            <a:endParaRPr lang="en-US" sz="1000" dirty="0"/>
           </a:p>
         </p:txBody>
       </p:sp>
@@ -6181,7 +4593,7 @@
         <p:spPr>
           <a:xfrm>
             <a:off x="502920" y="1783080"/>
-            <a:ext cx="2743200" cy="274320"/>
+            <a:ext cx="4864608" cy="274320"/>
           </a:xfrm>
           <a:prstGeom prst="rect">
             <a:avLst/>
@@ -6213,7 +4625,7 @@
         <p:spPr>
           <a:xfrm>
             <a:off x="576072" y="1783080"/>
-            <a:ext cx="2633472" cy="274320"/>
+            <a:ext cx="4754880" cy="274320"/>
           </a:xfrm>
           <a:prstGeom prst="rect">
             <a:avLst/>
@@ -6245,14 +4657,14 @@
       </p:sp>
       <p:sp>
         <p:nvSpPr>
-          <p:cNvPr id="15" name="Shape 12"/>
-          <p:cNvSpPr/>
-          <p:nvPr/>
-        </p:nvSpPr>
-        <p:spPr>
-          <a:xfrm>
-            <a:off x="3246120" y="1783080"/>
-            <a:ext cx="1645920" cy="274320"/>
+          <p:cNvPr id="17" name="Shape 14"/>
+          <p:cNvSpPr/>
+          <p:nvPr/>
+        </p:nvSpPr>
+        <p:spPr>
+          <a:xfrm>
+            <a:off x="5413248" y="1783080"/>
+            <a:ext cx="3090672" cy="274320"/>
           </a:xfrm>
           <a:prstGeom prst="rect">
             <a:avLst/>
@@ -6277,14 +4689,14 @@
       </p:sp>
       <p:sp>
         <p:nvSpPr>
-          <p:cNvPr id="16" name="Text 13"/>
-          <p:cNvSpPr/>
-          <p:nvPr/>
-        </p:nvSpPr>
-        <p:spPr>
-          <a:xfrm>
-            <a:off x="3319272" y="1783080"/>
-            <a:ext cx="1536192" cy="274320"/>
+          <p:cNvPr id="18" name="Text 15"/>
+          <p:cNvSpPr/>
+          <p:nvPr/>
+        </p:nvSpPr>
+        <p:spPr>
+          <a:xfrm>
+            <a:off x="5486400" y="1783080"/>
+            <a:ext cx="2980944" cy="274320"/>
           </a:xfrm>
           <a:prstGeom prst="rect">
             <a:avLst/>
@@ -6308,7 +4720,7 @@
                 <a:ea typeface="Calibri" pitchFamily="34" charset="-122"/>
                 <a:cs typeface="Calibri" pitchFamily="34" charset="-120"/>
               </a:rPr>
-              <a:t>Origine</a:t>
+              <a:t>Montant mobilisé</a:t>
             </a:r>
             <a:endParaRPr lang="en-US" sz="850" dirty="0"/>
           </a:p>
@@ -6316,14 +4728,724 @@
       </p:sp>
       <p:sp>
         <p:nvSpPr>
-          <p:cNvPr id="17" name="Shape 14"/>
-          <p:cNvSpPr/>
-          <p:nvPr/>
-        </p:nvSpPr>
-        <p:spPr>
-          <a:xfrm>
-            <a:off x="4892040" y="1783080"/>
-            <a:ext cx="1645920" cy="274320"/>
+          <p:cNvPr id="21" name="Shape 18"/>
+          <p:cNvSpPr/>
+          <p:nvPr/>
+        </p:nvSpPr>
+        <p:spPr>
+          <a:xfrm>
+            <a:off x="502920" y="2084832"/>
+            <a:ext cx="4864608" cy="301752"/>
+          </a:xfrm>
+          <a:prstGeom prst="rect">
+            <a:avLst/>
+          </a:prstGeom>
+          <a:solidFill>
+            <a:srgbClr val="F7F5F1"/>
+          </a:solidFill>
+          <a:ln w="3810">
+            <a:solidFill>
+              <a:srgbClr val="E5E0D8"/>
+            </a:solidFill>
+            <a:prstDash val="solid"/>
+          </a:ln>
+        </p:spPr>
+        <p:txBody>
+          <a:bodyPr/>
+          <a:lstStyle/>
+          <a:p>
+            <a:endParaRPr lang="fr-FR"/>
+          </a:p>
+        </p:txBody>
+      </p:sp>
+      <p:sp>
+        <p:nvSpPr>
+          <p:cNvPr id="22" name="Text 19"/>
+          <p:cNvSpPr/>
+          <p:nvPr/>
+        </p:nvSpPr>
+        <p:spPr>
+          <a:xfrm>
+            <a:off x="576072" y="2093976"/>
+            <a:ext cx="4754880" cy="283464"/>
+          </a:xfrm>
+          <a:prstGeom prst="rect">
+            <a:avLst/>
+          </a:prstGeom>
+          <a:noFill/>
+          <a:ln/>
+        </p:spPr>
+        <p:txBody>
+          <a:bodyPr wrap="square" lIns="0" tIns="0" rIns="0" bIns="0" rtlCol="0" anchor="ctr"/>
+          <a:lstStyle/>
+          <a:p>
+            <a:pPr marL="0" indent="0" algn="l">
+              <a:buNone/>
+            </a:pPr>
+            <a:r>
+              <a:rPr lang="en-US" sz="900" dirty="0">
+                <a:solidFill>
+                  <a:srgbClr val="8E5B3F"/>
+                </a:solidFill>
+                <a:latin typeface="Calibri" pitchFamily="34" charset="0"/>
+                <a:ea typeface="Calibri" pitchFamily="34" charset="-122"/>
+                <a:cs typeface="Calibri" pitchFamily="34" charset="-120"/>
+              </a:rPr>
+              <a:t>[Assurance vie de Mme/M. X. — 50 %]</a:t>
+            </a:r>
+            <a:endParaRPr lang="en-US" sz="900" dirty="0"/>
+          </a:p>
+        </p:txBody>
+      </p:sp>
+      <p:sp>
+        <p:nvSpPr>
+          <p:cNvPr id="25" name="Shape 22"/>
+          <p:cNvSpPr/>
+          <p:nvPr/>
+        </p:nvSpPr>
+        <p:spPr>
+          <a:xfrm>
+            <a:off x="5413248" y="2084832"/>
+            <a:ext cx="3090672" cy="301752"/>
+          </a:xfrm>
+          <a:prstGeom prst="rect">
+            <a:avLst/>
+          </a:prstGeom>
+          <a:solidFill>
+            <a:srgbClr val="F7F5F1"/>
+          </a:solidFill>
+          <a:ln w="3810">
+            <a:solidFill>
+              <a:srgbClr val="E5E0D8"/>
+            </a:solidFill>
+            <a:prstDash val="solid"/>
+          </a:ln>
+        </p:spPr>
+        <p:txBody>
+          <a:bodyPr/>
+          <a:lstStyle/>
+          <a:p>
+            <a:endParaRPr lang="fr-FR"/>
+          </a:p>
+        </p:txBody>
+      </p:sp>
+      <p:sp>
+        <p:nvSpPr>
+          <p:cNvPr id="26" name="Text 23"/>
+          <p:cNvSpPr/>
+          <p:nvPr/>
+        </p:nvSpPr>
+        <p:spPr>
+          <a:xfrm>
+            <a:off x="5486400" y="2093976"/>
+            <a:ext cx="2980944" cy="283464"/>
+          </a:xfrm>
+          <a:prstGeom prst="rect">
+            <a:avLst/>
+          </a:prstGeom>
+          <a:noFill/>
+          <a:ln/>
+        </p:spPr>
+        <p:txBody>
+          <a:bodyPr wrap="square" lIns="0" tIns="0" rIns="0" bIns="0" rtlCol="0" anchor="ctr"/>
+          <a:lstStyle/>
+          <a:p>
+            <a:pPr marL="0" indent="0" algn="l">
+              <a:buNone/>
+            </a:pPr>
+            <a:r>
+              <a:rPr lang="en-US" sz="900" dirty="0">
+                <a:solidFill>
+                  <a:srgbClr val="8E5B3F"/>
+                </a:solidFill>
+                <a:latin typeface="Calibri" pitchFamily="34" charset="0"/>
+                <a:ea typeface="Calibri" pitchFamily="34" charset="-122"/>
+                <a:cs typeface="Calibri" pitchFamily="34" charset="-120"/>
+              </a:rPr>
+              <a:t>[X €]</a:t>
+            </a:r>
+            <a:endParaRPr lang="en-US" sz="900" dirty="0"/>
+          </a:p>
+        </p:txBody>
+      </p:sp>
+      <p:sp>
+        <p:nvSpPr>
+          <p:cNvPr id="29" name="Shape 26"/>
+          <p:cNvSpPr/>
+          <p:nvPr/>
+        </p:nvSpPr>
+        <p:spPr>
+          <a:xfrm>
+            <a:off x="502920" y="2395728"/>
+            <a:ext cx="4864608" cy="301752"/>
+          </a:xfrm>
+          <a:prstGeom prst="rect">
+            <a:avLst/>
+          </a:prstGeom>
+          <a:solidFill>
+            <a:srgbClr val="F3F0EB"/>
+          </a:solidFill>
+          <a:ln w="3810">
+            <a:solidFill>
+              <a:srgbClr val="E5E0D8"/>
+            </a:solidFill>
+            <a:prstDash val="solid"/>
+          </a:ln>
+        </p:spPr>
+        <p:txBody>
+          <a:bodyPr/>
+          <a:lstStyle/>
+          <a:p>
+            <a:endParaRPr lang="fr-FR"/>
+          </a:p>
+        </p:txBody>
+      </p:sp>
+      <p:sp>
+        <p:nvSpPr>
+          <p:cNvPr id="30" name="Text 27"/>
+          <p:cNvSpPr/>
+          <p:nvPr/>
+        </p:nvSpPr>
+        <p:spPr>
+          <a:xfrm>
+            <a:off x="576072" y="2404872"/>
+            <a:ext cx="4754880" cy="283464"/>
+          </a:xfrm>
+          <a:prstGeom prst="rect">
+            <a:avLst/>
+          </a:prstGeom>
+          <a:noFill/>
+          <a:ln/>
+        </p:spPr>
+        <p:txBody>
+          <a:bodyPr wrap="square" lIns="0" tIns="0" rIns="0" bIns="0" rtlCol="0" anchor="ctr"/>
+          <a:lstStyle/>
+          <a:p>
+            <a:pPr marL="0" indent="0" algn="l">
+              <a:buNone/>
+            </a:pPr>
+            <a:r>
+              <a:rPr lang="en-US" sz="900" dirty="0">
+                <a:solidFill>
+                  <a:srgbClr val="8E5B3F"/>
+                </a:solidFill>
+                <a:latin typeface="Calibri" pitchFamily="34" charset="0"/>
+                <a:ea typeface="Calibri" pitchFamily="34" charset="-122"/>
+                <a:cs typeface="Calibri" pitchFamily="34" charset="-120"/>
+              </a:rPr>
+              <a:t>[PER de Mme/M. Y. — 30 %]</a:t>
+            </a:r>
+            <a:endParaRPr lang="en-US" sz="900" dirty="0"/>
+          </a:p>
+        </p:txBody>
+      </p:sp>
+      <p:sp>
+        <p:nvSpPr>
+          <p:cNvPr id="33" name="Shape 30"/>
+          <p:cNvSpPr/>
+          <p:nvPr/>
+        </p:nvSpPr>
+        <p:spPr>
+          <a:xfrm>
+            <a:off x="5413248" y="2395728"/>
+            <a:ext cx="3090672" cy="301752"/>
+          </a:xfrm>
+          <a:prstGeom prst="rect">
+            <a:avLst/>
+          </a:prstGeom>
+          <a:solidFill>
+            <a:srgbClr val="F3F0EB"/>
+          </a:solidFill>
+          <a:ln w="3810">
+            <a:solidFill>
+              <a:srgbClr val="E5E0D8"/>
+            </a:solidFill>
+            <a:prstDash val="solid"/>
+          </a:ln>
+        </p:spPr>
+        <p:txBody>
+          <a:bodyPr/>
+          <a:lstStyle/>
+          <a:p>
+            <a:endParaRPr lang="fr-FR"/>
+          </a:p>
+        </p:txBody>
+      </p:sp>
+      <p:sp>
+        <p:nvSpPr>
+          <p:cNvPr id="34" name="Text 31"/>
+          <p:cNvSpPr/>
+          <p:nvPr/>
+        </p:nvSpPr>
+        <p:spPr>
+          <a:xfrm>
+            <a:off x="5486400" y="2404872"/>
+            <a:ext cx="2980944" cy="283464"/>
+          </a:xfrm>
+          <a:prstGeom prst="rect">
+            <a:avLst/>
+          </a:prstGeom>
+          <a:noFill/>
+          <a:ln/>
+        </p:spPr>
+        <p:txBody>
+          <a:bodyPr wrap="square" lIns="0" tIns="0" rIns="0" bIns="0" rtlCol="0" anchor="ctr"/>
+          <a:lstStyle/>
+          <a:p>
+            <a:pPr marL="0" indent="0" algn="l">
+              <a:buNone/>
+            </a:pPr>
+            <a:r>
+              <a:rPr lang="en-US" sz="900" dirty="0">
+                <a:solidFill>
+                  <a:srgbClr val="8E5B3F"/>
+                </a:solidFill>
+                <a:latin typeface="Calibri" pitchFamily="34" charset="0"/>
+                <a:ea typeface="Calibri" pitchFamily="34" charset="-122"/>
+                <a:cs typeface="Calibri" pitchFamily="34" charset="-120"/>
+              </a:rPr>
+              <a:t>[X €]</a:t>
+            </a:r>
+            <a:endParaRPr lang="en-US" sz="900" dirty="0"/>
+          </a:p>
+        </p:txBody>
+      </p:sp>
+      <p:sp>
+        <p:nvSpPr>
+          <p:cNvPr id="37" name="Shape 34"/>
+          <p:cNvSpPr/>
+          <p:nvPr/>
+        </p:nvSpPr>
+        <p:spPr>
+          <a:xfrm>
+            <a:off x="502920" y="2706624"/>
+            <a:ext cx="4864608" cy="301752"/>
+          </a:xfrm>
+          <a:prstGeom prst="rect">
+            <a:avLst/>
+          </a:prstGeom>
+          <a:solidFill>
+            <a:srgbClr val="F7F5F1"/>
+          </a:solidFill>
+          <a:ln w="3810">
+            <a:solidFill>
+              <a:srgbClr val="E5E0D8"/>
+            </a:solidFill>
+            <a:prstDash val="solid"/>
+          </a:ln>
+        </p:spPr>
+        <p:txBody>
+          <a:bodyPr/>
+          <a:lstStyle/>
+          <a:p>
+            <a:endParaRPr lang="fr-FR"/>
+          </a:p>
+        </p:txBody>
+      </p:sp>
+      <p:sp>
+        <p:nvSpPr>
+          <p:cNvPr id="38" name="Text 35"/>
+          <p:cNvSpPr/>
+          <p:nvPr/>
+        </p:nvSpPr>
+        <p:spPr>
+          <a:xfrm>
+            <a:off x="576072" y="2715768"/>
+            <a:ext cx="4754880" cy="283464"/>
+          </a:xfrm>
+          <a:prstGeom prst="rect">
+            <a:avLst/>
+          </a:prstGeom>
+          <a:noFill/>
+          <a:ln/>
+        </p:spPr>
+        <p:txBody>
+          <a:bodyPr wrap="square" lIns="0" tIns="0" rIns="0" bIns="0" rtlCol="0" anchor="ctr"/>
+          <a:lstStyle/>
+          <a:p>
+            <a:pPr marL="0" indent="0" algn="l">
+              <a:buNone/>
+            </a:pPr>
+            <a:r>
+              <a:rPr lang="en-US" sz="900" dirty="0">
+                <a:solidFill>
+                  <a:srgbClr val="8E5B3F"/>
+                </a:solidFill>
+                <a:latin typeface="Calibri" pitchFamily="34" charset="0"/>
+                <a:ea typeface="Calibri" pitchFamily="34" charset="-122"/>
+                <a:cs typeface="Calibri" pitchFamily="34" charset="-120"/>
+              </a:rPr>
+              <a:t>[Titres détenus en direct — 20 %]</a:t>
+            </a:r>
+            <a:endParaRPr lang="en-US" sz="900" dirty="0"/>
+          </a:p>
+        </p:txBody>
+      </p:sp>
+      <p:sp>
+        <p:nvSpPr>
+          <p:cNvPr id="41" name="Shape 38"/>
+          <p:cNvSpPr/>
+          <p:nvPr/>
+        </p:nvSpPr>
+        <p:spPr>
+          <a:xfrm>
+            <a:off x="5413248" y="2706624"/>
+            <a:ext cx="3090672" cy="301752"/>
+          </a:xfrm>
+          <a:prstGeom prst="rect">
+            <a:avLst/>
+          </a:prstGeom>
+          <a:solidFill>
+            <a:srgbClr val="F7F5F1"/>
+          </a:solidFill>
+          <a:ln w="3810">
+            <a:solidFill>
+              <a:srgbClr val="E5E0D8"/>
+            </a:solidFill>
+            <a:prstDash val="solid"/>
+          </a:ln>
+        </p:spPr>
+        <p:txBody>
+          <a:bodyPr/>
+          <a:lstStyle/>
+          <a:p>
+            <a:endParaRPr lang="fr-FR"/>
+          </a:p>
+        </p:txBody>
+      </p:sp>
+      <p:sp>
+        <p:nvSpPr>
+          <p:cNvPr id="42" name="Text 39"/>
+          <p:cNvSpPr/>
+          <p:nvPr/>
+        </p:nvSpPr>
+        <p:spPr>
+          <a:xfrm>
+            <a:off x="5486400" y="2715768"/>
+            <a:ext cx="2980944" cy="283464"/>
+          </a:xfrm>
+          <a:prstGeom prst="rect">
+            <a:avLst/>
+          </a:prstGeom>
+          <a:noFill/>
+          <a:ln/>
+        </p:spPr>
+        <p:txBody>
+          <a:bodyPr wrap="square" lIns="0" tIns="0" rIns="0" bIns="0" rtlCol="0" anchor="ctr"/>
+          <a:lstStyle/>
+          <a:p>
+            <a:pPr marL="0" indent="0" algn="l">
+              <a:buNone/>
+            </a:pPr>
+            <a:r>
+              <a:rPr lang="en-US" sz="900" dirty="0">
+                <a:solidFill>
+                  <a:srgbClr val="8E5B3F"/>
+                </a:solidFill>
+                <a:latin typeface="Calibri" pitchFamily="34" charset="0"/>
+                <a:ea typeface="Calibri" pitchFamily="34" charset="-122"/>
+                <a:cs typeface="Calibri" pitchFamily="34" charset="-120"/>
+              </a:rPr>
+              <a:t>[X €]</a:t>
+            </a:r>
+            <a:endParaRPr lang="en-US" sz="900" dirty="0"/>
+          </a:p>
+        </p:txBody>
+      </p:sp>
+      <p:sp>
+        <p:nvSpPr>
+          <p:cNvPr id="45" name="Shape 42"/>
+          <p:cNvSpPr/>
+          <p:nvPr/>
+        </p:nvSpPr>
+        <p:spPr>
+          <a:xfrm>
+            <a:off x="502920" y="3017520"/>
+            <a:ext cx="4864608" cy="301752"/>
+          </a:xfrm>
+          <a:prstGeom prst="rect">
+            <a:avLst/>
+          </a:prstGeom>
+          <a:solidFill>
+            <a:srgbClr val="F3F0EB"/>
+          </a:solidFill>
+          <a:ln w="3810">
+            <a:solidFill>
+              <a:srgbClr val="E5E0D8"/>
+            </a:solidFill>
+            <a:prstDash val="solid"/>
+          </a:ln>
+        </p:spPr>
+        <p:txBody>
+          <a:bodyPr/>
+          <a:lstStyle/>
+          <a:p>
+            <a:endParaRPr lang="fr-FR"/>
+          </a:p>
+        </p:txBody>
+      </p:sp>
+      <p:sp>
+        <p:nvSpPr>
+          <p:cNvPr id="46" name="Text 43"/>
+          <p:cNvSpPr/>
+          <p:nvPr/>
+        </p:nvSpPr>
+        <p:spPr>
+          <a:xfrm>
+            <a:off x="576072" y="3026664"/>
+            <a:ext cx="4754880" cy="283464"/>
+          </a:xfrm>
+          <a:prstGeom prst="rect">
+            <a:avLst/>
+          </a:prstGeom>
+          <a:noFill/>
+          <a:ln/>
+        </p:spPr>
+        <p:txBody>
+          <a:bodyPr wrap="square" lIns="0" tIns="0" rIns="0" bIns="0" rtlCol="0" anchor="ctr"/>
+          <a:lstStyle/>
+          <a:p>
+            <a:pPr marL="0" indent="0" algn="l">
+              <a:buNone/>
+            </a:pPr>
+            <a:r>
+              <a:rPr lang="en-US" sz="900" dirty="0">
+                <a:solidFill>
+                  <a:srgbClr val="8E5B3F"/>
+                </a:solidFill>
+                <a:latin typeface="Calibri" pitchFamily="34" charset="0"/>
+                <a:ea typeface="Calibri" pitchFamily="34" charset="-122"/>
+                <a:cs typeface="Calibri" pitchFamily="34" charset="-120"/>
+              </a:rPr>
+              <a:t>[Contrat de capitalisation — 100 %]</a:t>
+            </a:r>
+            <a:endParaRPr lang="en-US" sz="900" dirty="0"/>
+          </a:p>
+        </p:txBody>
+      </p:sp>
+      <p:sp>
+        <p:nvSpPr>
+          <p:cNvPr id="49" name="Shape 46"/>
+          <p:cNvSpPr/>
+          <p:nvPr/>
+        </p:nvSpPr>
+        <p:spPr>
+          <a:xfrm>
+            <a:off x="5413248" y="3017520"/>
+            <a:ext cx="3090672" cy="301752"/>
+          </a:xfrm>
+          <a:prstGeom prst="rect">
+            <a:avLst/>
+          </a:prstGeom>
+          <a:solidFill>
+            <a:srgbClr val="F3F0EB"/>
+          </a:solidFill>
+          <a:ln w="3810">
+            <a:solidFill>
+              <a:srgbClr val="E5E0D8"/>
+            </a:solidFill>
+            <a:prstDash val="solid"/>
+          </a:ln>
+        </p:spPr>
+        <p:txBody>
+          <a:bodyPr/>
+          <a:lstStyle/>
+          <a:p>
+            <a:endParaRPr lang="fr-FR"/>
+          </a:p>
+        </p:txBody>
+      </p:sp>
+      <p:sp>
+        <p:nvSpPr>
+          <p:cNvPr id="50" name="Text 47"/>
+          <p:cNvSpPr/>
+          <p:nvPr/>
+        </p:nvSpPr>
+        <p:spPr>
+          <a:xfrm>
+            <a:off x="5486400" y="3026664"/>
+            <a:ext cx="2980944" cy="283464"/>
+          </a:xfrm>
+          <a:prstGeom prst="rect">
+            <a:avLst/>
+          </a:prstGeom>
+          <a:noFill/>
+          <a:ln/>
+        </p:spPr>
+        <p:txBody>
+          <a:bodyPr wrap="square" lIns="0" tIns="0" rIns="0" bIns="0" rtlCol="0" anchor="ctr"/>
+          <a:lstStyle/>
+          <a:p>
+            <a:pPr marL="0" indent="0" algn="l">
+              <a:buNone/>
+            </a:pPr>
+            <a:r>
+              <a:rPr lang="en-US" sz="900" dirty="0">
+                <a:solidFill>
+                  <a:srgbClr val="8E5B3F"/>
+                </a:solidFill>
+                <a:latin typeface="Calibri" pitchFamily="34" charset="0"/>
+                <a:ea typeface="Calibri" pitchFamily="34" charset="-122"/>
+                <a:cs typeface="Calibri" pitchFamily="34" charset="-120"/>
+              </a:rPr>
+              <a:t>[X €]</a:t>
+            </a:r>
+            <a:endParaRPr lang="en-US" sz="900" dirty="0"/>
+          </a:p>
+        </p:txBody>
+      </p:sp>
+      <p:sp>
+        <p:nvSpPr>
+          <p:cNvPr id="53" name="Shape 50"/>
+          <p:cNvSpPr/>
+          <p:nvPr/>
+        </p:nvSpPr>
+        <p:spPr>
+          <a:xfrm>
+            <a:off x="502920" y="3328416"/>
+            <a:ext cx="4864608" cy="301752"/>
+          </a:xfrm>
+          <a:prstGeom prst="rect">
+            <a:avLst/>
+          </a:prstGeom>
+          <a:solidFill>
+            <a:srgbClr val="F7F5F1"/>
+          </a:solidFill>
+          <a:ln w="3810">
+            <a:solidFill>
+              <a:srgbClr val="E5E0D8"/>
+            </a:solidFill>
+            <a:prstDash val="solid"/>
+          </a:ln>
+        </p:spPr>
+        <p:txBody>
+          <a:bodyPr/>
+          <a:lstStyle/>
+          <a:p>
+            <a:endParaRPr lang="fr-FR"/>
+          </a:p>
+        </p:txBody>
+      </p:sp>
+      <p:sp>
+        <p:nvSpPr>
+          <p:cNvPr id="54" name="Text 51"/>
+          <p:cNvSpPr/>
+          <p:nvPr/>
+        </p:nvSpPr>
+        <p:spPr>
+          <a:xfrm>
+            <a:off x="576072" y="3337560"/>
+            <a:ext cx="4754880" cy="283464"/>
+          </a:xfrm>
+          <a:prstGeom prst="rect">
+            <a:avLst/>
+          </a:prstGeom>
+          <a:noFill/>
+          <a:ln/>
+        </p:spPr>
+        <p:txBody>
+          <a:bodyPr wrap="square" lIns="0" tIns="0" rIns="0" bIns="0" rtlCol="0" anchor="ctr"/>
+          <a:lstStyle/>
+          <a:p>
+            <a:pPr marL="0" indent="0" algn="l">
+              <a:buNone/>
+            </a:pPr>
+            <a:r>
+              <a:rPr lang="en-US" sz="900" dirty="0">
+                <a:solidFill>
+                  <a:srgbClr val="8E5B3F"/>
+                </a:solidFill>
+                <a:latin typeface="Calibri" pitchFamily="34" charset="0"/>
+                <a:ea typeface="Calibri" pitchFamily="34" charset="-122"/>
+                <a:cs typeface="Calibri" pitchFamily="34" charset="-120"/>
+              </a:rPr>
+              <a:t>[Capacité d'épargne mensuelle]</a:t>
+            </a:r>
+            <a:endParaRPr lang="en-US" sz="900" dirty="0"/>
+          </a:p>
+        </p:txBody>
+      </p:sp>
+      <p:sp>
+        <p:nvSpPr>
+          <p:cNvPr id="57" name="Shape 54"/>
+          <p:cNvSpPr/>
+          <p:nvPr/>
+        </p:nvSpPr>
+        <p:spPr>
+          <a:xfrm>
+            <a:off x="5413248" y="3328416"/>
+            <a:ext cx="3090672" cy="301752"/>
+          </a:xfrm>
+          <a:prstGeom prst="rect">
+            <a:avLst/>
+          </a:prstGeom>
+          <a:solidFill>
+            <a:srgbClr val="F7F5F1"/>
+          </a:solidFill>
+          <a:ln w="3810">
+            <a:solidFill>
+              <a:srgbClr val="E5E0D8"/>
+            </a:solidFill>
+            <a:prstDash val="solid"/>
+          </a:ln>
+        </p:spPr>
+        <p:txBody>
+          <a:bodyPr/>
+          <a:lstStyle/>
+          <a:p>
+            <a:endParaRPr lang="fr-FR"/>
+          </a:p>
+        </p:txBody>
+      </p:sp>
+      <p:sp>
+        <p:nvSpPr>
+          <p:cNvPr id="58" name="Text 55"/>
+          <p:cNvSpPr/>
+          <p:nvPr/>
+        </p:nvSpPr>
+        <p:spPr>
+          <a:xfrm>
+            <a:off x="5486400" y="3337560"/>
+            <a:ext cx="2980944" cy="283464"/>
+          </a:xfrm>
+          <a:prstGeom prst="rect">
+            <a:avLst/>
+          </a:prstGeom>
+          <a:noFill/>
+          <a:ln/>
+        </p:spPr>
+        <p:txBody>
+          <a:bodyPr wrap="square" lIns="0" tIns="0" rIns="0" bIns="0" rtlCol="0" anchor="ctr"/>
+          <a:lstStyle/>
+          <a:p>
+            <a:pPr marL="0" indent="0" algn="l">
+              <a:buNone/>
+            </a:pPr>
+            <a:r>
+              <a:rPr lang="en-US" sz="900" dirty="0">
+                <a:solidFill>
+                  <a:srgbClr val="8E5B3F"/>
+                </a:solidFill>
+                <a:latin typeface="Calibri" pitchFamily="34" charset="0"/>
+                <a:ea typeface="Calibri" pitchFamily="34" charset="-122"/>
+                <a:cs typeface="Calibri" pitchFamily="34" charset="-120"/>
+              </a:rPr>
+              <a:t>[X €]/mois</a:t>
+            </a:r>
+            <a:endParaRPr lang="en-US" sz="900" dirty="0"/>
+          </a:p>
+        </p:txBody>
+      </p:sp>
+      <p:sp>
+        <p:nvSpPr>
+          <p:cNvPr id="61" name="Shape 58"/>
+          <p:cNvSpPr/>
+          <p:nvPr/>
+        </p:nvSpPr>
+        <p:spPr>
+          <a:xfrm>
+            <a:off x="502920" y="3639312"/>
+            <a:ext cx="8001000" cy="292608"/>
           </a:xfrm>
           <a:prstGeom prst="rect">
             <a:avLst/>
@@ -6348,14 +5470,14 @@
       </p:sp>
       <p:sp>
         <p:nvSpPr>
-          <p:cNvPr id="18" name="Text 15"/>
-          <p:cNvSpPr/>
-          <p:nvPr/>
-        </p:nvSpPr>
-        <p:spPr>
-          <a:xfrm>
-            <a:off x="4965192" y="1783080"/>
-            <a:ext cx="1536192" cy="274320"/>
+          <p:cNvPr id="62" name="Text 59"/>
+          <p:cNvSpPr/>
+          <p:nvPr/>
+        </p:nvSpPr>
+        <p:spPr>
+          <a:xfrm>
+            <a:off x="576072" y="3648456"/>
+            <a:ext cx="4910328" cy="274320"/>
           </a:xfrm>
           <a:prstGeom prst="rect">
             <a:avLst/>
@@ -6379,7 +5501,7 @@
                 <a:ea typeface="Calibri" pitchFamily="34" charset="-122"/>
                 <a:cs typeface="Calibri" pitchFamily="34" charset="-120"/>
               </a:rPr>
-              <a:t>Montant mobilisé</a:t>
+              <a:t>TOTAL DES MOYENS MOBILISÉS</a:t>
             </a:r>
             <a:endParaRPr lang="en-US" sz="850" dirty="0"/>
           </a:p>
@@ -6387,1594 +5509,32 @@
       </p:sp>
       <p:sp>
         <p:nvSpPr>
-          <p:cNvPr id="19" name="Shape 16"/>
-          <p:cNvSpPr/>
-          <p:nvPr/>
-        </p:nvSpPr>
-        <p:spPr>
-          <a:xfrm>
-            <a:off x="6537960" y="1783080"/>
-            <a:ext cx="1965960" cy="274320"/>
-          </a:xfrm>
-          <a:prstGeom prst="rect">
-            <a:avLst/>
-          </a:prstGeom>
-          <a:solidFill>
-            <a:srgbClr val="1C2B3A"/>
-          </a:solidFill>
-          <a:ln w="12700">
-            <a:solidFill>
-              <a:srgbClr val="1C2B3A"/>
-            </a:solidFill>
-            <a:prstDash val="solid"/>
-          </a:ln>
-        </p:spPr>
-        <p:txBody>
-          <a:bodyPr/>
-          <a:lstStyle/>
-          <a:p>
-            <a:endParaRPr lang="fr-FR"/>
-          </a:p>
-        </p:txBody>
-      </p:sp>
-      <p:sp>
-        <p:nvSpPr>
-          <p:cNvPr id="20" name="Text 17"/>
-          <p:cNvSpPr/>
-          <p:nvPr/>
-        </p:nvSpPr>
-        <p:spPr>
-          <a:xfrm>
-            <a:off x="6611112" y="1783080"/>
-            <a:ext cx="1856232" cy="274320"/>
-          </a:xfrm>
-          <a:prstGeom prst="rect">
-            <a:avLst/>
-          </a:prstGeom>
-          <a:noFill/>
-          <a:ln/>
-        </p:spPr>
-        <p:txBody>
-          <a:bodyPr wrap="square" lIns="0" tIns="0" rIns="0" bIns="0" rtlCol="0" anchor="ctr"/>
+          <p:cNvPr id="63" name="Text 60"/>
+          <p:cNvSpPr/>
+          <p:nvPr/>
+        </p:nvSpPr>
+        <p:spPr>
+          <a:xfrm>
+            <a:off x="5486400" y="3648456"/>
+            <a:ext cx="2980944" cy="274320"/>
+          </a:xfrm>
+          <a:prstGeom prst="rect">
+            <a:avLst/>
+          </a:prstGeom>
+          <a:noFill/>
+          <a:ln/>
+        </p:spPr>
+        <p:txBody>
+          <a:bodyPr wrap="square" lIns="0" tIns="0" rIns="0" bIns="0" rtlCol="0" anchor="t"/>
           <a:lstStyle/>
           <a:p>
             <a:pPr marL="0" indent="0">
               <a:buNone/>
             </a:pPr>
             <a:r>
-              <a:rPr lang="en-US" sz="850" b="1" dirty="0">
-                <a:solidFill>
-                  <a:srgbClr val="FFFFFF"/>
-                </a:solidFill>
-                <a:latin typeface="Calibri" pitchFamily="34" charset="0"/>
-                <a:ea typeface="Calibri" pitchFamily="34" charset="-122"/>
-                <a:cs typeface="Calibri" pitchFamily="34" charset="-120"/>
-              </a:rPr>
-              <a:t>Observation</a:t>
-            </a:r>
-            <a:endParaRPr lang="en-US" sz="850" dirty="0"/>
-          </a:p>
-        </p:txBody>
-      </p:sp>
-      <p:sp>
-        <p:nvSpPr>
-          <p:cNvPr id="21" name="Shape 18"/>
-          <p:cNvSpPr/>
-          <p:nvPr/>
-        </p:nvSpPr>
-        <p:spPr>
-          <a:xfrm>
-            <a:off x="502920" y="2084832"/>
-            <a:ext cx="2743200" cy="301752"/>
-          </a:xfrm>
-          <a:prstGeom prst="rect">
-            <a:avLst/>
-          </a:prstGeom>
-          <a:solidFill>
-            <a:srgbClr val="F7F5F1"/>
-          </a:solidFill>
-          <a:ln w="3810">
-            <a:solidFill>
-              <a:srgbClr val="E5E0D8"/>
-            </a:solidFill>
-            <a:prstDash val="solid"/>
-          </a:ln>
-        </p:spPr>
-        <p:txBody>
-          <a:bodyPr/>
-          <a:lstStyle/>
-          <a:p>
-            <a:endParaRPr lang="fr-FR"/>
-          </a:p>
-        </p:txBody>
-      </p:sp>
-      <p:sp>
-        <p:nvSpPr>
-          <p:cNvPr id="22" name="Text 19"/>
-          <p:cNvSpPr/>
-          <p:nvPr/>
-        </p:nvSpPr>
-        <p:spPr>
-          <a:xfrm>
-            <a:off x="576072" y="2093976"/>
-            <a:ext cx="2633472" cy="283464"/>
-          </a:xfrm>
-          <a:prstGeom prst="rect">
-            <a:avLst/>
-          </a:prstGeom>
-          <a:noFill/>
-          <a:ln/>
-        </p:spPr>
-        <p:txBody>
-          <a:bodyPr wrap="square" lIns="0" tIns="0" rIns="0" bIns="0" rtlCol="0" anchor="ctr"/>
-          <a:lstStyle/>
-          <a:p>
-            <a:pPr marL="0" indent="0" algn="l">
-              <a:buNone/>
-            </a:pPr>
-            <a:r>
-              <a:rPr lang="en-US" sz="900" dirty="0">
-                <a:solidFill>
-                  <a:srgbClr val="8E5B3F"/>
-                </a:solidFill>
-                <a:latin typeface="Calibri" pitchFamily="34" charset="0"/>
-                <a:ea typeface="Calibri" pitchFamily="34" charset="-122"/>
-                <a:cs typeface="Calibri" pitchFamily="34" charset="-120"/>
-              </a:rPr>
-              <a:t>[Enveloppe / actif 1]</a:t>
-            </a:r>
-            <a:endParaRPr lang="en-US" sz="900" dirty="0"/>
-          </a:p>
-        </p:txBody>
-      </p:sp>
-      <p:sp>
-        <p:nvSpPr>
-          <p:cNvPr id="23" name="Shape 20"/>
-          <p:cNvSpPr/>
-          <p:nvPr/>
-        </p:nvSpPr>
-        <p:spPr>
-          <a:xfrm>
-            <a:off x="3246120" y="2084832"/>
-            <a:ext cx="1645920" cy="301752"/>
-          </a:xfrm>
-          <a:prstGeom prst="rect">
-            <a:avLst/>
-          </a:prstGeom>
-          <a:solidFill>
-            <a:srgbClr val="F7F5F1"/>
-          </a:solidFill>
-          <a:ln w="3810">
-            <a:solidFill>
-              <a:srgbClr val="E5E0D8"/>
-            </a:solidFill>
-            <a:prstDash val="solid"/>
-          </a:ln>
-        </p:spPr>
-        <p:txBody>
-          <a:bodyPr/>
-          <a:lstStyle/>
-          <a:p>
-            <a:endParaRPr lang="fr-FR"/>
-          </a:p>
-        </p:txBody>
-      </p:sp>
-      <p:sp>
-        <p:nvSpPr>
-          <p:cNvPr id="24" name="Text 21"/>
-          <p:cNvSpPr/>
-          <p:nvPr/>
-        </p:nvSpPr>
-        <p:spPr>
-          <a:xfrm>
-            <a:off x="3319272" y="2093976"/>
-            <a:ext cx="1536192" cy="283464"/>
-          </a:xfrm>
-          <a:prstGeom prst="rect">
-            <a:avLst/>
-          </a:prstGeom>
-          <a:noFill/>
-          <a:ln/>
-        </p:spPr>
-        <p:txBody>
-          <a:bodyPr wrap="square" lIns="0" tIns="0" rIns="0" bIns="0" rtlCol="0" anchor="ctr"/>
-          <a:lstStyle/>
-          <a:p>
-            <a:pPr marL="0" indent="0" algn="l">
-              <a:buNone/>
-            </a:pPr>
-            <a:r>
-              <a:rPr lang="en-US" sz="900" dirty="0">
-                <a:solidFill>
-                  <a:srgbClr val="8E5B3F"/>
-                </a:solidFill>
-                <a:latin typeface="Calibri" pitchFamily="34" charset="0"/>
-                <a:ea typeface="Calibri" pitchFamily="34" charset="-122"/>
-                <a:cs typeface="Calibri" pitchFamily="34" charset="-120"/>
-              </a:rPr>
-              <a:t>[Existant / Nouveau]</a:t>
-            </a:r>
-            <a:endParaRPr lang="en-US" sz="900" dirty="0"/>
-          </a:p>
-        </p:txBody>
-      </p:sp>
-      <p:sp>
-        <p:nvSpPr>
-          <p:cNvPr id="25" name="Shape 22"/>
-          <p:cNvSpPr/>
-          <p:nvPr/>
-        </p:nvSpPr>
-        <p:spPr>
-          <a:xfrm>
-            <a:off x="4892040" y="2084832"/>
-            <a:ext cx="1645920" cy="301752"/>
-          </a:xfrm>
-          <a:prstGeom prst="rect">
-            <a:avLst/>
-          </a:prstGeom>
-          <a:solidFill>
-            <a:srgbClr val="F7F5F1"/>
-          </a:solidFill>
-          <a:ln w="3810">
-            <a:solidFill>
-              <a:srgbClr val="E5E0D8"/>
-            </a:solidFill>
-            <a:prstDash val="solid"/>
-          </a:ln>
-        </p:spPr>
-        <p:txBody>
-          <a:bodyPr/>
-          <a:lstStyle/>
-          <a:p>
-            <a:endParaRPr lang="fr-FR"/>
-          </a:p>
-        </p:txBody>
-      </p:sp>
-      <p:sp>
-        <p:nvSpPr>
-          <p:cNvPr id="26" name="Text 23"/>
-          <p:cNvSpPr/>
-          <p:nvPr/>
-        </p:nvSpPr>
-        <p:spPr>
-          <a:xfrm>
-            <a:off x="4965192" y="2093976"/>
-            <a:ext cx="1536192" cy="283464"/>
-          </a:xfrm>
-          <a:prstGeom prst="rect">
-            <a:avLst/>
-          </a:prstGeom>
-          <a:noFill/>
-          <a:ln/>
-        </p:spPr>
-        <p:txBody>
-          <a:bodyPr wrap="square" lIns="0" tIns="0" rIns="0" bIns="0" rtlCol="0" anchor="ctr"/>
-          <a:lstStyle/>
-          <a:p>
-            <a:pPr marL="0" indent="0" algn="l">
-              <a:buNone/>
-            </a:pPr>
-            <a:r>
-              <a:rPr lang="en-US" sz="900" dirty="0">
-                <a:solidFill>
-                  <a:srgbClr val="8E5B3F"/>
-                </a:solidFill>
-                <a:latin typeface="Calibri" pitchFamily="34" charset="0"/>
-                <a:ea typeface="Calibri" pitchFamily="34" charset="-122"/>
-                <a:cs typeface="Calibri" pitchFamily="34" charset="-120"/>
-              </a:rPr>
-              <a:t>[X €]</a:t>
-            </a:r>
-            <a:endParaRPr lang="en-US" sz="900" dirty="0"/>
-          </a:p>
-        </p:txBody>
-      </p:sp>
-      <p:sp>
-        <p:nvSpPr>
-          <p:cNvPr id="27" name="Shape 24"/>
-          <p:cNvSpPr/>
-          <p:nvPr/>
-        </p:nvSpPr>
-        <p:spPr>
-          <a:xfrm>
-            <a:off x="6537960" y="2084832"/>
-            <a:ext cx="1965960" cy="301752"/>
-          </a:xfrm>
-          <a:prstGeom prst="rect">
-            <a:avLst/>
-          </a:prstGeom>
-          <a:solidFill>
-            <a:srgbClr val="F7F5F1"/>
-          </a:solidFill>
-          <a:ln w="3810">
-            <a:solidFill>
-              <a:srgbClr val="E5E0D8"/>
-            </a:solidFill>
-            <a:prstDash val="solid"/>
-          </a:ln>
-        </p:spPr>
-        <p:txBody>
-          <a:bodyPr/>
-          <a:lstStyle/>
-          <a:p>
-            <a:endParaRPr lang="fr-FR"/>
-          </a:p>
-        </p:txBody>
-      </p:sp>
-      <p:sp>
-        <p:nvSpPr>
-          <p:cNvPr id="28" name="Text 25"/>
-          <p:cNvSpPr/>
-          <p:nvPr/>
-        </p:nvSpPr>
-        <p:spPr>
-          <a:xfrm>
-            <a:off x="6611112" y="2093976"/>
-            <a:ext cx="1856232" cy="283464"/>
-          </a:xfrm>
-          <a:prstGeom prst="rect">
-            <a:avLst/>
-          </a:prstGeom>
-          <a:noFill/>
-          <a:ln/>
-        </p:spPr>
-        <p:txBody>
-          <a:bodyPr wrap="square" lIns="0" tIns="0" rIns="0" bIns="0" rtlCol="0" anchor="ctr"/>
-          <a:lstStyle/>
-          <a:p>
-            <a:pPr marL="0" indent="0" algn="l">
-              <a:buNone/>
-            </a:pPr>
-            <a:r>
-              <a:rPr lang="en-US" sz="900" dirty="0">
-                <a:solidFill>
-                  <a:srgbClr val="8E5B3F"/>
-                </a:solidFill>
-                <a:latin typeface="Calibri" pitchFamily="34" charset="0"/>
-                <a:ea typeface="Calibri" pitchFamily="34" charset="-122"/>
-                <a:cs typeface="Calibri" pitchFamily="34" charset="-120"/>
-              </a:rPr>
-              <a:t>[Commentaire]</a:t>
-            </a:r>
-            <a:endParaRPr lang="en-US" sz="900" dirty="0"/>
-          </a:p>
-        </p:txBody>
-      </p:sp>
-      <p:sp>
-        <p:nvSpPr>
-          <p:cNvPr id="29" name="Shape 26"/>
-          <p:cNvSpPr/>
-          <p:nvPr/>
-        </p:nvSpPr>
-        <p:spPr>
-          <a:xfrm>
-            <a:off x="502920" y="2395728"/>
-            <a:ext cx="2743200" cy="301752"/>
-          </a:xfrm>
-          <a:prstGeom prst="rect">
-            <a:avLst/>
-          </a:prstGeom>
-          <a:solidFill>
-            <a:srgbClr val="F3F0EB"/>
-          </a:solidFill>
-          <a:ln w="3810">
-            <a:solidFill>
-              <a:srgbClr val="E5E0D8"/>
-            </a:solidFill>
-            <a:prstDash val="solid"/>
-          </a:ln>
-        </p:spPr>
-        <p:txBody>
-          <a:bodyPr/>
-          <a:lstStyle/>
-          <a:p>
-            <a:endParaRPr lang="fr-FR"/>
-          </a:p>
-        </p:txBody>
-      </p:sp>
-      <p:sp>
-        <p:nvSpPr>
-          <p:cNvPr id="30" name="Text 27"/>
-          <p:cNvSpPr/>
-          <p:nvPr/>
-        </p:nvSpPr>
-        <p:spPr>
-          <a:xfrm>
-            <a:off x="576072" y="2404872"/>
-            <a:ext cx="2633472" cy="283464"/>
-          </a:xfrm>
-          <a:prstGeom prst="rect">
-            <a:avLst/>
-          </a:prstGeom>
-          <a:noFill/>
-          <a:ln/>
-        </p:spPr>
-        <p:txBody>
-          <a:bodyPr wrap="square" lIns="0" tIns="0" rIns="0" bIns="0" rtlCol="0" anchor="ctr"/>
-          <a:lstStyle/>
-          <a:p>
-            <a:pPr marL="0" indent="0" algn="l">
-              <a:buNone/>
-            </a:pPr>
-            <a:r>
-              <a:rPr lang="en-US" sz="900" dirty="0">
-                <a:solidFill>
-                  <a:srgbClr val="8E5B3F"/>
-                </a:solidFill>
-                <a:latin typeface="Calibri" pitchFamily="34" charset="0"/>
-                <a:ea typeface="Calibri" pitchFamily="34" charset="-122"/>
-                <a:cs typeface="Calibri" pitchFamily="34" charset="-120"/>
-              </a:rPr>
-              <a:t>[Enveloppe / actif 2]</a:t>
-            </a:r>
-            <a:endParaRPr lang="en-US" sz="900" dirty="0"/>
-          </a:p>
-        </p:txBody>
-      </p:sp>
-      <p:sp>
-        <p:nvSpPr>
-          <p:cNvPr id="31" name="Shape 28"/>
-          <p:cNvSpPr/>
-          <p:nvPr/>
-        </p:nvSpPr>
-        <p:spPr>
-          <a:xfrm>
-            <a:off x="3246120" y="2395728"/>
-            <a:ext cx="1645920" cy="301752"/>
-          </a:xfrm>
-          <a:prstGeom prst="rect">
-            <a:avLst/>
-          </a:prstGeom>
-          <a:solidFill>
-            <a:srgbClr val="F3F0EB"/>
-          </a:solidFill>
-          <a:ln w="3810">
-            <a:solidFill>
-              <a:srgbClr val="E5E0D8"/>
-            </a:solidFill>
-            <a:prstDash val="solid"/>
-          </a:ln>
-        </p:spPr>
-        <p:txBody>
-          <a:bodyPr/>
-          <a:lstStyle/>
-          <a:p>
-            <a:endParaRPr lang="fr-FR"/>
-          </a:p>
-        </p:txBody>
-      </p:sp>
-      <p:sp>
-        <p:nvSpPr>
-          <p:cNvPr id="32" name="Text 29"/>
-          <p:cNvSpPr/>
-          <p:nvPr/>
-        </p:nvSpPr>
-        <p:spPr>
-          <a:xfrm>
-            <a:off x="3319272" y="2404872"/>
-            <a:ext cx="1536192" cy="283464"/>
-          </a:xfrm>
-          <a:prstGeom prst="rect">
-            <a:avLst/>
-          </a:prstGeom>
-          <a:noFill/>
-          <a:ln/>
-        </p:spPr>
-        <p:txBody>
-          <a:bodyPr wrap="square" lIns="0" tIns="0" rIns="0" bIns="0" rtlCol="0" anchor="ctr"/>
-          <a:lstStyle/>
-          <a:p>
-            <a:pPr marL="0" indent="0" algn="l">
-              <a:buNone/>
-            </a:pPr>
-            <a:r>
-              <a:rPr lang="en-US" sz="900" dirty="0">
-                <a:solidFill>
-                  <a:srgbClr val="8E5B3F"/>
-                </a:solidFill>
-                <a:latin typeface="Calibri" pitchFamily="34" charset="0"/>
-                <a:ea typeface="Calibri" pitchFamily="34" charset="-122"/>
-                <a:cs typeface="Calibri" pitchFamily="34" charset="-120"/>
-              </a:rPr>
-              <a:t>[Existant / Nouveau]</a:t>
-            </a:r>
-            <a:endParaRPr lang="en-US" sz="900" dirty="0"/>
-          </a:p>
-        </p:txBody>
-      </p:sp>
-      <p:sp>
-        <p:nvSpPr>
-          <p:cNvPr id="33" name="Shape 30"/>
-          <p:cNvSpPr/>
-          <p:nvPr/>
-        </p:nvSpPr>
-        <p:spPr>
-          <a:xfrm>
-            <a:off x="4892040" y="2395728"/>
-            <a:ext cx="1645920" cy="301752"/>
-          </a:xfrm>
-          <a:prstGeom prst="rect">
-            <a:avLst/>
-          </a:prstGeom>
-          <a:solidFill>
-            <a:srgbClr val="F3F0EB"/>
-          </a:solidFill>
-          <a:ln w="3810">
-            <a:solidFill>
-              <a:srgbClr val="E5E0D8"/>
-            </a:solidFill>
-            <a:prstDash val="solid"/>
-          </a:ln>
-        </p:spPr>
-        <p:txBody>
-          <a:bodyPr/>
-          <a:lstStyle/>
-          <a:p>
-            <a:endParaRPr lang="fr-FR"/>
-          </a:p>
-        </p:txBody>
-      </p:sp>
-      <p:sp>
-        <p:nvSpPr>
-          <p:cNvPr id="34" name="Text 31"/>
-          <p:cNvSpPr/>
-          <p:nvPr/>
-        </p:nvSpPr>
-        <p:spPr>
-          <a:xfrm>
-            <a:off x="4965192" y="2404872"/>
-            <a:ext cx="1536192" cy="283464"/>
-          </a:xfrm>
-          <a:prstGeom prst="rect">
-            <a:avLst/>
-          </a:prstGeom>
-          <a:noFill/>
-          <a:ln/>
-        </p:spPr>
-        <p:txBody>
-          <a:bodyPr wrap="square" lIns="0" tIns="0" rIns="0" bIns="0" rtlCol="0" anchor="ctr"/>
-          <a:lstStyle/>
-          <a:p>
-            <a:pPr marL="0" indent="0" algn="l">
-              <a:buNone/>
-            </a:pPr>
-            <a:r>
-              <a:rPr lang="en-US" sz="900" dirty="0">
-                <a:solidFill>
-                  <a:srgbClr val="8E5B3F"/>
-                </a:solidFill>
-                <a:latin typeface="Calibri" pitchFamily="34" charset="0"/>
-                <a:ea typeface="Calibri" pitchFamily="34" charset="-122"/>
-                <a:cs typeface="Calibri" pitchFamily="34" charset="-120"/>
-              </a:rPr>
-              <a:t>[X €]</a:t>
-            </a:r>
-            <a:endParaRPr lang="en-US" sz="900" dirty="0"/>
-          </a:p>
-        </p:txBody>
-      </p:sp>
-      <p:sp>
-        <p:nvSpPr>
-          <p:cNvPr id="35" name="Shape 32"/>
-          <p:cNvSpPr/>
-          <p:nvPr/>
-        </p:nvSpPr>
-        <p:spPr>
-          <a:xfrm>
-            <a:off x="6537960" y="2395728"/>
-            <a:ext cx="1965960" cy="301752"/>
-          </a:xfrm>
-          <a:prstGeom prst="rect">
-            <a:avLst/>
-          </a:prstGeom>
-          <a:solidFill>
-            <a:srgbClr val="F3F0EB"/>
-          </a:solidFill>
-          <a:ln w="3810">
-            <a:solidFill>
-              <a:srgbClr val="E5E0D8"/>
-            </a:solidFill>
-            <a:prstDash val="solid"/>
-          </a:ln>
-        </p:spPr>
-        <p:txBody>
-          <a:bodyPr/>
-          <a:lstStyle/>
-          <a:p>
-            <a:endParaRPr lang="fr-FR"/>
-          </a:p>
-        </p:txBody>
-      </p:sp>
-      <p:sp>
-        <p:nvSpPr>
-          <p:cNvPr id="36" name="Text 33"/>
-          <p:cNvSpPr/>
-          <p:nvPr/>
-        </p:nvSpPr>
-        <p:spPr>
-          <a:xfrm>
-            <a:off x="6611112" y="2404872"/>
-            <a:ext cx="1856232" cy="283464"/>
-          </a:xfrm>
-          <a:prstGeom prst="rect">
-            <a:avLst/>
-          </a:prstGeom>
-          <a:noFill/>
-          <a:ln/>
-        </p:spPr>
-        <p:txBody>
-          <a:bodyPr wrap="square" lIns="0" tIns="0" rIns="0" bIns="0" rtlCol="0" anchor="ctr"/>
-          <a:lstStyle/>
-          <a:p>
-            <a:pPr marL="0" indent="0" algn="l">
-              <a:buNone/>
-            </a:pPr>
-            <a:r>
-              <a:rPr lang="en-US" sz="900" dirty="0">
-                <a:solidFill>
-                  <a:srgbClr val="8E5B3F"/>
-                </a:solidFill>
-                <a:latin typeface="Calibri" pitchFamily="34" charset="0"/>
-                <a:ea typeface="Calibri" pitchFamily="34" charset="-122"/>
-                <a:cs typeface="Calibri" pitchFamily="34" charset="-120"/>
-              </a:rPr>
-              <a:t>[Commentaire]</a:t>
-            </a:r>
-            <a:endParaRPr lang="en-US" sz="900" dirty="0"/>
-          </a:p>
-        </p:txBody>
-      </p:sp>
-      <p:sp>
-        <p:nvSpPr>
-          <p:cNvPr id="37" name="Shape 34"/>
-          <p:cNvSpPr/>
-          <p:nvPr/>
-        </p:nvSpPr>
-        <p:spPr>
-          <a:xfrm>
-            <a:off x="502920" y="2706624"/>
-            <a:ext cx="2743200" cy="301752"/>
-          </a:xfrm>
-          <a:prstGeom prst="rect">
-            <a:avLst/>
-          </a:prstGeom>
-          <a:solidFill>
-            <a:srgbClr val="F7F5F1"/>
-          </a:solidFill>
-          <a:ln w="3810">
-            <a:solidFill>
-              <a:srgbClr val="E5E0D8"/>
-            </a:solidFill>
-            <a:prstDash val="solid"/>
-          </a:ln>
-        </p:spPr>
-        <p:txBody>
-          <a:bodyPr/>
-          <a:lstStyle/>
-          <a:p>
-            <a:endParaRPr lang="fr-FR"/>
-          </a:p>
-        </p:txBody>
-      </p:sp>
-      <p:sp>
-        <p:nvSpPr>
-          <p:cNvPr id="38" name="Text 35"/>
-          <p:cNvSpPr/>
-          <p:nvPr/>
-        </p:nvSpPr>
-        <p:spPr>
-          <a:xfrm>
-            <a:off x="576072" y="2715768"/>
-            <a:ext cx="2633472" cy="283464"/>
-          </a:xfrm>
-          <a:prstGeom prst="rect">
-            <a:avLst/>
-          </a:prstGeom>
-          <a:noFill/>
-          <a:ln/>
-        </p:spPr>
-        <p:txBody>
-          <a:bodyPr wrap="square" lIns="0" tIns="0" rIns="0" bIns="0" rtlCol="0" anchor="ctr"/>
-          <a:lstStyle/>
-          <a:p>
-            <a:pPr marL="0" indent="0" algn="l">
-              <a:buNone/>
-            </a:pPr>
-            <a:r>
-              <a:rPr lang="en-US" sz="900" dirty="0">
-                <a:solidFill>
-                  <a:srgbClr val="8E5B3F"/>
-                </a:solidFill>
-                <a:latin typeface="Calibri" pitchFamily="34" charset="0"/>
-                <a:ea typeface="Calibri" pitchFamily="34" charset="-122"/>
-                <a:cs typeface="Calibri" pitchFamily="34" charset="-120"/>
-              </a:rPr>
-              <a:t>[Enveloppe / actif 3]</a:t>
-            </a:r>
-            <a:endParaRPr lang="en-US" sz="900" dirty="0"/>
-          </a:p>
-        </p:txBody>
-      </p:sp>
-      <p:sp>
-        <p:nvSpPr>
-          <p:cNvPr id="39" name="Shape 36"/>
-          <p:cNvSpPr/>
-          <p:nvPr/>
-        </p:nvSpPr>
-        <p:spPr>
-          <a:xfrm>
-            <a:off x="3246120" y="2706624"/>
-            <a:ext cx="1645920" cy="301752"/>
-          </a:xfrm>
-          <a:prstGeom prst="rect">
-            <a:avLst/>
-          </a:prstGeom>
-          <a:solidFill>
-            <a:srgbClr val="F7F5F1"/>
-          </a:solidFill>
-          <a:ln w="3810">
-            <a:solidFill>
-              <a:srgbClr val="E5E0D8"/>
-            </a:solidFill>
-            <a:prstDash val="solid"/>
-          </a:ln>
-        </p:spPr>
-        <p:txBody>
-          <a:bodyPr/>
-          <a:lstStyle/>
-          <a:p>
-            <a:endParaRPr lang="fr-FR"/>
-          </a:p>
-        </p:txBody>
-      </p:sp>
-      <p:sp>
-        <p:nvSpPr>
-          <p:cNvPr id="40" name="Text 37"/>
-          <p:cNvSpPr/>
-          <p:nvPr/>
-        </p:nvSpPr>
-        <p:spPr>
-          <a:xfrm>
-            <a:off x="3319272" y="2715768"/>
-            <a:ext cx="1536192" cy="283464"/>
-          </a:xfrm>
-          <a:prstGeom prst="rect">
-            <a:avLst/>
-          </a:prstGeom>
-          <a:noFill/>
-          <a:ln/>
-        </p:spPr>
-        <p:txBody>
-          <a:bodyPr wrap="square" lIns="0" tIns="0" rIns="0" bIns="0" rtlCol="0" anchor="ctr"/>
-          <a:lstStyle/>
-          <a:p>
-            <a:pPr marL="0" indent="0" algn="l">
-              <a:buNone/>
-            </a:pPr>
-            <a:r>
-              <a:rPr lang="en-US" sz="900" dirty="0">
-                <a:solidFill>
-                  <a:srgbClr val="8E5B3F"/>
-                </a:solidFill>
-                <a:latin typeface="Calibri" pitchFamily="34" charset="0"/>
-                <a:ea typeface="Calibri" pitchFamily="34" charset="-122"/>
-                <a:cs typeface="Calibri" pitchFamily="34" charset="-120"/>
-              </a:rPr>
-              <a:t>[Existant / Nouveau]</a:t>
-            </a:r>
-            <a:endParaRPr lang="en-US" sz="900" dirty="0"/>
-          </a:p>
-        </p:txBody>
-      </p:sp>
-      <p:sp>
-        <p:nvSpPr>
-          <p:cNvPr id="41" name="Shape 38"/>
-          <p:cNvSpPr/>
-          <p:nvPr/>
-        </p:nvSpPr>
-        <p:spPr>
-          <a:xfrm>
-            <a:off x="4892040" y="2706624"/>
-            <a:ext cx="1645920" cy="301752"/>
-          </a:xfrm>
-          <a:prstGeom prst="rect">
-            <a:avLst/>
-          </a:prstGeom>
-          <a:solidFill>
-            <a:srgbClr val="F7F5F1"/>
-          </a:solidFill>
-          <a:ln w="3810">
-            <a:solidFill>
-              <a:srgbClr val="E5E0D8"/>
-            </a:solidFill>
-            <a:prstDash val="solid"/>
-          </a:ln>
-        </p:spPr>
-        <p:txBody>
-          <a:bodyPr/>
-          <a:lstStyle/>
-          <a:p>
-            <a:endParaRPr lang="fr-FR"/>
-          </a:p>
-        </p:txBody>
-      </p:sp>
-      <p:sp>
-        <p:nvSpPr>
-          <p:cNvPr id="42" name="Text 39"/>
-          <p:cNvSpPr/>
-          <p:nvPr/>
-        </p:nvSpPr>
-        <p:spPr>
-          <a:xfrm>
-            <a:off x="4965192" y="2715768"/>
-            <a:ext cx="1536192" cy="283464"/>
-          </a:xfrm>
-          <a:prstGeom prst="rect">
-            <a:avLst/>
-          </a:prstGeom>
-          <a:noFill/>
-          <a:ln/>
-        </p:spPr>
-        <p:txBody>
-          <a:bodyPr wrap="square" lIns="0" tIns="0" rIns="0" bIns="0" rtlCol="0" anchor="ctr"/>
-          <a:lstStyle/>
-          <a:p>
-            <a:pPr marL="0" indent="0" algn="l">
-              <a:buNone/>
-            </a:pPr>
-            <a:r>
-              <a:rPr lang="en-US" sz="900" dirty="0">
-                <a:solidFill>
-                  <a:srgbClr val="8E5B3F"/>
-                </a:solidFill>
-                <a:latin typeface="Calibri" pitchFamily="34" charset="0"/>
-                <a:ea typeface="Calibri" pitchFamily="34" charset="-122"/>
-                <a:cs typeface="Calibri" pitchFamily="34" charset="-120"/>
-              </a:rPr>
-              <a:t>[X €]</a:t>
-            </a:r>
-            <a:endParaRPr lang="en-US" sz="900" dirty="0"/>
-          </a:p>
-        </p:txBody>
-      </p:sp>
-      <p:sp>
-        <p:nvSpPr>
-          <p:cNvPr id="43" name="Shape 40"/>
-          <p:cNvSpPr/>
-          <p:nvPr/>
-        </p:nvSpPr>
-        <p:spPr>
-          <a:xfrm>
-            <a:off x="6537960" y="2706624"/>
-            <a:ext cx="1965960" cy="301752"/>
-          </a:xfrm>
-          <a:prstGeom prst="rect">
-            <a:avLst/>
-          </a:prstGeom>
-          <a:solidFill>
-            <a:srgbClr val="F7F5F1"/>
-          </a:solidFill>
-          <a:ln w="3810">
-            <a:solidFill>
-              <a:srgbClr val="E5E0D8"/>
-            </a:solidFill>
-            <a:prstDash val="solid"/>
-          </a:ln>
-        </p:spPr>
-        <p:txBody>
-          <a:bodyPr/>
-          <a:lstStyle/>
-          <a:p>
-            <a:endParaRPr lang="fr-FR"/>
-          </a:p>
-        </p:txBody>
-      </p:sp>
-      <p:sp>
-        <p:nvSpPr>
-          <p:cNvPr id="44" name="Text 41"/>
-          <p:cNvSpPr/>
-          <p:nvPr/>
-        </p:nvSpPr>
-        <p:spPr>
-          <a:xfrm>
-            <a:off x="6611112" y="2715768"/>
-            <a:ext cx="1856232" cy="283464"/>
-          </a:xfrm>
-          <a:prstGeom prst="rect">
-            <a:avLst/>
-          </a:prstGeom>
-          <a:noFill/>
-          <a:ln/>
-        </p:spPr>
-        <p:txBody>
-          <a:bodyPr wrap="square" lIns="0" tIns="0" rIns="0" bIns="0" rtlCol="0" anchor="ctr"/>
-          <a:lstStyle/>
-          <a:p>
-            <a:pPr marL="0" indent="0" algn="l">
-              <a:buNone/>
-            </a:pPr>
-            <a:r>
-              <a:rPr lang="en-US" sz="900" dirty="0">
-                <a:solidFill>
-                  <a:srgbClr val="8E5B3F"/>
-                </a:solidFill>
-                <a:latin typeface="Calibri" pitchFamily="34" charset="0"/>
-                <a:ea typeface="Calibri" pitchFamily="34" charset="-122"/>
-                <a:cs typeface="Calibri" pitchFamily="34" charset="-120"/>
-              </a:rPr>
-              <a:t>[Commentaire]</a:t>
-            </a:r>
-            <a:endParaRPr lang="en-US" sz="900" dirty="0"/>
-          </a:p>
-        </p:txBody>
-      </p:sp>
-      <p:sp>
-        <p:nvSpPr>
-          <p:cNvPr id="45" name="Shape 42"/>
-          <p:cNvSpPr/>
-          <p:nvPr/>
-        </p:nvSpPr>
-        <p:spPr>
-          <a:xfrm>
-            <a:off x="502920" y="3017520"/>
-            <a:ext cx="2743200" cy="301752"/>
-          </a:xfrm>
-          <a:prstGeom prst="rect">
-            <a:avLst/>
-          </a:prstGeom>
-          <a:solidFill>
-            <a:srgbClr val="F3F0EB"/>
-          </a:solidFill>
-          <a:ln w="3810">
-            <a:solidFill>
-              <a:srgbClr val="E5E0D8"/>
-            </a:solidFill>
-            <a:prstDash val="solid"/>
-          </a:ln>
-        </p:spPr>
-        <p:txBody>
-          <a:bodyPr/>
-          <a:lstStyle/>
-          <a:p>
-            <a:endParaRPr lang="fr-FR"/>
-          </a:p>
-        </p:txBody>
-      </p:sp>
-      <p:sp>
-        <p:nvSpPr>
-          <p:cNvPr id="46" name="Text 43"/>
-          <p:cNvSpPr/>
-          <p:nvPr/>
-        </p:nvSpPr>
-        <p:spPr>
-          <a:xfrm>
-            <a:off x="576072" y="3026664"/>
-            <a:ext cx="2633472" cy="283464"/>
-          </a:xfrm>
-          <a:prstGeom prst="rect">
-            <a:avLst/>
-          </a:prstGeom>
-          <a:noFill/>
-          <a:ln/>
-        </p:spPr>
-        <p:txBody>
-          <a:bodyPr wrap="square" lIns="0" tIns="0" rIns="0" bIns="0" rtlCol="0" anchor="ctr"/>
-          <a:lstStyle/>
-          <a:p>
-            <a:pPr marL="0" indent="0" algn="l">
-              <a:buNone/>
-            </a:pPr>
-            <a:r>
-              <a:rPr lang="en-US" sz="900" dirty="0">
-                <a:solidFill>
-                  <a:srgbClr val="8E5B3F"/>
-                </a:solidFill>
-                <a:latin typeface="Calibri" pitchFamily="34" charset="0"/>
-                <a:ea typeface="Calibri" pitchFamily="34" charset="-122"/>
-                <a:cs typeface="Calibri" pitchFamily="34" charset="-120"/>
-              </a:rPr>
-              <a:t>[Enveloppe / actif 4]</a:t>
-            </a:r>
-            <a:endParaRPr lang="en-US" sz="900" dirty="0"/>
-          </a:p>
-        </p:txBody>
-      </p:sp>
-      <p:sp>
-        <p:nvSpPr>
-          <p:cNvPr id="47" name="Shape 44"/>
-          <p:cNvSpPr/>
-          <p:nvPr/>
-        </p:nvSpPr>
-        <p:spPr>
-          <a:xfrm>
-            <a:off x="3246120" y="3017520"/>
-            <a:ext cx="1645920" cy="301752"/>
-          </a:xfrm>
-          <a:prstGeom prst="rect">
-            <a:avLst/>
-          </a:prstGeom>
-          <a:solidFill>
-            <a:srgbClr val="F3F0EB"/>
-          </a:solidFill>
-          <a:ln w="3810">
-            <a:solidFill>
-              <a:srgbClr val="E5E0D8"/>
-            </a:solidFill>
-            <a:prstDash val="solid"/>
-          </a:ln>
-        </p:spPr>
-        <p:txBody>
-          <a:bodyPr/>
-          <a:lstStyle/>
-          <a:p>
-            <a:endParaRPr lang="fr-FR"/>
-          </a:p>
-        </p:txBody>
-      </p:sp>
-      <p:sp>
-        <p:nvSpPr>
-          <p:cNvPr id="48" name="Text 45"/>
-          <p:cNvSpPr/>
-          <p:nvPr/>
-        </p:nvSpPr>
-        <p:spPr>
-          <a:xfrm>
-            <a:off x="3319272" y="3026664"/>
-            <a:ext cx="1536192" cy="283464"/>
-          </a:xfrm>
-          <a:prstGeom prst="rect">
-            <a:avLst/>
-          </a:prstGeom>
-          <a:noFill/>
-          <a:ln/>
-        </p:spPr>
-        <p:txBody>
-          <a:bodyPr wrap="square" lIns="0" tIns="0" rIns="0" bIns="0" rtlCol="0" anchor="ctr"/>
-          <a:lstStyle/>
-          <a:p>
-            <a:pPr marL="0" indent="0" algn="l">
-              <a:buNone/>
-            </a:pPr>
-            <a:r>
-              <a:rPr lang="en-US" sz="900" dirty="0">
-                <a:solidFill>
-                  <a:srgbClr val="8E5B3F"/>
-                </a:solidFill>
-                <a:latin typeface="Calibri" pitchFamily="34" charset="0"/>
-                <a:ea typeface="Calibri" pitchFamily="34" charset="-122"/>
-                <a:cs typeface="Calibri" pitchFamily="34" charset="-120"/>
-              </a:rPr>
-              <a:t>[Existant / Nouveau]</a:t>
-            </a:r>
-            <a:endParaRPr lang="en-US" sz="900" dirty="0"/>
-          </a:p>
-        </p:txBody>
-      </p:sp>
-      <p:sp>
-        <p:nvSpPr>
-          <p:cNvPr id="49" name="Shape 46"/>
-          <p:cNvSpPr/>
-          <p:nvPr/>
-        </p:nvSpPr>
-        <p:spPr>
-          <a:xfrm>
-            <a:off x="4892040" y="3017520"/>
-            <a:ext cx="1645920" cy="301752"/>
-          </a:xfrm>
-          <a:prstGeom prst="rect">
-            <a:avLst/>
-          </a:prstGeom>
-          <a:solidFill>
-            <a:srgbClr val="F3F0EB"/>
-          </a:solidFill>
-          <a:ln w="3810">
-            <a:solidFill>
-              <a:srgbClr val="E5E0D8"/>
-            </a:solidFill>
-            <a:prstDash val="solid"/>
-          </a:ln>
-        </p:spPr>
-        <p:txBody>
-          <a:bodyPr/>
-          <a:lstStyle/>
-          <a:p>
-            <a:endParaRPr lang="fr-FR"/>
-          </a:p>
-        </p:txBody>
-      </p:sp>
-      <p:sp>
-        <p:nvSpPr>
-          <p:cNvPr id="50" name="Text 47"/>
-          <p:cNvSpPr/>
-          <p:nvPr/>
-        </p:nvSpPr>
-        <p:spPr>
-          <a:xfrm>
-            <a:off x="4965192" y="3026664"/>
-            <a:ext cx="1536192" cy="283464"/>
-          </a:xfrm>
-          <a:prstGeom prst="rect">
-            <a:avLst/>
-          </a:prstGeom>
-          <a:noFill/>
-          <a:ln/>
-        </p:spPr>
-        <p:txBody>
-          <a:bodyPr wrap="square" lIns="0" tIns="0" rIns="0" bIns="0" rtlCol="0" anchor="ctr"/>
-          <a:lstStyle/>
-          <a:p>
-            <a:pPr marL="0" indent="0" algn="l">
-              <a:buNone/>
-            </a:pPr>
-            <a:r>
-              <a:rPr lang="en-US" sz="900" dirty="0">
-                <a:solidFill>
-                  <a:srgbClr val="8E5B3F"/>
-                </a:solidFill>
-                <a:latin typeface="Calibri" pitchFamily="34" charset="0"/>
-                <a:ea typeface="Calibri" pitchFamily="34" charset="-122"/>
-                <a:cs typeface="Calibri" pitchFamily="34" charset="-120"/>
-              </a:rPr>
-              <a:t>[X €]</a:t>
-            </a:r>
-            <a:endParaRPr lang="en-US" sz="900" dirty="0"/>
-          </a:p>
-        </p:txBody>
-      </p:sp>
-      <p:sp>
-        <p:nvSpPr>
-          <p:cNvPr id="51" name="Shape 48"/>
-          <p:cNvSpPr/>
-          <p:nvPr/>
-        </p:nvSpPr>
-        <p:spPr>
-          <a:xfrm>
-            <a:off x="6537960" y="3017520"/>
-            <a:ext cx="1965960" cy="301752"/>
-          </a:xfrm>
-          <a:prstGeom prst="rect">
-            <a:avLst/>
-          </a:prstGeom>
-          <a:solidFill>
-            <a:srgbClr val="F3F0EB"/>
-          </a:solidFill>
-          <a:ln w="3810">
-            <a:solidFill>
-              <a:srgbClr val="E5E0D8"/>
-            </a:solidFill>
-            <a:prstDash val="solid"/>
-          </a:ln>
-        </p:spPr>
-        <p:txBody>
-          <a:bodyPr/>
-          <a:lstStyle/>
-          <a:p>
-            <a:endParaRPr lang="fr-FR"/>
-          </a:p>
-        </p:txBody>
-      </p:sp>
-      <p:sp>
-        <p:nvSpPr>
-          <p:cNvPr id="52" name="Text 49"/>
-          <p:cNvSpPr/>
-          <p:nvPr/>
-        </p:nvSpPr>
-        <p:spPr>
-          <a:xfrm>
-            <a:off x="6611112" y="3026664"/>
-            <a:ext cx="1856232" cy="283464"/>
-          </a:xfrm>
-          <a:prstGeom prst="rect">
-            <a:avLst/>
-          </a:prstGeom>
-          <a:noFill/>
-          <a:ln/>
-        </p:spPr>
-        <p:txBody>
-          <a:bodyPr wrap="square" lIns="0" tIns="0" rIns="0" bIns="0" rtlCol="0" anchor="ctr"/>
-          <a:lstStyle/>
-          <a:p>
-            <a:pPr marL="0" indent="0" algn="l">
-              <a:buNone/>
-            </a:pPr>
-            <a:r>
-              <a:rPr lang="en-US" sz="900" dirty="0">
-                <a:solidFill>
-                  <a:srgbClr val="8E5B3F"/>
-                </a:solidFill>
-                <a:latin typeface="Calibri" pitchFamily="34" charset="0"/>
-                <a:ea typeface="Calibri" pitchFamily="34" charset="-122"/>
-                <a:cs typeface="Calibri" pitchFamily="34" charset="-120"/>
-              </a:rPr>
-              <a:t>[Commentaire]</a:t>
-            </a:r>
-            <a:endParaRPr lang="en-US" sz="900" dirty="0"/>
-          </a:p>
-        </p:txBody>
-      </p:sp>
-      <p:sp>
-        <p:nvSpPr>
-          <p:cNvPr id="53" name="Shape 50"/>
-          <p:cNvSpPr/>
-          <p:nvPr/>
-        </p:nvSpPr>
-        <p:spPr>
-          <a:xfrm>
-            <a:off x="502920" y="3328416"/>
-            <a:ext cx="2743200" cy="301752"/>
-          </a:xfrm>
-          <a:prstGeom prst="rect">
-            <a:avLst/>
-          </a:prstGeom>
-          <a:solidFill>
-            <a:srgbClr val="F7F5F1"/>
-          </a:solidFill>
-          <a:ln w="3810">
-            <a:solidFill>
-              <a:srgbClr val="E5E0D8"/>
-            </a:solidFill>
-            <a:prstDash val="solid"/>
-          </a:ln>
-        </p:spPr>
-        <p:txBody>
-          <a:bodyPr/>
-          <a:lstStyle/>
-          <a:p>
-            <a:endParaRPr lang="fr-FR"/>
-          </a:p>
-        </p:txBody>
-      </p:sp>
-      <p:sp>
-        <p:nvSpPr>
-          <p:cNvPr id="54" name="Text 51"/>
-          <p:cNvSpPr/>
-          <p:nvPr/>
-        </p:nvSpPr>
-        <p:spPr>
-          <a:xfrm>
-            <a:off x="576072" y="3337560"/>
-            <a:ext cx="2633472" cy="283464"/>
-          </a:xfrm>
-          <a:prstGeom prst="rect">
-            <a:avLst/>
-          </a:prstGeom>
-          <a:noFill/>
-          <a:ln/>
-        </p:spPr>
-        <p:txBody>
-          <a:bodyPr wrap="square" lIns="0" tIns="0" rIns="0" bIns="0" rtlCol="0" anchor="ctr"/>
-          <a:lstStyle/>
-          <a:p>
-            <a:pPr marL="0" indent="0" algn="l">
-              <a:buNone/>
-            </a:pPr>
-            <a:r>
-              <a:rPr lang="en-US" sz="900" dirty="0">
-                <a:solidFill>
-                  <a:srgbClr val="8E5B3F"/>
-                </a:solidFill>
-                <a:latin typeface="Calibri" pitchFamily="34" charset="0"/>
-                <a:ea typeface="Calibri" pitchFamily="34" charset="-122"/>
-                <a:cs typeface="Calibri" pitchFamily="34" charset="-120"/>
-              </a:rPr>
-              <a:t>[Capacité d'épargne mensuelle]</a:t>
-            </a:r>
-            <a:endParaRPr lang="en-US" sz="900" dirty="0"/>
-          </a:p>
-        </p:txBody>
-      </p:sp>
-      <p:sp>
-        <p:nvSpPr>
-          <p:cNvPr id="55" name="Shape 52"/>
-          <p:cNvSpPr/>
-          <p:nvPr/>
-        </p:nvSpPr>
-        <p:spPr>
-          <a:xfrm>
-            <a:off x="3246120" y="3328416"/>
-            <a:ext cx="1645920" cy="301752"/>
-          </a:xfrm>
-          <a:prstGeom prst="rect">
-            <a:avLst/>
-          </a:prstGeom>
-          <a:solidFill>
-            <a:srgbClr val="F7F5F1"/>
-          </a:solidFill>
-          <a:ln w="3810">
-            <a:solidFill>
-              <a:srgbClr val="E5E0D8"/>
-            </a:solidFill>
-            <a:prstDash val="solid"/>
-          </a:ln>
-        </p:spPr>
-        <p:txBody>
-          <a:bodyPr/>
-          <a:lstStyle/>
-          <a:p>
-            <a:endParaRPr lang="fr-FR"/>
-          </a:p>
-        </p:txBody>
-      </p:sp>
-      <p:sp>
-        <p:nvSpPr>
-          <p:cNvPr id="56" name="Text 53"/>
-          <p:cNvSpPr/>
-          <p:nvPr/>
-        </p:nvSpPr>
-        <p:spPr>
-          <a:xfrm>
-            <a:off x="3319272" y="3337560"/>
-            <a:ext cx="1536192" cy="283464"/>
-          </a:xfrm>
-          <a:prstGeom prst="rect">
-            <a:avLst/>
-          </a:prstGeom>
-          <a:noFill/>
-          <a:ln/>
-        </p:spPr>
-        <p:txBody>
-          <a:bodyPr wrap="square" lIns="0" tIns="0" rIns="0" bIns="0" rtlCol="0" anchor="ctr"/>
-          <a:lstStyle/>
-          <a:p>
-            <a:pPr marL="0" indent="0" algn="l">
-              <a:buNone/>
-            </a:pPr>
-            <a:r>
-              <a:rPr lang="en-US" sz="900" dirty="0">
-                <a:solidFill>
-                  <a:srgbClr val="8E5B3F"/>
-                </a:solidFill>
-                <a:latin typeface="Calibri" pitchFamily="34" charset="0"/>
-                <a:ea typeface="Calibri" pitchFamily="34" charset="-122"/>
-                <a:cs typeface="Calibri" pitchFamily="34" charset="-120"/>
-              </a:rPr>
-              <a:t>[Nouveau]</a:t>
-            </a:r>
-            <a:endParaRPr lang="en-US" sz="900" dirty="0"/>
-          </a:p>
-        </p:txBody>
-      </p:sp>
-      <p:sp>
-        <p:nvSpPr>
-          <p:cNvPr id="57" name="Shape 54"/>
-          <p:cNvSpPr/>
-          <p:nvPr/>
-        </p:nvSpPr>
-        <p:spPr>
-          <a:xfrm>
-            <a:off x="4892040" y="3328416"/>
-            <a:ext cx="1645920" cy="301752"/>
-          </a:xfrm>
-          <a:prstGeom prst="rect">
-            <a:avLst/>
-          </a:prstGeom>
-          <a:solidFill>
-            <a:srgbClr val="F7F5F1"/>
-          </a:solidFill>
-          <a:ln w="3810">
-            <a:solidFill>
-              <a:srgbClr val="E5E0D8"/>
-            </a:solidFill>
-            <a:prstDash val="solid"/>
-          </a:ln>
-        </p:spPr>
-        <p:txBody>
-          <a:bodyPr/>
-          <a:lstStyle/>
-          <a:p>
-            <a:endParaRPr lang="fr-FR"/>
-          </a:p>
-        </p:txBody>
-      </p:sp>
-      <p:sp>
-        <p:nvSpPr>
-          <p:cNvPr id="58" name="Text 55"/>
-          <p:cNvSpPr/>
-          <p:nvPr/>
-        </p:nvSpPr>
-        <p:spPr>
-          <a:xfrm>
-            <a:off x="4965192" y="3337560"/>
-            <a:ext cx="1536192" cy="283464"/>
-          </a:xfrm>
-          <a:prstGeom prst="rect">
-            <a:avLst/>
-          </a:prstGeom>
-          <a:noFill/>
-          <a:ln/>
-        </p:spPr>
-        <p:txBody>
-          <a:bodyPr wrap="square" lIns="0" tIns="0" rIns="0" bIns="0" rtlCol="0" anchor="ctr"/>
-          <a:lstStyle/>
-          <a:p>
-            <a:pPr marL="0" indent="0" algn="l">
-              <a:buNone/>
-            </a:pPr>
-            <a:r>
-              <a:rPr lang="en-US" sz="900" dirty="0">
-                <a:solidFill>
-                  <a:srgbClr val="8E5B3F"/>
-                </a:solidFill>
-                <a:latin typeface="Calibri" pitchFamily="34" charset="0"/>
-                <a:ea typeface="Calibri" pitchFamily="34" charset="-122"/>
-                <a:cs typeface="Calibri" pitchFamily="34" charset="-120"/>
-              </a:rPr>
-              <a:t>[X €]/mois</a:t>
-            </a:r>
-            <a:endParaRPr lang="en-US" sz="900" dirty="0"/>
-          </a:p>
-        </p:txBody>
-      </p:sp>
-      <p:sp>
-        <p:nvSpPr>
-          <p:cNvPr id="59" name="Shape 56"/>
-          <p:cNvSpPr/>
-          <p:nvPr/>
-        </p:nvSpPr>
-        <p:spPr>
-          <a:xfrm>
-            <a:off x="6537960" y="3328416"/>
-            <a:ext cx="1965960" cy="301752"/>
-          </a:xfrm>
-          <a:prstGeom prst="rect">
-            <a:avLst/>
-          </a:prstGeom>
-          <a:solidFill>
-            <a:srgbClr val="F7F5F1"/>
-          </a:solidFill>
-          <a:ln w="3810">
-            <a:solidFill>
-              <a:srgbClr val="E5E0D8"/>
-            </a:solidFill>
-            <a:prstDash val="solid"/>
-          </a:ln>
-        </p:spPr>
-        <p:txBody>
-          <a:bodyPr/>
-          <a:lstStyle/>
-          <a:p>
-            <a:endParaRPr lang="fr-FR"/>
-          </a:p>
-        </p:txBody>
-      </p:sp>
-      <p:sp>
-        <p:nvSpPr>
-          <p:cNvPr id="60" name="Text 57"/>
-          <p:cNvSpPr/>
-          <p:nvPr/>
-        </p:nvSpPr>
-        <p:spPr>
-          <a:xfrm>
-            <a:off x="6611112" y="3337560"/>
-            <a:ext cx="1856232" cy="283464"/>
-          </a:xfrm>
-          <a:prstGeom prst="rect">
-            <a:avLst/>
-          </a:prstGeom>
-          <a:noFill/>
-          <a:ln/>
-        </p:spPr>
-        <p:txBody>
-          <a:bodyPr wrap="square" lIns="0" tIns="0" rIns="0" bIns="0" rtlCol="0" anchor="ctr"/>
-          <a:lstStyle/>
-          <a:p>
-            <a:pPr marL="0" indent="0" algn="l">
-              <a:buNone/>
-            </a:pPr>
-            <a:r>
-              <a:rPr lang="en-US" sz="900" dirty="0">
-                <a:solidFill>
-                  <a:srgbClr val="8E5B3F"/>
-                </a:solidFill>
-                <a:latin typeface="Calibri" pitchFamily="34" charset="0"/>
-                <a:ea typeface="Calibri" pitchFamily="34" charset="-122"/>
-                <a:cs typeface="Calibri" pitchFamily="34" charset="-120"/>
-              </a:rPr>
-              <a:t>[Commentaire]</a:t>
-            </a:r>
-            <a:endParaRPr lang="en-US" sz="900" dirty="0"/>
-          </a:p>
-        </p:txBody>
-      </p:sp>
-      <p:sp>
-        <p:nvSpPr>
-          <p:cNvPr id="61" name="Shape 58"/>
-          <p:cNvSpPr/>
-          <p:nvPr/>
-        </p:nvSpPr>
-        <p:spPr>
-          <a:xfrm>
-            <a:off x="502920" y="3639312"/>
-            <a:ext cx="8001000" cy="292608"/>
-          </a:xfrm>
-          <a:prstGeom prst="rect">
-            <a:avLst/>
-          </a:prstGeom>
-          <a:solidFill>
-            <a:srgbClr val="1C2B3A"/>
-          </a:solidFill>
-          <a:ln w="12700">
-            <a:solidFill>
-              <a:srgbClr val="1C2B3A"/>
-            </a:solidFill>
-            <a:prstDash val="solid"/>
-          </a:ln>
-        </p:spPr>
-        <p:txBody>
-          <a:bodyPr/>
-          <a:lstStyle/>
-          <a:p>
-            <a:endParaRPr lang="fr-FR"/>
-          </a:p>
-        </p:txBody>
-      </p:sp>
-      <p:sp>
-        <p:nvSpPr>
-          <p:cNvPr id="62" name="Text 59"/>
-          <p:cNvSpPr/>
-          <p:nvPr/>
-        </p:nvSpPr>
-        <p:spPr>
-          <a:xfrm>
-            <a:off x="576072" y="3648456"/>
-            <a:ext cx="4114800" cy="274320"/>
-          </a:xfrm>
-          <a:prstGeom prst="rect">
-            <a:avLst/>
-          </a:prstGeom>
-          <a:noFill/>
-          <a:ln/>
-        </p:spPr>
-        <p:txBody>
-          <a:bodyPr wrap="square" lIns="0" tIns="0" rIns="0" bIns="0" rtlCol="0" anchor="ctr"/>
-          <a:lstStyle/>
-          <a:p>
-            <a:pPr marL="0" indent="0">
-              <a:buNone/>
-            </a:pPr>
-            <a:r>
-              <a:rPr lang="en-US" sz="850" b="1" dirty="0">
-                <a:solidFill>
-                  <a:srgbClr val="FFFFFF"/>
-                </a:solidFill>
-                <a:latin typeface="Calibri" pitchFamily="34" charset="0"/>
-                <a:ea typeface="Calibri" pitchFamily="34" charset="-122"/>
-                <a:cs typeface="Calibri" pitchFamily="34" charset="-120"/>
-              </a:rPr>
-              <a:t>TOTAL DES MOYENS MOBILISÉS</a:t>
-            </a:r>
-            <a:endParaRPr lang="en-US" sz="850" dirty="0"/>
-          </a:p>
-        </p:txBody>
-      </p:sp>
-      <p:sp>
-        <p:nvSpPr>
-          <p:cNvPr id="63" name="Text 60"/>
-          <p:cNvSpPr/>
-          <p:nvPr/>
-        </p:nvSpPr>
-        <p:spPr>
-          <a:xfrm>
-            <a:off x="5303520" y="3648456"/>
-            <a:ext cx="2286000" cy="274320"/>
-          </a:xfrm>
-          <a:prstGeom prst="rect">
-            <a:avLst/>
-          </a:prstGeom>
-          <a:noFill/>
-          <a:ln/>
-        </p:spPr>
-        <p:txBody>
-          <a:bodyPr wrap="square" lIns="0" tIns="0" rIns="0" bIns="0" rtlCol="0" anchor="t"/>
-          <a:lstStyle/>
-          <a:p>
-            <a:pPr marL="0" indent="0">
-              <a:buNone/>
-            </a:pPr>
-            <a:r>
               <a:rPr lang="en-US" sz="850" i="1" dirty="0">
                 <a:solidFill>
-                  <a:srgbClr val="8E5B3F"/>
+                  <a:srgbClr val="F3F0EB"/>
                 </a:solidFill>
                 <a:latin typeface="Calibri" pitchFamily="34" charset="0"/>
                 <a:ea typeface="Calibri" pitchFamily="34" charset="-122"/>
@@ -8060,1473 +5620,6 @@
       <p:sp>
         <p:nvSpPr>
           <p:cNvPr id="66" name="Text 63"/>
-          <p:cNvSpPr/>
-          <p:nvPr/>
-        </p:nvSpPr>
-        <p:spPr>
-          <a:xfrm>
-            <a:off x="2560320" y="5001768"/>
-            <a:ext cx="6080760" cy="118872"/>
-          </a:xfrm>
-          <a:prstGeom prst="rect">
-            <a:avLst/>
-          </a:prstGeom>
-          <a:noFill/>
-          <a:ln/>
-        </p:spPr>
-        <p:txBody>
-          <a:bodyPr wrap="square" lIns="0" tIns="0" rIns="0" bIns="0" rtlCol="0" anchor="ctr"/>
-          <a:lstStyle/>
-          <a:p>
-            <a:pPr marL="0" indent="0" algn="ctr">
-              <a:buNone/>
-            </a:pPr>
-            <a:r>
-              <a:rPr lang="en-US" sz="680" i="1" dirty="0">
-                <a:solidFill>
-                  <a:srgbClr val="A09080"/>
-                </a:solidFill>
-                <a:latin typeface="Calibri" pitchFamily="34" charset="0"/>
-                <a:ea typeface="Calibri" pitchFamily="34" charset="-122"/>
-                <a:cs typeface="Calibri" pitchFamily="34" charset="-120"/>
-              </a:rPr>
-              <a:t>Affilior Gestion Privée  ·  Confidentiel  ·  [MOIS ANNÉE]  ·  Ce document ne constitue pas un conseil en investissement au sens MIF2</a:t>
-            </a:r>
-            <a:endParaRPr lang="en-US" sz="680" dirty="0"/>
-          </a:p>
-        </p:txBody>
-      </p:sp>
-    </p:spTree>
-  </p:cSld>
-  <p:clrMapOvr>
-    <a:masterClrMapping/>
-  </p:clrMapOvr>
-</p:sld>
-</file>
-
-<file path=ppt/slides/slide14.xml><?xml version="1.0" encoding="utf-8"?>
-<p:sld xmlns:a="http://schemas.openxmlformats.org/drawingml/2006/main" xmlns:r="http://schemas.openxmlformats.org/officeDocument/2006/relationships" xmlns:p="http://schemas.openxmlformats.org/presentationml/2006/main">
-  <p:cSld name="Slide 14">
-    <p:bg>
-      <p:bgPr>
-        <a:solidFill>
-          <a:srgbClr val="F3F0EB"/>
-        </a:solidFill>
-        <a:effectLst/>
-      </p:bgPr>
-    </p:bg>
-    <p:spTree>
-      <p:nvGrpSpPr>
-        <p:cNvPr id="1" name=""/>
-        <p:cNvGrpSpPr/>
-        <p:nvPr/>
-      </p:nvGrpSpPr>
-      <p:grpSpPr>
-        <a:xfrm>
-          <a:off x="0" y="0"/>
-          <a:ext cx="0" cy="0"/>
-          <a:chOff x="0" y="0"/>
-          <a:chExt cx="0" cy="0"/>
-        </a:xfrm>
-      </p:grpSpPr>
-      <p:sp>
-        <p:nvSpPr>
-          <p:cNvPr id="2" name="Shape 0"/>
-          <p:cNvSpPr/>
-          <p:nvPr/>
-        </p:nvSpPr>
-        <p:spPr>
-          <a:xfrm>
-            <a:off x="8613648" y="411480"/>
-            <a:ext cx="10973" cy="4224528"/>
-          </a:xfrm>
-          <a:prstGeom prst="rect">
-            <a:avLst/>
-          </a:prstGeom>
-          <a:solidFill>
-            <a:srgbClr val="8B1A1A">
-              <a:alpha val="45000"/>
-            </a:srgbClr>
-          </a:solidFill>
-          <a:ln w="12700">
-            <a:solidFill>
-              <a:srgbClr val="8B1A1A">
-                <a:alpha val="45000"/>
-              </a:srgbClr>
-            </a:solidFill>
-            <a:prstDash val="solid"/>
-          </a:ln>
-        </p:spPr>
-        <p:txBody>
-          <a:bodyPr/>
-          <a:lstStyle/>
-          <a:p>
-            <a:endParaRPr lang="fr-FR"/>
-          </a:p>
-        </p:txBody>
-      </p:sp>
-      <p:sp>
-        <p:nvSpPr>
-          <p:cNvPr id="3" name="Shape 1"/>
-          <p:cNvSpPr/>
-          <p:nvPr/>
-        </p:nvSpPr>
-        <p:spPr>
-          <a:xfrm>
-            <a:off x="6876288" y="4773168"/>
-            <a:ext cx="1572768" cy="10973"/>
-          </a:xfrm>
-          <a:prstGeom prst="rect">
-            <a:avLst/>
-          </a:prstGeom>
-          <a:solidFill>
-            <a:srgbClr val="8B1A1A">
-              <a:alpha val="45000"/>
-            </a:srgbClr>
-          </a:solidFill>
-          <a:ln w="12700">
-            <a:solidFill>
-              <a:srgbClr val="8B1A1A">
-                <a:alpha val="45000"/>
-              </a:srgbClr>
-            </a:solidFill>
-            <a:prstDash val="solid"/>
-          </a:ln>
-        </p:spPr>
-        <p:txBody>
-          <a:bodyPr/>
-          <a:lstStyle/>
-          <a:p>
-            <a:endParaRPr lang="fr-FR"/>
-          </a:p>
-        </p:txBody>
-      </p:sp>
-      <p:sp>
-        <p:nvSpPr>
-          <p:cNvPr id="4" name="Shape 2"/>
-          <p:cNvSpPr/>
-          <p:nvPr/>
-        </p:nvSpPr>
-        <p:spPr>
-          <a:xfrm>
-            <a:off x="0" y="4974336"/>
-            <a:ext cx="9144000" cy="169164"/>
-          </a:xfrm>
-          <a:prstGeom prst="rect">
-            <a:avLst/>
-          </a:prstGeom>
-          <a:solidFill>
-            <a:srgbClr val="CFC8BD"/>
-          </a:solidFill>
-          <a:ln w="12700">
-            <a:solidFill>
-              <a:srgbClr val="CFC8BD"/>
-            </a:solidFill>
-            <a:prstDash val="solid"/>
-          </a:ln>
-        </p:spPr>
-        <p:txBody>
-          <a:bodyPr/>
-          <a:lstStyle/>
-          <a:p>
-            <a:endParaRPr lang="fr-FR"/>
-          </a:p>
-        </p:txBody>
-      </p:sp>
-      <p:pic>
-        <p:nvPicPr>
-          <p:cNvPr id="5" name="Image 0" descr="preencoded.png"/>
-          <p:cNvPicPr>
-            <a:picLocks noChangeAspect="1"/>
-          </p:cNvPicPr>
-          <p:nvPr/>
-        </p:nvPicPr>
-        <p:blipFill>
-          <a:blip r:embed="rId3"/>
-          <a:stretch>
-            <a:fillRect/>
-          </a:stretch>
-        </p:blipFill>
-        <p:spPr>
-          <a:xfrm>
-            <a:off x="8284464" y="4974336"/>
-            <a:ext cx="374904" cy="169164"/>
-          </a:xfrm>
-          <a:prstGeom prst="rect">
-            <a:avLst/>
-          </a:prstGeom>
-        </p:spPr>
-      </p:pic>
-      <p:sp>
-        <p:nvSpPr>
-          <p:cNvPr id="6" name="Shape 3"/>
-          <p:cNvSpPr/>
-          <p:nvPr/>
-        </p:nvSpPr>
-        <p:spPr>
-          <a:xfrm>
-            <a:off x="502920" y="164592"/>
-            <a:ext cx="8001000" cy="10973"/>
-          </a:xfrm>
-          <a:prstGeom prst="rect">
-            <a:avLst/>
-          </a:prstGeom>
-          <a:solidFill>
-            <a:srgbClr val="CFC8BD"/>
-          </a:solidFill>
-          <a:ln w="12700">
-            <a:solidFill>
-              <a:srgbClr val="CFC8BD"/>
-            </a:solidFill>
-            <a:prstDash val="solid"/>
-          </a:ln>
-        </p:spPr>
-        <p:txBody>
-          <a:bodyPr/>
-          <a:lstStyle/>
-          <a:p>
-            <a:endParaRPr lang="fr-FR"/>
-          </a:p>
-        </p:txBody>
-      </p:sp>
-      <p:sp>
-        <p:nvSpPr>
-          <p:cNvPr id="7" name="Text 4"/>
-          <p:cNvSpPr/>
-          <p:nvPr/>
-        </p:nvSpPr>
-        <p:spPr>
-          <a:xfrm>
-            <a:off x="4846320" y="228600"/>
-            <a:ext cx="3017520" cy="182880"/>
-          </a:xfrm>
-          <a:prstGeom prst="rect">
-            <a:avLst/>
-          </a:prstGeom>
-          <a:noFill/>
-          <a:ln/>
-        </p:spPr>
-        <p:txBody>
-          <a:bodyPr wrap="square" lIns="0" tIns="0" rIns="0" bIns="0" rtlCol="0" anchor="ctr"/>
-          <a:lstStyle/>
-          <a:p>
-            <a:pPr marL="0" indent="0" algn="r">
-              <a:buNone/>
-            </a:pPr>
-            <a:r>
-              <a:rPr lang="en-US" sz="750" kern="0" spc="200" dirty="0">
-                <a:solidFill>
-                  <a:srgbClr val="8B1A1A"/>
-                </a:solidFill>
-                <a:latin typeface="Garamond" pitchFamily="34" charset="0"/>
-                <a:ea typeface="Garamond" pitchFamily="34" charset="-122"/>
-                <a:cs typeface="Garamond" pitchFamily="34" charset="-120"/>
-              </a:rPr>
-              <a:t>STRATÉGIE · IMPACT</a:t>
-            </a:r>
-            <a:endParaRPr lang="en-US" sz="750" dirty="0"/>
-          </a:p>
-        </p:txBody>
-      </p:sp>
-      <p:sp>
-        <p:nvSpPr>
-          <p:cNvPr id="8" name="Text 5"/>
-          <p:cNvSpPr/>
-          <p:nvPr/>
-        </p:nvSpPr>
-        <p:spPr>
-          <a:xfrm>
-            <a:off x="8092440" y="219456"/>
-            <a:ext cx="347472" cy="182880"/>
-          </a:xfrm>
-          <a:prstGeom prst="rect">
-            <a:avLst/>
-          </a:prstGeom>
-          <a:noFill/>
-          <a:ln/>
-        </p:spPr>
-        <p:txBody>
-          <a:bodyPr wrap="square" lIns="0" tIns="0" rIns="0" bIns="0" rtlCol="0" anchor="ctr"/>
-          <a:lstStyle/>
-          <a:p>
-            <a:pPr marL="0" indent="0" algn="r">
-              <a:buNone/>
-            </a:pPr>
-            <a:r>
-              <a:rPr lang="en-US" sz="700" dirty="0">
-                <a:solidFill>
-                  <a:srgbClr val="A09080"/>
-                </a:solidFill>
-                <a:latin typeface="Garamond" pitchFamily="34" charset="0"/>
-                <a:ea typeface="Garamond" pitchFamily="34" charset="-122"/>
-                <a:cs typeface="Garamond" pitchFamily="34" charset="-120"/>
-              </a:rPr>
-              <a:t>14</a:t>
-            </a:r>
-            <a:endParaRPr lang="en-US" sz="700" dirty="0"/>
-          </a:p>
-        </p:txBody>
-      </p:sp>
-      <p:sp>
-        <p:nvSpPr>
-          <p:cNvPr id="9" name="Shape 6"/>
-          <p:cNvSpPr/>
-          <p:nvPr/>
-        </p:nvSpPr>
-        <p:spPr>
-          <a:xfrm>
-            <a:off x="502920" y="475488"/>
-            <a:ext cx="8001000" cy="10973"/>
-          </a:xfrm>
-          <a:prstGeom prst="rect">
-            <a:avLst/>
-          </a:prstGeom>
-          <a:solidFill>
-            <a:srgbClr val="CFC8BD"/>
-          </a:solidFill>
-          <a:ln w="12700">
-            <a:solidFill>
-              <a:srgbClr val="CFC8BD"/>
-            </a:solidFill>
-            <a:prstDash val="solid"/>
-          </a:ln>
-        </p:spPr>
-        <p:txBody>
-          <a:bodyPr/>
-          <a:lstStyle/>
-          <a:p>
-            <a:endParaRPr lang="fr-FR"/>
-          </a:p>
-        </p:txBody>
-      </p:sp>
-      <p:sp>
-        <p:nvSpPr>
-          <p:cNvPr id="10" name="Text 7"/>
-          <p:cNvSpPr/>
-          <p:nvPr/>
-        </p:nvSpPr>
-        <p:spPr>
-          <a:xfrm>
-            <a:off x="502920" y="594360"/>
-            <a:ext cx="6400800" cy="566928"/>
-          </a:xfrm>
-          <a:prstGeom prst="rect">
-            <a:avLst/>
-          </a:prstGeom>
-          <a:noFill/>
-          <a:ln/>
-        </p:spPr>
-        <p:txBody>
-          <a:bodyPr wrap="square" lIns="0" tIns="0" rIns="0" bIns="0" rtlCol="0" anchor="ctr"/>
-          <a:lstStyle/>
-          <a:p>
-            <a:pPr marL="0" indent="0">
-              <a:buNone/>
-            </a:pPr>
-            <a:r>
-              <a:rPr lang="en-US" sz="2600" dirty="0">
-                <a:solidFill>
-                  <a:srgbClr val="1C2B3A"/>
-                </a:solidFill>
-                <a:latin typeface="Garamond" pitchFamily="34" charset="0"/>
-                <a:ea typeface="Garamond" pitchFamily="34" charset="-122"/>
-                <a:cs typeface="Garamond" pitchFamily="34" charset="-120"/>
-              </a:rPr>
-              <a:t>L'impact de la stratégie</a:t>
-            </a:r>
-            <a:endParaRPr lang="en-US" sz="2600" dirty="0"/>
-          </a:p>
-        </p:txBody>
-      </p:sp>
-      <p:sp>
-        <p:nvSpPr>
-          <p:cNvPr id="11" name="Shape 8"/>
-          <p:cNvSpPr/>
-          <p:nvPr/>
-        </p:nvSpPr>
-        <p:spPr>
-          <a:xfrm>
-            <a:off x="502920" y="1207008"/>
-            <a:ext cx="347472" cy="20117"/>
-          </a:xfrm>
-          <a:prstGeom prst="rect">
-            <a:avLst/>
-          </a:prstGeom>
-          <a:solidFill>
-            <a:srgbClr val="8B1A1A"/>
-          </a:solidFill>
-          <a:ln w="12700">
-            <a:solidFill>
-              <a:srgbClr val="8B1A1A"/>
-            </a:solidFill>
-            <a:prstDash val="solid"/>
-          </a:ln>
-        </p:spPr>
-        <p:txBody>
-          <a:bodyPr/>
-          <a:lstStyle/>
-          <a:p>
-            <a:endParaRPr lang="fr-FR"/>
-          </a:p>
-        </p:txBody>
-      </p:sp>
-      <p:sp>
-        <p:nvSpPr>
-          <p:cNvPr id="12" name="Text 9"/>
-          <p:cNvSpPr/>
-          <p:nvPr/>
-        </p:nvSpPr>
-        <p:spPr>
-          <a:xfrm>
-            <a:off x="502920" y="1316736"/>
-            <a:ext cx="8138160" cy="292608"/>
-          </a:xfrm>
-          <a:prstGeom prst="rect">
-            <a:avLst/>
-          </a:prstGeom>
-          <a:noFill/>
-          <a:ln/>
-        </p:spPr>
-        <p:txBody>
-          <a:bodyPr wrap="square" lIns="0" tIns="0" rIns="0" bIns="0" rtlCol="0" anchor="t"/>
-          <a:lstStyle/>
-          <a:p>
-            <a:pPr marL="0" indent="0">
-              <a:buNone/>
-            </a:pPr>
-            <a:r>
-              <a:rPr lang="en-US" sz="1100" i="1" dirty="0">
-                <a:solidFill>
-                  <a:srgbClr val="8E5B3F"/>
-                </a:solidFill>
-                <a:latin typeface="Calibri" pitchFamily="34" charset="0"/>
-                <a:ea typeface="Calibri" pitchFamily="34" charset="-122"/>
-                <a:cs typeface="Calibri" pitchFamily="34" charset="-120"/>
-              </a:rPr>
-              <a:t>[Phrase d'ancrage]</a:t>
-            </a:r>
-            <a:endParaRPr lang="en-US" sz="1100" dirty="0"/>
-          </a:p>
-        </p:txBody>
-      </p:sp>
-      <p:sp>
-        <p:nvSpPr>
-          <p:cNvPr id="13" name="Shape 10"/>
-          <p:cNvSpPr/>
-          <p:nvPr/>
-        </p:nvSpPr>
-        <p:spPr>
-          <a:xfrm>
-            <a:off x="502920" y="1719072"/>
-            <a:ext cx="8001000" cy="10973"/>
-          </a:xfrm>
-          <a:prstGeom prst="rect">
-            <a:avLst/>
-          </a:prstGeom>
-          <a:solidFill>
-            <a:srgbClr val="CFC8BD"/>
-          </a:solidFill>
-          <a:ln w="12700">
-            <a:solidFill>
-              <a:srgbClr val="CFC8BD"/>
-            </a:solidFill>
-            <a:prstDash val="solid"/>
-          </a:ln>
-        </p:spPr>
-        <p:txBody>
-          <a:bodyPr/>
-          <a:lstStyle/>
-          <a:p>
-            <a:endParaRPr lang="fr-FR"/>
-          </a:p>
-        </p:txBody>
-      </p:sp>
-      <p:sp>
-        <p:nvSpPr>
-          <p:cNvPr id="14" name="Text 11"/>
-          <p:cNvSpPr/>
-          <p:nvPr/>
-        </p:nvSpPr>
-        <p:spPr>
-          <a:xfrm>
-            <a:off x="502920" y="1783080"/>
-            <a:ext cx="2560320" cy="201168"/>
-          </a:xfrm>
-          <a:prstGeom prst="rect">
-            <a:avLst/>
-          </a:prstGeom>
-          <a:noFill/>
-          <a:ln/>
-        </p:spPr>
-        <p:txBody>
-          <a:bodyPr wrap="square" lIns="0" tIns="0" rIns="0" bIns="0" rtlCol="0" anchor="ctr"/>
-          <a:lstStyle/>
-          <a:p>
-            <a:pPr marL="0" indent="0">
-              <a:buNone/>
-            </a:pPr>
-            <a:r>
-              <a:rPr lang="en-US" sz="750" kern="0" spc="250" dirty="0">
-                <a:solidFill>
-                  <a:srgbClr val="8B1A1A"/>
-                </a:solidFill>
-                <a:latin typeface="Garamond" pitchFamily="34" charset="0"/>
-                <a:ea typeface="Garamond" pitchFamily="34" charset="-122"/>
-                <a:cs typeface="Garamond" pitchFamily="34" charset="-120"/>
-              </a:rPr>
-              <a:t>DROITS DE SUCCESSION ÉVITÉS</a:t>
-            </a:r>
-            <a:endParaRPr lang="en-US" sz="750" dirty="0"/>
-          </a:p>
-        </p:txBody>
-      </p:sp>
-      <p:sp>
-        <p:nvSpPr>
-          <p:cNvPr id="15" name="Text 12"/>
-          <p:cNvSpPr/>
-          <p:nvPr/>
-        </p:nvSpPr>
-        <p:spPr>
-          <a:xfrm>
-            <a:off x="502920" y="1993392"/>
-            <a:ext cx="2560320" cy="749808"/>
-          </a:xfrm>
-          <a:prstGeom prst="rect">
-            <a:avLst/>
-          </a:prstGeom>
-          <a:noFill/>
-          <a:ln/>
-        </p:spPr>
-        <p:txBody>
-          <a:bodyPr wrap="square" lIns="0" tIns="0" rIns="0" bIns="0" rtlCol="0" anchor="t"/>
-          <a:lstStyle/>
-          <a:p>
-            <a:pPr marL="0" indent="0">
-              <a:buNone/>
-            </a:pPr>
-            <a:r>
-              <a:rPr lang="en-US" sz="3400" i="1" dirty="0">
-                <a:solidFill>
-                  <a:srgbClr val="8E5B3F"/>
-                </a:solidFill>
-                <a:latin typeface="Garamond" pitchFamily="34" charset="0"/>
-                <a:ea typeface="Garamond" pitchFamily="34" charset="-122"/>
-                <a:cs typeface="Garamond" pitchFamily="34" charset="-120"/>
-              </a:rPr>
-              <a:t>[X €]</a:t>
-            </a:r>
-            <a:endParaRPr lang="en-US" sz="3400" dirty="0"/>
-          </a:p>
-        </p:txBody>
-      </p:sp>
-      <p:sp>
-        <p:nvSpPr>
-          <p:cNvPr id="16" name="Text 13"/>
-          <p:cNvSpPr/>
-          <p:nvPr/>
-        </p:nvSpPr>
-        <p:spPr>
-          <a:xfrm>
-            <a:off x="502920" y="2798064"/>
-            <a:ext cx="2560320" cy="201168"/>
-          </a:xfrm>
-          <a:prstGeom prst="rect">
-            <a:avLst/>
-          </a:prstGeom>
-          <a:noFill/>
-          <a:ln/>
-        </p:spPr>
-        <p:txBody>
-          <a:bodyPr wrap="square" lIns="0" tIns="0" rIns="0" bIns="0" rtlCol="0" anchor="t"/>
-          <a:lstStyle/>
-          <a:p>
-            <a:pPr marL="0" indent="0">
-              <a:buNone/>
-            </a:pPr>
-            <a:r>
-              <a:rPr lang="en-US" sz="900" i="1" dirty="0">
-                <a:solidFill>
-                  <a:srgbClr val="8E5B3F"/>
-                </a:solidFill>
-                <a:latin typeface="Calibri" pitchFamily="34" charset="0"/>
-                <a:ea typeface="Calibri" pitchFamily="34" charset="-122"/>
-                <a:cs typeface="Calibri" pitchFamily="34" charset="-120"/>
-              </a:rPr>
-              <a:t>vs. [X €] sans stratégie</a:t>
-            </a:r>
-            <a:endParaRPr lang="en-US" sz="900" dirty="0"/>
-          </a:p>
-        </p:txBody>
-      </p:sp>
-      <p:sp>
-        <p:nvSpPr>
-          <p:cNvPr id="17" name="Shape 14"/>
-          <p:cNvSpPr/>
-          <p:nvPr/>
-        </p:nvSpPr>
-        <p:spPr>
-          <a:xfrm>
-            <a:off x="3108960" y="1783080"/>
-            <a:ext cx="10973" cy="1280160"/>
-          </a:xfrm>
-          <a:prstGeom prst="rect">
-            <a:avLst/>
-          </a:prstGeom>
-          <a:solidFill>
-            <a:srgbClr val="CFC8BD"/>
-          </a:solidFill>
-          <a:ln w="12700">
-            <a:solidFill>
-              <a:srgbClr val="CFC8BD"/>
-            </a:solidFill>
-            <a:prstDash val="solid"/>
-          </a:ln>
-        </p:spPr>
-        <p:txBody>
-          <a:bodyPr/>
-          <a:lstStyle/>
-          <a:p>
-            <a:endParaRPr lang="fr-FR"/>
-          </a:p>
-        </p:txBody>
-      </p:sp>
-      <p:sp>
-        <p:nvSpPr>
-          <p:cNvPr id="18" name="Text 15"/>
-          <p:cNvSpPr/>
-          <p:nvPr/>
-        </p:nvSpPr>
-        <p:spPr>
-          <a:xfrm>
-            <a:off x="3200400" y="1783080"/>
-            <a:ext cx="2560320" cy="201168"/>
-          </a:xfrm>
-          <a:prstGeom prst="rect">
-            <a:avLst/>
-          </a:prstGeom>
-          <a:noFill/>
-          <a:ln/>
-        </p:spPr>
-        <p:txBody>
-          <a:bodyPr wrap="square" lIns="0" tIns="0" rIns="0" bIns="0" rtlCol="0" anchor="ctr"/>
-          <a:lstStyle/>
-          <a:p>
-            <a:pPr marL="0" indent="0">
-              <a:buNone/>
-            </a:pPr>
-            <a:r>
-              <a:rPr lang="en-US" sz="750" kern="0" spc="250" dirty="0">
-                <a:solidFill>
-                  <a:srgbClr val="8B1A1A"/>
-                </a:solidFill>
-                <a:latin typeface="Garamond" pitchFamily="34" charset="0"/>
-                <a:ea typeface="Garamond" pitchFamily="34" charset="-122"/>
-                <a:cs typeface="Garamond" pitchFamily="34" charset="-120"/>
-              </a:rPr>
-              <a:t>REVENU COMPLÉMENTAIRE ANNUEL</a:t>
-            </a:r>
-            <a:endParaRPr lang="en-US" sz="750" dirty="0"/>
-          </a:p>
-        </p:txBody>
-      </p:sp>
-      <p:sp>
-        <p:nvSpPr>
-          <p:cNvPr id="19" name="Text 16"/>
-          <p:cNvSpPr/>
-          <p:nvPr/>
-        </p:nvSpPr>
-        <p:spPr>
-          <a:xfrm>
-            <a:off x="3200400" y="1993392"/>
-            <a:ext cx="2560320" cy="749808"/>
-          </a:xfrm>
-          <a:prstGeom prst="rect">
-            <a:avLst/>
-          </a:prstGeom>
-          <a:noFill/>
-          <a:ln/>
-        </p:spPr>
-        <p:txBody>
-          <a:bodyPr wrap="square" lIns="0" tIns="0" rIns="0" bIns="0" rtlCol="0" anchor="t"/>
-          <a:lstStyle/>
-          <a:p>
-            <a:pPr marL="0" indent="0">
-              <a:buNone/>
-            </a:pPr>
-            <a:r>
-              <a:rPr lang="en-US" sz="3400" i="1" dirty="0">
-                <a:solidFill>
-                  <a:srgbClr val="8E5B3F"/>
-                </a:solidFill>
-                <a:latin typeface="Garamond" pitchFamily="34" charset="0"/>
-                <a:ea typeface="Garamond" pitchFamily="34" charset="-122"/>
-                <a:cs typeface="Garamond" pitchFamily="34" charset="-120"/>
-              </a:rPr>
-              <a:t>[X €/an]</a:t>
-            </a:r>
-            <a:endParaRPr lang="en-US" sz="3400" dirty="0"/>
-          </a:p>
-        </p:txBody>
-      </p:sp>
-      <p:sp>
-        <p:nvSpPr>
-          <p:cNvPr id="20" name="Text 17"/>
-          <p:cNvSpPr/>
-          <p:nvPr/>
-        </p:nvSpPr>
-        <p:spPr>
-          <a:xfrm>
-            <a:off x="3200400" y="2798064"/>
-            <a:ext cx="2560320" cy="201168"/>
-          </a:xfrm>
-          <a:prstGeom prst="rect">
-            <a:avLst/>
-          </a:prstGeom>
-          <a:noFill/>
-          <a:ln/>
-        </p:spPr>
-        <p:txBody>
-          <a:bodyPr wrap="square" lIns="0" tIns="0" rIns="0" bIns="0" rtlCol="0" anchor="t"/>
-          <a:lstStyle/>
-          <a:p>
-            <a:pPr marL="0" indent="0">
-              <a:buNone/>
-            </a:pPr>
-            <a:r>
-              <a:rPr lang="en-US" sz="900" i="1" dirty="0">
-                <a:solidFill>
-                  <a:srgbClr val="8E5B3F"/>
-                </a:solidFill>
-                <a:latin typeface="Calibri" pitchFamily="34" charset="0"/>
-                <a:ea typeface="Calibri" pitchFamily="34" charset="-122"/>
-                <a:cs typeface="Calibri" pitchFamily="34" charset="-120"/>
-              </a:rPr>
-              <a:t>à partir de [ANNÉE]</a:t>
-            </a:r>
-            <a:endParaRPr lang="en-US" sz="900" dirty="0"/>
-          </a:p>
-        </p:txBody>
-      </p:sp>
-      <p:sp>
-        <p:nvSpPr>
-          <p:cNvPr id="21" name="Shape 18"/>
-          <p:cNvSpPr/>
-          <p:nvPr/>
-        </p:nvSpPr>
-        <p:spPr>
-          <a:xfrm>
-            <a:off x="5806440" y="1783080"/>
-            <a:ext cx="10973" cy="1280160"/>
-          </a:xfrm>
-          <a:prstGeom prst="rect">
-            <a:avLst/>
-          </a:prstGeom>
-          <a:solidFill>
-            <a:srgbClr val="CFC8BD"/>
-          </a:solidFill>
-          <a:ln w="12700">
-            <a:solidFill>
-              <a:srgbClr val="CFC8BD"/>
-            </a:solidFill>
-            <a:prstDash val="solid"/>
-          </a:ln>
-        </p:spPr>
-        <p:txBody>
-          <a:bodyPr/>
-          <a:lstStyle/>
-          <a:p>
-            <a:endParaRPr lang="fr-FR"/>
-          </a:p>
-        </p:txBody>
-      </p:sp>
-      <p:sp>
-        <p:nvSpPr>
-          <p:cNvPr id="22" name="Text 19"/>
-          <p:cNvSpPr/>
-          <p:nvPr/>
-        </p:nvSpPr>
-        <p:spPr>
-          <a:xfrm>
-            <a:off x="5897880" y="1783080"/>
-            <a:ext cx="2560320" cy="201168"/>
-          </a:xfrm>
-          <a:prstGeom prst="rect">
-            <a:avLst/>
-          </a:prstGeom>
-          <a:noFill/>
-          <a:ln/>
-        </p:spPr>
-        <p:txBody>
-          <a:bodyPr wrap="square" lIns="0" tIns="0" rIns="0" bIns="0" rtlCol="0" anchor="ctr"/>
-          <a:lstStyle/>
-          <a:p>
-            <a:pPr marL="0" indent="0">
-              <a:buNone/>
-            </a:pPr>
-            <a:r>
-              <a:rPr lang="en-US" sz="750" kern="0" spc="250" dirty="0">
-                <a:solidFill>
-                  <a:srgbClr val="8B1A1A"/>
-                </a:solidFill>
-                <a:latin typeface="Garamond" pitchFamily="34" charset="0"/>
-                <a:ea typeface="Garamond" pitchFamily="34" charset="-122"/>
-                <a:cs typeface="Garamond" pitchFamily="34" charset="-120"/>
-              </a:rPr>
-              <a:t>ÉCONOMIE FISCALE SUR [X] ANS</a:t>
-            </a:r>
-            <a:endParaRPr lang="en-US" sz="750" dirty="0"/>
-          </a:p>
-        </p:txBody>
-      </p:sp>
-      <p:sp>
-        <p:nvSpPr>
-          <p:cNvPr id="23" name="Text 20"/>
-          <p:cNvSpPr/>
-          <p:nvPr/>
-        </p:nvSpPr>
-        <p:spPr>
-          <a:xfrm>
-            <a:off x="5897880" y="1993392"/>
-            <a:ext cx="2560320" cy="749808"/>
-          </a:xfrm>
-          <a:prstGeom prst="rect">
-            <a:avLst/>
-          </a:prstGeom>
-          <a:noFill/>
-          <a:ln/>
-        </p:spPr>
-        <p:txBody>
-          <a:bodyPr wrap="square" lIns="0" tIns="0" rIns="0" bIns="0" rtlCol="0" anchor="t"/>
-          <a:lstStyle/>
-          <a:p>
-            <a:pPr marL="0" indent="0">
-              <a:buNone/>
-            </a:pPr>
-            <a:r>
-              <a:rPr lang="en-US" sz="3400" i="1" dirty="0">
-                <a:solidFill>
-                  <a:srgbClr val="8E5B3F"/>
-                </a:solidFill>
-                <a:latin typeface="Garamond" pitchFamily="34" charset="0"/>
-                <a:ea typeface="Garamond" pitchFamily="34" charset="-122"/>
-                <a:cs typeface="Garamond" pitchFamily="34" charset="-120"/>
-              </a:rPr>
-              <a:t>[X €]</a:t>
-            </a:r>
-            <a:endParaRPr lang="en-US" sz="3400" dirty="0"/>
-          </a:p>
-        </p:txBody>
-      </p:sp>
-      <p:sp>
-        <p:nvSpPr>
-          <p:cNvPr id="24" name="Text 21"/>
-          <p:cNvSpPr/>
-          <p:nvPr/>
-        </p:nvSpPr>
-        <p:spPr>
-          <a:xfrm>
-            <a:off x="5897880" y="2798064"/>
-            <a:ext cx="2560320" cy="201168"/>
-          </a:xfrm>
-          <a:prstGeom prst="rect">
-            <a:avLst/>
-          </a:prstGeom>
-          <a:noFill/>
-          <a:ln/>
-        </p:spPr>
-        <p:txBody>
-          <a:bodyPr wrap="square" lIns="0" tIns="0" rIns="0" bIns="0" rtlCol="0" anchor="t"/>
-          <a:lstStyle/>
-          <a:p>
-            <a:pPr marL="0" indent="0">
-              <a:buNone/>
-            </a:pPr>
-            <a:r>
-              <a:rPr lang="en-US" sz="900" i="1" dirty="0">
-                <a:solidFill>
-                  <a:srgbClr val="8E5B3F"/>
-                </a:solidFill>
-                <a:latin typeface="Calibri" pitchFamily="34" charset="0"/>
-                <a:ea typeface="Calibri" pitchFamily="34" charset="-122"/>
-                <a:cs typeface="Calibri" pitchFamily="34" charset="-120"/>
-              </a:rPr>
-              <a:t>IR + PS + frais</a:t>
-            </a:r>
-            <a:endParaRPr lang="en-US" sz="900" dirty="0"/>
-          </a:p>
-        </p:txBody>
-      </p:sp>
-      <p:sp>
-        <p:nvSpPr>
-          <p:cNvPr id="25" name="Shape 22"/>
-          <p:cNvSpPr/>
-          <p:nvPr/>
-        </p:nvSpPr>
-        <p:spPr>
-          <a:xfrm>
-            <a:off x="502920" y="3127248"/>
-            <a:ext cx="8001000" cy="10973"/>
-          </a:xfrm>
-          <a:prstGeom prst="rect">
-            <a:avLst/>
-          </a:prstGeom>
-          <a:solidFill>
-            <a:srgbClr val="CFC8BD"/>
-          </a:solidFill>
-          <a:ln w="12700">
-            <a:solidFill>
-              <a:srgbClr val="CFC8BD"/>
-            </a:solidFill>
-            <a:prstDash val="solid"/>
-          </a:ln>
-        </p:spPr>
-        <p:txBody>
-          <a:bodyPr/>
-          <a:lstStyle/>
-          <a:p>
-            <a:endParaRPr lang="fr-FR"/>
-          </a:p>
-        </p:txBody>
-      </p:sp>
-      <p:sp>
-        <p:nvSpPr>
-          <p:cNvPr id="26" name="Text 23"/>
-          <p:cNvSpPr/>
-          <p:nvPr/>
-        </p:nvSpPr>
-        <p:spPr>
-          <a:xfrm>
-            <a:off x="502920" y="3246120"/>
-            <a:ext cx="3657600" cy="201168"/>
-          </a:xfrm>
-          <a:prstGeom prst="rect">
-            <a:avLst/>
-          </a:prstGeom>
-          <a:noFill/>
-          <a:ln/>
-        </p:spPr>
-        <p:txBody>
-          <a:bodyPr wrap="square" lIns="0" tIns="0" rIns="0" bIns="0" rtlCol="0" anchor="ctr"/>
-          <a:lstStyle/>
-          <a:p>
-            <a:pPr marL="0" indent="0">
-              <a:buNone/>
-            </a:pPr>
-            <a:r>
-              <a:rPr lang="en-US" sz="750" kern="0" spc="250" dirty="0">
-                <a:solidFill>
-                  <a:srgbClr val="4A5568"/>
-                </a:solidFill>
-                <a:latin typeface="Garamond" pitchFamily="34" charset="0"/>
-                <a:ea typeface="Garamond" pitchFamily="34" charset="-122"/>
-                <a:cs typeface="Garamond" pitchFamily="34" charset="-120"/>
-              </a:rPr>
-              <a:t>SANS STRATÉGIE</a:t>
-            </a:r>
-            <a:endParaRPr lang="en-US" sz="750" dirty="0"/>
-          </a:p>
-        </p:txBody>
-      </p:sp>
-      <p:sp>
-        <p:nvSpPr>
-          <p:cNvPr id="27" name="Text 24"/>
-          <p:cNvSpPr/>
-          <p:nvPr/>
-        </p:nvSpPr>
-        <p:spPr>
-          <a:xfrm>
-            <a:off x="4343400" y="3246120"/>
-            <a:ext cx="4069080" cy="201168"/>
-          </a:xfrm>
-          <a:prstGeom prst="rect">
-            <a:avLst/>
-          </a:prstGeom>
-          <a:noFill/>
-          <a:ln/>
-        </p:spPr>
-        <p:txBody>
-          <a:bodyPr wrap="square" lIns="0" tIns="0" rIns="0" bIns="0" rtlCol="0" anchor="ctr"/>
-          <a:lstStyle/>
-          <a:p>
-            <a:pPr marL="0" indent="0">
-              <a:buNone/>
-            </a:pPr>
-            <a:r>
-              <a:rPr lang="en-US" sz="750" kern="0" spc="250" dirty="0">
-                <a:solidFill>
-                  <a:srgbClr val="1C2B3A"/>
-                </a:solidFill>
-                <a:latin typeface="Garamond" pitchFamily="34" charset="0"/>
-                <a:ea typeface="Garamond" pitchFamily="34" charset="-122"/>
-                <a:cs typeface="Garamond" pitchFamily="34" charset="-120"/>
-              </a:rPr>
-              <a:t>AVEC LA STRATÉGIE AFFILIOR</a:t>
-            </a:r>
-            <a:endParaRPr lang="en-US" sz="750" dirty="0"/>
-          </a:p>
-        </p:txBody>
-      </p:sp>
-      <p:sp>
-        <p:nvSpPr>
-          <p:cNvPr id="28" name="Shape 25"/>
-          <p:cNvSpPr/>
-          <p:nvPr/>
-        </p:nvSpPr>
-        <p:spPr>
-          <a:xfrm>
-            <a:off x="4160520" y="3200400"/>
-            <a:ext cx="10973" cy="1572768"/>
-          </a:xfrm>
-          <a:prstGeom prst="rect">
-            <a:avLst/>
-          </a:prstGeom>
-          <a:solidFill>
-            <a:srgbClr val="CFC8BD"/>
-          </a:solidFill>
-          <a:ln w="12700">
-            <a:solidFill>
-              <a:srgbClr val="CFC8BD"/>
-            </a:solidFill>
-            <a:prstDash val="solid"/>
-          </a:ln>
-        </p:spPr>
-        <p:txBody>
-          <a:bodyPr/>
-          <a:lstStyle/>
-          <a:p>
-            <a:endParaRPr lang="fr-FR"/>
-          </a:p>
-        </p:txBody>
-      </p:sp>
-      <p:sp>
-        <p:nvSpPr>
-          <p:cNvPr id="29" name="Shape 26"/>
-          <p:cNvSpPr/>
-          <p:nvPr/>
-        </p:nvSpPr>
-        <p:spPr>
-          <a:xfrm>
-            <a:off x="502920" y="3474720"/>
-            <a:ext cx="20117" cy="384048"/>
-          </a:xfrm>
-          <a:prstGeom prst="rect">
-            <a:avLst/>
-          </a:prstGeom>
-          <a:solidFill>
-            <a:srgbClr val="CFC8BD"/>
-          </a:solidFill>
-          <a:ln w="12700">
-            <a:solidFill>
-              <a:srgbClr val="CFC8BD"/>
-            </a:solidFill>
-            <a:prstDash val="solid"/>
-          </a:ln>
-        </p:spPr>
-        <p:txBody>
-          <a:bodyPr/>
-          <a:lstStyle/>
-          <a:p>
-            <a:endParaRPr lang="fr-FR"/>
-          </a:p>
-        </p:txBody>
-      </p:sp>
-      <p:sp>
-        <p:nvSpPr>
-          <p:cNvPr id="30" name="Text 27"/>
-          <p:cNvSpPr/>
-          <p:nvPr/>
-        </p:nvSpPr>
-        <p:spPr>
-          <a:xfrm>
-            <a:off x="658368" y="3474720"/>
-            <a:ext cx="3337560" cy="384048"/>
-          </a:xfrm>
-          <a:prstGeom prst="rect">
-            <a:avLst/>
-          </a:prstGeom>
-          <a:noFill/>
-          <a:ln/>
-        </p:spPr>
-        <p:txBody>
-          <a:bodyPr wrap="square" lIns="0" tIns="0" rIns="0" bIns="0" rtlCol="0" anchor="t"/>
-          <a:lstStyle/>
-          <a:p>
-            <a:pPr marL="0" indent="0">
-              <a:buNone/>
-            </a:pPr>
-            <a:r>
-              <a:rPr lang="en-US" sz="1050" i="1" dirty="0">
-                <a:solidFill>
-                  <a:srgbClr val="8E5B3F"/>
-                </a:solidFill>
-                <a:latin typeface="Calibri" pitchFamily="34" charset="0"/>
-                <a:ea typeface="Calibri" pitchFamily="34" charset="-122"/>
-                <a:cs typeface="Calibri" pitchFamily="34" charset="-120"/>
-              </a:rPr>
-              <a:t>[Situation fiscale actuelle]</a:t>
-            </a:r>
-            <a:endParaRPr lang="en-US" sz="1050" dirty="0"/>
-          </a:p>
-        </p:txBody>
-      </p:sp>
-      <p:sp>
-        <p:nvSpPr>
-          <p:cNvPr id="31" name="Shape 28"/>
-          <p:cNvSpPr/>
-          <p:nvPr/>
-        </p:nvSpPr>
-        <p:spPr>
-          <a:xfrm>
-            <a:off x="502920" y="3977640"/>
-            <a:ext cx="20117" cy="384048"/>
-          </a:xfrm>
-          <a:prstGeom prst="rect">
-            <a:avLst/>
-          </a:prstGeom>
-          <a:solidFill>
-            <a:srgbClr val="CFC8BD"/>
-          </a:solidFill>
-          <a:ln w="12700">
-            <a:solidFill>
-              <a:srgbClr val="CFC8BD"/>
-            </a:solidFill>
-            <a:prstDash val="solid"/>
-          </a:ln>
-        </p:spPr>
-        <p:txBody>
-          <a:bodyPr/>
-          <a:lstStyle/>
-          <a:p>
-            <a:endParaRPr lang="fr-FR"/>
-          </a:p>
-        </p:txBody>
-      </p:sp>
-      <p:sp>
-        <p:nvSpPr>
-          <p:cNvPr id="32" name="Text 29"/>
-          <p:cNvSpPr/>
-          <p:nvPr/>
-        </p:nvSpPr>
-        <p:spPr>
-          <a:xfrm>
-            <a:off x="658368" y="3977640"/>
-            <a:ext cx="3337560" cy="384048"/>
-          </a:xfrm>
-          <a:prstGeom prst="rect">
-            <a:avLst/>
-          </a:prstGeom>
-          <a:noFill/>
-          <a:ln/>
-        </p:spPr>
-        <p:txBody>
-          <a:bodyPr wrap="square" lIns="0" tIns="0" rIns="0" bIns="0" rtlCol="0" anchor="t"/>
-          <a:lstStyle/>
-          <a:p>
-            <a:pPr marL="0" indent="0">
-              <a:buNone/>
-            </a:pPr>
-            <a:r>
-              <a:rPr lang="en-US" sz="1050" i="1" dirty="0">
-                <a:solidFill>
-                  <a:srgbClr val="8E5B3F"/>
-                </a:solidFill>
-                <a:latin typeface="Calibri" pitchFamily="34" charset="0"/>
-                <a:ea typeface="Calibri" pitchFamily="34" charset="-122"/>
-                <a:cs typeface="Calibri" pitchFamily="34" charset="-120"/>
-              </a:rPr>
-              <a:t>[Transmission]</a:t>
-            </a:r>
-            <a:endParaRPr lang="en-US" sz="1050" dirty="0"/>
-          </a:p>
-        </p:txBody>
-      </p:sp>
-      <p:sp>
-        <p:nvSpPr>
-          <p:cNvPr id="33" name="Shape 30"/>
-          <p:cNvSpPr/>
-          <p:nvPr/>
-        </p:nvSpPr>
-        <p:spPr>
-          <a:xfrm>
-            <a:off x="502920" y="4480560"/>
-            <a:ext cx="20117" cy="384048"/>
-          </a:xfrm>
-          <a:prstGeom prst="rect">
-            <a:avLst/>
-          </a:prstGeom>
-          <a:solidFill>
-            <a:srgbClr val="CFC8BD"/>
-          </a:solidFill>
-          <a:ln w="12700">
-            <a:solidFill>
-              <a:srgbClr val="CFC8BD"/>
-            </a:solidFill>
-            <a:prstDash val="solid"/>
-          </a:ln>
-        </p:spPr>
-        <p:txBody>
-          <a:bodyPr/>
-          <a:lstStyle/>
-          <a:p>
-            <a:endParaRPr lang="fr-FR"/>
-          </a:p>
-        </p:txBody>
-      </p:sp>
-      <p:sp>
-        <p:nvSpPr>
-          <p:cNvPr id="34" name="Text 31"/>
-          <p:cNvSpPr/>
-          <p:nvPr/>
-        </p:nvSpPr>
-        <p:spPr>
-          <a:xfrm>
-            <a:off x="658368" y="4480560"/>
-            <a:ext cx="3337560" cy="384048"/>
-          </a:xfrm>
-          <a:prstGeom prst="rect">
-            <a:avLst/>
-          </a:prstGeom>
-          <a:noFill/>
-          <a:ln/>
-        </p:spPr>
-        <p:txBody>
-          <a:bodyPr wrap="square" lIns="0" tIns="0" rIns="0" bIns="0" rtlCol="0" anchor="t"/>
-          <a:lstStyle/>
-          <a:p>
-            <a:pPr marL="0" indent="0">
-              <a:buNone/>
-            </a:pPr>
-            <a:r>
-              <a:rPr lang="en-US" sz="1050" i="1" dirty="0">
-                <a:solidFill>
-                  <a:srgbClr val="8E5B3F"/>
-                </a:solidFill>
-                <a:latin typeface="Calibri" pitchFamily="34" charset="0"/>
-                <a:ea typeface="Calibri" pitchFamily="34" charset="-122"/>
-                <a:cs typeface="Calibri" pitchFamily="34" charset="-120"/>
-              </a:rPr>
-              <a:t>[Retraite]</a:t>
-            </a:r>
-            <a:endParaRPr lang="en-US" sz="1050" dirty="0"/>
-          </a:p>
-        </p:txBody>
-      </p:sp>
-      <p:sp>
-        <p:nvSpPr>
-          <p:cNvPr id="35" name="Shape 32"/>
-          <p:cNvSpPr/>
-          <p:nvPr/>
-        </p:nvSpPr>
-        <p:spPr>
-          <a:xfrm>
-            <a:off x="4343400" y="3474720"/>
-            <a:ext cx="20117" cy="384048"/>
-          </a:xfrm>
-          <a:prstGeom prst="rect">
-            <a:avLst/>
-          </a:prstGeom>
-          <a:solidFill>
-            <a:srgbClr val="8B1A1A"/>
-          </a:solidFill>
-          <a:ln w="12700">
-            <a:solidFill>
-              <a:srgbClr val="8B1A1A"/>
-            </a:solidFill>
-            <a:prstDash val="solid"/>
-          </a:ln>
-        </p:spPr>
-        <p:txBody>
-          <a:bodyPr/>
-          <a:lstStyle/>
-          <a:p>
-            <a:endParaRPr lang="fr-FR"/>
-          </a:p>
-        </p:txBody>
-      </p:sp>
-      <p:sp>
-        <p:nvSpPr>
-          <p:cNvPr id="36" name="Text 33"/>
-          <p:cNvSpPr/>
-          <p:nvPr/>
-        </p:nvSpPr>
-        <p:spPr>
-          <a:xfrm>
-            <a:off x="4498848" y="3474720"/>
-            <a:ext cx="3913632" cy="384048"/>
-          </a:xfrm>
-          <a:prstGeom prst="rect">
-            <a:avLst/>
-          </a:prstGeom>
-          <a:noFill/>
-          <a:ln/>
-        </p:spPr>
-        <p:txBody>
-          <a:bodyPr wrap="square" lIns="0" tIns="0" rIns="0" bIns="0" rtlCol="0" anchor="t"/>
-          <a:lstStyle/>
-          <a:p>
-            <a:pPr marL="0" indent="0">
-              <a:buNone/>
-            </a:pPr>
-            <a:r>
-              <a:rPr lang="en-US" sz="1050" i="1" dirty="0">
-                <a:solidFill>
-                  <a:srgbClr val="8E5B3F"/>
-                </a:solidFill>
-                <a:latin typeface="Calibri" pitchFamily="34" charset="0"/>
-                <a:ea typeface="Calibri" pitchFamily="34" charset="-122"/>
-                <a:cs typeface="Calibri" pitchFamily="34" charset="-120"/>
-              </a:rPr>
-              <a:t>[Fiscalité — économie de X €/an grâce à [dispositif retenu]]</a:t>
-            </a:r>
-            <a:endParaRPr lang="en-US" sz="1050" dirty="0"/>
-          </a:p>
-        </p:txBody>
-      </p:sp>
-      <p:sp>
-        <p:nvSpPr>
-          <p:cNvPr id="37" name="Shape 34"/>
-          <p:cNvSpPr/>
-          <p:nvPr/>
-        </p:nvSpPr>
-        <p:spPr>
-          <a:xfrm>
-            <a:off x="4343400" y="3977640"/>
-            <a:ext cx="20117" cy="384048"/>
-          </a:xfrm>
-          <a:prstGeom prst="rect">
-            <a:avLst/>
-          </a:prstGeom>
-          <a:solidFill>
-            <a:srgbClr val="8B1A1A"/>
-          </a:solidFill>
-          <a:ln w="12700">
-            <a:solidFill>
-              <a:srgbClr val="8B1A1A"/>
-            </a:solidFill>
-            <a:prstDash val="solid"/>
-          </a:ln>
-        </p:spPr>
-        <p:txBody>
-          <a:bodyPr/>
-          <a:lstStyle/>
-          <a:p>
-            <a:endParaRPr lang="fr-FR"/>
-          </a:p>
-        </p:txBody>
-      </p:sp>
-      <p:sp>
-        <p:nvSpPr>
-          <p:cNvPr id="38" name="Text 35"/>
-          <p:cNvSpPr/>
-          <p:nvPr/>
-        </p:nvSpPr>
-        <p:spPr>
-          <a:xfrm>
-            <a:off x="4498848" y="3977640"/>
-            <a:ext cx="3913632" cy="384048"/>
-          </a:xfrm>
-          <a:prstGeom prst="rect">
-            <a:avLst/>
-          </a:prstGeom>
-          <a:noFill/>
-          <a:ln/>
-        </p:spPr>
-        <p:txBody>
-          <a:bodyPr wrap="square" lIns="0" tIns="0" rIns="0" bIns="0" rtlCol="0" anchor="t"/>
-          <a:lstStyle/>
-          <a:p>
-            <a:pPr marL="0" indent="0">
-              <a:buNone/>
-            </a:pPr>
-            <a:r>
-              <a:rPr lang="en-US" sz="1050" i="1" dirty="0">
-                <a:solidFill>
-                  <a:srgbClr val="8E5B3F"/>
-                </a:solidFill>
-                <a:latin typeface="Calibri" pitchFamily="34" charset="0"/>
-                <a:ea typeface="Calibri" pitchFamily="34" charset="-122"/>
-                <a:cs typeface="Calibri" pitchFamily="34" charset="-120"/>
-              </a:rPr>
-              <a:t>[Transmission — droits réduits de X € grâce à l'anticipation]</a:t>
-            </a:r>
-            <a:endParaRPr lang="en-US" sz="1050" dirty="0"/>
-          </a:p>
-        </p:txBody>
-      </p:sp>
-      <p:sp>
-        <p:nvSpPr>
-          <p:cNvPr id="39" name="Shape 36"/>
-          <p:cNvSpPr/>
-          <p:nvPr/>
-        </p:nvSpPr>
-        <p:spPr>
-          <a:xfrm>
-            <a:off x="4343400" y="4480560"/>
-            <a:ext cx="20117" cy="384048"/>
-          </a:xfrm>
-          <a:prstGeom prst="rect">
-            <a:avLst/>
-          </a:prstGeom>
-          <a:solidFill>
-            <a:srgbClr val="8B1A1A"/>
-          </a:solidFill>
-          <a:ln w="12700">
-            <a:solidFill>
-              <a:srgbClr val="8B1A1A"/>
-            </a:solidFill>
-            <a:prstDash val="solid"/>
-          </a:ln>
-        </p:spPr>
-        <p:txBody>
-          <a:bodyPr/>
-          <a:lstStyle/>
-          <a:p>
-            <a:endParaRPr lang="fr-FR"/>
-          </a:p>
-        </p:txBody>
-      </p:sp>
-      <p:sp>
-        <p:nvSpPr>
-          <p:cNvPr id="40" name="Text 37"/>
-          <p:cNvSpPr/>
-          <p:nvPr/>
-        </p:nvSpPr>
-        <p:spPr>
-          <a:xfrm>
-            <a:off x="4498848" y="4480560"/>
-            <a:ext cx="3913632" cy="384048"/>
-          </a:xfrm>
-          <a:prstGeom prst="rect">
-            <a:avLst/>
-          </a:prstGeom>
-          <a:noFill/>
-          <a:ln/>
-        </p:spPr>
-        <p:txBody>
-          <a:bodyPr wrap="square" lIns="0" tIns="0" rIns="0" bIns="0" rtlCol="0" anchor="t"/>
-          <a:lstStyle/>
-          <a:p>
-            <a:pPr marL="0" indent="0">
-              <a:buNone/>
-            </a:pPr>
-            <a:r>
-              <a:rPr lang="en-US" sz="1050" i="1" dirty="0">
-                <a:solidFill>
-                  <a:srgbClr val="8E5B3F"/>
-                </a:solidFill>
-                <a:latin typeface="Calibri" pitchFamily="34" charset="0"/>
-                <a:ea typeface="Calibri" pitchFamily="34" charset="-122"/>
-                <a:cs typeface="Calibri" pitchFamily="34" charset="-120"/>
-              </a:rPr>
-              <a:t>[Revenus complémentaires — X €/mois dès [ANNÉE]]</a:t>
-            </a:r>
-            <a:endParaRPr lang="en-US" sz="1050" dirty="0"/>
-          </a:p>
-        </p:txBody>
-      </p:sp>
-      <p:sp>
-        <p:nvSpPr>
-          <p:cNvPr id="41" name="Text 38"/>
           <p:cNvSpPr/>
           <p:nvPr/>
         </p:nvSpPr>
@@ -9985,7 +6078,7 @@
         <p:spPr>
           <a:xfrm>
             <a:off x="484632" y="1654961"/>
-            <a:ext cx="2560320" cy="2873045"/>
+            <a:ext cx="2560320" cy="3246120"/>
           </a:xfrm>
           <a:prstGeom prst="rect">
             <a:avLst/>
@@ -10049,7 +6142,7 @@
         <p:spPr>
           <a:xfrm>
             <a:off x="484632" y="1986207"/>
-            <a:ext cx="2560320" cy="700000"/>
+            <a:ext cx="2560320" cy="594360"/>
           </a:xfrm>
           <a:prstGeom prst="rect">
             <a:avLst/>
@@ -10086,7 +6179,7 @@
         </p:nvSpPr>
         <p:spPr>
           <a:xfrm>
-            <a:off x="484632" y="2756207"/>
+            <a:off x="484632" y="2615184"/>
             <a:ext cx="640080" cy="20117"/>
           </a:xfrm>
           <a:prstGeom prst="rect">
@@ -10115,8 +6208,8 @@
         </p:nvSpPr>
         <p:spPr>
           <a:xfrm>
-            <a:off x="484632" y="2886207"/>
-            <a:ext cx="2560320" cy="800000"/>
+            <a:off x="484632" y="2715768"/>
+            <a:ext cx="2560320" cy="1097280"/>
           </a:xfrm>
           <a:prstGeom prst="rect">
             <a:avLst/>
@@ -10167,6 +6260,46 @@
               <a:t>[Bénéfice 2]</a:t>
             </a:r>
           </a:p>
+          <a:p>
+            <a:pPr marL="146304" indent="-146304">
+              <a:buClr>
+                <a:srgbClr val="8B1A1A"/>
+              </a:buClr>
+              <a:buFont typeface="Arial"/>
+              <a:buChar char="•"/>
+            </a:pPr>
+            <a:r>
+              <a:rPr lang="en-US" sz="1000" dirty="0">
+                <a:solidFill>
+                  <a:srgbClr val="C4B5A5"/>
+                </a:solidFill>
+                <a:latin typeface="Calibri" pitchFamily="34" charset="0"/>
+                <a:ea typeface="Calibri" pitchFamily="34" charset="-122"/>
+                <a:cs typeface="Calibri" pitchFamily="34" charset="-120"/>
+              </a:rPr>
+              <a:t>[Bénéfice 3]</a:t>
+            </a:r>
+          </a:p>
+          <a:p>
+            <a:pPr marL="146304" indent="-146304">
+              <a:buClr>
+                <a:srgbClr val="8B1A1A"/>
+              </a:buClr>
+              <a:buFont typeface="Arial"/>
+              <a:buChar char="•"/>
+            </a:pPr>
+            <a:r>
+              <a:rPr lang="en-US" sz="1000" dirty="0">
+                <a:solidFill>
+                  <a:srgbClr val="C4B5A5"/>
+                </a:solidFill>
+                <a:latin typeface="Calibri" pitchFamily="34" charset="0"/>
+                <a:ea typeface="Calibri" pitchFamily="34" charset="-122"/>
+                <a:cs typeface="Calibri" pitchFamily="34" charset="-120"/>
+              </a:rPr>
+              <a:t>[Bénéfice 4]</a:t>
+            </a:r>
+          </a:p>
         </p:txBody>
       </p:sp>
       <p:sp>
@@ -10177,7 +6310,7 @@
         </p:nvSpPr>
         <p:spPr>
           <a:xfrm>
-            <a:off x="484632" y="3846207"/>
+            <a:off x="484632" y="3950208"/>
             <a:ext cx="2560320" cy="10973"/>
           </a:xfrm>
           <a:prstGeom prst="rect">
@@ -10200,14 +6333,43 @@
       </p:sp>
       <p:sp>
         <p:nvSpPr>
+          <p:cNvPr id="407" name="MetaRule"/>
+          <p:cNvSpPr/>
+          <p:nvPr/>
+        </p:nvSpPr>
+        <p:spPr>
+          <a:xfrm>
+            <a:off x="484632" y="4434840"/>
+            <a:ext cx="2560320" cy="10973"/>
+          </a:xfrm>
+          <a:prstGeom prst="rect">
+            <a:avLst/>
+          </a:prstGeom>
+          <a:solidFill>
+            <a:srgbClr val="A09080"/>
+          </a:solidFill>
+          <a:ln>
+            <a:noFill/>
+          </a:ln>
+        </p:spPr>
+        <p:txBody>
+          <a:bodyPr/>
+          <a:lstStyle/>
+          <a:p>
+            <a:endParaRPr/>
+          </a:p>
+        </p:txBody>
+      </p:sp>
+      <p:sp>
+        <p:nvSpPr>
           <p:cNvPr id="408" name="Solution"/>
           <p:cNvSpPr/>
           <p:nvPr/>
         </p:nvSpPr>
         <p:spPr>
           <a:xfrm>
-            <a:off x="484632" y="3956207"/>
-            <a:ext cx="2560320" cy="420000"/>
+            <a:off x="484632" y="4041648"/>
+            <a:ext cx="2560320" cy="329184"/>
           </a:xfrm>
           <a:prstGeom prst="rect">
             <a:avLst/>
@@ -10244,8 +6406,8 @@
         </p:nvSpPr>
         <p:spPr>
           <a:xfrm>
-            <a:off x="484632" y="4316207"/>
-            <a:ext cx="2560320" cy="220000"/>
+            <a:off x="484632" y="4507992"/>
+            <a:ext cx="2560320" cy="237744"/>
           </a:xfrm>
           <a:prstGeom prst="rect">
             <a:avLst/>
@@ -10283,7 +6445,7 @@
         <p:spPr>
           <a:xfrm>
             <a:off x="3182112" y="1654961"/>
-            <a:ext cx="2560320" cy="2873045"/>
+            <a:ext cx="2560320" cy="3246120"/>
           </a:xfrm>
           <a:prstGeom prst="rect">
             <a:avLst/>
@@ -10347,7 +6509,7 @@
         <p:spPr>
           <a:xfrm>
             <a:off x="3182112" y="1986207"/>
-            <a:ext cx="2560320" cy="700000"/>
+            <a:ext cx="2560320" cy="594360"/>
           </a:xfrm>
           <a:prstGeom prst="rect">
             <a:avLst/>
@@ -10384,7 +6546,7 @@
         </p:nvSpPr>
         <p:spPr>
           <a:xfrm>
-            <a:off x="3182112" y="2756207"/>
+            <a:off x="3182112" y="2615184"/>
             <a:ext cx="640080" cy="20117"/>
           </a:xfrm>
           <a:prstGeom prst="rect">
@@ -10413,8 +6575,8 @@
         </p:nvSpPr>
         <p:spPr>
           <a:xfrm>
-            <a:off x="3182112" y="2886207"/>
-            <a:ext cx="2560320" cy="800000"/>
+            <a:off x="3182112" y="2715768"/>
+            <a:ext cx="2560320" cy="1097280"/>
           </a:xfrm>
           <a:prstGeom prst="rect">
             <a:avLst/>
@@ -10465,6 +6627,46 @@
               <a:t>[Bénéfice 2]</a:t>
             </a:r>
           </a:p>
+          <a:p>
+            <a:pPr marL="146304" indent="-146304">
+              <a:buClr>
+                <a:srgbClr val="E5E0D8"/>
+              </a:buClr>
+              <a:buFont typeface="Arial"/>
+              <a:buChar char="•"/>
+            </a:pPr>
+            <a:r>
+              <a:rPr lang="en-US" sz="1000" dirty="0">
+                <a:solidFill>
+                  <a:srgbClr val="E5E0D8"/>
+                </a:solidFill>
+                <a:latin typeface="Calibri" pitchFamily="34" charset="0"/>
+                <a:ea typeface="Calibri" pitchFamily="34" charset="-122"/>
+                <a:cs typeface="Calibri" pitchFamily="34" charset="-120"/>
+              </a:rPr>
+              <a:t>[Bénéfice 3]</a:t>
+            </a:r>
+          </a:p>
+          <a:p>
+            <a:pPr marL="146304" indent="-146304">
+              <a:buClr>
+                <a:srgbClr val="E5E0D8"/>
+              </a:buClr>
+              <a:buFont typeface="Arial"/>
+              <a:buChar char="•"/>
+            </a:pPr>
+            <a:r>
+              <a:rPr lang="en-US" sz="1000" dirty="0">
+                <a:solidFill>
+                  <a:srgbClr val="E5E0D8"/>
+                </a:solidFill>
+                <a:latin typeface="Calibri" pitchFamily="34" charset="0"/>
+                <a:ea typeface="Calibri" pitchFamily="34" charset="-122"/>
+                <a:cs typeface="Calibri" pitchFamily="34" charset="-120"/>
+              </a:rPr>
+              <a:t>[Bénéfice 4]</a:t>
+            </a:r>
+          </a:p>
         </p:txBody>
       </p:sp>
       <p:sp>
@@ -10475,7 +6677,7 @@
         </p:nvSpPr>
         <p:spPr>
           <a:xfrm>
-            <a:off x="3182112" y="3846207"/>
+            <a:off x="3182112" y="3950208"/>
             <a:ext cx="2560320" cy="10973"/>
           </a:xfrm>
           <a:prstGeom prst="rect">
@@ -10498,14 +6700,43 @@
       </p:sp>
       <p:sp>
         <p:nvSpPr>
+          <p:cNvPr id="427" name="MetaRule"/>
+          <p:cNvSpPr/>
+          <p:nvPr/>
+        </p:nvSpPr>
+        <p:spPr>
+          <a:xfrm>
+            <a:off x="3182112" y="4434840"/>
+            <a:ext cx="2560320" cy="10973"/>
+          </a:xfrm>
+          <a:prstGeom prst="rect">
+            <a:avLst/>
+          </a:prstGeom>
+          <a:solidFill>
+            <a:srgbClr val="C4B5A5"/>
+          </a:solidFill>
+          <a:ln>
+            <a:noFill/>
+          </a:ln>
+        </p:spPr>
+        <p:txBody>
+          <a:bodyPr/>
+          <a:lstStyle/>
+          <a:p>
+            <a:endParaRPr/>
+          </a:p>
+        </p:txBody>
+      </p:sp>
+      <p:sp>
+        <p:nvSpPr>
           <p:cNvPr id="428" name="Solution"/>
           <p:cNvSpPr/>
           <p:nvPr/>
         </p:nvSpPr>
         <p:spPr>
           <a:xfrm>
-            <a:off x="3182112" y="3956207"/>
-            <a:ext cx="2560320" cy="420000"/>
+            <a:off x="3182112" y="4041648"/>
+            <a:ext cx="2560320" cy="329184"/>
           </a:xfrm>
           <a:prstGeom prst="rect">
             <a:avLst/>
@@ -10542,8 +6773,8 @@
         </p:nvSpPr>
         <p:spPr>
           <a:xfrm>
-            <a:off x="3182112" y="4316207"/>
-            <a:ext cx="2560320" cy="220000"/>
+            <a:off x="3182112" y="4507992"/>
+            <a:ext cx="2560320" cy="237744"/>
           </a:xfrm>
           <a:prstGeom prst="rect">
             <a:avLst/>
@@ -10581,7 +6812,7 @@
         <p:spPr>
           <a:xfrm>
             <a:off x="5879592" y="1654961"/>
-            <a:ext cx="2560320" cy="2873045"/>
+            <a:ext cx="2560320" cy="3246120"/>
           </a:xfrm>
           <a:prstGeom prst="rect">
             <a:avLst/>
@@ -10645,7 +6876,7 @@
         <p:spPr>
           <a:xfrm>
             <a:off x="5879592" y="1986207"/>
-            <a:ext cx="2560320" cy="700000"/>
+            <a:ext cx="2560320" cy="594360"/>
           </a:xfrm>
           <a:prstGeom prst="rect">
             <a:avLst/>
@@ -10682,7 +6913,7 @@
         </p:nvSpPr>
         <p:spPr>
           <a:xfrm>
-            <a:off x="5879592" y="2756207"/>
+            <a:off x="5879592" y="2615184"/>
             <a:ext cx="640080" cy="20117"/>
           </a:xfrm>
           <a:prstGeom prst="rect">
@@ -10711,8 +6942,8 @@
         </p:nvSpPr>
         <p:spPr>
           <a:xfrm>
-            <a:off x="5879592" y="2886207"/>
-            <a:ext cx="2560320" cy="800000"/>
+            <a:off x="5879592" y="2715768"/>
+            <a:ext cx="2560320" cy="1097280"/>
           </a:xfrm>
           <a:prstGeom prst="rect">
             <a:avLst/>
@@ -10763,6 +6994,46 @@
               <a:t>[Bénéfice 2]</a:t>
             </a:r>
           </a:p>
+          <a:p>
+            <a:pPr marL="146304" indent="-146304">
+              <a:buClr>
+                <a:srgbClr val="8B1A1A"/>
+              </a:buClr>
+              <a:buFont typeface="Arial"/>
+              <a:buChar char="•"/>
+            </a:pPr>
+            <a:r>
+              <a:rPr lang="en-US" sz="1000" dirty="0">
+                <a:solidFill>
+                  <a:srgbClr val="4A5568"/>
+                </a:solidFill>
+                <a:latin typeface="Calibri" pitchFamily="34" charset="0"/>
+                <a:ea typeface="Calibri" pitchFamily="34" charset="-122"/>
+                <a:cs typeface="Calibri" pitchFamily="34" charset="-120"/>
+              </a:rPr>
+              <a:t>[Bénéfice 3]</a:t>
+            </a:r>
+          </a:p>
+          <a:p>
+            <a:pPr marL="146304" indent="-146304">
+              <a:buClr>
+                <a:srgbClr val="8B1A1A"/>
+              </a:buClr>
+              <a:buFont typeface="Arial"/>
+              <a:buChar char="•"/>
+            </a:pPr>
+            <a:r>
+              <a:rPr lang="en-US" sz="1000" dirty="0">
+                <a:solidFill>
+                  <a:srgbClr val="4A5568"/>
+                </a:solidFill>
+                <a:latin typeface="Calibri" pitchFamily="34" charset="0"/>
+                <a:ea typeface="Calibri" pitchFamily="34" charset="-122"/>
+                <a:cs typeface="Calibri" pitchFamily="34" charset="-120"/>
+              </a:rPr>
+              <a:t>[Bénéfice 4]</a:t>
+            </a:r>
+          </a:p>
         </p:txBody>
       </p:sp>
       <p:sp>
@@ -10773,7 +7044,7 @@
         </p:nvSpPr>
         <p:spPr>
           <a:xfrm>
-            <a:off x="5879592" y="3846207"/>
+            <a:off x="5879592" y="3950208"/>
             <a:ext cx="2560320" cy="10973"/>
           </a:xfrm>
           <a:prstGeom prst="rect">
@@ -10796,14 +7067,43 @@
       </p:sp>
       <p:sp>
         <p:nvSpPr>
+          <p:cNvPr id="447" name="MetaRule"/>
+          <p:cNvSpPr/>
+          <p:nvPr/>
+        </p:nvSpPr>
+        <p:spPr>
+          <a:xfrm>
+            <a:off x="5879592" y="4434840"/>
+            <a:ext cx="2560320" cy="10973"/>
+          </a:xfrm>
+          <a:prstGeom prst="rect">
+            <a:avLst/>
+          </a:prstGeom>
+          <a:solidFill>
+            <a:srgbClr val="A09080"/>
+          </a:solidFill>
+          <a:ln>
+            <a:noFill/>
+          </a:ln>
+        </p:spPr>
+        <p:txBody>
+          <a:bodyPr/>
+          <a:lstStyle/>
+          <a:p>
+            <a:endParaRPr/>
+          </a:p>
+        </p:txBody>
+      </p:sp>
+      <p:sp>
+        <p:nvSpPr>
           <p:cNvPr id="448" name="Solution"/>
           <p:cNvSpPr/>
           <p:nvPr/>
         </p:nvSpPr>
         <p:spPr>
           <a:xfrm>
-            <a:off x="5879592" y="3956207"/>
-            <a:ext cx="2560320" cy="420000"/>
+            <a:off x="5879592" y="4041648"/>
+            <a:ext cx="2560320" cy="329184"/>
           </a:xfrm>
           <a:prstGeom prst="rect">
             <a:avLst/>
@@ -10840,8 +7140,8 @@
         </p:nvSpPr>
         <p:spPr>
           <a:xfrm>
-            <a:off x="5879592" y="4316207"/>
-            <a:ext cx="2560320" cy="220000"/>
+            <a:off x="5879592" y="4507992"/>
+            <a:ext cx="2560320" cy="237744"/>
           </a:xfrm>
           <a:prstGeom prst="rect">
             <a:avLst/>
@@ -14400,7 +10700,7 @@
             <a:r>
               <a:rPr lang="en-US" sz="800" i="1" dirty="0">
                 <a:solidFill>
-                  <a:srgbClr val="8E5B3F"/>
+                  <a:srgbClr val="F3F0EB"/>
                 </a:solidFill>
                 <a:latin typeface="Calibri" pitchFamily="34" charset="0"/>
                 <a:ea typeface="Calibri" pitchFamily="34" charset="-122"/>
@@ -14730,7 +11030,7 @@
             <a:r>
               <a:rPr lang="en-US" sz="800" i="1" dirty="0">
                 <a:solidFill>
-                  <a:srgbClr val="8E5B3F"/>
+                  <a:srgbClr val="F3F0EB"/>
                 </a:solidFill>
                 <a:latin typeface="Calibri" pitchFamily="34" charset="0"/>
                 <a:ea typeface="Calibri" pitchFamily="34" charset="-122"/>
@@ -15060,7 +11360,7 @@
             <a:r>
               <a:rPr lang="en-US" sz="800" i="1" dirty="0">
                 <a:solidFill>
-                  <a:srgbClr val="8E5B3F"/>
+                  <a:srgbClr val="F3F0EB"/>
                 </a:solidFill>
                 <a:latin typeface="Calibri" pitchFamily="34" charset="0"/>
                 <a:ea typeface="Calibri" pitchFamily="34" charset="-122"/>
@@ -15390,7 +11690,7 @@
             <a:r>
               <a:rPr lang="en-US" sz="800" i="1" dirty="0">
                 <a:solidFill>
-                  <a:srgbClr val="8E5B3F"/>
+                  <a:srgbClr val="4A5568"/>
                 </a:solidFill>
                 <a:latin typeface="Calibri" pitchFamily="34" charset="0"/>
                 <a:ea typeface="Calibri" pitchFamily="34" charset="-122"/>
@@ -25100,7 +21400,7 @@
               <a:buNone/>
             </a:pPr>
             <a:r>
-              <a:rPr lang="en-US" sz="6000" i="1" dirty="0">
+              <a:rPr lang="en-US" sz="5400" i="1" dirty="0">
                 <a:solidFill>
                   <a:srgbClr val="8E5B3F"/>
                 </a:solidFill>
@@ -25110,7 +21410,7 @@
               </a:rPr>
               <a:t>[X %]</a:t>
             </a:r>
-            <a:endParaRPr lang="en-US" sz="6000" dirty="0"/>
+            <a:endParaRPr lang="en-US" sz="5400" dirty="0"/>
           </a:p>
         </p:txBody>
       </p:sp>
@@ -26464,7 +22764,7 @@
             <a:r>
               <a:rPr lang="en-US" sz="3080" i="1" dirty="0">
                 <a:solidFill>
-                  <a:srgbClr val="4A5568"/>
+                  <a:srgbClr val="F3F0EB"/>
                 </a:solidFill>
                 <a:latin typeface="Garamond" pitchFamily="34" charset="0"/>
                 <a:ea typeface="Garamond" pitchFamily="34" charset="-122"/>
@@ -26509,7 +22809,7 @@
             <a:r>
               <a:rPr lang="en-US" sz="800" i="1" dirty="0">
                 <a:solidFill>
-                  <a:srgbClr val="A09080"/>
+                  <a:srgbClr val="F3F0EB"/>
                 </a:solidFill>
                 <a:latin typeface="Calibri" pitchFamily="34" charset="0"/>
                 <a:ea typeface="Calibri" pitchFamily="34" charset="-122"/>
@@ -26599,7 +22899,7 @@
             <a:r>
               <a:rPr lang="en-US" sz="850" i="1" dirty="0">
                 <a:solidFill>
-                  <a:srgbClr val="4A5568"/>
+                  <a:srgbClr val="F3F0EB"/>
                 </a:solidFill>
                 <a:latin typeface="Calibri" pitchFamily="34" charset="0"/>
                 <a:ea typeface="Calibri" pitchFamily="34" charset="-122"/>
@@ -26734,7 +23034,7 @@
             <a:r>
               <a:rPr lang="en-US" sz="850" b="1" dirty="0">
                 <a:solidFill>
-                  <a:srgbClr val="8B1A1A"/>
+                  <a:srgbClr val="F3F0EB"/>
                 </a:solidFill>
                 <a:latin typeface="Calibri" pitchFamily="34" charset="0"/>
                 <a:ea typeface="Calibri" pitchFamily="34" charset="-122"/>
@@ -26779,7 +23079,7 @@
             <a:r>
               <a:rPr lang="en-US" sz="850" b="1" dirty="0">
                 <a:solidFill>
-                  <a:srgbClr val="4A5568"/>
+                  <a:srgbClr val="F3F0EB"/>
                 </a:solidFill>
                 <a:latin typeface="Calibri" pitchFamily="34" charset="0"/>
                 <a:ea typeface="Calibri" pitchFamily="34" charset="-122"/>
@@ -27007,7 +23307,7 @@
             <a:r>
               <a:rPr lang="en-US" sz="3080" i="1" dirty="0">
                 <a:solidFill>
-                  <a:srgbClr val="4A5568"/>
+                  <a:srgbClr val="F3F0EB"/>
                 </a:solidFill>
                 <a:latin typeface="Garamond" pitchFamily="34" charset="0"/>
                 <a:ea typeface="Garamond" pitchFamily="34" charset="-122"/>
@@ -27187,7 +23487,7 @@
             <a:r>
               <a:rPr lang="en-US" sz="850" i="1" dirty="0">
                 <a:solidFill>
-                  <a:srgbClr val="4A5568"/>
+                  <a:srgbClr val="F3F0EB"/>
                 </a:solidFill>
                 <a:latin typeface="Calibri" pitchFamily="34" charset="0"/>
                 <a:ea typeface="Calibri" pitchFamily="34" charset="-122"/>
@@ -27232,7 +23532,7 @@
             <a:r>
               <a:rPr lang="en-US" sz="850" i="1" dirty="0">
                 <a:solidFill>
-                  <a:srgbClr val="4A5568"/>
+                  <a:srgbClr val="F3F0EB"/>
                 </a:solidFill>
                 <a:latin typeface="Calibri" pitchFamily="34" charset="0"/>
                 <a:ea typeface="Calibri" pitchFamily="34" charset="-122"/>

--- a/Cans_Mstr.pptx
+++ b/Cans_Mstr.pptx
@@ -3765,409 +3765,338 @@
       </p:sp>
       <p:sp>
         <p:nvSpPr>
-          <p:cNvPr id="12" name="Shape 9"/>
-          <p:cNvSpPr/>
-          <p:nvPr/>
-        </p:nvSpPr>
-        <p:spPr>
-          <a:xfrm>
-            <a:off x="502920" y="1371600"/>
-            <a:ext cx="2560320" cy="10973"/>
-          </a:xfrm>
-          <a:prstGeom prst="rect">
-            <a:avLst/>
-          </a:prstGeom>
-          <a:solidFill>
-            <a:srgbClr val="8B1A1A"/>
-          </a:solidFill>
-          <a:ln w="12700">
-            <a:solidFill>
-              <a:srgbClr val="8B1A1A"/>
-            </a:solidFill>
-            <a:prstDash val="solid"/>
-          </a:ln>
-        </p:spPr>
-        <p:txBody>
-          <a:bodyPr/>
-          <a:lstStyle/>
-          <a:p>
-            <a:endParaRPr lang="fr-FR"/>
-          </a:p>
-        </p:txBody>
-      </p:sp>
-      <p:sp>
-        <p:nvSpPr>
-          <p:cNvPr id="13" name="Text 10"/>
-          <p:cNvSpPr/>
-          <p:nvPr/>
-        </p:nvSpPr>
-        <p:spPr>
-          <a:xfrm>
-            <a:off x="502920" y="1463040"/>
-            <a:ext cx="2560320" cy="256032"/>
-          </a:xfrm>
-          <a:prstGeom prst="rect">
-            <a:avLst/>
-          </a:prstGeom>
-          <a:noFill/>
-          <a:ln/>
-        </p:spPr>
-        <p:txBody>
-          <a:bodyPr wrap="square" lIns="0" tIns="0" rIns="0" bIns="0" rtlCol="0" anchor="t"/>
-          <a:lstStyle/>
-          <a:p>
-            <a:pPr marL="0" indent="0">
-              <a:buNone/>
-            </a:pPr>
-            <a:r>
-              <a:rPr lang="en-US" sz="800" i="1" dirty="0">
-                <a:solidFill>
-                  <a:srgbClr val="8E5B3F"/>
-                </a:solidFill>
-                <a:latin typeface="Garamond" pitchFamily="34" charset="0"/>
-                <a:ea typeface="Garamond" pitchFamily="34" charset="-122"/>
-                <a:cs typeface="Garamond" pitchFamily="34" charset="-120"/>
-              </a:rPr>
-              <a:t>[PROJET 1 — intitulé]</a:t>
-            </a:r>
-            <a:endParaRPr lang="en-US" sz="800" dirty="0"/>
-          </a:p>
-        </p:txBody>
-      </p:sp>
-      <p:sp>
-        <p:nvSpPr>
-          <p:cNvPr id="14" name="Text 11"/>
-          <p:cNvSpPr/>
-          <p:nvPr/>
-        </p:nvSpPr>
-        <p:spPr>
-          <a:xfrm>
-            <a:off x="502920" y="1783080"/>
-            <a:ext cx="2560320" cy="2880360"/>
-          </a:xfrm>
-          <a:prstGeom prst="rect">
-            <a:avLst/>
-          </a:prstGeom>
-          <a:noFill/>
-          <a:ln/>
-        </p:spPr>
-        <p:txBody>
-          <a:bodyPr wrap="square" lIns="0" tIns="0" rIns="0" bIns="0" rtlCol="0" anchor="t"/>
-          <a:lstStyle/>
-          <a:p>
-            <a:pPr marL="0" indent="0">
-              <a:buNone/>
-            </a:pPr>
-            <a:r>
-              <a:rPr lang="en-US" sz="1150" i="1" dirty="0">
-                <a:solidFill>
-                  <a:srgbClr val="8E5B3F"/>
+          <p:cNvPr id="37" name="Text 34"/>
+          <p:cNvSpPr/>
+          <p:nvPr/>
+        </p:nvSpPr>
+        <p:spPr>
+          <a:xfrm>
+            <a:off x="2560320" y="5001768"/>
+            <a:ext cx="6080760" cy="118872"/>
+          </a:xfrm>
+          <a:prstGeom prst="rect">
+            <a:avLst/>
+          </a:prstGeom>
+          <a:noFill/>
+          <a:ln/>
+        </p:spPr>
+        <p:txBody>
+          <a:bodyPr wrap="square" lIns="0" tIns="0" rIns="0" bIns="0" rtlCol="0" anchor="ctr"/>
+          <a:lstStyle/>
+          <a:p>
+            <a:pPr marL="0" indent="0" algn="ctr">
+              <a:buNone/>
+            </a:pPr>
+            <a:r>
+              <a:rPr lang="en-US" sz="680" i="1" dirty="0">
+                <a:solidFill>
+                  <a:srgbClr val="A09080"/>
                 </a:solidFill>
                 <a:latin typeface="Calibri" pitchFamily="34" charset="0"/>
                 <a:ea typeface="Calibri" pitchFamily="34" charset="-122"/>
                 <a:cs typeface="Calibri" pitchFamily="34" charset="-120"/>
               </a:rPr>
-              <a:t>[Description du projet 1 — contexte, montant envisagé, horizon, implications patrimoniales]</a:t>
-            </a:r>
-            <a:endParaRPr lang="en-US" sz="1150" dirty="0"/>
-          </a:p>
-        </p:txBody>
-      </p:sp>
-      <p:sp>
-        <p:nvSpPr>
-          <p:cNvPr id="20" name="Shape 17"/>
-          <p:cNvSpPr/>
-          <p:nvPr/>
-        </p:nvSpPr>
-        <p:spPr>
-          <a:xfrm>
-            <a:off x="3200400" y="1371600"/>
-            <a:ext cx="2560320" cy="10973"/>
-          </a:xfrm>
-          <a:prstGeom prst="rect">
-            <a:avLst/>
-          </a:prstGeom>
-          <a:solidFill>
-            <a:srgbClr val="8B1A1A"/>
-          </a:solidFill>
-          <a:ln w="12700">
-            <a:solidFill>
-              <a:srgbClr val="8B1A1A"/>
-            </a:solidFill>
-            <a:prstDash val="solid"/>
+              <a:t>Affilior Gestion Privée  ·  Confidentiel  ·  [MOIS ANNÉE]  ·  Ce document ne constitue pas un conseil en investissement au sens MIF2</a:t>
+            </a:r>
+            <a:endParaRPr lang="en-US" sz="680" dirty="0"/>
+          </a:p>
+        </p:txBody>
+      </p:sp>
+      <p:sp>
+        <p:nvSpPr>
+          <p:cNvPr id="38" name="TextBox 37"/>
+          <p:cNvSpPr txBox="1"/>
+          <p:nvPr/>
+        </p:nvSpPr>
+        <p:spPr>
+          <a:xfrm>
+            <a:off x="502920" y="1371600"/>
+            <a:ext cx="8001000" cy="200000"/>
+          </a:xfrm>
+          <a:prstGeom prst="rect">
+            <a:avLst/>
+          </a:prstGeom>
+          <a:noFill/>
+        </p:spPr>
+        <p:txBody>
+          <a:bodyPr wrap="square" anchor="t" lIns="0" rIns="0" tIns="0" bIns="0">
+            <a:spAutoFit/>
+          </a:bodyPr>
+          <a:lstStyle/>
+          <a:p>
+            <a:pPr algn="l"/>
+            <a:r>
+              <a:rPr sz="1100" b="1" i="0" cap="all" spc="60">
+                <a:solidFill>
+                  <a:srgbClr val="8B1A1A"/>
+                </a:solidFill>
+                <a:latin typeface="Calibri"/>
+              </a:rPr>
+              <a:t>[MOT-CLÉ OBJECTIF 1]</a:t>
+            </a:r>
+          </a:p>
+        </p:txBody>
+      </p:sp>
+      <p:sp>
+        <p:nvSpPr>
+          <p:cNvPr id="39" name="TextBox 38"/>
+          <p:cNvSpPr txBox="1"/>
+          <p:nvPr/>
+        </p:nvSpPr>
+        <p:spPr>
+          <a:xfrm>
+            <a:off x="502920" y="1591600"/>
+            <a:ext cx="8001000" cy="350000"/>
+          </a:xfrm>
+          <a:prstGeom prst="rect">
+            <a:avLst/>
+          </a:prstGeom>
+          <a:noFill/>
+        </p:spPr>
+        <p:txBody>
+          <a:bodyPr wrap="square" anchor="t" lIns="0" rIns="0" tIns="0" bIns="0">
+            <a:spAutoFit/>
+          </a:bodyPr>
+          <a:lstStyle/>
+          <a:p>
+            <a:pPr algn="l"/>
+            <a:r>
+              <a:rPr sz="1500" b="0" i="1">
+                <a:solidFill>
+                  <a:srgbClr val="8E5B3F"/>
+                </a:solidFill>
+                <a:latin typeface="Garamond"/>
+              </a:rPr>
+              <a:t>[Formulation à la 1ère personne de l'objectif 1 — je souhaite / je réfléchis à / je m'interroge sur…]</a:t>
+            </a:r>
+          </a:p>
+        </p:txBody>
+      </p:sp>
+      <p:sp>
+        <p:nvSpPr>
+          <p:cNvPr id="40" name="Rectangle 39"/>
+          <p:cNvSpPr/>
+          <p:nvPr/>
+        </p:nvSpPr>
+        <p:spPr>
+          <a:xfrm>
+            <a:off x="502920" y="2171600"/>
+            <a:ext cx="8001000" cy="10973"/>
+          </a:xfrm>
+          <a:prstGeom prst="rect">
+            <a:avLst/>
+          </a:prstGeom>
+          <a:solidFill>
+            <a:srgbClr val="CFC8BD"/>
+          </a:solidFill>
+          <a:ln>
+            <a:noFill/>
           </a:ln>
-        </p:spPr>
-        <p:txBody>
-          <a:bodyPr/>
-          <a:lstStyle/>
-          <a:p>
-            <a:endParaRPr lang="fr-FR"/>
-          </a:p>
-        </p:txBody>
-      </p:sp>
-      <p:sp>
-        <p:nvSpPr>
-          <p:cNvPr id="21" name="Text 18"/>
-          <p:cNvSpPr/>
-          <p:nvPr/>
-        </p:nvSpPr>
-        <p:spPr>
-          <a:xfrm>
-            <a:off x="3200400" y="1463040"/>
-            <a:ext cx="2560320" cy="256032"/>
-          </a:xfrm>
-          <a:prstGeom prst="rect">
-            <a:avLst/>
-          </a:prstGeom>
-          <a:noFill/>
-          <a:ln/>
-        </p:spPr>
-        <p:txBody>
-          <a:bodyPr wrap="square" lIns="0" tIns="0" rIns="0" bIns="0" rtlCol="0" anchor="t"/>
-          <a:lstStyle/>
-          <a:p>
-            <a:pPr marL="0" indent="0">
-              <a:buNone/>
-            </a:pPr>
-            <a:r>
-              <a:rPr lang="en-US" sz="800" i="1" dirty="0">
+          <a:effectLst/>
+        </p:spPr>
+        <p:style>
+          <a:lnRef idx="1">
+            <a:schemeClr val="accent1"/>
+          </a:lnRef>
+          <a:fillRef idx="3">
+            <a:schemeClr val="accent1"/>
+          </a:fillRef>
+          <a:effectRef idx="2">
+            <a:schemeClr val="accent1"/>
+          </a:effectRef>
+          <a:fontRef idx="minor">
+            <a:schemeClr val="lt1"/>
+          </a:fontRef>
+        </p:style>
+        <p:txBody>
+          <a:bodyPr rtlCol="0" anchor="ctr"/>
+          <a:lstStyle/>
+          <a:p>
+            <a:pPr algn="ctr"/>
+          </a:p>
+        </p:txBody>
+      </p:sp>
+      <p:sp>
+        <p:nvSpPr>
+          <p:cNvPr id="41" name="TextBox 40"/>
+          <p:cNvSpPr txBox="1"/>
+          <p:nvPr/>
+        </p:nvSpPr>
+        <p:spPr>
+          <a:xfrm>
+            <a:off x="502920" y="2271600"/>
+            <a:ext cx="8001000" cy="200000"/>
+          </a:xfrm>
+          <a:prstGeom prst="rect">
+            <a:avLst/>
+          </a:prstGeom>
+          <a:noFill/>
+        </p:spPr>
+        <p:txBody>
+          <a:bodyPr wrap="square" anchor="t" lIns="0" rIns="0" tIns="0" bIns="0">
+            <a:spAutoFit/>
+          </a:bodyPr>
+          <a:lstStyle/>
+          <a:p>
+            <a:pPr algn="l"/>
+            <a:r>
+              <a:rPr sz="1100" b="1" i="0" cap="all" spc="60">
+                <a:solidFill>
+                  <a:srgbClr val="8B1A1A"/>
+                </a:solidFill>
+                <a:latin typeface="Calibri"/>
+              </a:rPr>
+              <a:t>[MOT-CLÉ OBJECTIF 2]</a:t>
+            </a:r>
+          </a:p>
+        </p:txBody>
+      </p:sp>
+      <p:sp>
+        <p:nvSpPr>
+          <p:cNvPr id="42" name="TextBox 41"/>
+          <p:cNvSpPr txBox="1"/>
+          <p:nvPr/>
+        </p:nvSpPr>
+        <p:spPr>
+          <a:xfrm>
+            <a:off x="502920" y="2491600"/>
+            <a:ext cx="8001000" cy="350000"/>
+          </a:xfrm>
+          <a:prstGeom prst="rect">
+            <a:avLst/>
+          </a:prstGeom>
+          <a:noFill/>
+        </p:spPr>
+        <p:txBody>
+          <a:bodyPr wrap="square" anchor="t" lIns="0" rIns="0" tIns="0" bIns="0">
+            <a:spAutoFit/>
+          </a:bodyPr>
+          <a:lstStyle/>
+          <a:p>
+            <a:pPr algn="l"/>
+            <a:r>
+              <a:rPr sz="1500" b="0" i="1">
                 <a:solidFill>
                   <a:srgbClr val="8E5B3F"/>
                 </a:solidFill>
-                <a:latin typeface="Garamond" pitchFamily="34" charset="0"/>
-                <a:ea typeface="Garamond" pitchFamily="34" charset="-122"/>
-                <a:cs typeface="Garamond" pitchFamily="34" charset="-120"/>
-              </a:rPr>
-              <a:t>[PROJET 2 — intitulé]</a:t>
-            </a:r>
-            <a:endParaRPr lang="en-US" sz="800" dirty="0"/>
-          </a:p>
-        </p:txBody>
-      </p:sp>
-      <p:sp>
-        <p:nvSpPr>
-          <p:cNvPr id="22" name="Text 19"/>
-          <p:cNvSpPr/>
-          <p:nvPr/>
-        </p:nvSpPr>
-        <p:spPr>
-          <a:xfrm>
-            <a:off x="3200400" y="1783080"/>
-            <a:ext cx="2560320" cy="2880360"/>
-          </a:xfrm>
-          <a:prstGeom prst="rect">
-            <a:avLst/>
-          </a:prstGeom>
-          <a:noFill/>
-          <a:ln/>
-        </p:spPr>
-        <p:txBody>
-          <a:bodyPr wrap="square" lIns="0" tIns="0" rIns="0" bIns="0" rtlCol="0" anchor="t"/>
-          <a:lstStyle/>
-          <a:p>
-            <a:pPr marL="0" indent="0">
-              <a:buNone/>
-            </a:pPr>
-            <a:r>
-              <a:rPr lang="en-US" sz="1150" i="1" dirty="0">
+                <a:latin typeface="Garamond"/>
+              </a:rPr>
+              <a:t>[Formulation à la 1ère personne de l'objectif 2 — je souhaite / je réfléchis à / je m'interroge sur…]</a:t>
+            </a:r>
+          </a:p>
+        </p:txBody>
+      </p:sp>
+      <p:sp>
+        <p:nvSpPr>
+          <p:cNvPr id="43" name="Rectangle 42"/>
+          <p:cNvSpPr/>
+          <p:nvPr/>
+        </p:nvSpPr>
+        <p:spPr>
+          <a:xfrm>
+            <a:off x="502920" y="3071600"/>
+            <a:ext cx="8001000" cy="10973"/>
+          </a:xfrm>
+          <a:prstGeom prst="rect">
+            <a:avLst/>
+          </a:prstGeom>
+          <a:solidFill>
+            <a:srgbClr val="CFC8BD"/>
+          </a:solidFill>
+          <a:ln>
+            <a:noFill/>
+          </a:ln>
+          <a:effectLst/>
+        </p:spPr>
+        <p:style>
+          <a:lnRef idx="1">
+            <a:schemeClr val="accent1"/>
+          </a:lnRef>
+          <a:fillRef idx="3">
+            <a:schemeClr val="accent1"/>
+          </a:fillRef>
+          <a:effectRef idx="2">
+            <a:schemeClr val="accent1"/>
+          </a:effectRef>
+          <a:fontRef idx="minor">
+            <a:schemeClr val="lt1"/>
+          </a:fontRef>
+        </p:style>
+        <p:txBody>
+          <a:bodyPr rtlCol="0" anchor="ctr"/>
+          <a:lstStyle/>
+          <a:p>
+            <a:pPr algn="ctr"/>
+          </a:p>
+        </p:txBody>
+      </p:sp>
+      <p:sp>
+        <p:nvSpPr>
+          <p:cNvPr id="44" name="TextBox 43"/>
+          <p:cNvSpPr txBox="1"/>
+          <p:nvPr/>
+        </p:nvSpPr>
+        <p:spPr>
+          <a:xfrm>
+            <a:off x="502920" y="3171600"/>
+            <a:ext cx="8001000" cy="200000"/>
+          </a:xfrm>
+          <a:prstGeom prst="rect">
+            <a:avLst/>
+          </a:prstGeom>
+          <a:noFill/>
+        </p:spPr>
+        <p:txBody>
+          <a:bodyPr wrap="square" anchor="t" lIns="0" rIns="0" tIns="0" bIns="0">
+            <a:spAutoFit/>
+          </a:bodyPr>
+          <a:lstStyle/>
+          <a:p>
+            <a:pPr algn="l"/>
+            <a:r>
+              <a:rPr sz="1100" b="1" i="0" cap="all" spc="60">
+                <a:solidFill>
+                  <a:srgbClr val="8B1A1A"/>
+                </a:solidFill>
+                <a:latin typeface="Calibri"/>
+              </a:rPr>
+              <a:t>[MOT-CLÉ OBJECTIF 3]</a:t>
+            </a:r>
+          </a:p>
+        </p:txBody>
+      </p:sp>
+      <p:sp>
+        <p:nvSpPr>
+          <p:cNvPr id="45" name="TextBox 44"/>
+          <p:cNvSpPr txBox="1"/>
+          <p:nvPr/>
+        </p:nvSpPr>
+        <p:spPr>
+          <a:xfrm>
+            <a:off x="502920" y="3391600"/>
+            <a:ext cx="8001000" cy="350000"/>
+          </a:xfrm>
+          <a:prstGeom prst="rect">
+            <a:avLst/>
+          </a:prstGeom>
+          <a:noFill/>
+        </p:spPr>
+        <p:txBody>
+          <a:bodyPr wrap="square" anchor="t" lIns="0" rIns="0" tIns="0" bIns="0">
+            <a:spAutoFit/>
+          </a:bodyPr>
+          <a:lstStyle/>
+          <a:p>
+            <a:pPr algn="l"/>
+            <a:r>
+              <a:rPr sz="1500" b="0" i="1">
                 <a:solidFill>
                   <a:srgbClr val="8E5B3F"/>
                 </a:solidFill>
-                <a:latin typeface="Calibri" pitchFamily="34" charset="0"/>
-                <a:ea typeface="Calibri" pitchFamily="34" charset="-122"/>
-                <a:cs typeface="Calibri" pitchFamily="34" charset="-120"/>
-              </a:rPr>
-              <a:t>[Description du projet 2 — contexte, montant envisagé, horizon, implications patrimoniales]</a:t>
-            </a:r>
-            <a:endParaRPr lang="en-US" sz="1150" dirty="0"/>
-          </a:p>
-        </p:txBody>
-      </p:sp>
-      <p:sp>
-        <p:nvSpPr>
-          <p:cNvPr id="28" name="Shape 25"/>
-          <p:cNvSpPr/>
-          <p:nvPr/>
-        </p:nvSpPr>
-        <p:spPr>
-          <a:xfrm>
-            <a:off x="5897880" y="1371600"/>
-            <a:ext cx="2560320" cy="10973"/>
-          </a:xfrm>
-          <a:prstGeom prst="rect">
-            <a:avLst/>
-          </a:prstGeom>
-          <a:solidFill>
-            <a:srgbClr val="8B1A1A"/>
-          </a:solidFill>
-          <a:ln w="12700">
-            <a:solidFill>
-              <a:srgbClr val="8B1A1A"/>
-            </a:solidFill>
-            <a:prstDash val="solid"/>
-          </a:ln>
-        </p:spPr>
-        <p:txBody>
-          <a:bodyPr/>
-          <a:lstStyle/>
-          <a:p>
-            <a:endParaRPr lang="fr-FR"/>
-          </a:p>
-        </p:txBody>
-      </p:sp>
-      <p:sp>
-        <p:nvSpPr>
-          <p:cNvPr id="29" name="Text 26"/>
-          <p:cNvSpPr/>
-          <p:nvPr/>
-        </p:nvSpPr>
-        <p:spPr>
-          <a:xfrm>
-            <a:off x="5897880" y="1463040"/>
-            <a:ext cx="2560320" cy="256032"/>
-          </a:xfrm>
-          <a:prstGeom prst="rect">
-            <a:avLst/>
-          </a:prstGeom>
-          <a:noFill/>
-          <a:ln/>
-        </p:spPr>
-        <p:txBody>
-          <a:bodyPr wrap="square" lIns="0" tIns="0" rIns="0" bIns="0" rtlCol="0" anchor="t"/>
-          <a:lstStyle/>
-          <a:p>
-            <a:pPr marL="0" indent="0">
-              <a:buNone/>
-            </a:pPr>
-            <a:r>
-              <a:rPr lang="en-US" sz="800" i="1" dirty="0">
-                <a:solidFill>
-                  <a:srgbClr val="8E5B3F"/>
-                </a:solidFill>
-                <a:latin typeface="Garamond" pitchFamily="34" charset="0"/>
-                <a:ea typeface="Garamond" pitchFamily="34" charset="-122"/>
-                <a:cs typeface="Garamond" pitchFamily="34" charset="-120"/>
-              </a:rPr>
-              <a:t>[PROJET 3 — intitulé]</a:t>
-            </a:r>
-            <a:endParaRPr lang="en-US" sz="800" dirty="0"/>
-          </a:p>
-        </p:txBody>
-      </p:sp>
-      <p:sp>
-        <p:nvSpPr>
-          <p:cNvPr id="30" name="Text 27"/>
-          <p:cNvSpPr/>
-          <p:nvPr/>
-        </p:nvSpPr>
-        <p:spPr>
-          <a:xfrm>
-            <a:off x="5897880" y="1783080"/>
-            <a:ext cx="2560320" cy="2880360"/>
-          </a:xfrm>
-          <a:prstGeom prst="rect">
-            <a:avLst/>
-          </a:prstGeom>
-          <a:noFill/>
-          <a:ln/>
-        </p:spPr>
-        <p:txBody>
-          <a:bodyPr wrap="square" lIns="0" tIns="0" rIns="0" bIns="0" rtlCol="0" anchor="t"/>
-          <a:lstStyle/>
-          <a:p>
-            <a:pPr marL="0" indent="0">
-              <a:buNone/>
-            </a:pPr>
-            <a:r>
-              <a:rPr lang="en-US" sz="1150" i="1" dirty="0">
-                <a:solidFill>
-                  <a:srgbClr val="8E5B3F"/>
-                </a:solidFill>
-                <a:latin typeface="Calibri" pitchFamily="34" charset="0"/>
-                <a:ea typeface="Calibri" pitchFamily="34" charset="-122"/>
-                <a:cs typeface="Calibri" pitchFamily="34" charset="-120"/>
-              </a:rPr>
-              <a:t>[Description du projet 3 — contexte, montant envisagé, horizon, implications patrimoniales]</a:t>
-            </a:r>
-            <a:endParaRPr lang="en-US" sz="1150" dirty="0"/>
-          </a:p>
-        </p:txBody>
-      </p:sp>
-      <p:sp>
-        <p:nvSpPr>
-          <p:cNvPr id="36" name="Text 33"/>
-          <p:cNvSpPr/>
-          <p:nvPr/>
-        </p:nvSpPr>
-        <p:spPr>
-          <a:xfrm>
-            <a:off x="502920" y="4800600"/>
-            <a:ext cx="8001000" cy="137160"/>
-          </a:xfrm>
-          <a:prstGeom prst="rect">
-            <a:avLst/>
-          </a:prstGeom>
-          <a:noFill/>
-          <a:ln/>
-        </p:spPr>
-        <p:txBody>
-          <a:bodyPr wrap="square" lIns="0" tIns="0" rIns="0" bIns="0" rtlCol="0" anchor="ctr"/>
-          <a:lstStyle/>
-          <a:p>
-            <a:pPr marL="0" indent="0">
-              <a:buNone/>
-            </a:pPr>
-            <a:r>
-              <a:rPr lang="en-US" sz="750" i="1" dirty="0">
-                <a:solidFill>
-                  <a:srgbClr val="A09080"/>
-                </a:solidFill>
-                <a:latin typeface="Calibri" pitchFamily="34" charset="0"/>
-                <a:ea typeface="Calibri" pitchFamily="34" charset="-122"/>
-                <a:cs typeface="Calibri" pitchFamily="34" charset="-120"/>
-              </a:rPr>
-              <a:t>Adapter le nombre de colonnes au nombre de projets — supprimer les colonnes non utilisées</a:t>
-            </a:r>
-            <a:endParaRPr lang="en-US" sz="750" dirty="0"/>
-          </a:p>
-        </p:txBody>
-      </p:sp>
-      <p:sp>
-        <p:nvSpPr>
-          <p:cNvPr id="37" name="Text 34"/>
-          <p:cNvSpPr/>
-          <p:nvPr/>
-        </p:nvSpPr>
-        <p:spPr>
-          <a:xfrm>
-            <a:off x="2560320" y="5001768"/>
-            <a:ext cx="6080760" cy="118872"/>
-          </a:xfrm>
-          <a:prstGeom prst="rect">
-            <a:avLst/>
-          </a:prstGeom>
-          <a:noFill/>
-          <a:ln/>
-        </p:spPr>
-        <p:txBody>
-          <a:bodyPr wrap="square" lIns="0" tIns="0" rIns="0" bIns="0" rtlCol="0" anchor="ctr"/>
-          <a:lstStyle/>
-          <a:p>
-            <a:pPr marL="0" indent="0" algn="ctr">
-              <a:buNone/>
-            </a:pPr>
-            <a:r>
-              <a:rPr lang="en-US" sz="680" i="1" dirty="0">
-                <a:solidFill>
-                  <a:srgbClr val="A09080"/>
-                </a:solidFill>
-                <a:latin typeface="Calibri" pitchFamily="34" charset="0"/>
-                <a:ea typeface="Calibri" pitchFamily="34" charset="-122"/>
-                <a:cs typeface="Calibri" pitchFamily="34" charset="-120"/>
-              </a:rPr>
-              <a:t>Affilior Gestion Privée  ·  Confidentiel  ·  [MOIS ANNÉE]  ·  Ce document ne constitue pas un conseil en investissement au sens MIF2</a:t>
-            </a:r>
-            <a:endParaRPr lang="en-US" sz="680" dirty="0"/>
+                <a:latin typeface="Garamond"/>
+              </a:rPr>
+              <a:t>[Formulation à la 1ère personne de l'objectif 3 — je souhaite / je réfléchis à / je m'interroge sur…]</a:t>
+            </a:r>
           </a:p>
         </p:txBody>
       </p:sp>
@@ -16561,14 +16490,14 @@
       </p:sp>
       <p:sp>
         <p:nvSpPr>
-          <p:cNvPr id="12" name="Text 9"/>
-          <p:cNvSpPr/>
-          <p:nvPr/>
-        </p:nvSpPr>
-        <p:spPr>
-          <a:xfrm>
-            <a:off x="502920" y="1371600"/>
-            <a:ext cx="3840480" cy="201168"/>
+          <p:cNvPr id="35" name="Text 32"/>
+          <p:cNvSpPr/>
+          <p:nvPr/>
+        </p:nvSpPr>
+        <p:spPr>
+          <a:xfrm>
+            <a:off x="2560320" y="5001768"/>
+            <a:ext cx="6080760" cy="118872"/>
           </a:xfrm>
           <a:prstGeom prst="rect">
             <a:avLst/>
@@ -16580,73 +16509,192 @@
           <a:bodyPr wrap="square" lIns="0" tIns="0" rIns="0" bIns="0" rtlCol="0" anchor="ctr"/>
           <a:lstStyle/>
           <a:p>
-            <a:pPr marL="0" indent="0">
-              <a:buNone/>
-            </a:pPr>
-            <a:r>
-              <a:rPr lang="en-US" sz="750" kern="0" spc="250" dirty="0">
-                <a:solidFill>
-                  <a:srgbClr val="8B1A1A"/>
-                </a:solidFill>
-                <a:latin typeface="Garamond" pitchFamily="34" charset="0"/>
-                <a:ea typeface="Garamond" pitchFamily="34" charset="-122"/>
-                <a:cs typeface="Garamond" pitchFamily="34" charset="-120"/>
-              </a:rPr>
-              <a:t>ÂGE</a:t>
-            </a:r>
-            <a:endParaRPr lang="en-US" sz="750" dirty="0"/>
-          </a:p>
-        </p:txBody>
-      </p:sp>
-      <p:sp>
-        <p:nvSpPr>
-          <p:cNvPr id="13" name="Text 10"/>
-          <p:cNvSpPr/>
-          <p:nvPr/>
-        </p:nvSpPr>
-        <p:spPr>
-          <a:xfrm>
-            <a:off x="502920" y="1609344"/>
-            <a:ext cx="3840480" cy="347472"/>
-          </a:xfrm>
-          <a:prstGeom prst="rect">
-            <a:avLst/>
-          </a:prstGeom>
-          <a:noFill/>
-          <a:ln/>
-        </p:spPr>
-        <p:txBody>
-          <a:bodyPr wrap="square" lIns="0" tIns="0" rIns="0" bIns="0" rtlCol="0" anchor="t"/>
-          <a:lstStyle/>
-          <a:p>
-            <a:pPr marL="0" indent="0">
-              <a:buNone/>
-            </a:pPr>
-            <a:r>
-              <a:rPr lang="en-US" sz="1150" i="1" dirty="0">
-                <a:solidFill>
-                  <a:srgbClr val="8E5B3F"/>
+            <a:pPr marL="0" indent="0" algn="ctr">
+              <a:buNone/>
+            </a:pPr>
+            <a:r>
+              <a:rPr lang="en-US" sz="680" i="1" dirty="0">
+                <a:solidFill>
+                  <a:srgbClr val="A09080"/>
                 </a:solidFill>
                 <a:latin typeface="Calibri" pitchFamily="34" charset="0"/>
                 <a:ea typeface="Calibri" pitchFamily="34" charset="-122"/>
                 <a:cs typeface="Calibri" pitchFamily="34" charset="-120"/>
               </a:rPr>
-              <a:t>[X ans — ou X et X ans si couple]</a:t>
-            </a:r>
-            <a:endParaRPr lang="en-US" sz="1150" dirty="0"/>
-          </a:p>
-        </p:txBody>
-      </p:sp>
-      <p:sp>
-        <p:nvSpPr>
-          <p:cNvPr id="14" name="Shape 11"/>
-          <p:cNvSpPr/>
-          <p:nvPr/>
-        </p:nvSpPr>
-        <p:spPr>
-          <a:xfrm>
-            <a:off x="502920" y="1956816"/>
-            <a:ext cx="3840480" cy="10973"/>
+              <a:t>Affilior Gestion Privée  ·  Confidentiel  ·  [MOIS ANNÉE]  ·  Ce document ne constitue pas un conseil en investissement au sens MIF2</a:t>
+            </a:r>
+            <a:endParaRPr lang="en-US" sz="680" dirty="0"/>
+          </a:p>
+        </p:txBody>
+      </p:sp>
+      <p:sp>
+        <p:nvSpPr>
+          <p:cNvPr id="36" name="Rectangle 35"/>
+          <p:cNvSpPr/>
+          <p:nvPr/>
+        </p:nvSpPr>
+        <p:spPr>
+          <a:xfrm>
+            <a:off x="502920" y="1316736"/>
+            <a:ext cx="22860" cy="430000"/>
+          </a:xfrm>
+          <a:prstGeom prst="rect">
+            <a:avLst/>
+          </a:prstGeom>
+          <a:solidFill>
+            <a:srgbClr val="8B1A1A"/>
+          </a:solidFill>
+          <a:ln>
+            <a:noFill/>
+          </a:ln>
+          <a:effectLst/>
+        </p:spPr>
+        <p:style>
+          <a:lnRef idx="1">
+            <a:schemeClr val="accent1"/>
+          </a:lnRef>
+          <a:fillRef idx="3">
+            <a:schemeClr val="accent1"/>
+          </a:fillRef>
+          <a:effectRef idx="2">
+            <a:schemeClr val="accent1"/>
+          </a:effectRef>
+          <a:fontRef idx="minor">
+            <a:schemeClr val="lt1"/>
+          </a:fontRef>
+        </p:style>
+        <p:txBody>
+          <a:bodyPr rtlCol="0" anchor="ctr"/>
+          <a:lstStyle/>
+          <a:p>
+            <a:pPr algn="ctr"/>
+          </a:p>
+        </p:txBody>
+      </p:sp>
+      <p:sp>
+        <p:nvSpPr>
+          <p:cNvPr id="37" name="TextBox 36"/>
+          <p:cNvSpPr txBox="1"/>
+          <p:nvPr/>
+        </p:nvSpPr>
+        <p:spPr>
+          <a:xfrm>
+            <a:off x="667512" y="1316736"/>
+            <a:ext cx="7863840" cy="430000"/>
+          </a:xfrm>
+          <a:prstGeom prst="rect">
+            <a:avLst/>
+          </a:prstGeom>
+          <a:noFill/>
+        </p:spPr>
+        <p:txBody>
+          <a:bodyPr wrap="square" anchor="t" lIns="0" rIns="0" tIns="0" bIns="0">
+            <a:spAutoFit/>
+          </a:bodyPr>
+          <a:lstStyle/>
+          <a:p>
+            <a:pPr algn="l"/>
+            <a:r>
+              <a:rPr sz="1150">
+                <a:solidFill>
+                  <a:srgbClr val="8E5B3F"/>
+                </a:solidFill>
+                <a:latin typeface="Calibri"/>
+              </a:rPr>
+              <a:t>[Puce 1 — phrase complète reformulée, à supprimer si non applicable]</a:t>
+            </a:r>
+          </a:p>
+        </p:txBody>
+      </p:sp>
+      <p:sp>
+        <p:nvSpPr>
+          <p:cNvPr id="38" name="Rectangle 37"/>
+          <p:cNvSpPr/>
+          <p:nvPr/>
+        </p:nvSpPr>
+        <p:spPr>
+          <a:xfrm>
+            <a:off x="502920" y="1866736"/>
+            <a:ext cx="22860" cy="430000"/>
+          </a:xfrm>
+          <a:prstGeom prst="rect">
+            <a:avLst/>
+          </a:prstGeom>
+          <a:solidFill>
+            <a:srgbClr val="8B1A1A"/>
+          </a:solidFill>
+          <a:ln>
+            <a:noFill/>
+          </a:ln>
+          <a:effectLst/>
+        </p:spPr>
+        <p:style>
+          <a:lnRef idx="1">
+            <a:schemeClr val="accent1"/>
+          </a:lnRef>
+          <a:fillRef idx="3">
+            <a:schemeClr val="accent1"/>
+          </a:fillRef>
+          <a:effectRef idx="2">
+            <a:schemeClr val="accent1"/>
+          </a:effectRef>
+          <a:fontRef idx="minor">
+            <a:schemeClr val="lt1"/>
+          </a:fontRef>
+        </p:style>
+        <p:txBody>
+          <a:bodyPr rtlCol="0" anchor="ctr"/>
+          <a:lstStyle/>
+          <a:p>
+            <a:pPr algn="ctr"/>
+          </a:p>
+        </p:txBody>
+      </p:sp>
+      <p:sp>
+        <p:nvSpPr>
+          <p:cNvPr id="39" name="TextBox 38"/>
+          <p:cNvSpPr txBox="1"/>
+          <p:nvPr/>
+        </p:nvSpPr>
+        <p:spPr>
+          <a:xfrm>
+            <a:off x="667512" y="1866736"/>
+            <a:ext cx="7863840" cy="430000"/>
+          </a:xfrm>
+          <a:prstGeom prst="rect">
+            <a:avLst/>
+          </a:prstGeom>
+          <a:noFill/>
+        </p:spPr>
+        <p:txBody>
+          <a:bodyPr wrap="square" anchor="t" lIns="0" rIns="0" tIns="0" bIns="0">
+            <a:spAutoFit/>
+          </a:bodyPr>
+          <a:lstStyle/>
+          <a:p>
+            <a:pPr algn="l"/>
+            <a:r>
+              <a:rPr sz="1150">
+                <a:solidFill>
+                  <a:srgbClr val="8E5B3F"/>
+                </a:solidFill>
+                <a:latin typeface="Calibri"/>
+              </a:rPr>
+              <a:t>[Puce 2 — phrase complète reformulée, à supprimer si non applicable]</a:t>
+            </a:r>
+          </a:p>
+        </p:txBody>
+      </p:sp>
+      <p:sp>
+        <p:nvSpPr>
+          <p:cNvPr id="40" name="Rectangle 39"/>
+          <p:cNvSpPr/>
+          <p:nvPr/>
+        </p:nvSpPr>
+        <p:spPr>
+          <a:xfrm>
+            <a:off x="502920" y="1811872"/>
+            <a:ext cx="8001000" cy="10973"/>
           </a:xfrm>
           <a:prstGeom prst="rect">
             <a:avLst/>
@@ -16654,109 +16702,122 @@
           <a:solidFill>
             <a:srgbClr val="E5E0D8"/>
           </a:solidFill>
-          <a:ln w="12700">
-            <a:solidFill>
-              <a:srgbClr val="E5E0D8"/>
-            </a:solidFill>
-            <a:prstDash val="solid"/>
+          <a:ln>
+            <a:noFill/>
           </a:ln>
-        </p:spPr>
-        <p:txBody>
-          <a:bodyPr/>
-          <a:lstStyle/>
-          <a:p>
-            <a:endParaRPr lang="fr-FR"/>
-          </a:p>
-        </p:txBody>
-      </p:sp>
-      <p:sp>
-        <p:nvSpPr>
-          <p:cNvPr id="15" name="Text 12"/>
-          <p:cNvSpPr/>
-          <p:nvPr/>
-        </p:nvSpPr>
-        <p:spPr>
-          <a:xfrm>
-            <a:off x="502920" y="2029968"/>
-            <a:ext cx="3840480" cy="201168"/>
-          </a:xfrm>
-          <a:prstGeom prst="rect">
-            <a:avLst/>
-          </a:prstGeom>
-          <a:noFill/>
-          <a:ln/>
-        </p:spPr>
-        <p:txBody>
-          <a:bodyPr wrap="square" lIns="0" tIns="0" rIns="0" bIns="0" rtlCol="0" anchor="ctr"/>
-          <a:lstStyle/>
-          <a:p>
-            <a:pPr marL="0" indent="0">
-              <a:buNone/>
-            </a:pPr>
-            <a:r>
-              <a:rPr lang="en-US" sz="750" kern="0" spc="250" dirty="0">
-                <a:solidFill>
-                  <a:srgbClr val="8B1A1A"/>
-                </a:solidFill>
-                <a:latin typeface="Garamond" pitchFamily="34" charset="0"/>
-                <a:ea typeface="Garamond" pitchFamily="34" charset="-122"/>
-                <a:cs typeface="Garamond" pitchFamily="34" charset="-120"/>
-              </a:rPr>
-              <a:t>SITUATION PROFESSIONNELLE</a:t>
-            </a:r>
-            <a:endParaRPr lang="en-US" sz="750" dirty="0"/>
-          </a:p>
-        </p:txBody>
-      </p:sp>
-      <p:sp>
-        <p:nvSpPr>
-          <p:cNvPr id="16" name="Text 13"/>
-          <p:cNvSpPr/>
-          <p:nvPr/>
-        </p:nvSpPr>
-        <p:spPr>
-          <a:xfrm>
-            <a:off x="502920" y="2267712"/>
-            <a:ext cx="3840480" cy="347472"/>
-          </a:xfrm>
-          <a:prstGeom prst="rect">
-            <a:avLst/>
-          </a:prstGeom>
-          <a:noFill/>
-          <a:ln/>
-        </p:spPr>
-        <p:txBody>
-          <a:bodyPr wrap="square" lIns="0" tIns="0" rIns="0" bIns="0" rtlCol="0" anchor="t"/>
-          <a:lstStyle/>
-          <a:p>
-            <a:pPr marL="0" indent="0">
-              <a:buNone/>
-            </a:pPr>
-            <a:r>
-              <a:rPr lang="en-US" sz="1150" i="1" dirty="0">
+          <a:effectLst/>
+        </p:spPr>
+        <p:style>
+          <a:lnRef idx="1">
+            <a:schemeClr val="accent1"/>
+          </a:lnRef>
+          <a:fillRef idx="3">
+            <a:schemeClr val="accent1"/>
+          </a:fillRef>
+          <a:effectRef idx="2">
+            <a:schemeClr val="accent1"/>
+          </a:effectRef>
+          <a:fontRef idx="minor">
+            <a:schemeClr val="lt1"/>
+          </a:fontRef>
+        </p:style>
+        <p:txBody>
+          <a:bodyPr rtlCol="0" anchor="ctr"/>
+          <a:lstStyle/>
+          <a:p>
+            <a:pPr algn="ctr"/>
+          </a:p>
+        </p:txBody>
+      </p:sp>
+      <p:sp>
+        <p:nvSpPr>
+          <p:cNvPr id="41" name="Rectangle 40"/>
+          <p:cNvSpPr/>
+          <p:nvPr/>
+        </p:nvSpPr>
+        <p:spPr>
+          <a:xfrm>
+            <a:off x="502920" y="2416736"/>
+            <a:ext cx="22860" cy="430000"/>
+          </a:xfrm>
+          <a:prstGeom prst="rect">
+            <a:avLst/>
+          </a:prstGeom>
+          <a:solidFill>
+            <a:srgbClr val="8B1A1A"/>
+          </a:solidFill>
+          <a:ln>
+            <a:noFill/>
+          </a:ln>
+          <a:effectLst/>
+        </p:spPr>
+        <p:style>
+          <a:lnRef idx="1">
+            <a:schemeClr val="accent1"/>
+          </a:lnRef>
+          <a:fillRef idx="3">
+            <a:schemeClr val="accent1"/>
+          </a:fillRef>
+          <a:effectRef idx="2">
+            <a:schemeClr val="accent1"/>
+          </a:effectRef>
+          <a:fontRef idx="minor">
+            <a:schemeClr val="lt1"/>
+          </a:fontRef>
+        </p:style>
+        <p:txBody>
+          <a:bodyPr rtlCol="0" anchor="ctr"/>
+          <a:lstStyle/>
+          <a:p>
+            <a:pPr algn="ctr"/>
+          </a:p>
+        </p:txBody>
+      </p:sp>
+      <p:sp>
+        <p:nvSpPr>
+          <p:cNvPr id="42" name="TextBox 41"/>
+          <p:cNvSpPr txBox="1"/>
+          <p:nvPr/>
+        </p:nvSpPr>
+        <p:spPr>
+          <a:xfrm>
+            <a:off x="667512" y="2416736"/>
+            <a:ext cx="7863840" cy="430000"/>
+          </a:xfrm>
+          <a:prstGeom prst="rect">
+            <a:avLst/>
+          </a:prstGeom>
+          <a:noFill/>
+        </p:spPr>
+        <p:txBody>
+          <a:bodyPr wrap="square" anchor="t" lIns="0" rIns="0" tIns="0" bIns="0">
+            <a:spAutoFit/>
+          </a:bodyPr>
+          <a:lstStyle/>
+          <a:p>
+            <a:pPr algn="l"/>
+            <a:r>
+              <a:rPr sz="1150">
                 <a:solidFill>
                   <a:srgbClr val="8E5B3F"/>
                 </a:solidFill>
-                <a:latin typeface="Calibri" pitchFamily="34" charset="0"/>
-                <a:ea typeface="Calibri" pitchFamily="34" charset="-122"/>
-                <a:cs typeface="Calibri" pitchFamily="34" charset="-120"/>
-              </a:rPr>
-              <a:t>[Profession · Employeur · Statut]</a:t>
-            </a:r>
-            <a:endParaRPr lang="en-US" sz="1150" dirty="0"/>
-          </a:p>
-        </p:txBody>
-      </p:sp>
-      <p:sp>
-        <p:nvSpPr>
-          <p:cNvPr id="17" name="Shape 14"/>
-          <p:cNvSpPr/>
-          <p:nvPr/>
-        </p:nvSpPr>
-        <p:spPr>
-          <a:xfrm>
-            <a:off x="502920" y="2615184"/>
-            <a:ext cx="3840480" cy="10973"/>
+                <a:latin typeface="Calibri"/>
+              </a:rPr>
+              <a:t>[Puce 3 — phrase complète reformulée, à supprimer si non applicable]</a:t>
+            </a:r>
+          </a:p>
+        </p:txBody>
+      </p:sp>
+      <p:sp>
+        <p:nvSpPr>
+          <p:cNvPr id="43" name="Rectangle 42"/>
+          <p:cNvSpPr/>
+          <p:nvPr/>
+        </p:nvSpPr>
+        <p:spPr>
+          <a:xfrm>
+            <a:off x="502920" y="2361872"/>
+            <a:ext cx="8001000" cy="10973"/>
           </a:xfrm>
           <a:prstGeom prst="rect">
             <a:avLst/>
@@ -16764,109 +16825,122 @@
           <a:solidFill>
             <a:srgbClr val="E5E0D8"/>
           </a:solidFill>
-          <a:ln w="12700">
-            <a:solidFill>
-              <a:srgbClr val="E5E0D8"/>
-            </a:solidFill>
-            <a:prstDash val="solid"/>
+          <a:ln>
+            <a:noFill/>
           </a:ln>
-        </p:spPr>
-        <p:txBody>
-          <a:bodyPr/>
-          <a:lstStyle/>
-          <a:p>
-            <a:endParaRPr lang="fr-FR"/>
-          </a:p>
-        </p:txBody>
-      </p:sp>
-      <p:sp>
-        <p:nvSpPr>
-          <p:cNvPr id="18" name="Text 15"/>
-          <p:cNvSpPr/>
-          <p:nvPr/>
-        </p:nvSpPr>
-        <p:spPr>
-          <a:xfrm>
-            <a:off x="502920" y="2688336"/>
-            <a:ext cx="3840480" cy="201168"/>
-          </a:xfrm>
-          <a:prstGeom prst="rect">
-            <a:avLst/>
-          </a:prstGeom>
-          <a:noFill/>
-          <a:ln/>
-        </p:spPr>
-        <p:txBody>
-          <a:bodyPr wrap="square" lIns="0" tIns="0" rIns="0" bIns="0" rtlCol="0" anchor="ctr"/>
-          <a:lstStyle/>
-          <a:p>
-            <a:pPr marL="0" indent="0">
-              <a:buNone/>
-            </a:pPr>
-            <a:r>
-              <a:rPr lang="en-US" sz="750" kern="0" spc="250" dirty="0">
-                <a:solidFill>
-                  <a:srgbClr val="8B1A1A"/>
-                </a:solidFill>
-                <a:latin typeface="Garamond" pitchFamily="34" charset="0"/>
-                <a:ea typeface="Garamond" pitchFamily="34" charset="-122"/>
-                <a:cs typeface="Garamond" pitchFamily="34" charset="-120"/>
-              </a:rPr>
-              <a:t>SITUATION FAMILIALE</a:t>
-            </a:r>
-            <a:endParaRPr lang="en-US" sz="750" dirty="0"/>
-          </a:p>
-        </p:txBody>
-      </p:sp>
-      <p:sp>
-        <p:nvSpPr>
-          <p:cNvPr id="19" name="Text 16"/>
-          <p:cNvSpPr/>
-          <p:nvPr/>
-        </p:nvSpPr>
-        <p:spPr>
-          <a:xfrm>
-            <a:off x="502920" y="2926080"/>
-            <a:ext cx="3840480" cy="347472"/>
-          </a:xfrm>
-          <a:prstGeom prst="rect">
-            <a:avLst/>
-          </a:prstGeom>
-          <a:noFill/>
-          <a:ln/>
-        </p:spPr>
-        <p:txBody>
-          <a:bodyPr wrap="square" lIns="0" tIns="0" rIns="0" bIns="0" rtlCol="0" anchor="t"/>
-          <a:lstStyle/>
-          <a:p>
-            <a:pPr marL="0" indent="0">
-              <a:buNone/>
-            </a:pPr>
-            <a:r>
-              <a:rPr lang="en-US" sz="1150" i="1" dirty="0">
+          <a:effectLst/>
+        </p:spPr>
+        <p:style>
+          <a:lnRef idx="1">
+            <a:schemeClr val="accent1"/>
+          </a:lnRef>
+          <a:fillRef idx="3">
+            <a:schemeClr val="accent1"/>
+          </a:fillRef>
+          <a:effectRef idx="2">
+            <a:schemeClr val="accent1"/>
+          </a:effectRef>
+          <a:fontRef idx="minor">
+            <a:schemeClr val="lt1"/>
+          </a:fontRef>
+        </p:style>
+        <p:txBody>
+          <a:bodyPr rtlCol="0" anchor="ctr"/>
+          <a:lstStyle/>
+          <a:p>
+            <a:pPr algn="ctr"/>
+          </a:p>
+        </p:txBody>
+      </p:sp>
+      <p:sp>
+        <p:nvSpPr>
+          <p:cNvPr id="44" name="Rectangle 43"/>
+          <p:cNvSpPr/>
+          <p:nvPr/>
+        </p:nvSpPr>
+        <p:spPr>
+          <a:xfrm>
+            <a:off x="502920" y="2966736"/>
+            <a:ext cx="22860" cy="430000"/>
+          </a:xfrm>
+          <a:prstGeom prst="rect">
+            <a:avLst/>
+          </a:prstGeom>
+          <a:solidFill>
+            <a:srgbClr val="8B1A1A"/>
+          </a:solidFill>
+          <a:ln>
+            <a:noFill/>
+          </a:ln>
+          <a:effectLst/>
+        </p:spPr>
+        <p:style>
+          <a:lnRef idx="1">
+            <a:schemeClr val="accent1"/>
+          </a:lnRef>
+          <a:fillRef idx="3">
+            <a:schemeClr val="accent1"/>
+          </a:fillRef>
+          <a:effectRef idx="2">
+            <a:schemeClr val="accent1"/>
+          </a:effectRef>
+          <a:fontRef idx="minor">
+            <a:schemeClr val="lt1"/>
+          </a:fontRef>
+        </p:style>
+        <p:txBody>
+          <a:bodyPr rtlCol="0" anchor="ctr"/>
+          <a:lstStyle/>
+          <a:p>
+            <a:pPr algn="ctr"/>
+          </a:p>
+        </p:txBody>
+      </p:sp>
+      <p:sp>
+        <p:nvSpPr>
+          <p:cNvPr id="45" name="TextBox 44"/>
+          <p:cNvSpPr txBox="1"/>
+          <p:nvPr/>
+        </p:nvSpPr>
+        <p:spPr>
+          <a:xfrm>
+            <a:off x="667512" y="2966736"/>
+            <a:ext cx="7863840" cy="430000"/>
+          </a:xfrm>
+          <a:prstGeom prst="rect">
+            <a:avLst/>
+          </a:prstGeom>
+          <a:noFill/>
+        </p:spPr>
+        <p:txBody>
+          <a:bodyPr wrap="square" anchor="t" lIns="0" rIns="0" tIns="0" bIns="0">
+            <a:spAutoFit/>
+          </a:bodyPr>
+          <a:lstStyle/>
+          <a:p>
+            <a:pPr algn="l"/>
+            <a:r>
+              <a:rPr sz="1150">
                 <a:solidFill>
                   <a:srgbClr val="8E5B3F"/>
                 </a:solidFill>
-                <a:latin typeface="Calibri" pitchFamily="34" charset="0"/>
-                <a:ea typeface="Calibri" pitchFamily="34" charset="-122"/>
-                <a:cs typeface="Calibri" pitchFamily="34" charset="-120"/>
-              </a:rPr>
-              <a:t>[Marié(e) / Pacsé(e) / Célibataire] sous le régime de [régime matrimonial]</a:t>
-            </a:r>
-            <a:endParaRPr lang="en-US" sz="1150" dirty="0"/>
-          </a:p>
-        </p:txBody>
-      </p:sp>
-      <p:sp>
-        <p:nvSpPr>
-          <p:cNvPr id="20" name="Shape 17"/>
-          <p:cNvSpPr/>
-          <p:nvPr/>
-        </p:nvSpPr>
-        <p:spPr>
-          <a:xfrm>
-            <a:off x="502920" y="3273552"/>
-            <a:ext cx="3840480" cy="10973"/>
+                <a:latin typeface="Calibri"/>
+              </a:rPr>
+              <a:t>[Puce 4 — phrase complète reformulée, à supprimer si non applicable]</a:t>
+            </a:r>
+          </a:p>
+        </p:txBody>
+      </p:sp>
+      <p:sp>
+        <p:nvSpPr>
+          <p:cNvPr id="46" name="Rectangle 45"/>
+          <p:cNvSpPr/>
+          <p:nvPr/>
+        </p:nvSpPr>
+        <p:spPr>
+          <a:xfrm>
+            <a:off x="502920" y="2911872"/>
+            <a:ext cx="8001000" cy="10973"/>
           </a:xfrm>
           <a:prstGeom prst="rect">
             <a:avLst/>
@@ -16874,109 +16948,122 @@
           <a:solidFill>
             <a:srgbClr val="E5E0D8"/>
           </a:solidFill>
-          <a:ln w="12700">
-            <a:solidFill>
-              <a:srgbClr val="E5E0D8"/>
-            </a:solidFill>
-            <a:prstDash val="solid"/>
+          <a:ln>
+            <a:noFill/>
           </a:ln>
-        </p:spPr>
-        <p:txBody>
-          <a:bodyPr/>
-          <a:lstStyle/>
-          <a:p>
-            <a:endParaRPr lang="fr-FR"/>
-          </a:p>
-        </p:txBody>
-      </p:sp>
-      <p:sp>
-        <p:nvSpPr>
-          <p:cNvPr id="21" name="Text 18"/>
-          <p:cNvSpPr/>
-          <p:nvPr/>
-        </p:nvSpPr>
-        <p:spPr>
-          <a:xfrm>
-            <a:off x="502920" y="3346704"/>
-            <a:ext cx="3840480" cy="201168"/>
-          </a:xfrm>
-          <a:prstGeom prst="rect">
-            <a:avLst/>
-          </a:prstGeom>
-          <a:noFill/>
-          <a:ln/>
-        </p:spPr>
-        <p:txBody>
-          <a:bodyPr wrap="square" lIns="0" tIns="0" rIns="0" bIns="0" rtlCol="0" anchor="ctr"/>
-          <a:lstStyle/>
-          <a:p>
-            <a:pPr marL="0" indent="0">
-              <a:buNone/>
-            </a:pPr>
-            <a:r>
-              <a:rPr lang="en-US" sz="750" kern="0" spc="250" dirty="0">
-                <a:solidFill>
-                  <a:srgbClr val="8B1A1A"/>
-                </a:solidFill>
-                <a:latin typeface="Garamond" pitchFamily="34" charset="0"/>
-                <a:ea typeface="Garamond" pitchFamily="34" charset="-122"/>
-                <a:cs typeface="Garamond" pitchFamily="34" charset="-120"/>
-              </a:rPr>
-              <a:t>ENFANTS</a:t>
-            </a:r>
-            <a:endParaRPr lang="en-US" sz="750" dirty="0"/>
-          </a:p>
-        </p:txBody>
-      </p:sp>
-      <p:sp>
-        <p:nvSpPr>
-          <p:cNvPr id="22" name="Text 19"/>
-          <p:cNvSpPr/>
-          <p:nvPr/>
-        </p:nvSpPr>
-        <p:spPr>
-          <a:xfrm>
-            <a:off x="502920" y="3584448"/>
-            <a:ext cx="3840480" cy="347472"/>
-          </a:xfrm>
-          <a:prstGeom prst="rect">
-            <a:avLst/>
-          </a:prstGeom>
-          <a:noFill/>
-          <a:ln/>
-        </p:spPr>
-        <p:txBody>
-          <a:bodyPr wrap="square" lIns="0" tIns="0" rIns="0" bIns="0" rtlCol="0" anchor="t"/>
-          <a:lstStyle/>
-          <a:p>
-            <a:pPr marL="0" indent="0">
-              <a:buNone/>
-            </a:pPr>
-            <a:r>
-              <a:rPr lang="en-US" sz="1150" i="1" dirty="0">
+          <a:effectLst/>
+        </p:spPr>
+        <p:style>
+          <a:lnRef idx="1">
+            <a:schemeClr val="accent1"/>
+          </a:lnRef>
+          <a:fillRef idx="3">
+            <a:schemeClr val="accent1"/>
+          </a:fillRef>
+          <a:effectRef idx="2">
+            <a:schemeClr val="accent1"/>
+          </a:effectRef>
+          <a:fontRef idx="minor">
+            <a:schemeClr val="lt1"/>
+          </a:fontRef>
+        </p:style>
+        <p:txBody>
+          <a:bodyPr rtlCol="0" anchor="ctr"/>
+          <a:lstStyle/>
+          <a:p>
+            <a:pPr algn="ctr"/>
+          </a:p>
+        </p:txBody>
+      </p:sp>
+      <p:sp>
+        <p:nvSpPr>
+          <p:cNvPr id="47" name="Rectangle 46"/>
+          <p:cNvSpPr/>
+          <p:nvPr/>
+        </p:nvSpPr>
+        <p:spPr>
+          <a:xfrm>
+            <a:off x="502920" y="3516736"/>
+            <a:ext cx="22860" cy="430000"/>
+          </a:xfrm>
+          <a:prstGeom prst="rect">
+            <a:avLst/>
+          </a:prstGeom>
+          <a:solidFill>
+            <a:srgbClr val="8B1A1A"/>
+          </a:solidFill>
+          <a:ln>
+            <a:noFill/>
+          </a:ln>
+          <a:effectLst/>
+        </p:spPr>
+        <p:style>
+          <a:lnRef idx="1">
+            <a:schemeClr val="accent1"/>
+          </a:lnRef>
+          <a:fillRef idx="3">
+            <a:schemeClr val="accent1"/>
+          </a:fillRef>
+          <a:effectRef idx="2">
+            <a:schemeClr val="accent1"/>
+          </a:effectRef>
+          <a:fontRef idx="minor">
+            <a:schemeClr val="lt1"/>
+          </a:fontRef>
+        </p:style>
+        <p:txBody>
+          <a:bodyPr rtlCol="0" anchor="ctr"/>
+          <a:lstStyle/>
+          <a:p>
+            <a:pPr algn="ctr"/>
+          </a:p>
+        </p:txBody>
+      </p:sp>
+      <p:sp>
+        <p:nvSpPr>
+          <p:cNvPr id="48" name="TextBox 47"/>
+          <p:cNvSpPr txBox="1"/>
+          <p:nvPr/>
+        </p:nvSpPr>
+        <p:spPr>
+          <a:xfrm>
+            <a:off x="667512" y="3516736"/>
+            <a:ext cx="7863840" cy="430000"/>
+          </a:xfrm>
+          <a:prstGeom prst="rect">
+            <a:avLst/>
+          </a:prstGeom>
+          <a:noFill/>
+        </p:spPr>
+        <p:txBody>
+          <a:bodyPr wrap="square" anchor="t" lIns="0" rIns="0" tIns="0" bIns="0">
+            <a:spAutoFit/>
+          </a:bodyPr>
+          <a:lstStyle/>
+          <a:p>
+            <a:pPr algn="l"/>
+            <a:r>
+              <a:rPr sz="1150">
                 <a:solidFill>
                   <a:srgbClr val="8E5B3F"/>
                 </a:solidFill>
-                <a:latin typeface="Calibri" pitchFamily="34" charset="0"/>
-                <a:ea typeface="Calibri" pitchFamily="34" charset="-122"/>
-                <a:cs typeface="Calibri" pitchFamily="34" charset="-120"/>
-              </a:rPr>
-              <a:t>[X enfants âgés de X, X et X ans]</a:t>
-            </a:r>
-            <a:endParaRPr lang="en-US" sz="1150" dirty="0"/>
-          </a:p>
-        </p:txBody>
-      </p:sp>
-      <p:sp>
-        <p:nvSpPr>
-          <p:cNvPr id="23" name="Shape 20"/>
-          <p:cNvSpPr/>
-          <p:nvPr/>
-        </p:nvSpPr>
-        <p:spPr>
-          <a:xfrm>
-            <a:off x="502920" y="3931920"/>
-            <a:ext cx="3840480" cy="10973"/>
+                <a:latin typeface="Calibri"/>
+              </a:rPr>
+              <a:t>[Puce 5 — phrase complète reformulée, à supprimer si non applicable]</a:t>
+            </a:r>
+          </a:p>
+        </p:txBody>
+      </p:sp>
+      <p:sp>
+        <p:nvSpPr>
+          <p:cNvPr id="49" name="Rectangle 48"/>
+          <p:cNvSpPr/>
+          <p:nvPr/>
+        </p:nvSpPr>
+        <p:spPr>
+          <a:xfrm>
+            <a:off x="502920" y="3461872"/>
+            <a:ext cx="8001000" cy="10973"/>
           </a:xfrm>
           <a:prstGeom prst="rect">
             <a:avLst/>
@@ -16984,465 +17071,153 @@
           <a:solidFill>
             <a:srgbClr val="E5E0D8"/>
           </a:solidFill>
-          <a:ln w="12700">
-            <a:solidFill>
-              <a:srgbClr val="E5E0D8"/>
-            </a:solidFill>
-            <a:prstDash val="solid"/>
+          <a:ln>
+            <a:noFill/>
           </a:ln>
-        </p:spPr>
-        <p:txBody>
-          <a:bodyPr/>
-          <a:lstStyle/>
-          <a:p>
-            <a:endParaRPr lang="fr-FR"/>
-          </a:p>
-        </p:txBody>
-      </p:sp>
-      <p:sp>
-        <p:nvSpPr>
-          <p:cNvPr id="24" name="Text 21"/>
-          <p:cNvSpPr/>
-          <p:nvPr/>
-        </p:nvSpPr>
-        <p:spPr>
-          <a:xfrm>
-            <a:off x="502920" y="4005072"/>
-            <a:ext cx="3840480" cy="201168"/>
-          </a:xfrm>
-          <a:prstGeom prst="rect">
-            <a:avLst/>
-          </a:prstGeom>
-          <a:noFill/>
-          <a:ln/>
-        </p:spPr>
-        <p:txBody>
-          <a:bodyPr wrap="square" lIns="0" tIns="0" rIns="0" bIns="0" rtlCol="0" anchor="ctr"/>
-          <a:lstStyle/>
-          <a:p>
-            <a:pPr marL="0" indent="0">
-              <a:buNone/>
-            </a:pPr>
-            <a:r>
-              <a:rPr lang="en-US" sz="750" kern="0" spc="250" dirty="0">
-                <a:solidFill>
-                  <a:srgbClr val="8B1A1A"/>
-                </a:solidFill>
-                <a:latin typeface="Garamond" pitchFamily="34" charset="0"/>
-                <a:ea typeface="Garamond" pitchFamily="34" charset="-122"/>
-                <a:cs typeface="Garamond" pitchFamily="34" charset="-120"/>
-              </a:rPr>
-              <a:t>RÉSIDENCE PRINCIPALE</a:t>
-            </a:r>
-            <a:endParaRPr lang="en-US" sz="750" dirty="0"/>
-          </a:p>
-        </p:txBody>
-      </p:sp>
-      <p:sp>
-        <p:nvSpPr>
-          <p:cNvPr id="25" name="Text 22"/>
-          <p:cNvSpPr/>
-          <p:nvPr/>
-        </p:nvSpPr>
-        <p:spPr>
-          <a:xfrm>
-            <a:off x="502920" y="4242816"/>
-            <a:ext cx="3840480" cy="347472"/>
-          </a:xfrm>
-          <a:prstGeom prst="rect">
-            <a:avLst/>
-          </a:prstGeom>
-          <a:noFill/>
-          <a:ln/>
-        </p:spPr>
-        <p:txBody>
-          <a:bodyPr wrap="square" lIns="0" tIns="0" rIns="0" bIns="0" rtlCol="0" anchor="t"/>
-          <a:lstStyle/>
-          <a:p>
-            <a:pPr marL="0" indent="0">
-              <a:buNone/>
-            </a:pPr>
-            <a:r>
-              <a:rPr lang="en-US" sz="1150" i="1" dirty="0">
+          <a:effectLst/>
+        </p:spPr>
+        <p:style>
+          <a:lnRef idx="1">
+            <a:schemeClr val="accent1"/>
+          </a:lnRef>
+          <a:fillRef idx="3">
+            <a:schemeClr val="accent1"/>
+          </a:fillRef>
+          <a:effectRef idx="2">
+            <a:schemeClr val="accent1"/>
+          </a:effectRef>
+          <a:fontRef idx="minor">
+            <a:schemeClr val="lt1"/>
+          </a:fontRef>
+        </p:style>
+        <p:txBody>
+          <a:bodyPr rtlCol="0" anchor="ctr"/>
+          <a:lstStyle/>
+          <a:p>
+            <a:pPr algn="ctr"/>
+          </a:p>
+        </p:txBody>
+      </p:sp>
+      <p:sp>
+        <p:nvSpPr>
+          <p:cNvPr id="50" name="Rectangle 49"/>
+          <p:cNvSpPr/>
+          <p:nvPr/>
+        </p:nvSpPr>
+        <p:spPr>
+          <a:xfrm>
+            <a:off x="502920" y="4066736"/>
+            <a:ext cx="22860" cy="430000"/>
+          </a:xfrm>
+          <a:prstGeom prst="rect">
+            <a:avLst/>
+          </a:prstGeom>
+          <a:solidFill>
+            <a:srgbClr val="8B1A1A"/>
+          </a:solidFill>
+          <a:ln>
+            <a:noFill/>
+          </a:ln>
+          <a:effectLst/>
+        </p:spPr>
+        <p:style>
+          <a:lnRef idx="1">
+            <a:schemeClr val="accent1"/>
+          </a:lnRef>
+          <a:fillRef idx="3">
+            <a:schemeClr val="accent1"/>
+          </a:fillRef>
+          <a:effectRef idx="2">
+            <a:schemeClr val="accent1"/>
+          </a:effectRef>
+          <a:fontRef idx="minor">
+            <a:schemeClr val="lt1"/>
+          </a:fontRef>
+        </p:style>
+        <p:txBody>
+          <a:bodyPr rtlCol="0" anchor="ctr"/>
+          <a:lstStyle/>
+          <a:p>
+            <a:pPr algn="ctr"/>
+          </a:p>
+        </p:txBody>
+      </p:sp>
+      <p:sp>
+        <p:nvSpPr>
+          <p:cNvPr id="51" name="TextBox 50"/>
+          <p:cNvSpPr txBox="1"/>
+          <p:nvPr/>
+        </p:nvSpPr>
+        <p:spPr>
+          <a:xfrm>
+            <a:off x="667512" y="4066736"/>
+            <a:ext cx="7863840" cy="430000"/>
+          </a:xfrm>
+          <a:prstGeom prst="rect">
+            <a:avLst/>
+          </a:prstGeom>
+          <a:noFill/>
+        </p:spPr>
+        <p:txBody>
+          <a:bodyPr wrap="square" anchor="t" lIns="0" rIns="0" tIns="0" bIns="0">
+            <a:spAutoFit/>
+          </a:bodyPr>
+          <a:lstStyle/>
+          <a:p>
+            <a:pPr algn="l"/>
+            <a:r>
+              <a:rPr sz="1150">
                 <a:solidFill>
                   <a:srgbClr val="8E5B3F"/>
                 </a:solidFill>
-                <a:latin typeface="Calibri" pitchFamily="34" charset="0"/>
-                <a:ea typeface="Calibri" pitchFamily="34" charset="-122"/>
-                <a:cs typeface="Calibri" pitchFamily="34" charset="-120"/>
-              </a:rPr>
-              <a:t>[Propriétaire / Locataire] à [Ville]</a:t>
-            </a:r>
-            <a:endParaRPr lang="en-US" sz="1150" dirty="0"/>
-          </a:p>
-        </p:txBody>
-      </p:sp>
-      <p:sp>
-        <p:nvSpPr>
-          <p:cNvPr id="26" name="Shape 23"/>
-          <p:cNvSpPr/>
-          <p:nvPr/>
-        </p:nvSpPr>
-        <p:spPr>
-          <a:xfrm>
-            <a:off x="4572000" y="594360"/>
-            <a:ext cx="10973" cy="4297680"/>
-          </a:xfrm>
-          <a:prstGeom prst="rect">
-            <a:avLst/>
-          </a:prstGeom>
-          <a:solidFill>
-            <a:srgbClr val="CFC8BD"/>
-          </a:solidFill>
-          <a:ln w="12700">
-            <a:solidFill>
-              <a:srgbClr val="CFC8BD"/>
-            </a:solidFill>
-            <a:prstDash val="solid"/>
+                <a:latin typeface="Calibri"/>
+              </a:rPr>
+              <a:t>[Puce 6 — phrase complète reformulée, à supprimer si non applicable]</a:t>
+            </a:r>
+          </a:p>
+        </p:txBody>
+      </p:sp>
+      <p:sp>
+        <p:nvSpPr>
+          <p:cNvPr id="52" name="Rectangle 51"/>
+          <p:cNvSpPr/>
+          <p:nvPr/>
+        </p:nvSpPr>
+        <p:spPr>
+          <a:xfrm>
+            <a:off x="502920" y="4011872"/>
+            <a:ext cx="8001000" cy="10973"/>
+          </a:xfrm>
+          <a:prstGeom prst="rect">
+            <a:avLst/>
+          </a:prstGeom>
+          <a:solidFill>
+            <a:srgbClr val="E5E0D8"/>
+          </a:solidFill>
+          <a:ln>
+            <a:noFill/>
           </a:ln>
-        </p:spPr>
-        <p:txBody>
-          <a:bodyPr/>
-          <a:lstStyle/>
-          <a:p>
-            <a:endParaRPr lang="fr-FR"/>
-          </a:p>
-        </p:txBody>
-      </p:sp>
-      <p:sp>
-        <p:nvSpPr>
-          <p:cNvPr id="27" name="Text 24"/>
-          <p:cNvSpPr/>
-          <p:nvPr/>
-        </p:nvSpPr>
-        <p:spPr>
-          <a:xfrm>
-            <a:off x="4709160" y="1371600"/>
-            <a:ext cx="3840480" cy="201168"/>
-          </a:xfrm>
-          <a:prstGeom prst="rect">
-            <a:avLst/>
-          </a:prstGeom>
-          <a:noFill/>
-          <a:ln/>
-        </p:spPr>
-        <p:txBody>
-          <a:bodyPr wrap="square" lIns="0" tIns="0" rIns="0" bIns="0" rtlCol="0" anchor="ctr"/>
-          <a:lstStyle/>
-          <a:p>
-            <a:pPr marL="0" indent="0">
-              <a:buNone/>
-            </a:pPr>
-            <a:r>
-              <a:rPr lang="en-US" sz="750" kern="0" spc="250" dirty="0">
-                <a:solidFill>
-                  <a:srgbClr val="8B1A1A"/>
-                </a:solidFill>
-                <a:latin typeface="Garamond" pitchFamily="34" charset="0"/>
-                <a:ea typeface="Garamond" pitchFamily="34" charset="-122"/>
-                <a:cs typeface="Garamond" pitchFamily="34" charset="-120"/>
-              </a:rPr>
-              <a:t>REVENU ANNUEL NET DÉCLARÉ</a:t>
-            </a:r>
-            <a:endParaRPr lang="en-US" sz="750" dirty="0"/>
-          </a:p>
-        </p:txBody>
-      </p:sp>
-      <p:sp>
-        <p:nvSpPr>
-          <p:cNvPr id="28" name="Text 25"/>
-          <p:cNvSpPr/>
-          <p:nvPr/>
-        </p:nvSpPr>
-        <p:spPr>
-          <a:xfrm>
-            <a:off x="4709160" y="1609344"/>
-            <a:ext cx="3840480" cy="347472"/>
-          </a:xfrm>
-          <a:prstGeom prst="rect">
-            <a:avLst/>
-          </a:prstGeom>
-          <a:noFill/>
-          <a:ln/>
-        </p:spPr>
-        <p:txBody>
-          <a:bodyPr wrap="square" lIns="0" tIns="0" rIns="0" bIns="0" rtlCol="0" anchor="t"/>
-          <a:lstStyle/>
-          <a:p>
-            <a:pPr marL="0" indent="0">
-              <a:buNone/>
-            </a:pPr>
-            <a:r>
-              <a:rPr lang="en-US" sz="1150" i="1" dirty="0">
-                <a:solidFill>
-                  <a:srgbClr val="8E5B3F"/>
-                </a:solidFill>
-                <a:latin typeface="Calibri" pitchFamily="34" charset="0"/>
-                <a:ea typeface="Calibri" pitchFamily="34" charset="-122"/>
-                <a:cs typeface="Calibri" pitchFamily="34" charset="-120"/>
-              </a:rPr>
-              <a:t>[X €] en [ANNÉE]</a:t>
-            </a:r>
-            <a:endParaRPr lang="en-US" sz="1150" dirty="0"/>
-          </a:p>
-        </p:txBody>
-      </p:sp>
-      <p:sp>
-        <p:nvSpPr>
-          <p:cNvPr id="29" name="Shape 26"/>
-          <p:cNvSpPr/>
-          <p:nvPr/>
-        </p:nvSpPr>
-        <p:spPr>
-          <a:xfrm>
-            <a:off x="4709160" y="1956816"/>
-            <a:ext cx="3840480" cy="10973"/>
-          </a:xfrm>
-          <a:prstGeom prst="rect">
-            <a:avLst/>
-          </a:prstGeom>
-          <a:solidFill>
-            <a:srgbClr val="E5E0D8"/>
-          </a:solidFill>
-          <a:ln w="12700">
-            <a:solidFill>
-              <a:srgbClr val="E5E0D8"/>
-            </a:solidFill>
-            <a:prstDash val="solid"/>
-          </a:ln>
-        </p:spPr>
-        <p:txBody>
-          <a:bodyPr/>
-          <a:lstStyle/>
-          <a:p>
-            <a:endParaRPr lang="fr-FR"/>
-          </a:p>
-        </p:txBody>
-      </p:sp>
-      <p:sp>
-        <p:nvSpPr>
-          <p:cNvPr id="30" name="Text 27"/>
-          <p:cNvSpPr/>
-          <p:nvPr/>
-        </p:nvSpPr>
-        <p:spPr>
-          <a:xfrm>
-            <a:off x="4709160" y="2029968"/>
-            <a:ext cx="3840480" cy="201168"/>
-          </a:xfrm>
-          <a:prstGeom prst="rect">
-            <a:avLst/>
-          </a:prstGeom>
-          <a:noFill/>
-          <a:ln/>
-        </p:spPr>
-        <p:txBody>
-          <a:bodyPr wrap="square" lIns="0" tIns="0" rIns="0" bIns="0" rtlCol="0" anchor="ctr"/>
-          <a:lstStyle/>
-          <a:p>
-            <a:pPr marL="0" indent="0">
-              <a:buNone/>
-            </a:pPr>
-            <a:r>
-              <a:rPr lang="en-US" sz="750" kern="0" spc="250" dirty="0">
-                <a:solidFill>
-                  <a:srgbClr val="8B1A1A"/>
-                </a:solidFill>
-                <a:latin typeface="Garamond" pitchFamily="34" charset="0"/>
-                <a:ea typeface="Garamond" pitchFamily="34" charset="-122"/>
-                <a:cs typeface="Garamond" pitchFamily="34" charset="-120"/>
-              </a:rPr>
-              <a:t>ÉPARGNE MENSUELLE CAPACITÉ</a:t>
-            </a:r>
-            <a:endParaRPr lang="en-US" sz="750" dirty="0"/>
-          </a:p>
-        </p:txBody>
-      </p:sp>
-      <p:sp>
-        <p:nvSpPr>
-          <p:cNvPr id="31" name="Text 28"/>
-          <p:cNvSpPr/>
-          <p:nvPr/>
-        </p:nvSpPr>
-        <p:spPr>
-          <a:xfrm>
-            <a:off x="4709160" y="2267712"/>
-            <a:ext cx="3840480" cy="347472"/>
-          </a:xfrm>
-          <a:prstGeom prst="rect">
-            <a:avLst/>
-          </a:prstGeom>
-          <a:noFill/>
-          <a:ln/>
-        </p:spPr>
-        <p:txBody>
-          <a:bodyPr wrap="square" lIns="0" tIns="0" rIns="0" bIns="0" rtlCol="0" anchor="t"/>
-          <a:lstStyle/>
-          <a:p>
-            <a:pPr marL="0" indent="0">
-              <a:buNone/>
-            </a:pPr>
-            <a:r>
-              <a:rPr lang="en-US" sz="1150" i="1" dirty="0">
-                <a:solidFill>
-                  <a:srgbClr val="8E5B3F"/>
-                </a:solidFill>
-                <a:latin typeface="Calibri" pitchFamily="34" charset="0"/>
-                <a:ea typeface="Calibri" pitchFamily="34" charset="-122"/>
-                <a:cs typeface="Calibri" pitchFamily="34" charset="-120"/>
-              </a:rPr>
-              <a:t>[X €]/mois</a:t>
-            </a:r>
-            <a:endParaRPr lang="en-US" sz="1150" dirty="0"/>
-          </a:p>
-        </p:txBody>
-      </p:sp>
-      <p:sp>
-        <p:nvSpPr>
-          <p:cNvPr id="32" name="Shape 29"/>
-          <p:cNvSpPr/>
-          <p:nvPr/>
-        </p:nvSpPr>
-        <p:spPr>
-          <a:xfrm>
-            <a:off x="4709160" y="2615184"/>
-            <a:ext cx="3840480" cy="10973"/>
-          </a:xfrm>
-          <a:prstGeom prst="rect">
-            <a:avLst/>
-          </a:prstGeom>
-          <a:solidFill>
-            <a:srgbClr val="E5E0D8"/>
-          </a:solidFill>
-          <a:ln w="12700">
-            <a:solidFill>
-              <a:srgbClr val="E5E0D8"/>
-            </a:solidFill>
-            <a:prstDash val="solid"/>
-          </a:ln>
-        </p:spPr>
-        <p:txBody>
-          <a:bodyPr/>
-          <a:lstStyle/>
-          <a:p>
-            <a:endParaRPr lang="fr-FR"/>
-          </a:p>
-        </p:txBody>
-      </p:sp>
-      <p:sp>
-        <p:nvSpPr>
-          <p:cNvPr id="33" name="Text 30"/>
-          <p:cNvSpPr/>
-          <p:nvPr/>
-        </p:nvSpPr>
-        <p:spPr>
-          <a:xfrm>
-            <a:off x="4709160" y="2688336"/>
-            <a:ext cx="3840480" cy="201168"/>
-          </a:xfrm>
-          <a:prstGeom prst="rect">
-            <a:avLst/>
-          </a:prstGeom>
-          <a:noFill/>
-          <a:ln/>
-        </p:spPr>
-        <p:txBody>
-          <a:bodyPr wrap="square" lIns="0" tIns="0" rIns="0" bIns="0" rtlCol="0" anchor="ctr"/>
-          <a:lstStyle/>
-          <a:p>
-            <a:pPr marL="0" indent="0">
-              <a:buNone/>
-            </a:pPr>
-            <a:r>
-              <a:rPr lang="en-US" sz="750" kern="0" spc="250" dirty="0">
-                <a:solidFill>
-                  <a:srgbClr val="8B1A1A"/>
-                </a:solidFill>
-                <a:latin typeface="Garamond" pitchFamily="34" charset="0"/>
-                <a:ea typeface="Garamond" pitchFamily="34" charset="-122"/>
-                <a:cs typeface="Garamond" pitchFamily="34" charset="-120"/>
-              </a:rPr>
-              <a:t>SITUATION PARTICULIÈRE</a:t>
-            </a:r>
-            <a:endParaRPr lang="en-US" sz="750" dirty="0"/>
-          </a:p>
-        </p:txBody>
-      </p:sp>
-      <p:sp>
-        <p:nvSpPr>
-          <p:cNvPr id="34" name="Text 31"/>
-          <p:cNvSpPr/>
-          <p:nvPr/>
-        </p:nvSpPr>
-        <p:spPr>
-          <a:xfrm>
-            <a:off x="4709160" y="2926080"/>
-            <a:ext cx="3840480" cy="347472"/>
-          </a:xfrm>
-          <a:prstGeom prst="rect">
-            <a:avLst/>
-          </a:prstGeom>
-          <a:noFill/>
-          <a:ln/>
-        </p:spPr>
-        <p:txBody>
-          <a:bodyPr wrap="square" lIns="0" tIns="0" rIns="0" bIns="0" rtlCol="0" anchor="t"/>
-          <a:lstStyle/>
-          <a:p>
-            <a:pPr marL="0" indent="0">
-              <a:buNone/>
-            </a:pPr>
-            <a:r>
-              <a:rPr lang="en-US" sz="1150" i="1" dirty="0">
-                <a:solidFill>
-                  <a:srgbClr val="8E5B3F"/>
-                </a:solidFill>
-                <a:latin typeface="Calibri" pitchFamily="34" charset="0"/>
-                <a:ea typeface="Calibri" pitchFamily="34" charset="-122"/>
-                <a:cs typeface="Calibri" pitchFamily="34" charset="-120"/>
-              </a:rPr>
-              <a:t>[AGA, BSPCE, stock-options, gérance, etc.]</a:t>
-            </a:r>
-            <a:endParaRPr lang="en-US" sz="1150" dirty="0"/>
-          </a:p>
-        </p:txBody>
-      </p:sp>
-      <p:sp>
-        <p:nvSpPr>
-          <p:cNvPr id="35" name="Text 32"/>
-          <p:cNvSpPr/>
-          <p:nvPr/>
-        </p:nvSpPr>
-        <p:spPr>
-          <a:xfrm>
-            <a:off x="2560320" y="5001768"/>
-            <a:ext cx="6080760" cy="118872"/>
-          </a:xfrm>
-          <a:prstGeom prst="rect">
-            <a:avLst/>
-          </a:prstGeom>
-          <a:noFill/>
-          <a:ln/>
-        </p:spPr>
-        <p:txBody>
-          <a:bodyPr wrap="square" lIns="0" tIns="0" rIns="0" bIns="0" rtlCol="0" anchor="ctr"/>
-          <a:lstStyle/>
-          <a:p>
-            <a:pPr marL="0" indent="0" algn="ctr">
-              <a:buNone/>
-            </a:pPr>
-            <a:r>
-              <a:rPr lang="en-US" sz="680" i="1" dirty="0">
-                <a:solidFill>
-                  <a:srgbClr val="A09080"/>
-                </a:solidFill>
-                <a:latin typeface="Calibri" pitchFamily="34" charset="0"/>
-                <a:ea typeface="Calibri" pitchFamily="34" charset="-122"/>
-                <a:cs typeface="Calibri" pitchFamily="34" charset="-120"/>
-              </a:rPr>
-              <a:t>Affilior Gestion Privée  ·  Confidentiel  ·  [MOIS ANNÉE]  ·  Ce document ne constitue pas un conseil en investissement au sens MIF2</a:t>
-            </a:r>
-            <a:endParaRPr lang="en-US" sz="680" dirty="0"/>
+          <a:effectLst/>
+        </p:spPr>
+        <p:style>
+          <a:lnRef idx="1">
+            <a:schemeClr val="accent1"/>
+          </a:lnRef>
+          <a:fillRef idx="3">
+            <a:schemeClr val="accent1"/>
+          </a:fillRef>
+          <a:effectRef idx="2">
+            <a:schemeClr val="accent1"/>
+          </a:effectRef>
+          <a:fontRef idx="minor">
+            <a:schemeClr val="lt1"/>
+          </a:fontRef>
+        </p:style>
+        <p:txBody>
+          <a:bodyPr rtlCol="0" anchor="ctr"/>
+          <a:lstStyle/>
+          <a:p>
+            <a:pPr algn="ctr"/>
           </a:p>
         </p:txBody>
       </p:sp>

--- a/Cans_Mstr.pptx
+++ b/Cans_Mstr.pptx
@@ -6262,7 +6262,7 @@
       </p:sp>
       <p:sp>
         <p:nvSpPr>
-          <p:cNvPr id="407" name="MetaRule"/>
+          <p:cNvPr id="450" name="MetaRule"/>
           <p:cNvSpPr/>
           <p:nvPr/>
         </p:nvSpPr>
@@ -6629,7 +6629,7 @@
       </p:sp>
       <p:sp>
         <p:nvSpPr>
-          <p:cNvPr id="427" name="MetaRule"/>
+          <p:cNvPr id="451" name="MetaRule"/>
           <p:cNvSpPr/>
           <p:nvPr/>
         </p:nvSpPr>
@@ -6996,7 +6996,7 @@
       </p:sp>
       <p:sp>
         <p:nvSpPr>
-          <p:cNvPr id="447" name="MetaRule"/>
+          <p:cNvPr id="452" name="MetaRule"/>
           <p:cNvSpPr/>
           <p:nvPr/>
         </p:nvSpPr>

--- a/Cans_Mstr.pptx
+++ b/Cans_Mstr.pptx
@@ -5,7 +5,7 @@
     <p:sldMasterId id="2147483648" r:id="rId4"/>
   </p:sldMasterIdLst>
   <p:notesMasterIdLst>
-    <p:notesMasterId r:id="rId24"/>
+    <p:notesMasterId r:id="rId22"/>
   </p:notesMasterIdLst>
   <p:sldIdLst>
     <p:sldId id="256" r:id="rId5"/>
@@ -17,14 +17,14 @@
     <p:sldId id="262" r:id="rId11"/>
     <p:sldId id="263" r:id="rId12"/>
     <p:sldId id="264" r:id="rId13"/>
-    <p:sldId id="266" r:id="rId15"/>
-    <p:sldId id="267" r:id="rId16"/>
-    <p:sldId id="268" r:id="rId17"/>
-    <p:sldId id="270" r:id="rId19"/>
-    <p:sldId id="271" r:id="rId20"/>
-    <p:sldId id="272" r:id="rId21"/>
-    <p:sldId id="273" r:id="rId22"/>
-    <p:sldId id="274" r:id="rId23"/>
+    <p:sldId id="266" r:id="rId14"/>
+    <p:sldId id="267" r:id="rId15"/>
+    <p:sldId id="268" r:id="rId16"/>
+    <p:sldId id="270" r:id="rId17"/>
+    <p:sldId id="271" r:id="rId18"/>
+    <p:sldId id="272" r:id="rId19"/>
+    <p:sldId id="273" r:id="rId20"/>
+    <p:sldId id="274" r:id="rId21"/>
   </p:sldIdLst>
   <p:sldSz cx="9144000" cy="5143500" type="screen16x9"/>
   <p:notesSz cx="5143500" cy="9144000"/>
@@ -923,6 +923,90 @@
 </p:notes>
 </file>
 
+<file path=ppt/notesSlides/notesSlide10.xml><?xml version="1.0" encoding="utf-8"?>
+<p:notes xmlns:a="http://schemas.openxmlformats.org/drawingml/2006/main" xmlns:r="http://schemas.openxmlformats.org/officeDocument/2006/relationships" xmlns:p="http://schemas.openxmlformats.org/presentationml/2006/main">
+  <p:cSld>
+    <p:spTree>
+      <p:nvGrpSpPr>
+        <p:cNvPr id="1" name=""/>
+        <p:cNvGrpSpPr/>
+        <p:nvPr/>
+      </p:nvGrpSpPr>
+      <p:grpSpPr>
+        <a:xfrm>
+          <a:off x="0" y="0"/>
+          <a:ext cx="0" cy="0"/>
+          <a:chOff x="0" y="0"/>
+          <a:chExt cx="0" cy="0"/>
+        </a:xfrm>
+      </p:grpSpPr>
+      <p:sp>
+        <p:nvSpPr>
+          <p:cNvPr id="2" name="Slide Image Placeholder 1"/>
+          <p:cNvSpPr>
+            <a:spLocks noGrp="1" noRot="1" noChangeAspect="1"/>
+          </p:cNvSpPr>
+          <p:nvPr>
+            <p:ph type="sldImg"/>
+          </p:nvPr>
+        </p:nvSpPr>
+        <p:spPr/>
+      </p:sp>
+      <p:sp>
+        <p:nvSpPr>
+          <p:cNvPr id="3" name="Notes Placeholder 2"/>
+          <p:cNvSpPr>
+            <a:spLocks noGrp="1"/>
+          </p:cNvSpPr>
+          <p:nvPr>
+            <p:ph type="body" idx="1"/>
+          </p:nvPr>
+        </p:nvSpPr>
+        <p:spPr/>
+        <p:txBody>
+          <a:bodyPr/>
+          <a:lstStyle/>
+          <a:p>
+            <a:endParaRPr lang="en-US" dirty="0"/>
+          </a:p>
+        </p:txBody>
+      </p:sp>
+      <p:sp>
+        <p:nvSpPr>
+          <p:cNvPr id="4" name="Slide Number Placeholder 3"/>
+          <p:cNvSpPr>
+            <a:spLocks noGrp="1"/>
+          </p:cNvSpPr>
+          <p:nvPr>
+            <p:ph type="sldNum" sz="quarter" idx="10"/>
+          </p:nvPr>
+        </p:nvSpPr>
+        <p:spPr/>
+        <p:txBody>
+          <a:bodyPr/>
+          <a:lstStyle/>
+          <a:p>
+            <a:fld id="{F7021451-1387-4CA6-816F-3879F97B5CBC}" type="slidenum">
+              <a:rPr lang="en-US"/>
+              <a:t>10</a:t>
+            </a:fld>
+            <a:endParaRPr lang="en-US"/>
+          </a:p>
+        </p:txBody>
+      </p:sp>
+    </p:spTree>
+    <p:extLst>
+      <p:ext uri="{BB962C8B-B14F-4D97-AF65-F5344CB8AC3E}">
+        <p14:creationId xmlns:p14="http://schemas.microsoft.com/office/powerpoint/2010/main" val="1024086991"/>
+      </p:ext>
+    </p:extLst>
+  </p:cSld>
+  <p:clrMapOvr>
+    <a:masterClrMapping/>
+  </p:clrMapOvr>
+</p:notes>
+</file>
+
 <file path=ppt/notesSlides/notesSlide11.xml><?xml version="1.0" encoding="utf-8"?>
 <p:notes xmlns:a="http://schemas.openxmlformats.org/drawingml/2006/main" xmlns:r="http://schemas.openxmlformats.org/officeDocument/2006/relationships" xmlns:p="http://schemas.openxmlformats.org/presentationml/2006/main">
   <p:cSld>
@@ -1175,6 +1259,90 @@
 </p:notes>
 </file>
 
+<file path=ppt/notesSlides/notesSlide14.xml><?xml version="1.0" encoding="utf-8"?>
+<p:notes xmlns:a="http://schemas.openxmlformats.org/drawingml/2006/main" xmlns:r="http://schemas.openxmlformats.org/officeDocument/2006/relationships" xmlns:p="http://schemas.openxmlformats.org/presentationml/2006/main">
+  <p:cSld>
+    <p:spTree>
+      <p:nvGrpSpPr>
+        <p:cNvPr id="1" name=""/>
+        <p:cNvGrpSpPr/>
+        <p:nvPr/>
+      </p:nvGrpSpPr>
+      <p:grpSpPr>
+        <a:xfrm>
+          <a:off x="0" y="0"/>
+          <a:ext cx="0" cy="0"/>
+          <a:chOff x="0" y="0"/>
+          <a:chExt cx="0" cy="0"/>
+        </a:xfrm>
+      </p:grpSpPr>
+      <p:sp>
+        <p:nvSpPr>
+          <p:cNvPr id="2" name="Slide Image Placeholder 1"/>
+          <p:cNvSpPr>
+            <a:spLocks noGrp="1" noRot="1" noChangeAspect="1"/>
+          </p:cNvSpPr>
+          <p:nvPr>
+            <p:ph type="sldImg"/>
+          </p:nvPr>
+        </p:nvSpPr>
+        <p:spPr/>
+      </p:sp>
+      <p:sp>
+        <p:nvSpPr>
+          <p:cNvPr id="3" name="Notes Placeholder 2"/>
+          <p:cNvSpPr>
+            <a:spLocks noGrp="1"/>
+          </p:cNvSpPr>
+          <p:nvPr>
+            <p:ph type="body" idx="1"/>
+          </p:nvPr>
+        </p:nvSpPr>
+        <p:spPr/>
+        <p:txBody>
+          <a:bodyPr/>
+          <a:lstStyle/>
+          <a:p>
+            <a:endParaRPr lang="en-US" dirty="0"/>
+          </a:p>
+        </p:txBody>
+      </p:sp>
+      <p:sp>
+        <p:nvSpPr>
+          <p:cNvPr id="4" name="Slide Number Placeholder 3"/>
+          <p:cNvSpPr>
+            <a:spLocks noGrp="1"/>
+          </p:cNvSpPr>
+          <p:nvPr>
+            <p:ph type="sldNum" sz="quarter" idx="10"/>
+          </p:nvPr>
+        </p:nvSpPr>
+        <p:spPr/>
+        <p:txBody>
+          <a:bodyPr/>
+          <a:lstStyle/>
+          <a:p>
+            <a:fld id="{F7021451-1387-4CA6-816F-3879F97B5CBC}" type="slidenum">
+              <a:rPr lang="en-US"/>
+              <a:t>14</a:t>
+            </a:fld>
+            <a:endParaRPr lang="en-US"/>
+          </a:p>
+        </p:txBody>
+      </p:sp>
+    </p:spTree>
+    <p:extLst>
+      <p:ext uri="{BB962C8B-B14F-4D97-AF65-F5344CB8AC3E}">
+        <p14:creationId xmlns:p14="http://schemas.microsoft.com/office/powerpoint/2010/main" val="1024086991"/>
+      </p:ext>
+    </p:extLst>
+  </p:cSld>
+  <p:clrMapOvr>
+    <a:masterClrMapping/>
+  </p:clrMapOvr>
+</p:notes>
+</file>
+
 <file path=ppt/notesSlides/notesSlide15.xml><?xml version="1.0" encoding="utf-8"?>
 <p:notes xmlns:a="http://schemas.openxmlformats.org/drawingml/2006/main" xmlns:r="http://schemas.openxmlformats.org/officeDocument/2006/relationships" xmlns:p="http://schemas.openxmlformats.org/presentationml/2006/main">
   <p:cSld>
@@ -1409,174 +1577,6 @@
             <a:fld id="{F7021451-1387-4CA6-816F-3879F97B5CBC}" type="slidenum">
               <a:rPr lang="en-US"/>
               <a:t>17</a:t>
-            </a:fld>
-            <a:endParaRPr lang="en-US"/>
-          </a:p>
-        </p:txBody>
-      </p:sp>
-    </p:spTree>
-    <p:extLst>
-      <p:ext uri="{BB962C8B-B14F-4D97-AF65-F5344CB8AC3E}">
-        <p14:creationId xmlns:p14="http://schemas.microsoft.com/office/powerpoint/2010/main" val="1024086991"/>
-      </p:ext>
-    </p:extLst>
-  </p:cSld>
-  <p:clrMapOvr>
-    <a:masterClrMapping/>
-  </p:clrMapOvr>
-</p:notes>
-</file>
-
-<file path=ppt/notesSlides/notesSlide18.xml><?xml version="1.0" encoding="utf-8"?>
-<p:notes xmlns:a="http://schemas.openxmlformats.org/drawingml/2006/main" xmlns:r="http://schemas.openxmlformats.org/officeDocument/2006/relationships" xmlns:p="http://schemas.openxmlformats.org/presentationml/2006/main">
-  <p:cSld>
-    <p:spTree>
-      <p:nvGrpSpPr>
-        <p:cNvPr id="1" name=""/>
-        <p:cNvGrpSpPr/>
-        <p:nvPr/>
-      </p:nvGrpSpPr>
-      <p:grpSpPr>
-        <a:xfrm>
-          <a:off x="0" y="0"/>
-          <a:ext cx="0" cy="0"/>
-          <a:chOff x="0" y="0"/>
-          <a:chExt cx="0" cy="0"/>
-        </a:xfrm>
-      </p:grpSpPr>
-      <p:sp>
-        <p:nvSpPr>
-          <p:cNvPr id="2" name="Slide Image Placeholder 1"/>
-          <p:cNvSpPr>
-            <a:spLocks noGrp="1" noRot="1" noChangeAspect="1"/>
-          </p:cNvSpPr>
-          <p:nvPr>
-            <p:ph type="sldImg"/>
-          </p:nvPr>
-        </p:nvSpPr>
-        <p:spPr/>
-      </p:sp>
-      <p:sp>
-        <p:nvSpPr>
-          <p:cNvPr id="3" name="Notes Placeholder 2"/>
-          <p:cNvSpPr>
-            <a:spLocks noGrp="1"/>
-          </p:cNvSpPr>
-          <p:nvPr>
-            <p:ph type="body" idx="1"/>
-          </p:nvPr>
-        </p:nvSpPr>
-        <p:spPr/>
-        <p:txBody>
-          <a:bodyPr/>
-          <a:lstStyle/>
-          <a:p>
-            <a:endParaRPr lang="en-US" dirty="0"/>
-          </a:p>
-        </p:txBody>
-      </p:sp>
-      <p:sp>
-        <p:nvSpPr>
-          <p:cNvPr id="4" name="Slide Number Placeholder 3"/>
-          <p:cNvSpPr>
-            <a:spLocks noGrp="1"/>
-          </p:cNvSpPr>
-          <p:nvPr>
-            <p:ph type="sldNum" sz="quarter" idx="10"/>
-          </p:nvPr>
-        </p:nvSpPr>
-        <p:spPr/>
-        <p:txBody>
-          <a:bodyPr/>
-          <a:lstStyle/>
-          <a:p>
-            <a:fld id="{F7021451-1387-4CA6-816F-3879F97B5CBC}" type="slidenum">
-              <a:rPr lang="en-US"/>
-              <a:t>18</a:t>
-            </a:fld>
-            <a:endParaRPr lang="en-US"/>
-          </a:p>
-        </p:txBody>
-      </p:sp>
-    </p:spTree>
-    <p:extLst>
-      <p:ext uri="{BB962C8B-B14F-4D97-AF65-F5344CB8AC3E}">
-        <p14:creationId xmlns:p14="http://schemas.microsoft.com/office/powerpoint/2010/main" val="1024086991"/>
-      </p:ext>
-    </p:extLst>
-  </p:cSld>
-  <p:clrMapOvr>
-    <a:masterClrMapping/>
-  </p:clrMapOvr>
-</p:notes>
-</file>
-
-<file path=ppt/notesSlides/notesSlide19.xml><?xml version="1.0" encoding="utf-8"?>
-<p:notes xmlns:a="http://schemas.openxmlformats.org/drawingml/2006/main" xmlns:r="http://schemas.openxmlformats.org/officeDocument/2006/relationships" xmlns:p="http://schemas.openxmlformats.org/presentationml/2006/main">
-  <p:cSld>
-    <p:spTree>
-      <p:nvGrpSpPr>
-        <p:cNvPr id="1" name=""/>
-        <p:cNvGrpSpPr/>
-        <p:nvPr/>
-      </p:nvGrpSpPr>
-      <p:grpSpPr>
-        <a:xfrm>
-          <a:off x="0" y="0"/>
-          <a:ext cx="0" cy="0"/>
-          <a:chOff x="0" y="0"/>
-          <a:chExt cx="0" cy="0"/>
-        </a:xfrm>
-      </p:grpSpPr>
-      <p:sp>
-        <p:nvSpPr>
-          <p:cNvPr id="2" name="Slide Image Placeholder 1"/>
-          <p:cNvSpPr>
-            <a:spLocks noGrp="1" noRot="1" noChangeAspect="1"/>
-          </p:cNvSpPr>
-          <p:nvPr>
-            <p:ph type="sldImg"/>
-          </p:nvPr>
-        </p:nvSpPr>
-        <p:spPr/>
-      </p:sp>
-      <p:sp>
-        <p:nvSpPr>
-          <p:cNvPr id="3" name="Notes Placeholder 2"/>
-          <p:cNvSpPr>
-            <a:spLocks noGrp="1"/>
-          </p:cNvSpPr>
-          <p:nvPr>
-            <p:ph type="body" idx="1"/>
-          </p:nvPr>
-        </p:nvSpPr>
-        <p:spPr/>
-        <p:txBody>
-          <a:bodyPr/>
-          <a:lstStyle/>
-          <a:p>
-            <a:endParaRPr lang="en-US" dirty="0"/>
-          </a:p>
-        </p:txBody>
-      </p:sp>
-      <p:sp>
-        <p:nvSpPr>
-          <p:cNvPr id="4" name="Slide Number Placeholder 3"/>
-          <p:cNvSpPr>
-            <a:spLocks noGrp="1"/>
-          </p:cNvSpPr>
-          <p:nvPr>
-            <p:ph type="sldNum" sz="quarter" idx="10"/>
-          </p:nvPr>
-        </p:nvSpPr>
-        <p:spPr/>
-        <p:txBody>
-          <a:bodyPr/>
-          <a:lstStyle/>
-          <a:p>
-            <a:fld id="{F7021451-1387-4CA6-816F-3879F97B5CBC}" type="slidenum">
-              <a:rPr lang="en-US"/>
-              <a:t>19</a:t>
             </a:fld>
             <a:endParaRPr lang="en-US"/>
           </a:p>
@@ -3819,7 +3819,7 @@
           <a:noFill/>
         </p:spPr>
         <p:txBody>
-          <a:bodyPr wrap="square" anchor="t" lIns="0" rIns="0" tIns="0" bIns="0">
+          <a:bodyPr wrap="square" lIns="0" tIns="0" rIns="0" bIns="0" anchor="t">
             <a:spAutoFit/>
           </a:bodyPr>
           <a:lstStyle/>
@@ -3854,7 +3854,7 @@
           <a:noFill/>
         </p:spPr>
         <p:txBody>
-          <a:bodyPr wrap="square" anchor="t" lIns="0" rIns="0" tIns="0" bIns="0">
+          <a:bodyPr wrap="square" lIns="0" tIns="0" rIns="0" bIns="0" anchor="t">
             <a:spAutoFit/>
           </a:bodyPr>
           <a:lstStyle/>
@@ -3913,6 +3913,7 @@
           <a:lstStyle/>
           <a:p>
             <a:pPr algn="ctr"/>
+            <a:endParaRPr/>
           </a:p>
         </p:txBody>
       </p:sp>
@@ -3933,7 +3934,7 @@
           <a:noFill/>
         </p:spPr>
         <p:txBody>
-          <a:bodyPr wrap="square" anchor="t" lIns="0" rIns="0" tIns="0" bIns="0">
+          <a:bodyPr wrap="square" lIns="0" tIns="0" rIns="0" bIns="0" anchor="t">
             <a:spAutoFit/>
           </a:bodyPr>
           <a:lstStyle/>
@@ -3968,7 +3969,7 @@
           <a:noFill/>
         </p:spPr>
         <p:txBody>
-          <a:bodyPr wrap="square" anchor="t" lIns="0" rIns="0" tIns="0" bIns="0">
+          <a:bodyPr wrap="square" lIns="0" tIns="0" rIns="0" bIns="0" anchor="t">
             <a:spAutoFit/>
           </a:bodyPr>
           <a:lstStyle/>
@@ -4027,6 +4028,7 @@
           <a:lstStyle/>
           <a:p>
             <a:pPr algn="ctr"/>
+            <a:endParaRPr/>
           </a:p>
         </p:txBody>
       </p:sp>
@@ -4047,7 +4049,7 @@
           <a:noFill/>
         </p:spPr>
         <p:txBody>
-          <a:bodyPr wrap="square" anchor="t" lIns="0" rIns="0" tIns="0" bIns="0">
+          <a:bodyPr wrap="square" lIns="0" tIns="0" rIns="0" bIns="0" anchor="t">
             <a:spAutoFit/>
           </a:bodyPr>
           <a:lstStyle/>
@@ -4082,7 +4084,7 @@
           <a:noFill/>
         </p:spPr>
         <p:txBody>
-          <a:bodyPr wrap="square" anchor="t" lIns="0" rIns="0" tIns="0" bIns="0">
+          <a:bodyPr wrap="square" lIns="0" tIns="0" rIns="0" bIns="0" anchor="t">
             <a:spAutoFit/>
           </a:bodyPr>
           <a:lstStyle/>
@@ -16568,6 +16570,7 @@
           <a:lstStyle/>
           <a:p>
             <a:pPr algn="ctr"/>
+            <a:endParaRPr/>
           </a:p>
         </p:txBody>
       </p:sp>
@@ -16588,7 +16591,7 @@
           <a:noFill/>
         </p:spPr>
         <p:txBody>
-          <a:bodyPr wrap="square" anchor="t" lIns="0" rIns="0" tIns="0" bIns="0">
+          <a:bodyPr wrap="square" lIns="0" tIns="0" rIns="0" bIns="0" anchor="t">
             <a:spAutoFit/>
           </a:bodyPr>
           <a:lstStyle/>
@@ -16647,6 +16650,7 @@
           <a:lstStyle/>
           <a:p>
             <a:pPr algn="ctr"/>
+            <a:endParaRPr/>
           </a:p>
         </p:txBody>
       </p:sp>
@@ -16667,7 +16671,7 @@
           <a:noFill/>
         </p:spPr>
         <p:txBody>
-          <a:bodyPr wrap="square" anchor="t" lIns="0" rIns="0" tIns="0" bIns="0">
+          <a:bodyPr wrap="square" lIns="0" tIns="0" rIns="0" bIns="0" anchor="t">
             <a:spAutoFit/>
           </a:bodyPr>
           <a:lstStyle/>
@@ -16726,6 +16730,7 @@
           <a:lstStyle/>
           <a:p>
             <a:pPr algn="ctr"/>
+            <a:endParaRPr/>
           </a:p>
         </p:txBody>
       </p:sp>
@@ -16770,6 +16775,7 @@
           <a:lstStyle/>
           <a:p>
             <a:pPr algn="ctr"/>
+            <a:endParaRPr/>
           </a:p>
         </p:txBody>
       </p:sp>
@@ -16790,7 +16796,7 @@
           <a:noFill/>
         </p:spPr>
         <p:txBody>
-          <a:bodyPr wrap="square" anchor="t" lIns="0" rIns="0" tIns="0" bIns="0">
+          <a:bodyPr wrap="square" lIns="0" tIns="0" rIns="0" bIns="0" anchor="t">
             <a:spAutoFit/>
           </a:bodyPr>
           <a:lstStyle/>
@@ -16849,6 +16855,7 @@
           <a:lstStyle/>
           <a:p>
             <a:pPr algn="ctr"/>
+            <a:endParaRPr/>
           </a:p>
         </p:txBody>
       </p:sp>
@@ -16893,6 +16900,7 @@
           <a:lstStyle/>
           <a:p>
             <a:pPr algn="ctr"/>
+            <a:endParaRPr/>
           </a:p>
         </p:txBody>
       </p:sp>
@@ -16913,7 +16921,7 @@
           <a:noFill/>
         </p:spPr>
         <p:txBody>
-          <a:bodyPr wrap="square" anchor="t" lIns="0" rIns="0" tIns="0" bIns="0">
+          <a:bodyPr wrap="square" lIns="0" tIns="0" rIns="0" bIns="0" anchor="t">
             <a:spAutoFit/>
           </a:bodyPr>
           <a:lstStyle/>
@@ -16972,6 +16980,7 @@
           <a:lstStyle/>
           <a:p>
             <a:pPr algn="ctr"/>
+            <a:endParaRPr/>
           </a:p>
         </p:txBody>
       </p:sp>
@@ -17016,6 +17025,7 @@
           <a:lstStyle/>
           <a:p>
             <a:pPr algn="ctr"/>
+            <a:endParaRPr/>
           </a:p>
         </p:txBody>
       </p:sp>
@@ -17036,7 +17046,7 @@
           <a:noFill/>
         </p:spPr>
         <p:txBody>
-          <a:bodyPr wrap="square" anchor="t" lIns="0" rIns="0" tIns="0" bIns="0">
+          <a:bodyPr wrap="square" lIns="0" tIns="0" rIns="0" bIns="0" anchor="t">
             <a:spAutoFit/>
           </a:bodyPr>
           <a:lstStyle/>
@@ -17095,6 +17105,7 @@
           <a:lstStyle/>
           <a:p>
             <a:pPr algn="ctr"/>
+            <a:endParaRPr/>
           </a:p>
         </p:txBody>
       </p:sp>
@@ -17139,6 +17150,7 @@
           <a:lstStyle/>
           <a:p>
             <a:pPr algn="ctr"/>
+            <a:endParaRPr/>
           </a:p>
         </p:txBody>
       </p:sp>
@@ -17159,7 +17171,7 @@
           <a:noFill/>
         </p:spPr>
         <p:txBody>
-          <a:bodyPr wrap="square" anchor="t" lIns="0" rIns="0" tIns="0" bIns="0">
+          <a:bodyPr wrap="square" lIns="0" tIns="0" rIns="0" bIns="0" anchor="t">
             <a:spAutoFit/>
           </a:bodyPr>
           <a:lstStyle/>
@@ -17218,6 +17230,7 @@
           <a:lstStyle/>
           <a:p>
             <a:pPr algn="ctr"/>
+            <a:endParaRPr/>
           </a:p>
         </p:txBody>
       </p:sp>
@@ -25441,26 +25454,6 @@
 </file>
 
 <file path=customXml/item1.xml><?xml version="1.0" encoding="utf-8"?>
-<p:properties xmlns:p="http://schemas.microsoft.com/office/2006/metadata/properties" xmlns:xsi="http://www.w3.org/2001/XMLSchema-instance" xmlns:pc="http://schemas.microsoft.com/office/infopath/2007/PartnerControls">
-  <documentManagement>
-    <TaxCatchAll xmlns="96f3f382-ceb1-40cb-99f5-e72dad3ad468" xsi:nil="true"/>
-    <lcf76f155ced4ddcb4097134ff3c332f xmlns="20af6729-ca02-41fe-ad33-8052e43e59c7">
-      <Terms xmlns="http://schemas.microsoft.com/office/infopath/2007/PartnerControls"/>
-    </lcf76f155ced4ddcb4097134ff3c332f>
-  </documentManagement>
-</p:properties>
-</file>
-
-<file path=customXml/item2.xml><?xml version="1.0" encoding="utf-8"?>
-<?mso-contentType ?>
-<FormTemplates xmlns="http://schemas.microsoft.com/sharepoint/v3/contenttype/forms">
-  <Display>DocumentLibraryForm</Display>
-  <Edit>DocumentLibraryForm</Edit>
-  <New>DocumentLibraryForm</New>
-</FormTemplates>
-</file>
-
-<file path=customXml/item3.xml><?xml version="1.0" encoding="utf-8"?>
 <ct:contentTypeSchema xmlns:ct="http://schemas.microsoft.com/office/2006/metadata/contentType" xmlns:ma="http://schemas.microsoft.com/office/2006/metadata/properties/metaAttributes" ct:_="" ma:_="" ma:contentTypeName="Document" ma:contentTypeID="0x010100E413E88BE41E9B4697EEB1383CCFCEE9" ma:contentTypeVersion="15" ma:contentTypeDescription="Crée un document." ma:contentTypeScope="" ma:versionID="fdc6ab2ac34b5193386aa592c794ff43">
   <xsd:schema xmlns:xsd="http://www.w3.org/2001/XMLSchema" xmlns:xs="http://www.w3.org/2001/XMLSchema" xmlns:p="http://schemas.microsoft.com/office/2006/metadata/properties" xmlns:ns2="20af6729-ca02-41fe-ad33-8052e43e59c7" xmlns:ns3="96f3f382-ceb1-40cb-99f5-e72dad3ad468" targetNamespace="http://schemas.microsoft.com/office/2006/metadata/properties" ma:root="true" ma:fieldsID="deac9eb5af6cc4882cd6ba5d54d79817" ns2:_="" ns3:_="">
     <xsd:import namespace="20af6729-ca02-41fe-ad33-8052e43e59c7"/>
@@ -25695,26 +25688,27 @@
 </ct:contentTypeSchema>
 </file>
 
-<file path=customXml/itemProps1.xml><?xml version="1.0" encoding="utf-8"?>
-<ds:datastoreItem xmlns:ds="http://schemas.openxmlformats.org/officeDocument/2006/customXml" ds:itemID="{4D2500C3-0BF9-4160-9EFB-6F363BE89EA2}">
-  <ds:schemaRefs>
-    <ds:schemaRef ds:uri="http://schemas.microsoft.com/office/2006/metadata/properties"/>
-    <ds:schemaRef ds:uri="http://schemas.microsoft.com/office/infopath/2007/PartnerControls"/>
-    <ds:schemaRef ds:uri="96f3f382-ceb1-40cb-99f5-e72dad3ad468"/>
-    <ds:schemaRef ds:uri="20af6729-ca02-41fe-ad33-8052e43e59c7"/>
-  </ds:schemaRefs>
-</ds:datastoreItem>
+<file path=customXml/item2.xml><?xml version="1.0" encoding="utf-8"?>
+<?mso-contentType ?>
+<FormTemplates xmlns="http://schemas.microsoft.com/sharepoint/v3/contenttype/forms">
+  <Display>DocumentLibraryForm</Display>
+  <Edit>DocumentLibraryForm</Edit>
+  <New>DocumentLibraryForm</New>
+</FormTemplates>
 </file>
 
-<file path=customXml/itemProps2.xml><?xml version="1.0" encoding="utf-8"?>
-<ds:datastoreItem xmlns:ds="http://schemas.openxmlformats.org/officeDocument/2006/customXml" ds:itemID="{F079F69C-2C23-423F-AFA6-0DA966A4C7CD}">
-  <ds:schemaRefs>
-    <ds:schemaRef ds:uri="http://schemas.microsoft.com/sharepoint/v3/contenttype/forms"/>
-  </ds:schemaRefs>
-</ds:datastoreItem>
+<file path=customXml/item3.xml><?xml version="1.0" encoding="utf-8"?>
+<p:properties xmlns:p="http://schemas.microsoft.com/office/2006/metadata/properties" xmlns:xsi="http://www.w3.org/2001/XMLSchema-instance" xmlns:pc="http://schemas.microsoft.com/office/infopath/2007/PartnerControls">
+  <documentManagement>
+    <TaxCatchAll xmlns="96f3f382-ceb1-40cb-99f5-e72dad3ad468" xsi:nil="true"/>
+    <lcf76f155ced4ddcb4097134ff3c332f xmlns="20af6729-ca02-41fe-ad33-8052e43e59c7">
+      <Terms xmlns="http://schemas.microsoft.com/office/infopath/2007/PartnerControls"/>
+    </lcf76f155ced4ddcb4097134ff3c332f>
+  </documentManagement>
+</p:properties>
 </file>
 
-<file path=customXml/itemProps3.xml><?xml version="1.0" encoding="utf-8"?>
+<file path=customXml/itemProps1.xml><?xml version="1.0" encoding="utf-8"?>
 <ds:datastoreItem xmlns:ds="http://schemas.openxmlformats.org/officeDocument/2006/customXml" ds:itemID="{BE50BBAE-E30E-4E78-9619-46B248827988}">
   <ds:schemaRefs>
     <ds:schemaRef ds:uri="http://schemas.microsoft.com/office/2006/metadata/contentType"/>
@@ -25731,4 +25725,23 @@
     <ds:schemaRef ds:uri="http://schemas.microsoft.com/internal/obd"/>
   </ds:schemaRefs>
 </ds:datastoreItem>
+</file>
+
+<file path=customXml/itemProps2.xml><?xml version="1.0" encoding="utf-8"?>
+<ds:datastoreItem xmlns:ds="http://schemas.openxmlformats.org/officeDocument/2006/customXml" ds:itemID="{F079F69C-2C23-423F-AFA6-0DA966A4C7CD}">
+  <ds:schemaRefs>
+    <ds:schemaRef ds:uri="http://schemas.microsoft.com/sharepoint/v3/contenttype/forms"/>
+  </ds:schemaRefs>
+</ds:datastoreItem>
+</file>
+
+<file path=customXml/itemProps3.xml><?xml version="1.0" encoding="utf-8"?>
+<ds:datastoreItem xmlns:ds="http://schemas.openxmlformats.org/officeDocument/2006/customXml" ds:itemID="{4D2500C3-0BF9-4160-9EFB-6F363BE89EA2}">
+  <ds:schemaRefs>
+    <ds:schemaRef ds:uri="http://schemas.microsoft.com/office/2006/metadata/properties"/>
+    <ds:schemaRef ds:uri="http://schemas.microsoft.com/office/infopath/2007/PartnerControls"/>
+    <ds:schemaRef ds:uri="96f3f382-ceb1-40cb-99f5-e72dad3ad468"/>
+    <ds:schemaRef ds:uri="20af6729-ca02-41fe-ad33-8052e43e59c7"/>
+  </ds:schemaRefs>
+</ds:datastoreItem>
 </file>
--- a/Cans_Mstr.pptx
+++ b/Cans_Mstr.pptx
@@ -3830,7 +3830,7 @@
                 <a:solidFill>
                   <a:srgbClr val="8B1A1A"/>
                 </a:solidFill>
-                <a:latin typeface="Calibri"/>
+                <a:latin typeface="Garamond"/>
               </a:rPr>
               <a:t>[MOT-CLÉ OBJECTIF 1]</a:t>
             </a:r>
@@ -3945,7 +3945,7 @@
                 <a:solidFill>
                   <a:srgbClr val="8B1A1A"/>
                 </a:solidFill>
-                <a:latin typeface="Calibri"/>
+                <a:latin typeface="Garamond"/>
               </a:rPr>
               <a:t>[MOT-CLÉ OBJECTIF 2]</a:t>
             </a:r>
@@ -4060,7 +4060,7 @@
                 <a:solidFill>
                   <a:srgbClr val="8B1A1A"/>
                 </a:solidFill>
-                <a:latin typeface="Calibri"/>
+                <a:latin typeface="Garamond"/>
               </a:rPr>
               <a:t>[MOT-CLÉ OBJECTIF 3]</a:t>
             </a:r>
@@ -10078,45 +10078,6 @@
               <a:t>[Détail — comment, fréquence, interlocuteur]</a:t>
             </a:r>
             <a:endParaRPr lang="en-US" sz="1050" dirty="0"/>
-          </a:p>
-        </p:txBody>
-      </p:sp>
-      <p:sp>
-        <p:nvSpPr>
-          <p:cNvPr id="38" name="Text 35"/>
-          <p:cNvSpPr/>
-          <p:nvPr/>
-        </p:nvSpPr>
-        <p:spPr>
-          <a:xfrm>
-            <a:off x="502920" y="4800600"/>
-            <a:ext cx="8001000" cy="137160"/>
-          </a:xfrm>
-          <a:prstGeom prst="rect">
-            <a:avLst/>
-          </a:prstGeom>
-          <a:noFill/>
-          <a:ln/>
-        </p:spPr>
-        <p:txBody>
-          <a:bodyPr wrap="square" lIns="0" tIns="0" rIns="0" bIns="0" rtlCol="0" anchor="ctr"/>
-          <a:lstStyle/>
-          <a:p>
-            <a:pPr marL="0" indent="0">
-              <a:buNone/>
-            </a:pPr>
-            <a:r>
-              <a:rPr lang="en-US" sz="750" i="1" dirty="0">
-                <a:solidFill>
-                  <a:srgbClr val="A09080"/>
-                </a:solidFill>
-                <a:latin typeface="Calibri" pitchFamily="34" charset="0"/>
-                <a:ea typeface="Calibri" pitchFamily="34" charset="-122"/>
-                <a:cs typeface="Calibri" pitchFamily="34" charset="-120"/>
-              </a:rPr>
-              <a:t>Section gauche : contenu fixe Affilior. Section droite : personnaliser selon le dossier.</a:t>
-            </a:r>
-            <a:endParaRPr lang="en-US" sz="750" dirty="0"/>
           </a:p>
         </p:txBody>
       </p:sp>
@@ -24759,45 +24720,6 @@
       </p:sp>
       <p:sp>
         <p:nvSpPr>
-          <p:cNvPr id="27" name="Text 24"/>
-          <p:cNvSpPr/>
-          <p:nvPr/>
-        </p:nvSpPr>
-        <p:spPr>
-          <a:xfrm>
-            <a:off x="502920" y="4800600"/>
-            <a:ext cx="8001000" cy="137160"/>
-          </a:xfrm>
-          <a:prstGeom prst="rect">
-            <a:avLst/>
-          </a:prstGeom>
-          <a:noFill/>
-          <a:ln/>
-        </p:spPr>
-        <p:txBody>
-          <a:bodyPr wrap="square" lIns="0" tIns="0" rIns="0" bIns="0" rtlCol="0" anchor="ctr"/>
-          <a:lstStyle/>
-          <a:p>
-            <a:pPr marL="0" indent="0">
-              <a:buNone/>
-            </a:pPr>
-            <a:r>
-              <a:rPr lang="en-US" sz="750" i="1" dirty="0">
-                <a:solidFill>
-                  <a:srgbClr val="A09080"/>
-                </a:solidFill>
-                <a:latin typeface="Calibri" pitchFamily="34" charset="0"/>
-                <a:ea typeface="Calibri" pitchFamily="34" charset="-122"/>
-                <a:cs typeface="Calibri" pitchFamily="34" charset="-120"/>
-              </a:rPr>
-              <a:t>5 remarques maximum recommandées — supprimer les lignes non utilisées</a:t>
-            </a:r>
-            <a:endParaRPr lang="en-US" sz="750" dirty="0"/>
-          </a:p>
-        </p:txBody>
-      </p:sp>
-      <p:sp>
-        <p:nvSpPr>
           <p:cNvPr id="28" name="Text 25"/>
           <p:cNvSpPr/>
           <p:nvPr/>

--- a/Cans_Mstr.pptx
+++ b/Cans_Mstr.pptx
@@ -3623,45 +3623,6 @@
       </p:sp>
       <p:sp>
         <p:nvSpPr>
-          <p:cNvPr id="8" name="Text 5"/>
-          <p:cNvSpPr/>
-          <p:nvPr/>
-        </p:nvSpPr>
-        <p:spPr>
-          <a:xfrm>
-            <a:off x="8092440" y="219456"/>
-            <a:ext cx="347472" cy="182880"/>
-          </a:xfrm>
-          <a:prstGeom prst="rect">
-            <a:avLst/>
-          </a:prstGeom>
-          <a:noFill/>
-          <a:ln/>
-        </p:spPr>
-        <p:txBody>
-          <a:bodyPr wrap="square" lIns="0" tIns="0" rIns="0" bIns="0" rtlCol="0" anchor="ctr"/>
-          <a:lstStyle/>
-          <a:p>
-            <a:pPr marL="0" indent="0" algn="r">
-              <a:buNone/>
-            </a:pPr>
-            <a:r>
-              <a:rPr lang="en-US" sz="700" dirty="0">
-                <a:solidFill>
-                  <a:srgbClr val="A09080"/>
-                </a:solidFill>
-                <a:latin typeface="Garamond" pitchFamily="34" charset="0"/>
-                <a:ea typeface="Garamond" pitchFamily="34" charset="-122"/>
-                <a:cs typeface="Garamond" pitchFamily="34" charset="-120"/>
-              </a:rPr>
-              <a:t>12</a:t>
-            </a:r>
-            <a:endParaRPr lang="en-US" sz="700" dirty="0"/>
-          </a:p>
-        </p:txBody>
-      </p:sp>
-      <p:sp>
-        <p:nvSpPr>
           <p:cNvPr id="9" name="Shape 6"/>
           <p:cNvSpPr/>
           <p:nvPr/>
@@ -4336,45 +4297,6 @@
       </p:sp>
       <p:sp>
         <p:nvSpPr>
-          <p:cNvPr id="8" name="Text 5"/>
-          <p:cNvSpPr/>
-          <p:nvPr/>
-        </p:nvSpPr>
-        <p:spPr>
-          <a:xfrm>
-            <a:off x="8092440" y="219456"/>
-            <a:ext cx="347472" cy="182880"/>
-          </a:xfrm>
-          <a:prstGeom prst="rect">
-            <a:avLst/>
-          </a:prstGeom>
-          <a:noFill/>
-          <a:ln/>
-        </p:spPr>
-        <p:txBody>
-          <a:bodyPr wrap="square" lIns="0" tIns="0" rIns="0" bIns="0" rtlCol="0" anchor="ctr"/>
-          <a:lstStyle/>
-          <a:p>
-            <a:pPr marL="0" indent="0" algn="r">
-              <a:buNone/>
-            </a:pPr>
-            <a:r>
-              <a:rPr lang="en-US" sz="700" dirty="0">
-                <a:solidFill>
-                  <a:srgbClr val="A09080"/>
-                </a:solidFill>
-                <a:latin typeface="Garamond" pitchFamily="34" charset="0"/>
-                <a:ea typeface="Garamond" pitchFamily="34" charset="-122"/>
-                <a:cs typeface="Garamond" pitchFamily="34" charset="-120"/>
-              </a:rPr>
-              <a:t>13</a:t>
-            </a:r>
-            <a:endParaRPr lang="en-US" sz="700" dirty="0"/>
-          </a:p>
-        </p:txBody>
-      </p:sp>
-      <p:sp>
-        <p:nvSpPr>
           <p:cNvPr id="9" name="Shape 6"/>
           <p:cNvSpPr/>
           <p:nvPr/>
@@ -5821,45 +5743,6 @@
       </p:sp>
       <p:sp>
         <p:nvSpPr>
-          <p:cNvPr id="8" name="Text 5"/>
-          <p:cNvSpPr/>
-          <p:nvPr/>
-        </p:nvSpPr>
-        <p:spPr>
-          <a:xfrm>
-            <a:off x="8092440" y="219456"/>
-            <a:ext cx="347472" cy="182880"/>
-          </a:xfrm>
-          <a:prstGeom prst="rect">
-            <a:avLst/>
-          </a:prstGeom>
-          <a:noFill/>
-          <a:ln/>
-        </p:spPr>
-        <p:txBody>
-          <a:bodyPr wrap="square" lIns="0" tIns="0" rIns="0" bIns="0" rtlCol="0" anchor="ctr"/>
-          <a:lstStyle/>
-          <a:p>
-            <a:pPr marL="0" indent="0" algn="r">
-              <a:buNone/>
-            </a:pPr>
-            <a:r>
-              <a:rPr lang="en-US" sz="700" dirty="0">
-                <a:solidFill>
-                  <a:srgbClr val="A09080"/>
-                </a:solidFill>
-                <a:latin typeface="Garamond" pitchFamily="34" charset="0"/>
-                <a:ea typeface="Garamond" pitchFamily="34" charset="-122"/>
-                <a:cs typeface="Garamond" pitchFamily="34" charset="-120"/>
-              </a:rPr>
-              <a:t>15</a:t>
-            </a:r>
-            <a:endParaRPr lang="en-US" sz="700" dirty="0"/>
-          </a:p>
-        </p:txBody>
-      </p:sp>
-      <p:sp>
-        <p:nvSpPr>
           <p:cNvPr id="9" name="Shape 6"/>
           <p:cNvSpPr/>
           <p:nvPr/>
@@ -7374,40 +7257,33 @@
       </p:sp>
       <p:sp>
         <p:nvSpPr>
-          <p:cNvPr id="8" name="Text 5"/>
-          <p:cNvSpPr/>
-          <p:nvPr/>
-        </p:nvSpPr>
-        <p:spPr>
-          <a:xfrm>
-            <a:off x="8092440" y="219456"/>
-            <a:ext cx="347472" cy="182880"/>
-          </a:xfrm>
-          <a:prstGeom prst="rect">
-            <a:avLst/>
-          </a:prstGeom>
-          <a:noFill/>
-          <a:ln/>
-        </p:spPr>
-        <p:txBody>
-          <a:bodyPr wrap="square" lIns="0" tIns="0" rIns="0" bIns="0" rtlCol="0" anchor="ctr"/>
-          <a:lstStyle/>
-          <a:p>
-            <a:pPr marL="0" indent="0" algn="r">
-              <a:buNone/>
-            </a:pPr>
-            <a:r>
-              <a:rPr lang="en-US" sz="700" dirty="0">
-                <a:solidFill>
-                  <a:srgbClr val="A09080"/>
-                </a:solidFill>
-                <a:latin typeface="Garamond" pitchFamily="34" charset="0"/>
-                <a:ea typeface="Garamond" pitchFamily="34" charset="-122"/>
-                <a:cs typeface="Garamond" pitchFamily="34" charset="-120"/>
-              </a:rPr>
-              <a:t>16</a:t>
-            </a:r>
-            <a:endParaRPr lang="en-US" sz="700" dirty="0"/>
+          <p:cNvPr id="1045" name="Shape 6"/>
+          <p:cNvSpPr/>
+          <p:nvPr/>
+        </p:nvSpPr>
+        <p:spPr>
+          <a:xfrm>
+            <a:off x="502920" y="475488"/>
+            <a:ext cx="8001000" cy="10973"/>
+          </a:xfrm>
+          <a:prstGeom prst="rect">
+            <a:avLst/>
+          </a:prstGeom>
+          <a:solidFill>
+            <a:srgbClr val="CFC8BD"/>
+          </a:solidFill>
+          <a:ln w="12700">
+            <a:solidFill>
+              <a:srgbClr val="CFC8BD"/>
+            </a:solidFill>
+            <a:prstDash val="solid"/>
+          </a:ln>
+        </p:spPr>
+        <p:txBody>
+          <a:bodyPr/>
+          <a:lstStyle/>
+          <a:p>
+            <a:endParaRPr lang="fr-FR"/>
           </a:p>
         </p:txBody>
       </p:sp>
@@ -9011,45 +8887,6 @@
       </p:sp>
       <p:sp>
         <p:nvSpPr>
-          <p:cNvPr id="8" name="Text 5"/>
-          <p:cNvSpPr/>
-          <p:nvPr/>
-        </p:nvSpPr>
-        <p:spPr>
-          <a:xfrm>
-            <a:off x="8092440" y="219456"/>
-            <a:ext cx="347472" cy="182880"/>
-          </a:xfrm>
-          <a:prstGeom prst="rect">
-            <a:avLst/>
-          </a:prstGeom>
-          <a:noFill/>
-          <a:ln/>
-        </p:spPr>
-        <p:txBody>
-          <a:bodyPr wrap="square" lIns="0" tIns="0" rIns="0" bIns="0" rtlCol="0" anchor="ctr"/>
-          <a:lstStyle/>
-          <a:p>
-            <a:pPr marL="0" indent="0" algn="r">
-              <a:buNone/>
-            </a:pPr>
-            <a:r>
-              <a:rPr lang="en-US" sz="700" dirty="0">
-                <a:solidFill>
-                  <a:srgbClr val="A09080"/>
-                </a:solidFill>
-                <a:latin typeface="Garamond" pitchFamily="34" charset="0"/>
-                <a:ea typeface="Garamond" pitchFamily="34" charset="-122"/>
-                <a:cs typeface="Garamond" pitchFamily="34" charset="-120"/>
-              </a:rPr>
-              <a:t>16</a:t>
-            </a:r>
-            <a:endParaRPr lang="en-US" sz="700" dirty="0"/>
-          </a:p>
-        </p:txBody>
-      </p:sp>
-      <p:sp>
-        <p:nvSpPr>
           <p:cNvPr id="9" name="Shape 6"/>
           <p:cNvSpPr/>
           <p:nvPr/>
@@ -10354,40 +10191,33 @@
       </p:sp>
       <p:sp>
         <p:nvSpPr>
-          <p:cNvPr id="8" name="Text 5"/>
-          <p:cNvSpPr/>
-          <p:nvPr/>
-        </p:nvSpPr>
-        <p:spPr>
-          <a:xfrm>
-            <a:off x="8092440" y="219456"/>
-            <a:ext cx="347472" cy="182880"/>
-          </a:xfrm>
-          <a:prstGeom prst="rect">
-            <a:avLst/>
-          </a:prstGeom>
-          <a:noFill/>
-          <a:ln/>
-        </p:spPr>
-        <p:txBody>
-          <a:bodyPr wrap="square" lIns="0" tIns="0" rIns="0" bIns="0" rtlCol="0" anchor="ctr"/>
-          <a:lstStyle/>
-          <a:p>
-            <a:pPr marL="0" indent="0" algn="r">
-              <a:buNone/>
-            </a:pPr>
-            <a:r>
-              <a:rPr lang="en-US" sz="700" dirty="0">
-                <a:solidFill>
-                  <a:srgbClr val="A09080"/>
-                </a:solidFill>
-                <a:latin typeface="Garamond" pitchFamily="34" charset="0"/>
-                <a:ea typeface="Garamond" pitchFamily="34" charset="-122"/>
-                <a:cs typeface="Garamond" pitchFamily="34" charset="-120"/>
-              </a:rPr>
-              <a:t>19</a:t>
-            </a:r>
-            <a:endParaRPr lang="en-US" sz="700" dirty="0"/>
+          <p:cNvPr id="1050" name="Shape 6"/>
+          <p:cNvSpPr/>
+          <p:nvPr/>
+        </p:nvSpPr>
+        <p:spPr>
+          <a:xfrm>
+            <a:off x="502920" y="475488"/>
+            <a:ext cx="8001000" cy="10973"/>
+          </a:xfrm>
+          <a:prstGeom prst="rect">
+            <a:avLst/>
+          </a:prstGeom>
+          <a:solidFill>
+            <a:srgbClr val="CFC8BD"/>
+          </a:solidFill>
+          <a:ln w="12700">
+            <a:solidFill>
+              <a:srgbClr val="CFC8BD"/>
+            </a:solidFill>
+            <a:prstDash val="solid"/>
+          </a:ln>
+        </p:spPr>
+        <p:txBody>
+          <a:bodyPr/>
+          <a:lstStyle/>
+          <a:p>
+            <a:endParaRPr lang="fr-FR"/>
           </a:p>
         </p:txBody>
       </p:sp>
@@ -12158,45 +11988,6 @@
       </p:sp>
       <p:sp>
         <p:nvSpPr>
-          <p:cNvPr id="8" name="Text 5"/>
-          <p:cNvSpPr/>
-          <p:nvPr/>
-        </p:nvSpPr>
-        <p:spPr>
-          <a:xfrm>
-            <a:off x="8092440" y="219456"/>
-            <a:ext cx="347472" cy="182880"/>
-          </a:xfrm>
-          <a:prstGeom prst="rect">
-            <a:avLst/>
-          </a:prstGeom>
-          <a:noFill/>
-          <a:ln/>
-        </p:spPr>
-        <p:txBody>
-          <a:bodyPr wrap="square" lIns="0" tIns="0" rIns="0" bIns="0" rtlCol="0" anchor="ctr"/>
-          <a:lstStyle/>
-          <a:p>
-            <a:pPr marL="0" indent="0" algn="r">
-              <a:buNone/>
-            </a:pPr>
-            <a:r>
-              <a:rPr lang="en-US" sz="700" dirty="0">
-                <a:solidFill>
-                  <a:srgbClr val="A09080"/>
-                </a:solidFill>
-                <a:latin typeface="Garamond" pitchFamily="34" charset="0"/>
-                <a:ea typeface="Garamond" pitchFamily="34" charset="-122"/>
-                <a:cs typeface="Garamond" pitchFamily="34" charset="-120"/>
-              </a:rPr>
-              <a:t>18</a:t>
-            </a:r>
-            <a:endParaRPr lang="en-US" sz="700" dirty="0"/>
-          </a:p>
-        </p:txBody>
-      </p:sp>
-      <p:sp>
-        <p:nvSpPr>
           <p:cNvPr id="9" name="Shape 6"/>
           <p:cNvSpPr/>
           <p:nvPr/>
@@ -14960,45 +14751,6 @@
       </p:sp>
       <p:sp>
         <p:nvSpPr>
-          <p:cNvPr id="8" name="Text 5"/>
-          <p:cNvSpPr/>
-          <p:nvPr/>
-        </p:nvSpPr>
-        <p:spPr>
-          <a:xfrm>
-            <a:off x="8092440" y="219456"/>
-            <a:ext cx="347472" cy="182880"/>
-          </a:xfrm>
-          <a:prstGeom prst="rect">
-            <a:avLst/>
-          </a:prstGeom>
-          <a:noFill/>
-          <a:ln/>
-        </p:spPr>
-        <p:txBody>
-          <a:bodyPr wrap="square" lIns="0" tIns="0" rIns="0" bIns="0" rtlCol="0" anchor="ctr"/>
-          <a:lstStyle/>
-          <a:p>
-            <a:pPr marL="0" indent="0" algn="r">
-              <a:buNone/>
-            </a:pPr>
-            <a:r>
-              <a:rPr lang="en-US" sz="700" dirty="0">
-                <a:solidFill>
-                  <a:srgbClr val="A09080"/>
-                </a:solidFill>
-                <a:latin typeface="Garamond" pitchFamily="34" charset="0"/>
-                <a:ea typeface="Garamond" pitchFamily="34" charset="-122"/>
-                <a:cs typeface="Garamond" pitchFamily="34" charset="-120"/>
-              </a:rPr>
-              <a:t>02</a:t>
-            </a:r>
-            <a:endParaRPr lang="en-US" sz="700" dirty="0"/>
-          </a:p>
-        </p:txBody>
-      </p:sp>
-      <p:sp>
-        <p:nvSpPr>
           <p:cNvPr id="9" name="Shape 6"/>
           <p:cNvSpPr/>
           <p:nvPr/>
@@ -15219,45 +14971,6 @@
       </p:sp>
       <p:sp>
         <p:nvSpPr>
-          <p:cNvPr id="15" name="Text 12"/>
-          <p:cNvSpPr/>
-          <p:nvPr/>
-        </p:nvSpPr>
-        <p:spPr>
-          <a:xfrm>
-            <a:off x="7498080" y="1527048"/>
-            <a:ext cx="1005840" cy="256032"/>
-          </a:xfrm>
-          <a:prstGeom prst="rect">
-            <a:avLst/>
-          </a:prstGeom>
-          <a:noFill/>
-          <a:ln/>
-        </p:spPr>
-        <p:txBody>
-          <a:bodyPr wrap="square" lIns="0" tIns="0" rIns="0" bIns="0" rtlCol="0" anchor="ctr"/>
-          <a:lstStyle/>
-          <a:p>
-            <a:pPr marL="0" indent="0" algn="r">
-              <a:buNone/>
-            </a:pPr>
-            <a:r>
-              <a:rPr lang="en-US" sz="1000" dirty="0">
-                <a:solidFill>
-                  <a:srgbClr val="8B1A1A"/>
-                </a:solidFill>
-                <a:latin typeface="Garamond" pitchFamily="34" charset="0"/>
-                <a:ea typeface="Garamond" pitchFamily="34" charset="-122"/>
-                <a:cs typeface="Garamond" pitchFamily="34" charset="-120"/>
-              </a:rPr>
-              <a:t>04 — 08</a:t>
-            </a:r>
-            <a:endParaRPr lang="en-US" sz="1000" dirty="0"/>
-          </a:p>
-        </p:txBody>
-      </p:sp>
-      <p:sp>
-        <p:nvSpPr>
           <p:cNvPr id="16" name="Shape 13"/>
           <p:cNvSpPr/>
           <p:nvPr/>
@@ -15407,45 +15120,6 @@
       </p:sp>
       <p:sp>
         <p:nvSpPr>
-          <p:cNvPr id="20" name="Text 17"/>
-          <p:cNvSpPr/>
-          <p:nvPr/>
-        </p:nvSpPr>
-        <p:spPr>
-          <a:xfrm>
-            <a:off x="7498080" y="2350008"/>
-            <a:ext cx="1005840" cy="256032"/>
-          </a:xfrm>
-          <a:prstGeom prst="rect">
-            <a:avLst/>
-          </a:prstGeom>
-          <a:noFill/>
-          <a:ln/>
-        </p:spPr>
-        <p:txBody>
-          <a:bodyPr wrap="square" lIns="0" tIns="0" rIns="0" bIns="0" rtlCol="0" anchor="ctr"/>
-          <a:lstStyle/>
-          <a:p>
-            <a:pPr marL="0" indent="0" algn="r">
-              <a:buNone/>
-            </a:pPr>
-            <a:r>
-              <a:rPr lang="en-US" sz="1000" dirty="0">
-                <a:solidFill>
-                  <a:srgbClr val="8B1A1A"/>
-                </a:solidFill>
-                <a:latin typeface="Garamond" pitchFamily="34" charset="0"/>
-                <a:ea typeface="Garamond" pitchFamily="34" charset="-122"/>
-                <a:cs typeface="Garamond" pitchFamily="34" charset="-120"/>
-              </a:rPr>
-              <a:t>09 — 10</a:t>
-            </a:r>
-            <a:endParaRPr lang="en-US" sz="1000" dirty="0"/>
-          </a:p>
-        </p:txBody>
-      </p:sp>
-      <p:sp>
-        <p:nvSpPr>
           <p:cNvPr id="21" name="Shape 18"/>
           <p:cNvSpPr/>
           <p:nvPr/>
@@ -15595,45 +15269,6 @@
       </p:sp>
       <p:sp>
         <p:nvSpPr>
-          <p:cNvPr id="25" name="Text 22"/>
-          <p:cNvSpPr/>
-          <p:nvPr/>
-        </p:nvSpPr>
-        <p:spPr>
-          <a:xfrm>
-            <a:off x="7498080" y="3172968"/>
-            <a:ext cx="1005840" cy="256032"/>
-          </a:xfrm>
-          <a:prstGeom prst="rect">
-            <a:avLst/>
-          </a:prstGeom>
-          <a:noFill/>
-          <a:ln/>
-        </p:spPr>
-        <p:txBody>
-          <a:bodyPr wrap="square" lIns="0" tIns="0" rIns="0" bIns="0" rtlCol="0" anchor="ctr"/>
-          <a:lstStyle/>
-          <a:p>
-            <a:pPr marL="0" indent="0" algn="r">
-              <a:buNone/>
-            </a:pPr>
-            <a:r>
-              <a:rPr lang="en-US" sz="1000" dirty="0">
-                <a:solidFill>
-                  <a:srgbClr val="8B1A1A"/>
-                </a:solidFill>
-                <a:latin typeface="Garamond" pitchFamily="34" charset="0"/>
-                <a:ea typeface="Garamond" pitchFamily="34" charset="-122"/>
-                <a:cs typeface="Garamond" pitchFamily="34" charset="-120"/>
-              </a:rPr>
-              <a:t>12 — 15</a:t>
-            </a:r>
-            <a:endParaRPr lang="en-US" sz="1000" dirty="0"/>
-          </a:p>
-        </p:txBody>
-      </p:sp>
-      <p:sp>
-        <p:nvSpPr>
           <p:cNvPr id="26" name="Shape 23"/>
           <p:cNvSpPr/>
           <p:nvPr/>
@@ -15778,45 +15413,6 @@
               <a:t>Notre accompagnement · Prochaines étapes</a:t>
             </a:r>
             <a:endParaRPr lang="en-US" sz="850" dirty="0"/>
-          </a:p>
-        </p:txBody>
-      </p:sp>
-      <p:sp>
-        <p:nvSpPr>
-          <p:cNvPr id="30" name="Text 27"/>
-          <p:cNvSpPr/>
-          <p:nvPr/>
-        </p:nvSpPr>
-        <p:spPr>
-          <a:xfrm>
-            <a:off x="7498080" y="3995928"/>
-            <a:ext cx="1005840" cy="256032"/>
-          </a:xfrm>
-          <a:prstGeom prst="rect">
-            <a:avLst/>
-          </a:prstGeom>
-          <a:noFill/>
-          <a:ln/>
-        </p:spPr>
-        <p:txBody>
-          <a:bodyPr wrap="square" lIns="0" tIns="0" rIns="0" bIns="0" rtlCol="0" anchor="ctr"/>
-          <a:lstStyle/>
-          <a:p>
-            <a:pPr marL="0" indent="0" algn="r">
-              <a:buNone/>
-            </a:pPr>
-            <a:r>
-              <a:rPr lang="en-US" sz="1000" dirty="0">
-                <a:solidFill>
-                  <a:srgbClr val="8B1A1A"/>
-                </a:solidFill>
-                <a:latin typeface="Garamond" pitchFamily="34" charset="0"/>
-                <a:ea typeface="Garamond" pitchFamily="34" charset="-122"/>
-                <a:cs typeface="Garamond" pitchFamily="34" charset="-120"/>
-              </a:rPr>
-              <a:t>16 — 17</a:t>
-            </a:r>
-            <a:endParaRPr lang="en-US" sz="1000" dirty="0"/>
           </a:p>
         </p:txBody>
       </p:sp>
@@ -16311,45 +15907,6 @@
       </p:sp>
       <p:sp>
         <p:nvSpPr>
-          <p:cNvPr id="8" name="Text 5"/>
-          <p:cNvSpPr/>
-          <p:nvPr/>
-        </p:nvSpPr>
-        <p:spPr>
-          <a:xfrm>
-            <a:off x="8092440" y="219456"/>
-            <a:ext cx="347472" cy="182880"/>
-          </a:xfrm>
-          <a:prstGeom prst="rect">
-            <a:avLst/>
-          </a:prstGeom>
-          <a:noFill/>
-          <a:ln/>
-        </p:spPr>
-        <p:txBody>
-          <a:bodyPr wrap="square" lIns="0" tIns="0" rIns="0" bIns="0" rtlCol="0" anchor="ctr"/>
-          <a:lstStyle/>
-          <a:p>
-            <a:pPr marL="0" indent="0" algn="r">
-              <a:buNone/>
-            </a:pPr>
-            <a:r>
-              <a:rPr lang="en-US" sz="700" dirty="0">
-                <a:solidFill>
-                  <a:srgbClr val="A09080"/>
-                </a:solidFill>
-                <a:latin typeface="Garamond" pitchFamily="34" charset="0"/>
-                <a:ea typeface="Garamond" pitchFamily="34" charset="-122"/>
-                <a:cs typeface="Garamond" pitchFamily="34" charset="-120"/>
-              </a:rPr>
-              <a:t>04</a:t>
-            </a:r>
-            <a:endParaRPr lang="en-US" sz="700" dirty="0"/>
-          </a:p>
-        </p:txBody>
-      </p:sp>
-      <p:sp>
-        <p:nvSpPr>
           <p:cNvPr id="9" name="Text 6"/>
           <p:cNvSpPr/>
           <p:nvPr/>
@@ -17424,45 +16981,6 @@
               <a:t>PATRIMOINE</a:t>
             </a:r>
             <a:endParaRPr lang="en-US" sz="750" dirty="0"/>
-          </a:p>
-        </p:txBody>
-      </p:sp>
-      <p:sp>
-        <p:nvSpPr>
-          <p:cNvPr id="8" name="Text 5"/>
-          <p:cNvSpPr/>
-          <p:nvPr/>
-        </p:nvSpPr>
-        <p:spPr>
-          <a:xfrm>
-            <a:off x="8092440" y="219456"/>
-            <a:ext cx="347472" cy="182880"/>
-          </a:xfrm>
-          <a:prstGeom prst="rect">
-            <a:avLst/>
-          </a:prstGeom>
-          <a:noFill/>
-          <a:ln/>
-        </p:spPr>
-        <p:txBody>
-          <a:bodyPr wrap="square" lIns="0" tIns="0" rIns="0" bIns="0" rtlCol="0" anchor="ctr"/>
-          <a:lstStyle/>
-          <a:p>
-            <a:pPr marL="0" indent="0" algn="r">
-              <a:buNone/>
-            </a:pPr>
-            <a:r>
-              <a:rPr lang="en-US" sz="700" dirty="0">
-                <a:solidFill>
-                  <a:srgbClr val="A09080"/>
-                </a:solidFill>
-                <a:latin typeface="Garamond" pitchFamily="34" charset="0"/>
-                <a:ea typeface="Garamond" pitchFamily="34" charset="-122"/>
-                <a:cs typeface="Garamond" pitchFamily="34" charset="-120"/>
-              </a:rPr>
-              <a:t>05</a:t>
-            </a:r>
-            <a:endParaRPr lang="en-US" sz="700" dirty="0"/>
           </a:p>
         </p:txBody>
       </p:sp>
@@ -19441,7 +18959,7 @@
                       </a:r>
                     </a:p>
                   </a:txBody>
-                  <a:tcPr marL="45720" marR="45720" marT="9144" marB="9144">
+                  <a:tcPr marL="91440" marR="137160" marT="9144" marB="9144">
                     <a:solidFill>
                       <a:srgbClr val="1C2B3A"/>
                     </a:solidFill>
@@ -19691,40 +19209,33 @@
       </p:sp>
       <p:sp>
         <p:nvSpPr>
-          <p:cNvPr id="8" name="Text 5"/>
-          <p:cNvSpPr/>
-          <p:nvPr/>
-        </p:nvSpPr>
-        <p:spPr>
-          <a:xfrm>
-            <a:off x="8092440" y="219456"/>
-            <a:ext cx="347472" cy="182880"/>
-          </a:xfrm>
-          <a:prstGeom prst="rect">
-            <a:avLst/>
-          </a:prstGeom>
-          <a:noFill/>
-          <a:ln/>
-        </p:spPr>
-        <p:txBody>
-          <a:bodyPr wrap="square" lIns="0" tIns="0" rIns="0" bIns="0" rtlCol="0" anchor="ctr"/>
-          <a:lstStyle/>
-          <a:p>
-            <a:pPr marL="0" indent="0" algn="r">
-              <a:buNone/>
-            </a:pPr>
-            <a:r>
-              <a:rPr lang="en-US" sz="700" dirty="0">
-                <a:solidFill>
-                  <a:srgbClr val="A09080"/>
-                </a:solidFill>
-                <a:latin typeface="Garamond" pitchFamily="34" charset="0"/>
-                <a:ea typeface="Garamond" pitchFamily="34" charset="-122"/>
-                <a:cs typeface="Garamond" pitchFamily="34" charset="-120"/>
-              </a:rPr>
-              <a:t>06</a:t>
-            </a:r>
-            <a:endParaRPr lang="en-US" sz="700" dirty="0"/>
+          <p:cNvPr id="1036" name="Shape 6"/>
+          <p:cNvSpPr/>
+          <p:nvPr/>
+        </p:nvSpPr>
+        <p:spPr>
+          <a:xfrm>
+            <a:off x="502920" y="475488"/>
+            <a:ext cx="8001000" cy="10973"/>
+          </a:xfrm>
+          <a:prstGeom prst="rect">
+            <a:avLst/>
+          </a:prstGeom>
+          <a:solidFill>
+            <a:srgbClr val="CFC8BD"/>
+          </a:solidFill>
+          <a:ln w="12700">
+            <a:solidFill>
+              <a:srgbClr val="CFC8BD"/>
+            </a:solidFill>
+            <a:prstDash val="solid"/>
+          </a:ln>
+        </p:spPr>
+        <p:txBody>
+          <a:bodyPr/>
+          <a:lstStyle/>
+          <a:p>
+            <a:endParaRPr lang="fr-FR"/>
           </a:p>
         </p:txBody>
       </p:sp>
@@ -20945,45 +20456,6 @@
       </p:sp>
       <p:sp>
         <p:nvSpPr>
-          <p:cNvPr id="8" name="Text 5"/>
-          <p:cNvSpPr/>
-          <p:nvPr/>
-        </p:nvSpPr>
-        <p:spPr>
-          <a:xfrm>
-            <a:off x="8092440" y="219456"/>
-            <a:ext cx="347472" cy="182880"/>
-          </a:xfrm>
-          <a:prstGeom prst="rect">
-            <a:avLst/>
-          </a:prstGeom>
-          <a:noFill/>
-          <a:ln/>
-        </p:spPr>
-        <p:txBody>
-          <a:bodyPr wrap="square" lIns="0" tIns="0" rIns="0" bIns="0" rtlCol="0" anchor="ctr"/>
-          <a:lstStyle/>
-          <a:p>
-            <a:pPr marL="0" indent="0" algn="r">
-              <a:buNone/>
-            </a:pPr>
-            <a:r>
-              <a:rPr lang="en-US" sz="700" dirty="0">
-                <a:solidFill>
-                  <a:srgbClr val="A09080"/>
-                </a:solidFill>
-                <a:latin typeface="Garamond" pitchFamily="34" charset="0"/>
-                <a:ea typeface="Garamond" pitchFamily="34" charset="-122"/>
-                <a:cs typeface="Garamond" pitchFamily="34" charset="-120"/>
-              </a:rPr>
-              <a:t>06</a:t>
-            </a:r>
-            <a:endParaRPr lang="en-US" sz="700" dirty="0"/>
-          </a:p>
-        </p:txBody>
-      </p:sp>
-      <p:sp>
-        <p:nvSpPr>
           <p:cNvPr id="9" name="Shape 6"/>
           <p:cNvSpPr/>
           <p:nvPr/>
@@ -22171,46 +21643,33 @@
       </p:sp>
       <p:sp>
         <p:nvSpPr>
-          <p:cNvPr id="141" name="Text 5">
-            <a:extLst>
-              <a:ext uri="{FF2B5EF4-FFF2-40B4-BE49-F238E27FC236}">
-                <a16:creationId xmlns:a16="http://schemas.microsoft.com/office/drawing/2014/main" id="{41D73E14-2473-94E7-B98A-E551ADC9B175}"/>
-              </a:ext>
-            </a:extLst>
-          </p:cNvPr>
-          <p:cNvSpPr/>
-          <p:nvPr/>
-        </p:nvSpPr>
-        <p:spPr>
-          <a:xfrm>
-            <a:off x="8092440" y="219456"/>
-            <a:ext cx="347472" cy="182880"/>
-          </a:xfrm>
-          <a:prstGeom prst="rect">
-            <a:avLst/>
-          </a:prstGeom>
-          <a:noFill/>
-          <a:ln/>
-        </p:spPr>
-        <p:txBody>
-          <a:bodyPr wrap="square" lIns="0" tIns="0" rIns="0" bIns="0" rtlCol="0" anchor="ctr"/>
-          <a:lstStyle/>
-          <a:p>
-            <a:pPr marL="0" indent="0" algn="r">
-              <a:buNone/>
-            </a:pPr>
-            <a:r>
-              <a:rPr lang="en-US" sz="700" dirty="0">
-                <a:solidFill>
-                  <a:srgbClr val="A09080"/>
-                </a:solidFill>
-                <a:latin typeface="Garamond" pitchFamily="34" charset="0"/>
-                <a:ea typeface="Garamond" pitchFamily="34" charset="-122"/>
-                <a:cs typeface="Garamond" pitchFamily="34" charset="-120"/>
-              </a:rPr>
-              <a:t>07</a:t>
-            </a:r>
-            <a:endParaRPr lang="en-US" sz="700" dirty="0"/>
+          <p:cNvPr id="1213" name="Shape 6"/>
+          <p:cNvSpPr/>
+          <p:nvPr/>
+        </p:nvSpPr>
+        <p:spPr>
+          <a:xfrm>
+            <a:off x="502920" y="475488"/>
+            <a:ext cx="8001000" cy="10973"/>
+          </a:xfrm>
+          <a:prstGeom prst="rect">
+            <a:avLst/>
+          </a:prstGeom>
+          <a:solidFill>
+            <a:srgbClr val="CFC8BD"/>
+          </a:solidFill>
+          <a:ln w="12700">
+            <a:solidFill>
+              <a:srgbClr val="CFC8BD"/>
+            </a:solidFill>
+            <a:prstDash val="solid"/>
+          </a:ln>
+        </p:spPr>
+        <p:txBody>
+          <a:bodyPr/>
+          <a:lstStyle/>
+          <a:p>
+            <a:endParaRPr lang="fr-FR"/>
           </a:p>
         </p:txBody>
       </p:sp>
@@ -22609,7 +22068,7 @@
                 <a:ea typeface="Calibri" pitchFamily="34" charset="-122"/>
                 <a:cs typeface="Calibri" pitchFamily="34" charset="-120"/>
               </a:rPr>
-              <a:t>Par enfant (×N)</a:t>
+              <a:t>Par enfant</a:t>
             </a:r>
             <a:endParaRPr lang="en-US" sz="850" dirty="0"/>
           </a:p>
@@ -22642,11 +22101,11 @@
           <a:bodyPr wrap="square" lIns="0" tIns="0" rIns="0" bIns="0" rtlCol="0" anchor="ctr"/>
           <a:lstStyle/>
           <a:p>
-            <a:pPr marL="0" indent="0">
-              <a:buNone/>
-            </a:pPr>
-            <a:r>
-              <a:rPr lang="en-US" sz="850" i="1" dirty="0">
+            <a:pPr marL="0" indent="0" algn="r">
+              <a:buNone/>
+            </a:pPr>
+            <a:r>
+              <a:rPr lang="en-US" sz="850" b="1" dirty="0">
                 <a:solidFill>
                   <a:srgbClr val="F3F0EB"/>
                 </a:solidFill>
@@ -23152,7 +22611,7 @@
                 <a:ea typeface="Calibri" pitchFamily="34" charset="-122"/>
                 <a:cs typeface="Calibri" pitchFamily="34" charset="-120"/>
               </a:rPr>
-              <a:t>Par enfant (×N)</a:t>
+              <a:t>Par enfant</a:t>
             </a:r>
             <a:endParaRPr lang="en-US" sz="850" dirty="0"/>
           </a:p>
@@ -23230,11 +22689,11 @@
           <a:bodyPr wrap="square" lIns="0" tIns="0" rIns="0" bIns="0" rtlCol="0" anchor="ctr"/>
           <a:lstStyle/>
           <a:p>
-            <a:pPr marL="0" indent="0">
-              <a:buNone/>
-            </a:pPr>
-            <a:r>
-              <a:rPr lang="en-US" sz="850" i="1" dirty="0">
+            <a:pPr marL="0" indent="0" algn="r">
+              <a:buNone/>
+            </a:pPr>
+            <a:r>
+              <a:rPr lang="en-US" sz="850" b="1" dirty="0">
                 <a:solidFill>
                   <a:srgbClr val="F3F0EB"/>
                 </a:solidFill>
@@ -23275,11 +22734,11 @@
           <a:bodyPr wrap="square" lIns="0" tIns="0" rIns="0" bIns="0" rtlCol="0" anchor="ctr"/>
           <a:lstStyle/>
           <a:p>
-            <a:pPr marL="0" indent="0">
-              <a:buNone/>
-            </a:pPr>
-            <a:r>
-              <a:rPr lang="en-US" sz="850" i="1" dirty="0">
+            <a:pPr marL="0" indent="0" algn="r">
+              <a:buNone/>
+            </a:pPr>
+            <a:r>
+              <a:rPr lang="en-US" sz="850" b="1" dirty="0">
                 <a:solidFill>
                   <a:srgbClr val="F3F0EB"/>
                 </a:solidFill>
@@ -23618,7 +23077,7 @@
               <a:buNone/>
             </a:pPr>
             <a:r>
-              <a:rPr lang="en-US" sz="3600" i="1" dirty="0">
+              <a:rPr lang="en-US" sz="3080" i="1" dirty="0">
                 <a:solidFill>
                   <a:srgbClr val="4A5568"/>
                 </a:solidFill>
@@ -24051,45 +23510,6 @@
               <a:t>DIAGNOSTIC</a:t>
             </a:r>
             <a:endParaRPr lang="en-US" sz="750" dirty="0"/>
-          </a:p>
-        </p:txBody>
-      </p:sp>
-      <p:sp>
-        <p:nvSpPr>
-          <p:cNvPr id="8" name="Text 5"/>
-          <p:cNvSpPr/>
-          <p:nvPr/>
-        </p:nvSpPr>
-        <p:spPr>
-          <a:xfrm>
-            <a:off x="8092440" y="219456"/>
-            <a:ext cx="347472" cy="182880"/>
-          </a:xfrm>
-          <a:prstGeom prst="rect">
-            <a:avLst/>
-          </a:prstGeom>
-          <a:noFill/>
-          <a:ln/>
-        </p:spPr>
-        <p:txBody>
-          <a:bodyPr wrap="square" lIns="0" tIns="0" rIns="0" bIns="0" rtlCol="0" anchor="ctr"/>
-          <a:lstStyle/>
-          <a:p>
-            <a:pPr marL="0" indent="0" algn="r">
-              <a:buNone/>
-            </a:pPr>
-            <a:r>
-              <a:rPr lang="en-US" sz="700" dirty="0">
-                <a:solidFill>
-                  <a:srgbClr val="A09080"/>
-                </a:solidFill>
-                <a:latin typeface="Garamond" pitchFamily="34" charset="0"/>
-                <a:ea typeface="Garamond" pitchFamily="34" charset="-122"/>
-                <a:cs typeface="Garamond" pitchFamily="34" charset="-120"/>
-              </a:rPr>
-              <a:t>09</a:t>
-            </a:r>
-            <a:endParaRPr lang="en-US" sz="700" dirty="0"/>
           </a:p>
         </p:txBody>
       </p:sp>

--- a/Cans_Mstr.pptx
+++ b/Cans_Mstr.pptx
@@ -15222,7 +15222,7 @@
                 <a:ea typeface="Garamond" pitchFamily="34" charset="-122"/>
                 <a:cs typeface="Garamond" pitchFamily="34" charset="-120"/>
               </a:rPr>
-              <a:t>Votre stratégie Affilior</a:t>
+              <a:t>Votre stratégie</a:t>
             </a:r>
             <a:endParaRPr lang="en-US" sz="1600" dirty="0"/>
           </a:p>
